--- a/IEP/t2-lesson3-perpendicular-slopes-IEP-catchup.pptx
+++ b/IEP/t2-lesson3-perpendicular-slopes-IEP-catchup.pptx
@@ -2364,6 +2364,40 @@
           </a:p>
         </p:txBody>
       </p:sp>
+      <p:sp>
+        <p:nvSpPr>
+          <p:cNvPr id="12" name="Slide Number 12"/>
+          <p:cNvSpPr txBox="1"/>
+          <p:nvPr/>
+        </p:nvSpPr>
+        <p:spPr>
+          <a:xfrm>
+            <a:off x="11277295" y="6611112"/>
+            <a:ext cx="685800" cy="201168"/>
+          </a:xfrm>
+          <a:prstGeom prst="rect">
+            <a:avLst/>
+          </a:prstGeom>
+          <a:noFill/>
+        </p:spPr>
+        <p:txBody>
+          <a:bodyPr wrap="none" lIns="0" tIns="0" rIns="0" bIns="0" anchor="b">
+            <a:noAutofit/>
+          </a:bodyPr>
+          <a:lstStyle/>
+          <a:p>
+            <a:pPr algn="r"/>
+            <a:fld id="{5C1A6E0B-3B1F-4D5E-9C7A-2F4B8D6E1A90}" type="slidenum">
+              <a:rPr lang="en-US" sz="1200" dirty="0">
+                <a:solidFill>
+                  <a:srgbClr val="5F6272"/>
+                </a:solidFill>
+              </a:rPr>
+              <a:t>1</a:t>
+            </a:fld>
+          </a:p>
+        </p:txBody>
+      </p:sp>
     </p:spTree>
   </p:cSld>
   <p:clrMapOvr>
@@ -3039,6 +3073,40 @@
               <a:t xml:space="preserve">3</a:t>
             </a:r>
             <a:endParaRPr lang="en-US" sz="2325" dirty="0"/>
+          </a:p>
+        </p:txBody>
+      </p:sp>
+      <p:sp>
+        <p:nvSpPr>
+          <p:cNvPr id="12" name="Slide Number 12"/>
+          <p:cNvSpPr txBox="1"/>
+          <p:nvPr/>
+        </p:nvSpPr>
+        <p:spPr>
+          <a:xfrm>
+            <a:off x="11277295" y="6611112"/>
+            <a:ext cx="685800" cy="201168"/>
+          </a:xfrm>
+          <a:prstGeom prst="rect">
+            <a:avLst/>
+          </a:prstGeom>
+          <a:noFill/>
+        </p:spPr>
+        <p:txBody>
+          <a:bodyPr wrap="none" lIns="0" tIns="0" rIns="0" bIns="0" anchor="b">
+            <a:noAutofit/>
+          </a:bodyPr>
+          <a:lstStyle/>
+          <a:p>
+            <a:pPr algn="r"/>
+            <a:fld id="{5C1A6E0B-3B1F-4D5E-9C7A-2F4B8D6E1A90}" type="slidenum">
+              <a:rPr lang="en-US" sz="1200" dirty="0">
+                <a:solidFill>
+                  <a:srgbClr val="5F6272"/>
+                </a:solidFill>
+              </a:rPr>
+              <a:t>10</a:t>
+            </a:fld>
           </a:p>
         </p:txBody>
       </p:sp>
@@ -3919,6 +3987,40 @@
               <a:t xml:space="preserve">−2</a:t>
             </a:r>
             <a:endParaRPr lang="en-US" sz="2325" dirty="0"/>
+          </a:p>
+        </p:txBody>
+      </p:sp>
+      <p:sp>
+        <p:nvSpPr>
+          <p:cNvPr id="13" name="Slide Number 13"/>
+          <p:cNvSpPr txBox="1"/>
+          <p:nvPr/>
+        </p:nvSpPr>
+        <p:spPr>
+          <a:xfrm>
+            <a:off x="11277295" y="6611112"/>
+            <a:ext cx="685800" cy="201168"/>
+          </a:xfrm>
+          <a:prstGeom prst="rect">
+            <a:avLst/>
+          </a:prstGeom>
+          <a:noFill/>
+        </p:spPr>
+        <p:txBody>
+          <a:bodyPr wrap="none" lIns="0" tIns="0" rIns="0" bIns="0" anchor="b">
+            <a:noAutofit/>
+          </a:bodyPr>
+          <a:lstStyle/>
+          <a:p>
+            <a:pPr algn="r"/>
+            <a:fld id="{5C1A6E0B-3B1F-4D5E-9C7A-2F4B8D6E1A90}" type="slidenum">
+              <a:rPr lang="en-US" sz="1200" dirty="0">
+                <a:solidFill>
+                  <a:srgbClr val="5F6272"/>
+                </a:solidFill>
+              </a:rPr>
+              <a:t>11</a:t>
+            </a:fld>
           </a:p>
         </p:txBody>
       </p:sp>
@@ -4409,6 +4511,40 @@
           </a:p>
         </p:txBody>
       </p:sp>
+      <p:sp>
+        <p:nvSpPr>
+          <p:cNvPr id="5" name="Slide Number 5"/>
+          <p:cNvSpPr txBox="1"/>
+          <p:nvPr/>
+        </p:nvSpPr>
+        <p:spPr>
+          <a:xfrm>
+            <a:off x="11277295" y="6611112"/>
+            <a:ext cx="685800" cy="201168"/>
+          </a:xfrm>
+          <a:prstGeom prst="rect">
+            <a:avLst/>
+          </a:prstGeom>
+          <a:noFill/>
+        </p:spPr>
+        <p:txBody>
+          <a:bodyPr wrap="none" lIns="0" tIns="0" rIns="0" bIns="0" anchor="b">
+            <a:noAutofit/>
+          </a:bodyPr>
+          <a:lstStyle/>
+          <a:p>
+            <a:pPr algn="r"/>
+            <a:fld id="{5C1A6E0B-3B1F-4D5E-9C7A-2F4B8D6E1A90}" type="slidenum">
+              <a:rPr lang="en-US" sz="1200" dirty="0">
+                <a:solidFill>
+                  <a:srgbClr val="5F6272"/>
+                </a:solidFill>
+              </a:rPr>
+              <a:t>12</a:t>
+            </a:fld>
+          </a:p>
+        </p:txBody>
+      </p:sp>
     </p:spTree>
   </p:cSld>
   <p:clrMapOvr>
@@ -4569,6 +4705,40 @@
           </a:p>
         </p:txBody>
       </p:sp>
+      <p:sp>
+        <p:nvSpPr>
+          <p:cNvPr id="5" name="Slide Number 5"/>
+          <p:cNvSpPr txBox="1"/>
+          <p:nvPr/>
+        </p:nvSpPr>
+        <p:spPr>
+          <a:xfrm>
+            <a:off x="11277295" y="6611112"/>
+            <a:ext cx="685800" cy="201168"/>
+          </a:xfrm>
+          <a:prstGeom prst="rect">
+            <a:avLst/>
+          </a:prstGeom>
+          <a:noFill/>
+        </p:spPr>
+        <p:txBody>
+          <a:bodyPr wrap="none" lIns="0" tIns="0" rIns="0" bIns="0" anchor="b">
+            <a:noAutofit/>
+          </a:bodyPr>
+          <a:lstStyle/>
+          <a:p>
+            <a:pPr algn="r"/>
+            <a:fld id="{5C1A6E0B-3B1F-4D5E-9C7A-2F4B8D6E1A90}" type="slidenum">
+              <a:rPr lang="en-US" sz="1200" dirty="0">
+                <a:solidFill>
+                  <a:srgbClr val="5F6272"/>
+                </a:solidFill>
+              </a:rPr>
+              <a:t>13</a:t>
+            </a:fld>
+          </a:p>
+        </p:txBody>
+      </p:sp>
     </p:spTree>
   </p:cSld>
   <p:clrMapOvr>
@@ -5240,6 +5410,40 @@
               <a:t xml:space="preserve">−1</a:t>
             </a:r>
             <a:endParaRPr lang="en-US" sz="2325" dirty="0"/>
+          </a:p>
+        </p:txBody>
+      </p:sp>
+      <p:sp>
+        <p:nvSpPr>
+          <p:cNvPr id="12" name="Slide Number 12"/>
+          <p:cNvSpPr txBox="1"/>
+          <p:nvPr/>
+        </p:nvSpPr>
+        <p:spPr>
+          <a:xfrm>
+            <a:off x="11277295" y="6611112"/>
+            <a:ext cx="685800" cy="201168"/>
+          </a:xfrm>
+          <a:prstGeom prst="rect">
+            <a:avLst/>
+          </a:prstGeom>
+          <a:noFill/>
+        </p:spPr>
+        <p:txBody>
+          <a:bodyPr wrap="none" lIns="0" tIns="0" rIns="0" bIns="0" anchor="b">
+            <a:noAutofit/>
+          </a:bodyPr>
+          <a:lstStyle/>
+          <a:p>
+            <a:pPr algn="r"/>
+            <a:fld id="{5C1A6E0B-3B1F-4D5E-9C7A-2F4B8D6E1A90}" type="slidenum">
+              <a:rPr lang="en-US" sz="1200" dirty="0">
+                <a:solidFill>
+                  <a:srgbClr val="5F6272"/>
+                </a:solidFill>
+              </a:rPr>
+              <a:t>14</a:t>
+            </a:fld>
           </a:p>
         </p:txBody>
       </p:sp>
@@ -5905,6 +6109,40 @@
           </a:p>
         </p:txBody>
       </p:sp>
+      <p:sp>
+        <p:nvSpPr>
+          <p:cNvPr id="6" name="Slide Number 6"/>
+          <p:cNvSpPr txBox="1"/>
+          <p:nvPr/>
+        </p:nvSpPr>
+        <p:spPr>
+          <a:xfrm>
+            <a:off x="11277295" y="6611112"/>
+            <a:ext cx="685800" cy="201168"/>
+          </a:xfrm>
+          <a:prstGeom prst="rect">
+            <a:avLst/>
+          </a:prstGeom>
+          <a:noFill/>
+        </p:spPr>
+        <p:txBody>
+          <a:bodyPr wrap="none" lIns="0" tIns="0" rIns="0" bIns="0" anchor="b">
+            <a:noAutofit/>
+          </a:bodyPr>
+          <a:lstStyle/>
+          <a:p>
+            <a:pPr algn="r"/>
+            <a:fld id="{5C1A6E0B-3B1F-4D5E-9C7A-2F4B8D6E1A90}" type="slidenum">
+              <a:rPr lang="en-US" sz="1200" dirty="0">
+                <a:solidFill>
+                  <a:srgbClr val="5F6272"/>
+                </a:solidFill>
+              </a:rPr>
+              <a:t>15</a:t>
+            </a:fld>
+          </a:p>
+        </p:txBody>
+      </p:sp>
     </p:spTree>
   </p:cSld>
   <p:clrMapOvr>
@@ -8152,6 +8390,40 @@
               <a:t xml:space="preserve">(3, 0)</a:t>
             </a:r>
             <a:endParaRPr lang="en-US" sz="1125" dirty="0"/>
+          </a:p>
+        </p:txBody>
+      </p:sp>
+      <p:sp>
+        <p:nvSpPr>
+          <p:cNvPr id="62" name="Slide Number 62"/>
+          <p:cNvSpPr txBox="1"/>
+          <p:nvPr/>
+        </p:nvSpPr>
+        <p:spPr>
+          <a:xfrm>
+            <a:off x="11277295" y="6611112"/>
+            <a:ext cx="685800" cy="201168"/>
+          </a:xfrm>
+          <a:prstGeom prst="rect">
+            <a:avLst/>
+          </a:prstGeom>
+          <a:noFill/>
+        </p:spPr>
+        <p:txBody>
+          <a:bodyPr wrap="none" lIns="0" tIns="0" rIns="0" bIns="0" anchor="b">
+            <a:noAutofit/>
+          </a:bodyPr>
+          <a:lstStyle/>
+          <a:p>
+            <a:pPr algn="r"/>
+            <a:fld id="{5C1A6E0B-3B1F-4D5E-9C7A-2F4B8D6E1A90}" type="slidenum">
+              <a:rPr lang="en-US" sz="1200" dirty="0">
+                <a:solidFill>
+                  <a:srgbClr val="5F6272"/>
+                </a:solidFill>
+              </a:rPr>
+              <a:t>16</a:t>
+            </a:fld>
           </a:p>
         </p:txBody>
       </p:sp>
@@ -8596,6 +8868,40 @@
           </a:p>
         </p:txBody>
       </p:sp>
+      <p:sp>
+        <p:nvSpPr>
+          <p:cNvPr id="5" name="Slide Number 5"/>
+          <p:cNvSpPr txBox="1"/>
+          <p:nvPr/>
+        </p:nvSpPr>
+        <p:spPr>
+          <a:xfrm>
+            <a:off x="11277295" y="6611112"/>
+            <a:ext cx="685800" cy="201168"/>
+          </a:xfrm>
+          <a:prstGeom prst="rect">
+            <a:avLst/>
+          </a:prstGeom>
+          <a:noFill/>
+        </p:spPr>
+        <p:txBody>
+          <a:bodyPr wrap="none" lIns="0" tIns="0" rIns="0" bIns="0" anchor="b">
+            <a:noAutofit/>
+          </a:bodyPr>
+          <a:lstStyle/>
+          <a:p>
+            <a:pPr algn="r"/>
+            <a:fld id="{5C1A6E0B-3B1F-4D5E-9C7A-2F4B8D6E1A90}" type="slidenum">
+              <a:rPr lang="en-US" sz="1200" dirty="0">
+                <a:solidFill>
+                  <a:srgbClr val="5F6272"/>
+                </a:solidFill>
+              </a:rPr>
+              <a:t>17</a:t>
+            </a:fld>
+          </a:p>
+        </p:txBody>
+      </p:sp>
     </p:spTree>
   </p:cSld>
   <p:clrMapOvr>
@@ -10609,6 +10915,40 @@
               <a:t xml:space="preserve">(2, −1)</a:t>
             </a:r>
             <a:endParaRPr lang="en-US" sz="1125" dirty="0"/>
+          </a:p>
+        </p:txBody>
+      </p:sp>
+      <p:sp>
+        <p:nvSpPr>
+          <p:cNvPr id="58" name="Slide Number 58"/>
+          <p:cNvSpPr txBox="1"/>
+          <p:nvPr/>
+        </p:nvSpPr>
+        <p:spPr>
+          <a:xfrm>
+            <a:off x="11277295" y="6611112"/>
+            <a:ext cx="685800" cy="201168"/>
+          </a:xfrm>
+          <a:prstGeom prst="rect">
+            <a:avLst/>
+          </a:prstGeom>
+          <a:noFill/>
+        </p:spPr>
+        <p:txBody>
+          <a:bodyPr wrap="none" lIns="0" tIns="0" rIns="0" bIns="0" anchor="b">
+            <a:noAutofit/>
+          </a:bodyPr>
+          <a:lstStyle/>
+          <a:p>
+            <a:pPr algn="r"/>
+            <a:fld id="{5C1A6E0B-3B1F-4D5E-9C7A-2F4B8D6E1A90}" type="slidenum">
+              <a:rPr lang="en-US" sz="1200" dirty="0">
+                <a:solidFill>
+                  <a:srgbClr val="5F6272"/>
+                </a:solidFill>
+              </a:rPr>
+              <a:t>18</a:t>
+            </a:fld>
           </a:p>
         </p:txBody>
       </p:sp>
@@ -11660,6 +12000,40 @@
           </a:p>
         </p:txBody>
       </p:sp>
+      <p:sp>
+        <p:nvSpPr>
+          <p:cNvPr id="9" name="Slide Number 9"/>
+          <p:cNvSpPr txBox="1"/>
+          <p:nvPr/>
+        </p:nvSpPr>
+        <p:spPr>
+          <a:xfrm>
+            <a:off x="11277295" y="6611112"/>
+            <a:ext cx="685800" cy="201168"/>
+          </a:xfrm>
+          <a:prstGeom prst="rect">
+            <a:avLst/>
+          </a:prstGeom>
+          <a:noFill/>
+        </p:spPr>
+        <p:txBody>
+          <a:bodyPr wrap="none" lIns="0" tIns="0" rIns="0" bIns="0" anchor="b">
+            <a:noAutofit/>
+          </a:bodyPr>
+          <a:lstStyle/>
+          <a:p>
+            <a:pPr algn="r"/>
+            <a:fld id="{5C1A6E0B-3B1F-4D5E-9C7A-2F4B8D6E1A90}" type="slidenum">
+              <a:rPr lang="en-US" sz="1200" dirty="0">
+                <a:solidFill>
+                  <a:srgbClr val="5F6272"/>
+                </a:solidFill>
+              </a:rPr>
+              <a:t>19</a:t>
+            </a:fld>
+          </a:p>
+        </p:txBody>
+      </p:sp>
     </p:spTree>
   </p:cSld>
   <p:clrMapOvr>
@@ -12048,6 +12422,40 @@
           </a:p>
         </p:txBody>
       </p:sp>
+      <p:sp>
+        <p:nvSpPr>
+          <p:cNvPr id="5" name="Slide Number 5"/>
+          <p:cNvSpPr txBox="1"/>
+          <p:nvPr/>
+        </p:nvSpPr>
+        <p:spPr>
+          <a:xfrm>
+            <a:off x="11277295" y="6611112"/>
+            <a:ext cx="685800" cy="201168"/>
+          </a:xfrm>
+          <a:prstGeom prst="rect">
+            <a:avLst/>
+          </a:prstGeom>
+          <a:noFill/>
+        </p:spPr>
+        <p:txBody>
+          <a:bodyPr wrap="none" lIns="0" tIns="0" rIns="0" bIns="0" anchor="b">
+            <a:noAutofit/>
+          </a:bodyPr>
+          <a:lstStyle/>
+          <a:p>
+            <a:pPr algn="r"/>
+            <a:fld id="{5C1A6E0B-3B1F-4D5E-9C7A-2F4B8D6E1A90}" type="slidenum">
+              <a:rPr lang="en-US" sz="1200" dirty="0">
+                <a:solidFill>
+                  <a:srgbClr val="5F6272"/>
+                </a:solidFill>
+              </a:rPr>
+              <a:t>2</a:t>
+            </a:fld>
+          </a:p>
+        </p:txBody>
+      </p:sp>
     </p:spTree>
   </p:cSld>
   <p:clrMapOvr>
@@ -12707,6 +13115,40 @@
               <a:t xml:space="preserve"> + 2</a:t>
             </a:r>
             <a:endParaRPr lang="en-US" sz="2325" dirty="0"/>
+          </a:p>
+        </p:txBody>
+      </p:sp>
+      <p:sp>
+        <p:nvSpPr>
+          <p:cNvPr id="10" name="Slide Number 10"/>
+          <p:cNvSpPr txBox="1"/>
+          <p:nvPr/>
+        </p:nvSpPr>
+        <p:spPr>
+          <a:xfrm>
+            <a:off x="11277295" y="6611112"/>
+            <a:ext cx="685800" cy="201168"/>
+          </a:xfrm>
+          <a:prstGeom prst="rect">
+            <a:avLst/>
+          </a:prstGeom>
+          <a:noFill/>
+        </p:spPr>
+        <p:txBody>
+          <a:bodyPr wrap="none" lIns="0" tIns="0" rIns="0" bIns="0" anchor="b">
+            <a:noAutofit/>
+          </a:bodyPr>
+          <a:lstStyle/>
+          <a:p>
+            <a:pPr algn="r"/>
+            <a:fld id="{5C1A6E0B-3B1F-4D5E-9C7A-2F4B8D6E1A90}" type="slidenum">
+              <a:rPr lang="en-US" sz="1200" dirty="0">
+                <a:solidFill>
+                  <a:srgbClr val="5F6272"/>
+                </a:solidFill>
+              </a:rPr>
+              <a:t>20</a:t>
+            </a:fld>
           </a:p>
         </p:txBody>
       </p:sp>
@@ -13729,6 +14171,40 @@
           </a:p>
         </p:txBody>
       </p:sp>
+      <p:sp>
+        <p:nvSpPr>
+          <p:cNvPr id="13" name="Slide Number 13"/>
+          <p:cNvSpPr txBox="1"/>
+          <p:nvPr/>
+        </p:nvSpPr>
+        <p:spPr>
+          <a:xfrm>
+            <a:off x="11277295" y="6611112"/>
+            <a:ext cx="685800" cy="201168"/>
+          </a:xfrm>
+          <a:prstGeom prst="rect">
+            <a:avLst/>
+          </a:prstGeom>
+          <a:noFill/>
+        </p:spPr>
+        <p:txBody>
+          <a:bodyPr wrap="none" lIns="0" tIns="0" rIns="0" bIns="0" anchor="b">
+            <a:noAutofit/>
+          </a:bodyPr>
+          <a:lstStyle/>
+          <a:p>
+            <a:pPr algn="r"/>
+            <a:fld id="{5C1A6E0B-3B1F-4D5E-9C7A-2F4B8D6E1A90}" type="slidenum">
+              <a:rPr lang="en-US" sz="1200" dirty="0">
+                <a:solidFill>
+                  <a:srgbClr val="5F6272"/>
+                </a:solidFill>
+              </a:rPr>
+              <a:t>21</a:t>
+            </a:fld>
+          </a:p>
+        </p:txBody>
+      </p:sp>
     </p:spTree>
   </p:cSld>
   <p:clrMapOvr>
@@ -14216,6 +14692,40 @@
           </a:p>
         </p:txBody>
       </p:sp>
+      <p:sp>
+        <p:nvSpPr>
+          <p:cNvPr id="5" name="Slide Number 5"/>
+          <p:cNvSpPr txBox="1"/>
+          <p:nvPr/>
+        </p:nvSpPr>
+        <p:spPr>
+          <a:xfrm>
+            <a:off x="11277295" y="6611112"/>
+            <a:ext cx="685800" cy="201168"/>
+          </a:xfrm>
+          <a:prstGeom prst="rect">
+            <a:avLst/>
+          </a:prstGeom>
+          <a:noFill/>
+        </p:spPr>
+        <p:txBody>
+          <a:bodyPr wrap="none" lIns="0" tIns="0" rIns="0" bIns="0" anchor="b">
+            <a:noAutofit/>
+          </a:bodyPr>
+          <a:lstStyle/>
+          <a:p>
+            <a:pPr algn="r"/>
+            <a:fld id="{5C1A6E0B-3B1F-4D5E-9C7A-2F4B8D6E1A90}" type="slidenum">
+              <a:rPr lang="en-US" sz="1200" dirty="0">
+                <a:solidFill>
+                  <a:srgbClr val="5F6272"/>
+                </a:solidFill>
+              </a:rPr>
+              <a:t>22</a:t>
+            </a:fld>
+          </a:p>
+        </p:txBody>
+      </p:sp>
     </p:spTree>
   </p:cSld>
   <p:clrMapOvr>
@@ -14494,6 +15004,40 @@
           </a:p>
         </p:txBody>
       </p:sp>
+      <p:sp>
+        <p:nvSpPr>
+          <p:cNvPr id="6" name="Slide Number 6"/>
+          <p:cNvSpPr txBox="1"/>
+          <p:nvPr/>
+        </p:nvSpPr>
+        <p:spPr>
+          <a:xfrm>
+            <a:off x="11277295" y="6611112"/>
+            <a:ext cx="685800" cy="201168"/>
+          </a:xfrm>
+          <a:prstGeom prst="rect">
+            <a:avLst/>
+          </a:prstGeom>
+          <a:noFill/>
+        </p:spPr>
+        <p:txBody>
+          <a:bodyPr wrap="none" lIns="0" tIns="0" rIns="0" bIns="0" anchor="b">
+            <a:noAutofit/>
+          </a:bodyPr>
+          <a:lstStyle/>
+          <a:p>
+            <a:pPr algn="r"/>
+            <a:fld id="{5C1A6E0B-3B1F-4D5E-9C7A-2F4B8D6E1A90}" type="slidenum">
+              <a:rPr lang="en-US" sz="1200" dirty="0">
+                <a:solidFill>
+                  <a:srgbClr val="5F6272"/>
+                </a:solidFill>
+              </a:rPr>
+              <a:t>23</a:t>
+            </a:fld>
+          </a:p>
+        </p:txBody>
+      </p:sp>
     </p:spTree>
   </p:cSld>
   <p:clrMapOvr>
@@ -15165,6 +15709,40 @@
               <a:t xml:space="preserve">−3</a:t>
             </a:r>
             <a:endParaRPr lang="en-US" sz="2325" dirty="0"/>
+          </a:p>
+        </p:txBody>
+      </p:sp>
+      <p:sp>
+        <p:nvSpPr>
+          <p:cNvPr id="12" name="Slide Number 12"/>
+          <p:cNvSpPr txBox="1"/>
+          <p:nvPr/>
+        </p:nvSpPr>
+        <p:spPr>
+          <a:xfrm>
+            <a:off x="11277295" y="6611112"/>
+            <a:ext cx="685800" cy="201168"/>
+          </a:xfrm>
+          <a:prstGeom prst="rect">
+            <a:avLst/>
+          </a:prstGeom>
+          <a:noFill/>
+        </p:spPr>
+        <p:txBody>
+          <a:bodyPr wrap="none" lIns="0" tIns="0" rIns="0" bIns="0" anchor="b">
+            <a:noAutofit/>
+          </a:bodyPr>
+          <a:lstStyle/>
+          <a:p>
+            <a:pPr algn="r"/>
+            <a:fld id="{5C1A6E0B-3B1F-4D5E-9C7A-2F4B8D6E1A90}" type="slidenum">
+              <a:rPr lang="en-US" sz="1200" dirty="0">
+                <a:solidFill>
+                  <a:srgbClr val="5F6272"/>
+                </a:solidFill>
+              </a:rPr>
+              <a:t>3</a:t>
+            </a:fld>
           </a:p>
         </p:txBody>
       </p:sp>
@@ -15830,6 +16408,40 @@
           </a:p>
         </p:txBody>
       </p:sp>
+      <p:sp>
+        <p:nvSpPr>
+          <p:cNvPr id="6" name="Slide Number 6"/>
+          <p:cNvSpPr txBox="1"/>
+          <p:nvPr/>
+        </p:nvSpPr>
+        <p:spPr>
+          <a:xfrm>
+            <a:off x="11277295" y="6611112"/>
+            <a:ext cx="685800" cy="201168"/>
+          </a:xfrm>
+          <a:prstGeom prst="rect">
+            <a:avLst/>
+          </a:prstGeom>
+          <a:noFill/>
+        </p:spPr>
+        <p:txBody>
+          <a:bodyPr wrap="none" lIns="0" tIns="0" rIns="0" bIns="0" anchor="b">
+            <a:noAutofit/>
+          </a:bodyPr>
+          <a:lstStyle/>
+          <a:p>
+            <a:pPr algn="r"/>
+            <a:fld id="{5C1A6E0B-3B1F-4D5E-9C7A-2F4B8D6E1A90}" type="slidenum">
+              <a:rPr lang="en-US" sz="1200" dirty="0">
+                <a:solidFill>
+                  <a:srgbClr val="5F6272"/>
+                </a:solidFill>
+              </a:rPr>
+              <a:t>4</a:t>
+            </a:fld>
+          </a:p>
+        </p:txBody>
+      </p:sp>
     </p:spTree>
   </p:cSld>
   <p:clrMapOvr>
@@ -16819,6 +17431,40 @@
               <a:t xml:space="preserve">$25</a:t>
             </a:r>
             <a:endParaRPr lang="en-US" sz="2325" dirty="0"/>
+          </a:p>
+        </p:txBody>
+      </p:sp>
+      <p:sp>
+        <p:nvSpPr>
+          <p:cNvPr id="20" name="Slide Number 20"/>
+          <p:cNvSpPr txBox="1"/>
+          <p:nvPr/>
+        </p:nvSpPr>
+        <p:spPr>
+          <a:xfrm>
+            <a:off x="11277295" y="6611112"/>
+            <a:ext cx="685800" cy="201168"/>
+          </a:xfrm>
+          <a:prstGeom prst="rect">
+            <a:avLst/>
+          </a:prstGeom>
+          <a:noFill/>
+        </p:spPr>
+        <p:txBody>
+          <a:bodyPr wrap="none" lIns="0" tIns="0" rIns="0" bIns="0" anchor="b">
+            <a:noAutofit/>
+          </a:bodyPr>
+          <a:lstStyle/>
+          <a:p>
+            <a:pPr algn="r"/>
+            <a:fld id="{5C1A6E0B-3B1F-4D5E-9C7A-2F4B8D6E1A90}" type="slidenum">
+              <a:rPr lang="en-US" sz="1200" dirty="0">
+                <a:solidFill>
+                  <a:srgbClr val="5F6272"/>
+                </a:solidFill>
+              </a:rPr>
+              <a:t>5</a:t>
+            </a:fld>
           </a:p>
         </p:txBody>
       </p:sp>
@@ -17667,6 +18313,40 @@
           </a:p>
         </p:txBody>
       </p:sp>
+      <p:sp>
+        <p:nvSpPr>
+          <p:cNvPr id="10" name="Slide Number 10"/>
+          <p:cNvSpPr txBox="1"/>
+          <p:nvPr/>
+        </p:nvSpPr>
+        <p:spPr>
+          <a:xfrm>
+            <a:off x="11277295" y="6611112"/>
+            <a:ext cx="685800" cy="201168"/>
+          </a:xfrm>
+          <a:prstGeom prst="rect">
+            <a:avLst/>
+          </a:prstGeom>
+          <a:noFill/>
+        </p:spPr>
+        <p:txBody>
+          <a:bodyPr wrap="none" lIns="0" tIns="0" rIns="0" bIns="0" anchor="b">
+            <a:noAutofit/>
+          </a:bodyPr>
+          <a:lstStyle/>
+          <a:p>
+            <a:pPr algn="r"/>
+            <a:fld id="{5C1A6E0B-3B1F-4D5E-9C7A-2F4B8D6E1A90}" type="slidenum">
+              <a:rPr lang="en-US" sz="1200" dirty="0">
+                <a:solidFill>
+                  <a:srgbClr val="5F6272"/>
+                </a:solidFill>
+              </a:rPr>
+              <a:t>6</a:t>
+            </a:fld>
+          </a:p>
+        </p:txBody>
+      </p:sp>
     </p:spTree>
   </p:cSld>
   <p:clrMapOvr>
@@ -18055,6 +18735,40 @@
           </a:p>
         </p:txBody>
       </p:sp>
+      <p:sp>
+        <p:nvSpPr>
+          <p:cNvPr id="5" name="Slide Number 5"/>
+          <p:cNvSpPr txBox="1"/>
+          <p:nvPr/>
+        </p:nvSpPr>
+        <p:spPr>
+          <a:xfrm>
+            <a:off x="11277295" y="6611112"/>
+            <a:ext cx="685800" cy="201168"/>
+          </a:xfrm>
+          <a:prstGeom prst="rect">
+            <a:avLst/>
+          </a:prstGeom>
+          <a:noFill/>
+        </p:spPr>
+        <p:txBody>
+          <a:bodyPr wrap="none" lIns="0" tIns="0" rIns="0" bIns="0" anchor="b">
+            <a:noAutofit/>
+          </a:bodyPr>
+          <a:lstStyle/>
+          <a:p>
+            <a:pPr algn="r"/>
+            <a:fld id="{5C1A6E0B-3B1F-4D5E-9C7A-2F4B8D6E1A90}" type="slidenum">
+              <a:rPr lang="en-US" sz="1200" dirty="0">
+                <a:solidFill>
+                  <a:srgbClr val="5F6272"/>
+                </a:solidFill>
+              </a:rPr>
+              <a:t>7</a:t>
+            </a:fld>
+          </a:p>
+        </p:txBody>
+      </p:sp>
     </p:spTree>
   </p:cSld>
   <p:clrMapOvr>
@@ -18807,6 +19521,40 @@
           </a:p>
         </p:txBody>
       </p:sp>
+      <p:sp>
+        <p:nvSpPr>
+          <p:cNvPr id="16" name="Slide Number 16"/>
+          <p:cNvSpPr txBox="1"/>
+          <p:nvPr/>
+        </p:nvSpPr>
+        <p:spPr>
+          <a:xfrm>
+            <a:off x="11277295" y="6611112"/>
+            <a:ext cx="685800" cy="201168"/>
+          </a:xfrm>
+          <a:prstGeom prst="rect">
+            <a:avLst/>
+          </a:prstGeom>
+          <a:noFill/>
+        </p:spPr>
+        <p:txBody>
+          <a:bodyPr wrap="none" lIns="0" tIns="0" rIns="0" bIns="0" anchor="b">
+            <a:noAutofit/>
+          </a:bodyPr>
+          <a:lstStyle/>
+          <a:p>
+            <a:pPr algn="r"/>
+            <a:fld id="{5C1A6E0B-3B1F-4D5E-9C7A-2F4B8D6E1A90}" type="slidenum">
+              <a:rPr lang="en-US" sz="1200" dirty="0">
+                <a:solidFill>
+                  <a:srgbClr val="5F6272"/>
+                </a:solidFill>
+              </a:rPr>
+              <a:t>8</a:t>
+            </a:fld>
+          </a:p>
+        </p:txBody>
+      </p:sp>
     </p:spTree>
   </p:cSld>
   <p:clrMapOvr>
@@ -19276,6 +20024,40 @@
               <a:t xml:space="preserve"> alone.</a:t>
             </a:r>
             <a:endParaRPr lang="en-US" sz="1950" dirty="0"/>
+          </a:p>
+        </p:txBody>
+      </p:sp>
+      <p:sp>
+        <p:nvSpPr>
+          <p:cNvPr id="8" name="Slide Number 8"/>
+          <p:cNvSpPr txBox="1"/>
+          <p:nvPr/>
+        </p:nvSpPr>
+        <p:spPr>
+          <a:xfrm>
+            <a:off x="11277295" y="6611112"/>
+            <a:ext cx="685800" cy="201168"/>
+          </a:xfrm>
+          <a:prstGeom prst="rect">
+            <a:avLst/>
+          </a:prstGeom>
+          <a:noFill/>
+        </p:spPr>
+        <p:txBody>
+          <a:bodyPr wrap="none" lIns="0" tIns="0" rIns="0" bIns="0" anchor="b">
+            <a:noAutofit/>
+          </a:bodyPr>
+          <a:lstStyle/>
+          <a:p>
+            <a:pPr algn="r"/>
+            <a:fld id="{5C1A6E0B-3B1F-4D5E-9C7A-2F4B8D6E1A90}" type="slidenum">
+              <a:rPr lang="en-US" sz="1200" dirty="0">
+                <a:solidFill>
+                  <a:srgbClr val="5F6272"/>
+                </a:solidFill>
+              </a:rPr>
+              <a:t>9</a:t>
+            </a:fld>
           </a:p>
         </p:txBody>
       </p:sp>

--- a/IEP/t2-lesson3-perpendicular-slopes-IEP-catchup.pptx
+++ b/IEP/t2-lesson3-perpendicular-slopes-IEP-catchup.pptx
@@ -31,6 +31,8 @@
     <p:sldId id="276" r:id="rId31"/>
     <p:sldId id="277" r:id="rId32"/>
     <p:sldId id="278" r:id="rId33"/>
+    <p:sldId id="279" r:id="rId34"/>
+    <p:sldId id="280" r:id="rId35"/>
   </p:sldIdLst>
   <p:sldSz cx="12192000" cy="6858000"/>
   <p:notesSz cx="6858000" cy="9144000"/>
@@ -354,7 +356,7 @@
           <a:p>
             <a:r>
               <a:rPr lang="en-US" dirty="0"/>
-              <a:t>Class ends here on Thursday, October 29.</a:t>
+              <a:t>For the teacher or assistant: click once for each step. Read the step aloud, and before each click ask the student what to do next. Students check their own paper and fix any mistake in a different color.</a:t>
             </a:r>
           </a:p>
         </p:txBody>
@@ -413,7 +415,7 @@
           <a:p>
             <a:r>
               <a:rPr lang="en-US" dirty="0"/>
-              <a:t>Class starts here on Monday, November 2.</a:t>
+              <a:t>Class ends here on Thursday, October 29.</a:t>
             </a:r>
           </a:p>
         </p:txBody>
@@ -472,7 +474,7 @@
           <a:p>
             <a:r>
               <a:rPr lang="en-US" dirty="0"/>
-              <a:t>Added for this deck; not from the textbook. Have this up as students walk in; they work silently while you take attendance (about 5 minutes). The same 4 questions are on the online Day 2 bell work. Reveal the answers one at a time. Answer key: 1. Perpendicular slopes are negative reciprocals: ⅔ · (−3/2) = −1. 2. On a horizontal line y never changes, so the rise is 0. 3. Every point on a vertical line has the same x-value, here 2. 4. Negative reciprocals multiply to −1.</a:t>
+              <a:t>Class starts here on Monday, November 2.</a:t>
             </a:r>
           </a:p>
         </p:txBody>
@@ -531,7 +533,7 @@
           <a:p>
             <a:r>
               <a:rPr lang="en-US" dirty="0"/>
-              <a:t>Catch-up from Topic 1 Lesson 6 so the class is ready for the End of Topic 1 Assessment (Lessons 1–6). Keep it to about 15 minutes, then go back to the Topic 2 lesson.</a:t>
+              <a:t>Added for this deck; not from the textbook. Have this up as students walk in; they work silently while you take attendance (about 5 minutes). The same 4 questions are on the online Day 2 bell work. Reveal the answers one at a time. Answer key: 1. Perpendicular slopes are negative reciprocals: ⅔ · (−3/2) = −1. 2. On a horizontal line y never changes, so the rise is 0. 3. Every point on a vertical line has the same x-value, here 2. 4. Negative reciprocals multiply to −1.</a:t>
             </a:r>
           </a:p>
         </p:txBody>
@@ -590,7 +592,7 @@
           <a:p>
             <a:r>
               <a:rPr lang="en-US" dirty="0"/>
-              <a:t>Check that both forms are the same: distribute 15(t − 3) = 15t − 45. The zero, 3, means she must sell 3 shirts just to break even.</a:t>
+              <a:t>Catch-up from Topic 1 Lesson 6 so the class is ready for the End of Topic 1 Assessment (Lessons 1–6). Keep it to about 15 minutes, then go back to the Topic 2 lesson.</a:t>
             </a:r>
           </a:p>
         </p:txBody>
@@ -649,7 +651,7 @@
           <a:p>
             <a:r>
               <a:rPr lang="en-US" dirty="0"/>
-              <a:t>End of the Topic 1 Catch-Up. Continue with the Topic 2 lesson.</a:t>
+              <a:t>Check that both forms are the same: distribute 15(t − 3) = 15t − 45. The zero, 3, means she must sell 3 shirts just to break even.</a:t>
             </a:r>
           </a:p>
         </p:txBody>
@@ -706,7 +708,10 @@
           <a:bodyPr/>
           <a:lstStyle/>
           <a:p>
-            <a:endParaRPr lang="en-US"/>
+            <a:r>
+              <a:rPr lang="en-US" dirty="0"/>
+              <a:t>End of the Topic 1 Catch-Up. Continue with the Topic 2 lesson.</a:t>
+            </a:r>
           </a:p>
         </p:txBody>
       </p:sp>
@@ -762,10 +767,7 @@
           <a:bodyPr/>
           <a:lstStyle/>
           <a:p>
-            <a:r>
-              <a:rPr lang="en-US" dirty="0"/>
-              <a:t>Model each step; point to the steps slide.</a:t>
-            </a:r>
+            <a:endParaRPr lang="en-US"/>
           </a:p>
         </p:txBody>
       </p:sp>
@@ -880,7 +882,10 @@
           <a:bodyPr/>
           <a:lstStyle/>
           <a:p>
-            <a:endParaRPr lang="en-US"/>
+            <a:r>
+              <a:rPr lang="en-US" dirty="0"/>
+              <a:t>Model each step; point to the steps slide.</a:t>
+            </a:r>
           </a:p>
         </p:txBody>
       </p:sp>
@@ -936,10 +941,7 @@
           <a:bodyPr/>
           <a:lstStyle/>
           <a:p>
-            <a:r>
-              <a:rPr lang="en-US" dirty="0"/>
-              <a:t>Give students time to try all items before revealing. Students may use the steps slide and their notes.</a:t>
-            </a:r>
+            <a:endParaRPr lang="en-US"/>
           </a:p>
         </p:txBody>
       </p:sp>
@@ -997,7 +999,7 @@
           <a:p>
             <a:r>
               <a:rPr lang="en-US" dirty="0"/>
-              <a:t>Class ends here on Monday, November 2.</a:t>
+              <a:t>For the teacher or assistant: click once for each step. Read the step aloud, and before each click ask the student what to do next. Students check their own paper and fix any mistake in a different color.</a:t>
             </a:r>
           </a:p>
         </p:txBody>
@@ -1011,6 +1013,124 @@
 </file>
 
 <file path=ppt/notesSlides/notesSlide23.xml><?xml version="1.0" encoding="utf-8"?>
+<p:notes xmlns:a="http://schemas.openxmlformats.org/drawingml/2006/main" xmlns:r="http://schemas.openxmlformats.org/officeDocument/2006/relationships" xmlns:p="http://schemas.openxmlformats.org/presentationml/2006/main">
+  <p:cSld>
+    <p:spTree>
+      <p:nvGrpSpPr>
+        <p:cNvPr id="1" name=""/>
+        <p:cNvGrpSpPr/>
+        <p:nvPr/>
+      </p:nvGrpSpPr>
+      <p:grpSpPr>
+        <a:xfrm>
+          <a:off x="0" y="0"/>
+          <a:ext cx="0" cy="0"/>
+          <a:chOff x="0" y="0"/>
+          <a:chExt cx="0" cy="0"/>
+        </a:xfrm>
+      </p:grpSpPr>
+      <p:sp>
+        <p:nvSpPr>
+          <p:cNvPr id="2" name="Slide Image Placeholder 1"/>
+          <p:cNvSpPr>
+            <a:spLocks noGrp="1" noRot="1" noChangeAspect="1"/>
+          </p:cNvSpPr>
+          <p:nvPr>
+            <p:ph type="sldImg"/>
+          </p:nvPr>
+        </p:nvSpPr>
+        <p:spPr/>
+      </p:sp>
+      <p:sp>
+        <p:nvSpPr>
+          <p:cNvPr id="3" name="Notes Placeholder 2"/>
+          <p:cNvSpPr>
+            <a:spLocks noGrp="1"/>
+          </p:cNvSpPr>
+          <p:nvPr>
+            <p:ph type="body" idx="1"/>
+          </p:nvPr>
+        </p:nvSpPr>
+        <p:spPr/>
+        <p:txBody>
+          <a:bodyPr/>
+          <a:lstStyle/>
+          <a:p>
+            <a:r>
+              <a:rPr lang="en-US" dirty="0"/>
+              <a:t>Give students time to try all items before revealing. Students may use the steps slide and their notes.</a:t>
+            </a:r>
+          </a:p>
+        </p:txBody>
+      </p:sp>
+    </p:spTree>
+  </p:cSld>
+  <p:clrMapOvr>
+    <a:masterClrMapping/>
+  </p:clrMapOvr>
+</p:notes>
+</file>
+
+<file path=ppt/notesSlides/notesSlide24.xml><?xml version="1.0" encoding="utf-8"?>
+<p:notes xmlns:a="http://schemas.openxmlformats.org/drawingml/2006/main" xmlns:r="http://schemas.openxmlformats.org/officeDocument/2006/relationships" xmlns:p="http://schemas.openxmlformats.org/presentationml/2006/main">
+  <p:cSld>
+    <p:spTree>
+      <p:nvGrpSpPr>
+        <p:cNvPr id="1" name=""/>
+        <p:cNvGrpSpPr/>
+        <p:nvPr/>
+      </p:nvGrpSpPr>
+      <p:grpSpPr>
+        <a:xfrm>
+          <a:off x="0" y="0"/>
+          <a:ext cx="0" cy="0"/>
+          <a:chOff x="0" y="0"/>
+          <a:chExt cx="0" cy="0"/>
+        </a:xfrm>
+      </p:grpSpPr>
+      <p:sp>
+        <p:nvSpPr>
+          <p:cNvPr id="2" name="Slide Image Placeholder 1"/>
+          <p:cNvSpPr>
+            <a:spLocks noGrp="1" noRot="1" noChangeAspect="1"/>
+          </p:cNvSpPr>
+          <p:nvPr>
+            <p:ph type="sldImg"/>
+          </p:nvPr>
+        </p:nvSpPr>
+        <p:spPr/>
+      </p:sp>
+      <p:sp>
+        <p:nvSpPr>
+          <p:cNvPr id="3" name="Notes Placeholder 2"/>
+          <p:cNvSpPr>
+            <a:spLocks noGrp="1"/>
+          </p:cNvSpPr>
+          <p:nvPr>
+            <p:ph type="body" idx="1"/>
+          </p:nvPr>
+        </p:nvSpPr>
+        <p:spPr/>
+        <p:txBody>
+          <a:bodyPr/>
+          <a:lstStyle/>
+          <a:p>
+            <a:r>
+              <a:rPr lang="en-US" dirty="0"/>
+              <a:t>Class ends here on Monday, November 2.</a:t>
+            </a:r>
+          </a:p>
+        </p:txBody>
+      </p:sp>
+    </p:spTree>
+  </p:cSld>
+  <p:clrMapOvr>
+    <a:masterClrMapping/>
+  </p:clrMapOvr>
+</p:notes>
+</file>
+
+<file path=ppt/notesSlides/notesSlide25.xml><?xml version="1.0" encoding="utf-8"?>
 <p:notes xmlns:a="http://schemas.openxmlformats.org/drawingml/2006/main" xmlns:r="http://schemas.openxmlformats.org/officeDocument/2006/relationships" xmlns:p="http://schemas.openxmlformats.org/presentationml/2006/main">
   <p:cSld>
     <p:spTree>
@@ -4387,7 +4507,7 @@
         </p:nvSpPr>
         <p:spPr>
           <a:xfrm>
-            <a:off x="685800" y="2103120"/>
+            <a:off x="685800" y="457200"/>
             <a:ext cx="10820095" cy="237744"/>
           </a:xfrm>
           <a:prstGeom prst="rect">
@@ -4417,7 +4537,7 @@
                 <a:latin typeface="Segoe UI"/>
                 <a:cs typeface="Segoe UI"/>
               </a:rPr>
-              <a:t xml:space="preserve">Topic 2 · Lesson 3 · End of Day 1</a:t>
+              <a:t xml:space="preserve">Check it · Step by step</a:t>
             </a:r>
             <a:endParaRPr lang="en-US" sz="1200" dirty="0"/>
           </a:p>
@@ -4431,8 +4551,8 @@
         </p:nvSpPr>
         <p:spPr>
           <a:xfrm>
-            <a:off x="685800" y="2512314"/>
-            <a:ext cx="10820095" cy="2569464"/>
+            <a:off x="685800" y="866394"/>
+            <a:ext cx="10820095" cy="580644"/>
           </a:xfrm>
           <a:prstGeom prst="rect">
             <a:avLst/>
@@ -4454,36 +4574,42 @@
               </a:lnSpc>
             </a:pPr>
             <a:r>
-              <a:rPr lang="en-US" sz="8250" dirty="0" b="1">
-                <a:solidFill>
-                  <a:srgbClr val="16171D"/>
-                </a:solidFill>
-                <a:latin typeface="Segoe UI"/>
-                <a:cs typeface="Segoe UI"/>
-              </a:rPr>
-              <a:t xml:space="preserve">Stop here: Thursday, October 29</a:t>
-            </a:r>
-            <a:endParaRPr lang="en-US" sz="8250" dirty="0"/>
-          </a:p>
-        </p:txBody>
-      </p:sp>
-      <p:sp>
-        <p:nvSpPr>
-          <p:cNvPr id="4" name="Shape 4"/>
-          <p:cNvSpPr txBox="1"/>
-          <p:nvPr/>
-        </p:nvSpPr>
-        <p:spPr>
-          <a:xfrm>
-            <a:off x="685800" y="5253228"/>
-            <a:ext cx="10820095" cy="740664"/>
-          </a:xfrm>
-          <a:prstGeom prst="rect">
-            <a:avLst/>
-          </a:prstGeom>
-          <a:noFill/>
-          <a:ln>
-            <a:noFill/>
+              <a:rPr lang="en-US" sz="3450" dirty="0" b="1">
+                <a:solidFill>
+                  <a:srgbClr val="16171D"/>
+                </a:solidFill>
+                <a:latin typeface="Segoe UI"/>
+                <a:cs typeface="Segoe UI"/>
+              </a:rPr>
+              <a:t xml:space="preserve">Find the perpendicular slope</a:t>
+            </a:r>
+            <a:endParaRPr lang="en-US" sz="3450" dirty="0"/>
+          </a:p>
+        </p:txBody>
+      </p:sp>
+      <p:sp>
+        <p:nvSpPr>
+          <p:cNvPr id="10" name="Shape 10"/>
+          <p:cNvSpPr txBox="1"/>
+          <p:nvPr/>
+        </p:nvSpPr>
+        <p:spPr>
+          <a:xfrm>
+            <a:off x="685800" y="1618488"/>
+            <a:ext cx="3454298" cy="3612642"/>
+          </a:xfrm>
+          <a:prstGeom prst="roundRect">
+            <a:avLst>
+              <a:gd name="adj" fmla="val 8000"/>
+            </a:avLst>
+          </a:prstGeom>
+          <a:solidFill>
+            <a:srgbClr val="FFFFFF"/>
+          </a:solidFill>
+          <a:ln w="12700">
+            <a:solidFill>
+              <a:srgbClr val="E3E4EC"/>
+            </a:solidFill>
           </a:ln>
         </p:spPr>
         <p:txBody>
@@ -4497,23 +4623,1449 @@
                 <a:spcPct val="100000"/>
               </a:lnSpc>
             </a:pPr>
-            <a:r>
-              <a:rPr lang="en-US" sz="2250" dirty="0">
-                <a:solidFill>
-                  <a:srgbClr val="16171D"/>
-                </a:solidFill>
-                <a:latin typeface="Segoe UI"/>
-                <a:cs typeface="Segoe UI"/>
-              </a:rPr>
-              <a:t xml:space="preserve">Next class: Monday, November 2. Start at the next slide, “Start: Monday, November 2.”</a:t>
-            </a:r>
-            <a:endParaRPr lang="en-US" sz="2250" dirty="0"/>
-          </a:p>
-        </p:txBody>
-      </p:sp>
-      <p:sp>
-        <p:nvSpPr>
-          <p:cNvPr id="5" name="Slide Number 5"/>
+            <a:endParaRPr lang="en-US" sz="1950" dirty="0"/>
+          </a:p>
+        </p:txBody>
+      </p:sp>
+      <p:sp>
+        <p:nvSpPr>
+          <p:cNvPr id="4" name="Shape 4"/>
+          <p:cNvSpPr txBox="1"/>
+          <p:nvPr/>
+        </p:nvSpPr>
+        <p:spPr>
+          <a:xfrm>
+            <a:off x="895350" y="1789938"/>
+            <a:ext cx="3035198" cy="374904"/>
+          </a:xfrm>
+          <a:prstGeom prst="rect">
+            <a:avLst/>
+          </a:prstGeom>
+          <a:noFill/>
+          <a:ln>
+            <a:noFill/>
+          </a:ln>
+        </p:spPr>
+        <p:txBody>
+          <a:bodyPr wrap="square" lIns="36576" tIns="27432" rIns="36576" bIns="27432" anchor="t">
+            <a:noAutofit/>
+          </a:bodyPr>
+          <a:lstStyle/>
+          <a:p>
+            <a:pPr algn="l">
+              <a:lnSpc>
+                <a:spcPct val="100000"/>
+              </a:lnSpc>
+            </a:pPr>
+            <a:r>
+              <a:rPr lang="en-US" sz="2100" dirty="0" b="1">
+                <a:solidFill>
+                  <a:srgbClr val="16171D"/>
+                </a:solidFill>
+                <a:latin typeface="Segoe UI"/>
+                <a:cs typeface="Segoe UI"/>
+              </a:rPr>
+              <a:t xml:space="preserve">1. 4</a:t>
+            </a:r>
+            <a:endParaRPr lang="en-US" sz="2100" dirty="0"/>
+          </a:p>
+        </p:txBody>
+      </p:sp>
+      <p:sp>
+        <p:nvSpPr>
+          <p:cNvPr id="5" name="Shape 5"/>
+          <p:cNvSpPr txBox="1"/>
+          <p:nvPr/>
+        </p:nvSpPr>
+        <p:spPr>
+          <a:xfrm>
+            <a:off x="895350" y="2260092"/>
+            <a:ext cx="3035198" cy="534924"/>
+          </a:xfrm>
+          <a:prstGeom prst="rect">
+            <a:avLst/>
+          </a:prstGeom>
+          <a:noFill/>
+          <a:ln>
+            <a:noFill/>
+          </a:ln>
+        </p:spPr>
+        <p:txBody>
+          <a:bodyPr wrap="square" lIns="36576" tIns="27432" rIns="36576" bIns="27432" anchor="t">
+            <a:noAutofit/>
+          </a:bodyPr>
+          <a:lstStyle/>
+          <a:p>
+            <a:pPr algn="l">
+              <a:lnSpc>
+                <a:spcPct val="100000"/>
+              </a:lnSpc>
+            </a:pPr>
+            <a:r>
+              <a:rPr lang="en-US" sz="1575" dirty="0" b="1">
+                <a:solidFill>
+                  <a:srgbClr val="16171D"/>
+                </a:solidFill>
+                <a:latin typeface="Segoe UI"/>
+                <a:cs typeface="Segoe UI"/>
+              </a:rPr>
+              <a:t xml:space="preserve">Step 1.</a:t>
+            </a:r>
+            <a:r>
+              <a:rPr lang="en-US" sz="1575" dirty="0">
+                <a:solidFill>
+                  <a:srgbClr val="16171D"/>
+                </a:solidFill>
+                <a:latin typeface="Segoe UI"/>
+                <a:cs typeface="Segoe UI"/>
+              </a:rPr>
+              <a:t xml:space="preserve"> Write it as a fraction: </a:t>
+            </a:r>
+            <a:r>
+              <a:rPr lang="en-US" sz="1575" dirty="0">
+                <a:solidFill>
+                  <a:srgbClr val="16171D"/>
+                </a:solidFill>
+                <a:latin typeface="Segoe UI"/>
+                <a:cs typeface="Segoe UI"/>
+              </a:rPr>
+              <a:t xml:space="preserve">4</a:t>
+            </a:r>
+            <a:r>
+              <a:rPr lang="en-US" sz="1575" dirty="0">
+                <a:solidFill>
+                  <a:srgbClr val="16171D"/>
+                </a:solidFill>
+                <a:latin typeface="Segoe UI"/>
+                <a:cs typeface="Segoe UI"/>
+              </a:rPr>
+              <a:t xml:space="preserve">/</a:t>
+            </a:r>
+            <a:r>
+              <a:rPr lang="en-US" sz="1575" dirty="0">
+                <a:solidFill>
+                  <a:srgbClr val="16171D"/>
+                </a:solidFill>
+                <a:latin typeface="Segoe UI"/>
+                <a:cs typeface="Segoe UI"/>
+              </a:rPr>
+              <a:t xml:space="preserve">1</a:t>
+            </a:r>
+            <a:r>
+              <a:rPr lang="en-US" sz="1575" dirty="0">
+                <a:solidFill>
+                  <a:srgbClr val="16171D"/>
+                </a:solidFill>
+                <a:latin typeface="Segoe UI"/>
+                <a:cs typeface="Segoe UI"/>
+              </a:rPr>
+              <a:t xml:space="preserve">.</a:t>
+            </a:r>
+            <a:endParaRPr lang="en-US" sz="1575" dirty="0"/>
+          </a:p>
+        </p:txBody>
+      </p:sp>
+      <p:sp>
+        <p:nvSpPr>
+          <p:cNvPr id="6" name="Shape 6"/>
+          <p:cNvSpPr txBox="1"/>
+          <p:nvPr/>
+        </p:nvSpPr>
+        <p:spPr>
+          <a:xfrm>
+            <a:off x="895350" y="2890266"/>
+            <a:ext cx="3035198" cy="294894"/>
+          </a:xfrm>
+          <a:prstGeom prst="rect">
+            <a:avLst/>
+          </a:prstGeom>
+          <a:noFill/>
+          <a:ln>
+            <a:noFill/>
+          </a:ln>
+        </p:spPr>
+        <p:txBody>
+          <a:bodyPr wrap="square" lIns="36576" tIns="27432" rIns="36576" bIns="27432" anchor="t">
+            <a:noAutofit/>
+          </a:bodyPr>
+          <a:lstStyle/>
+          <a:p>
+            <a:pPr algn="l">
+              <a:lnSpc>
+                <a:spcPct val="100000"/>
+              </a:lnSpc>
+            </a:pPr>
+            <a:r>
+              <a:rPr lang="en-US" sz="1575" dirty="0" b="1">
+                <a:solidFill>
+                  <a:srgbClr val="16171D"/>
+                </a:solidFill>
+                <a:latin typeface="Segoe UI"/>
+                <a:cs typeface="Segoe UI"/>
+              </a:rPr>
+              <a:t xml:space="preserve">Step 2.</a:t>
+            </a:r>
+            <a:r>
+              <a:rPr lang="en-US" sz="1575" dirty="0">
+                <a:solidFill>
+                  <a:srgbClr val="16171D"/>
+                </a:solidFill>
+                <a:latin typeface="Segoe UI"/>
+                <a:cs typeface="Segoe UI"/>
+              </a:rPr>
+              <a:t xml:space="preserve"> Flip it: </a:t>
+            </a:r>
+            <a:r>
+              <a:rPr lang="en-US" sz="1575" dirty="0">
+                <a:solidFill>
+                  <a:srgbClr val="16171D"/>
+                </a:solidFill>
+                <a:latin typeface="Segoe UI"/>
+                <a:cs typeface="Segoe UI"/>
+              </a:rPr>
+              <a:t xml:space="preserve">1</a:t>
+            </a:r>
+            <a:r>
+              <a:rPr lang="en-US" sz="1575" dirty="0">
+                <a:solidFill>
+                  <a:srgbClr val="16171D"/>
+                </a:solidFill>
+                <a:latin typeface="Segoe UI"/>
+                <a:cs typeface="Segoe UI"/>
+              </a:rPr>
+              <a:t xml:space="preserve">/</a:t>
+            </a:r>
+            <a:r>
+              <a:rPr lang="en-US" sz="1575" dirty="0">
+                <a:solidFill>
+                  <a:srgbClr val="16171D"/>
+                </a:solidFill>
+                <a:latin typeface="Segoe UI"/>
+                <a:cs typeface="Segoe UI"/>
+              </a:rPr>
+              <a:t xml:space="preserve">4</a:t>
+            </a:r>
+            <a:r>
+              <a:rPr lang="en-US" sz="1575" dirty="0">
+                <a:solidFill>
+                  <a:srgbClr val="16171D"/>
+                </a:solidFill>
+                <a:latin typeface="Segoe UI"/>
+                <a:cs typeface="Segoe UI"/>
+              </a:rPr>
+              <a:t xml:space="preserve">.</a:t>
+            </a:r>
+            <a:endParaRPr lang="en-US" sz="1575" dirty="0"/>
+          </a:p>
+        </p:txBody>
+      </p:sp>
+      <p:sp>
+        <p:nvSpPr>
+          <p:cNvPr id="7" name="Shape 7"/>
+          <p:cNvSpPr txBox="1"/>
+          <p:nvPr/>
+        </p:nvSpPr>
+        <p:spPr>
+          <a:xfrm>
+            <a:off x="895350" y="3280410"/>
+            <a:ext cx="3035198" cy="534924"/>
+          </a:xfrm>
+          <a:prstGeom prst="rect">
+            <a:avLst/>
+          </a:prstGeom>
+          <a:noFill/>
+          <a:ln>
+            <a:noFill/>
+          </a:ln>
+        </p:spPr>
+        <p:txBody>
+          <a:bodyPr wrap="square" lIns="36576" tIns="27432" rIns="36576" bIns="27432" anchor="t">
+            <a:noAutofit/>
+          </a:bodyPr>
+          <a:lstStyle/>
+          <a:p>
+            <a:pPr algn="l">
+              <a:lnSpc>
+                <a:spcPct val="100000"/>
+              </a:lnSpc>
+            </a:pPr>
+            <a:r>
+              <a:rPr lang="en-US" sz="1575" dirty="0" b="1">
+                <a:solidFill>
+                  <a:srgbClr val="16171D"/>
+                </a:solidFill>
+                <a:latin typeface="Segoe UI"/>
+                <a:cs typeface="Segoe UI"/>
+              </a:rPr>
+              <a:t xml:space="preserve">Step 3.</a:t>
+            </a:r>
+            <a:r>
+              <a:rPr lang="en-US" sz="1575" dirty="0">
+                <a:solidFill>
+                  <a:srgbClr val="16171D"/>
+                </a:solidFill>
+                <a:latin typeface="Segoe UI"/>
+                <a:cs typeface="Segoe UI"/>
+              </a:rPr>
+              <a:t xml:space="preserve"> Change the sign: −</a:t>
+            </a:r>
+            <a:r>
+              <a:rPr lang="en-US" sz="1575" dirty="0">
+                <a:solidFill>
+                  <a:srgbClr val="16171D"/>
+                </a:solidFill>
+                <a:latin typeface="Segoe UI"/>
+                <a:cs typeface="Segoe UI"/>
+              </a:rPr>
+              <a:t xml:space="preserve">1</a:t>
+            </a:r>
+            <a:r>
+              <a:rPr lang="en-US" sz="1575" dirty="0">
+                <a:solidFill>
+                  <a:srgbClr val="16171D"/>
+                </a:solidFill>
+                <a:latin typeface="Segoe UI"/>
+                <a:cs typeface="Segoe UI"/>
+              </a:rPr>
+              <a:t xml:space="preserve">/</a:t>
+            </a:r>
+            <a:r>
+              <a:rPr lang="en-US" sz="1575" dirty="0">
+                <a:solidFill>
+                  <a:srgbClr val="16171D"/>
+                </a:solidFill>
+                <a:latin typeface="Segoe UI"/>
+                <a:cs typeface="Segoe UI"/>
+              </a:rPr>
+              <a:t xml:space="preserve">4</a:t>
+            </a:r>
+            <a:r>
+              <a:rPr lang="en-US" sz="1575" dirty="0">
+                <a:solidFill>
+                  <a:srgbClr val="16171D"/>
+                </a:solidFill>
+                <a:latin typeface="Segoe UI"/>
+                <a:cs typeface="Segoe UI"/>
+              </a:rPr>
+              <a:t xml:space="preserve">.</a:t>
+            </a:r>
+            <a:endParaRPr lang="en-US" sz="1575" dirty="0"/>
+          </a:p>
+        </p:txBody>
+      </p:sp>
+      <p:sp>
+        <p:nvSpPr>
+          <p:cNvPr id="8" name="Shape 8"/>
+          <p:cNvSpPr txBox="1"/>
+          <p:nvPr/>
+        </p:nvSpPr>
+        <p:spPr>
+          <a:xfrm>
+            <a:off x="895350" y="3910584"/>
+            <a:ext cx="3035198" cy="534924"/>
+          </a:xfrm>
+          <a:prstGeom prst="rect">
+            <a:avLst/>
+          </a:prstGeom>
+          <a:noFill/>
+          <a:ln>
+            <a:noFill/>
+          </a:ln>
+        </p:spPr>
+        <p:txBody>
+          <a:bodyPr wrap="square" lIns="36576" tIns="27432" rIns="36576" bIns="27432" anchor="t">
+            <a:noAutofit/>
+          </a:bodyPr>
+          <a:lstStyle/>
+          <a:p>
+            <a:pPr algn="l">
+              <a:lnSpc>
+                <a:spcPct val="100000"/>
+              </a:lnSpc>
+            </a:pPr>
+            <a:r>
+              <a:rPr lang="en-US" sz="1575" dirty="0" b="1">
+                <a:solidFill>
+                  <a:srgbClr val="16171D"/>
+                </a:solidFill>
+                <a:latin typeface="Segoe UI"/>
+                <a:cs typeface="Segoe UI"/>
+              </a:rPr>
+              <a:t xml:space="preserve">Step 4.</a:t>
+            </a:r>
+            <a:r>
+              <a:rPr lang="en-US" sz="1575" dirty="0">
+                <a:solidFill>
+                  <a:srgbClr val="16171D"/>
+                </a:solidFill>
+                <a:latin typeface="Segoe UI"/>
+                <a:cs typeface="Segoe UI"/>
+              </a:rPr>
+              <a:t xml:space="preserve"> Check: 4 · (−</a:t>
+            </a:r>
+            <a:r>
+              <a:rPr lang="en-US" sz="1575" dirty="0">
+                <a:solidFill>
+                  <a:srgbClr val="16171D"/>
+                </a:solidFill>
+                <a:latin typeface="Segoe UI"/>
+                <a:cs typeface="Segoe UI"/>
+              </a:rPr>
+              <a:t xml:space="preserve">1</a:t>
+            </a:r>
+            <a:r>
+              <a:rPr lang="en-US" sz="1575" dirty="0">
+                <a:solidFill>
+                  <a:srgbClr val="16171D"/>
+                </a:solidFill>
+                <a:latin typeface="Segoe UI"/>
+                <a:cs typeface="Segoe UI"/>
+              </a:rPr>
+              <a:t xml:space="preserve">/</a:t>
+            </a:r>
+            <a:r>
+              <a:rPr lang="en-US" sz="1575" dirty="0">
+                <a:solidFill>
+                  <a:srgbClr val="16171D"/>
+                </a:solidFill>
+                <a:latin typeface="Segoe UI"/>
+                <a:cs typeface="Segoe UI"/>
+              </a:rPr>
+              <a:t xml:space="preserve">4</a:t>
+            </a:r>
+            <a:r>
+              <a:rPr lang="en-US" sz="1575" dirty="0">
+                <a:solidFill>
+                  <a:srgbClr val="16171D"/>
+                </a:solidFill>
+                <a:latin typeface="Segoe UI"/>
+                <a:cs typeface="Segoe UI"/>
+              </a:rPr>
+              <a:t xml:space="preserve">) = −1 ✓</a:t>
+            </a:r>
+            <a:endParaRPr lang="en-US" sz="1575" dirty="0"/>
+          </a:p>
+        </p:txBody>
+      </p:sp>
+      <p:sp>
+        <p:nvSpPr>
+          <p:cNvPr id="9" name="Shape 9"/>
+          <p:cNvSpPr txBox="1"/>
+          <p:nvPr/>
+        </p:nvSpPr>
+        <p:spPr>
+          <a:xfrm>
+            <a:off x="895350" y="4540758"/>
+            <a:ext cx="2576368" cy="518922"/>
+          </a:xfrm>
+          <a:prstGeom prst="roundRect">
+            <a:avLst>
+              <a:gd name="adj" fmla="val 8000"/>
+            </a:avLst>
+          </a:prstGeom>
+          <a:solidFill>
+            <a:srgbClr val="EDF5E9"/>
+          </a:solidFill>
+          <a:ln>
+            <a:noFill/>
+          </a:ln>
+        </p:spPr>
+        <p:txBody>
+          <a:bodyPr wrap="square" lIns="164592" tIns="64008" rIns="164592" bIns="64008" anchor="ctr">
+            <a:noAutofit/>
+          </a:bodyPr>
+          <a:lstStyle/>
+          <a:p>
+            <a:pPr algn="l">
+              <a:lnSpc>
+                <a:spcPct val="100000"/>
+              </a:lnSpc>
+            </a:pPr>
+            <a:r>
+              <a:rPr lang="en-US" sz="1125" dirty="0" b="1" spc="100">
+                <a:solidFill>
+                  <a:srgbClr val="4F8A3C"/>
+                </a:solidFill>
+                <a:latin typeface="Segoe UI"/>
+                <a:cs typeface="Segoe UI"/>
+              </a:rPr>
+              <a:t xml:space="preserve">ANSWER   </a:t>
+            </a:r>
+            <a:r>
+              <a:rPr lang="en-US" sz="2325" dirty="0">
+                <a:solidFill>
+                  <a:srgbClr val="16171D"/>
+                </a:solidFill>
+                <a:latin typeface="Cambria"/>
+                <a:cs typeface="Cambria"/>
+              </a:rPr>
+              <a:t xml:space="preserve">−</a:t>
+            </a:r>
+            <a:r>
+              <a:rPr lang="en-US" sz="2325" dirty="0">
+                <a:solidFill>
+                  <a:srgbClr val="16171D"/>
+                </a:solidFill>
+                <a:latin typeface="Cambria"/>
+                <a:cs typeface="Cambria"/>
+              </a:rPr>
+              <a:t xml:space="preserve">1</a:t>
+            </a:r>
+            <a:r>
+              <a:rPr lang="en-US" sz="2325" dirty="0">
+                <a:solidFill>
+                  <a:srgbClr val="16171D"/>
+                </a:solidFill>
+                <a:latin typeface="Cambria"/>
+                <a:cs typeface="Cambria"/>
+              </a:rPr>
+              <a:t xml:space="preserve">/</a:t>
+            </a:r>
+            <a:r>
+              <a:rPr lang="en-US" sz="2325" dirty="0">
+                <a:solidFill>
+                  <a:srgbClr val="16171D"/>
+                </a:solidFill>
+                <a:latin typeface="Cambria"/>
+                <a:cs typeface="Cambria"/>
+              </a:rPr>
+              <a:t xml:space="preserve">4</a:t>
+            </a:r>
+            <a:endParaRPr lang="en-US" sz="2325" dirty="0"/>
+          </a:p>
+        </p:txBody>
+      </p:sp>
+      <p:sp>
+        <p:nvSpPr>
+          <p:cNvPr id="16" name="Shape 16"/>
+          <p:cNvSpPr txBox="1"/>
+          <p:nvPr/>
+        </p:nvSpPr>
+        <p:spPr>
+          <a:xfrm>
+            <a:off x="4368698" y="1618488"/>
+            <a:ext cx="3454298" cy="2982468"/>
+          </a:xfrm>
+          <a:prstGeom prst="roundRect">
+            <a:avLst>
+              <a:gd name="adj" fmla="val 8000"/>
+            </a:avLst>
+          </a:prstGeom>
+          <a:solidFill>
+            <a:srgbClr val="FFFFFF"/>
+          </a:solidFill>
+          <a:ln w="12700">
+            <a:solidFill>
+              <a:srgbClr val="E3E4EC"/>
+            </a:solidFill>
+          </a:ln>
+        </p:spPr>
+        <p:txBody>
+          <a:bodyPr wrap="square" lIns="36576" tIns="27432" rIns="36576" bIns="27432" anchor="t">
+            <a:noAutofit/>
+          </a:bodyPr>
+          <a:lstStyle/>
+          <a:p>
+            <a:pPr algn="l">
+              <a:lnSpc>
+                <a:spcPct val="100000"/>
+              </a:lnSpc>
+            </a:pPr>
+            <a:endParaRPr lang="en-US" sz="1950" dirty="0"/>
+          </a:p>
+        </p:txBody>
+      </p:sp>
+      <p:sp>
+        <p:nvSpPr>
+          <p:cNvPr id="11" name="Shape 11"/>
+          <p:cNvSpPr txBox="1"/>
+          <p:nvPr/>
+        </p:nvSpPr>
+        <p:spPr>
+          <a:xfrm>
+            <a:off x="4578248" y="1789938"/>
+            <a:ext cx="3035198" cy="374904"/>
+          </a:xfrm>
+          <a:prstGeom prst="rect">
+            <a:avLst/>
+          </a:prstGeom>
+          <a:noFill/>
+          <a:ln>
+            <a:noFill/>
+          </a:ln>
+        </p:spPr>
+        <p:txBody>
+          <a:bodyPr wrap="square" lIns="36576" tIns="27432" rIns="36576" bIns="27432" anchor="t">
+            <a:noAutofit/>
+          </a:bodyPr>
+          <a:lstStyle/>
+          <a:p>
+            <a:pPr algn="l">
+              <a:lnSpc>
+                <a:spcPct val="100000"/>
+              </a:lnSpc>
+            </a:pPr>
+            <a:r>
+              <a:rPr lang="en-US" sz="2100" dirty="0" b="1">
+                <a:solidFill>
+                  <a:srgbClr val="16171D"/>
+                </a:solidFill>
+                <a:latin typeface="Segoe UI"/>
+                <a:cs typeface="Segoe UI"/>
+              </a:rPr>
+              <a:t xml:space="preserve">2. −</a:t>
+            </a:r>
+            <a:r>
+              <a:rPr lang="en-US" sz="2100" dirty="0" b="1">
+                <a:solidFill>
+                  <a:srgbClr val="16171D"/>
+                </a:solidFill>
+                <a:latin typeface="Segoe UI"/>
+                <a:cs typeface="Segoe UI"/>
+              </a:rPr>
+              <a:t xml:space="preserve">4</a:t>
+            </a:r>
+            <a:r>
+              <a:rPr lang="en-US" sz="2100" dirty="0" b="1">
+                <a:solidFill>
+                  <a:srgbClr val="16171D"/>
+                </a:solidFill>
+                <a:latin typeface="Segoe UI"/>
+                <a:cs typeface="Segoe UI"/>
+              </a:rPr>
+              <a:t xml:space="preserve">/</a:t>
+            </a:r>
+            <a:r>
+              <a:rPr lang="en-US" sz="2100" dirty="0" b="1">
+                <a:solidFill>
+                  <a:srgbClr val="16171D"/>
+                </a:solidFill>
+                <a:latin typeface="Segoe UI"/>
+                <a:cs typeface="Segoe UI"/>
+              </a:rPr>
+              <a:t xml:space="preserve">5</a:t>
+            </a:r>
+            <a:endParaRPr lang="en-US" sz="2100" dirty="0"/>
+          </a:p>
+        </p:txBody>
+      </p:sp>
+      <p:sp>
+        <p:nvSpPr>
+          <p:cNvPr id="12" name="Shape 12"/>
+          <p:cNvSpPr txBox="1"/>
+          <p:nvPr/>
+        </p:nvSpPr>
+        <p:spPr>
+          <a:xfrm>
+            <a:off x="4578248" y="2260092"/>
+            <a:ext cx="3035198" cy="294894"/>
+          </a:xfrm>
+          <a:prstGeom prst="rect">
+            <a:avLst/>
+          </a:prstGeom>
+          <a:noFill/>
+          <a:ln>
+            <a:noFill/>
+          </a:ln>
+        </p:spPr>
+        <p:txBody>
+          <a:bodyPr wrap="square" lIns="36576" tIns="27432" rIns="36576" bIns="27432" anchor="t">
+            <a:noAutofit/>
+          </a:bodyPr>
+          <a:lstStyle/>
+          <a:p>
+            <a:pPr algn="l">
+              <a:lnSpc>
+                <a:spcPct val="100000"/>
+              </a:lnSpc>
+            </a:pPr>
+            <a:r>
+              <a:rPr lang="en-US" sz="1575" dirty="0" b="1">
+                <a:solidFill>
+                  <a:srgbClr val="16171D"/>
+                </a:solidFill>
+                <a:latin typeface="Segoe UI"/>
+                <a:cs typeface="Segoe UI"/>
+              </a:rPr>
+              <a:t xml:space="preserve">Step 1.</a:t>
+            </a:r>
+            <a:r>
+              <a:rPr lang="en-US" sz="1575" dirty="0">
+                <a:solidFill>
+                  <a:srgbClr val="16171D"/>
+                </a:solidFill>
+                <a:latin typeface="Segoe UI"/>
+                <a:cs typeface="Segoe UI"/>
+              </a:rPr>
+              <a:t xml:space="preserve"> Flip it: −</a:t>
+            </a:r>
+            <a:r>
+              <a:rPr lang="en-US" sz="1575" dirty="0">
+                <a:solidFill>
+                  <a:srgbClr val="16171D"/>
+                </a:solidFill>
+                <a:latin typeface="Segoe UI"/>
+                <a:cs typeface="Segoe UI"/>
+              </a:rPr>
+              <a:t xml:space="preserve">5</a:t>
+            </a:r>
+            <a:r>
+              <a:rPr lang="en-US" sz="1575" dirty="0">
+                <a:solidFill>
+                  <a:srgbClr val="16171D"/>
+                </a:solidFill>
+                <a:latin typeface="Segoe UI"/>
+                <a:cs typeface="Segoe UI"/>
+              </a:rPr>
+              <a:t xml:space="preserve">/</a:t>
+            </a:r>
+            <a:r>
+              <a:rPr lang="en-US" sz="1575" dirty="0">
+                <a:solidFill>
+                  <a:srgbClr val="16171D"/>
+                </a:solidFill>
+                <a:latin typeface="Segoe UI"/>
+                <a:cs typeface="Segoe UI"/>
+              </a:rPr>
+              <a:t xml:space="preserve">4</a:t>
+            </a:r>
+            <a:r>
+              <a:rPr lang="en-US" sz="1575" dirty="0">
+                <a:solidFill>
+                  <a:srgbClr val="16171D"/>
+                </a:solidFill>
+                <a:latin typeface="Segoe UI"/>
+                <a:cs typeface="Segoe UI"/>
+              </a:rPr>
+              <a:t xml:space="preserve">.</a:t>
+            </a:r>
+            <a:endParaRPr lang="en-US" sz="1575" dirty="0"/>
+          </a:p>
+        </p:txBody>
+      </p:sp>
+      <p:sp>
+        <p:nvSpPr>
+          <p:cNvPr id="13" name="Shape 13"/>
+          <p:cNvSpPr txBox="1"/>
+          <p:nvPr/>
+        </p:nvSpPr>
+        <p:spPr>
+          <a:xfrm>
+            <a:off x="4578248" y="2650236"/>
+            <a:ext cx="3035198" cy="534924"/>
+          </a:xfrm>
+          <a:prstGeom prst="rect">
+            <a:avLst/>
+          </a:prstGeom>
+          <a:noFill/>
+          <a:ln>
+            <a:noFill/>
+          </a:ln>
+        </p:spPr>
+        <p:txBody>
+          <a:bodyPr wrap="square" lIns="36576" tIns="27432" rIns="36576" bIns="27432" anchor="t">
+            <a:noAutofit/>
+          </a:bodyPr>
+          <a:lstStyle/>
+          <a:p>
+            <a:pPr algn="l">
+              <a:lnSpc>
+                <a:spcPct val="100000"/>
+              </a:lnSpc>
+            </a:pPr>
+            <a:r>
+              <a:rPr lang="en-US" sz="1575" dirty="0" b="1">
+                <a:solidFill>
+                  <a:srgbClr val="16171D"/>
+                </a:solidFill>
+                <a:latin typeface="Segoe UI"/>
+                <a:cs typeface="Segoe UI"/>
+              </a:rPr>
+              <a:t xml:space="preserve">Step 2.</a:t>
+            </a:r>
+            <a:r>
+              <a:rPr lang="en-US" sz="1575" dirty="0">
+                <a:solidFill>
+                  <a:srgbClr val="16171D"/>
+                </a:solidFill>
+                <a:latin typeface="Segoe UI"/>
+                <a:cs typeface="Segoe UI"/>
+              </a:rPr>
+              <a:t xml:space="preserve"> Change the sign: − becomes +, so </a:t>
+            </a:r>
+            <a:r>
+              <a:rPr lang="en-US" sz="1575" dirty="0">
+                <a:solidFill>
+                  <a:srgbClr val="16171D"/>
+                </a:solidFill>
+                <a:latin typeface="Segoe UI"/>
+                <a:cs typeface="Segoe UI"/>
+              </a:rPr>
+              <a:t xml:space="preserve">5</a:t>
+            </a:r>
+            <a:r>
+              <a:rPr lang="en-US" sz="1575" dirty="0">
+                <a:solidFill>
+                  <a:srgbClr val="16171D"/>
+                </a:solidFill>
+                <a:latin typeface="Segoe UI"/>
+                <a:cs typeface="Segoe UI"/>
+              </a:rPr>
+              <a:t xml:space="preserve">/</a:t>
+            </a:r>
+            <a:r>
+              <a:rPr lang="en-US" sz="1575" dirty="0">
+                <a:solidFill>
+                  <a:srgbClr val="16171D"/>
+                </a:solidFill>
+                <a:latin typeface="Segoe UI"/>
+                <a:cs typeface="Segoe UI"/>
+              </a:rPr>
+              <a:t xml:space="preserve">4</a:t>
+            </a:r>
+            <a:r>
+              <a:rPr lang="en-US" sz="1575" dirty="0">
+                <a:solidFill>
+                  <a:srgbClr val="16171D"/>
+                </a:solidFill>
+                <a:latin typeface="Segoe UI"/>
+                <a:cs typeface="Segoe UI"/>
+              </a:rPr>
+              <a:t xml:space="preserve">.</a:t>
+            </a:r>
+            <a:endParaRPr lang="en-US" sz="1575" dirty="0"/>
+          </a:p>
+        </p:txBody>
+      </p:sp>
+      <p:sp>
+        <p:nvSpPr>
+          <p:cNvPr id="14" name="Shape 14"/>
+          <p:cNvSpPr txBox="1"/>
+          <p:nvPr/>
+        </p:nvSpPr>
+        <p:spPr>
+          <a:xfrm>
+            <a:off x="4578248" y="3280410"/>
+            <a:ext cx="3035198" cy="534924"/>
+          </a:xfrm>
+          <a:prstGeom prst="rect">
+            <a:avLst/>
+          </a:prstGeom>
+          <a:noFill/>
+          <a:ln>
+            <a:noFill/>
+          </a:ln>
+        </p:spPr>
+        <p:txBody>
+          <a:bodyPr wrap="square" lIns="36576" tIns="27432" rIns="36576" bIns="27432" anchor="t">
+            <a:noAutofit/>
+          </a:bodyPr>
+          <a:lstStyle/>
+          <a:p>
+            <a:pPr algn="l">
+              <a:lnSpc>
+                <a:spcPct val="100000"/>
+              </a:lnSpc>
+            </a:pPr>
+            <a:r>
+              <a:rPr lang="en-US" sz="1575" dirty="0" b="1">
+                <a:solidFill>
+                  <a:srgbClr val="16171D"/>
+                </a:solidFill>
+                <a:latin typeface="Segoe UI"/>
+                <a:cs typeface="Segoe UI"/>
+              </a:rPr>
+              <a:t xml:space="preserve">Step 3.</a:t>
+            </a:r>
+            <a:r>
+              <a:rPr lang="en-US" sz="1575" dirty="0">
+                <a:solidFill>
+                  <a:srgbClr val="16171D"/>
+                </a:solidFill>
+                <a:latin typeface="Segoe UI"/>
+                <a:cs typeface="Segoe UI"/>
+              </a:rPr>
+              <a:t xml:space="preserve"> Check: −</a:t>
+            </a:r>
+            <a:r>
+              <a:rPr lang="en-US" sz="1575" dirty="0">
+                <a:solidFill>
+                  <a:srgbClr val="16171D"/>
+                </a:solidFill>
+                <a:latin typeface="Segoe UI"/>
+                <a:cs typeface="Segoe UI"/>
+              </a:rPr>
+              <a:t xml:space="preserve">4</a:t>
+            </a:r>
+            <a:r>
+              <a:rPr lang="en-US" sz="1575" dirty="0">
+                <a:solidFill>
+                  <a:srgbClr val="16171D"/>
+                </a:solidFill>
+                <a:latin typeface="Segoe UI"/>
+                <a:cs typeface="Segoe UI"/>
+              </a:rPr>
+              <a:t xml:space="preserve">/</a:t>
+            </a:r>
+            <a:r>
+              <a:rPr lang="en-US" sz="1575" dirty="0">
+                <a:solidFill>
+                  <a:srgbClr val="16171D"/>
+                </a:solidFill>
+                <a:latin typeface="Segoe UI"/>
+                <a:cs typeface="Segoe UI"/>
+              </a:rPr>
+              <a:t xml:space="preserve">5</a:t>
+            </a:r>
+            <a:r>
+              <a:rPr lang="en-US" sz="1575" dirty="0">
+                <a:solidFill>
+                  <a:srgbClr val="16171D"/>
+                </a:solidFill>
+                <a:latin typeface="Segoe UI"/>
+                <a:cs typeface="Segoe UI"/>
+              </a:rPr>
+              <a:t xml:space="preserve"> · </a:t>
+            </a:r>
+            <a:r>
+              <a:rPr lang="en-US" sz="1575" dirty="0">
+                <a:solidFill>
+                  <a:srgbClr val="16171D"/>
+                </a:solidFill>
+                <a:latin typeface="Segoe UI"/>
+                <a:cs typeface="Segoe UI"/>
+              </a:rPr>
+              <a:t xml:space="preserve">5</a:t>
+            </a:r>
+            <a:r>
+              <a:rPr lang="en-US" sz="1575" dirty="0">
+                <a:solidFill>
+                  <a:srgbClr val="16171D"/>
+                </a:solidFill>
+                <a:latin typeface="Segoe UI"/>
+                <a:cs typeface="Segoe UI"/>
+              </a:rPr>
+              <a:t xml:space="preserve">/</a:t>
+            </a:r>
+            <a:r>
+              <a:rPr lang="en-US" sz="1575" dirty="0">
+                <a:solidFill>
+                  <a:srgbClr val="16171D"/>
+                </a:solidFill>
+                <a:latin typeface="Segoe UI"/>
+                <a:cs typeface="Segoe UI"/>
+              </a:rPr>
+              <a:t xml:space="preserve">4</a:t>
+            </a:r>
+            <a:r>
+              <a:rPr lang="en-US" sz="1575" dirty="0">
+                <a:solidFill>
+                  <a:srgbClr val="16171D"/>
+                </a:solidFill>
+                <a:latin typeface="Segoe UI"/>
+                <a:cs typeface="Segoe UI"/>
+              </a:rPr>
+              <a:t xml:space="preserve"> = −1 ✓</a:t>
+            </a:r>
+            <a:endParaRPr lang="en-US" sz="1575" dirty="0"/>
+          </a:p>
+        </p:txBody>
+      </p:sp>
+      <p:sp>
+        <p:nvSpPr>
+          <p:cNvPr id="15" name="Shape 15"/>
+          <p:cNvSpPr txBox="1"/>
+          <p:nvPr/>
+        </p:nvSpPr>
+        <p:spPr>
+          <a:xfrm>
+            <a:off x="4578248" y="3910584"/>
+            <a:ext cx="2410541" cy="518922"/>
+          </a:xfrm>
+          <a:prstGeom prst="roundRect">
+            <a:avLst>
+              <a:gd name="adj" fmla="val 8000"/>
+            </a:avLst>
+          </a:prstGeom>
+          <a:solidFill>
+            <a:srgbClr val="EDF5E9"/>
+          </a:solidFill>
+          <a:ln>
+            <a:noFill/>
+          </a:ln>
+        </p:spPr>
+        <p:txBody>
+          <a:bodyPr wrap="square" lIns="164592" tIns="64008" rIns="164592" bIns="64008" anchor="ctr">
+            <a:noAutofit/>
+          </a:bodyPr>
+          <a:lstStyle/>
+          <a:p>
+            <a:pPr algn="l">
+              <a:lnSpc>
+                <a:spcPct val="100000"/>
+              </a:lnSpc>
+            </a:pPr>
+            <a:r>
+              <a:rPr lang="en-US" sz="1125" dirty="0" b="1" spc="100">
+                <a:solidFill>
+                  <a:srgbClr val="4F8A3C"/>
+                </a:solidFill>
+                <a:latin typeface="Segoe UI"/>
+                <a:cs typeface="Segoe UI"/>
+              </a:rPr>
+              <a:t xml:space="preserve">ANSWER   </a:t>
+            </a:r>
+            <a:r>
+              <a:rPr lang="en-US" sz="2325" dirty="0">
+                <a:solidFill>
+                  <a:srgbClr val="16171D"/>
+                </a:solidFill>
+                <a:latin typeface="Cambria"/>
+                <a:cs typeface="Cambria"/>
+              </a:rPr>
+              <a:t xml:space="preserve">5</a:t>
+            </a:r>
+            <a:r>
+              <a:rPr lang="en-US" sz="2325" dirty="0">
+                <a:solidFill>
+                  <a:srgbClr val="16171D"/>
+                </a:solidFill>
+                <a:latin typeface="Cambria"/>
+                <a:cs typeface="Cambria"/>
+              </a:rPr>
+              <a:t xml:space="preserve">/</a:t>
+            </a:r>
+            <a:r>
+              <a:rPr lang="en-US" sz="2325" dirty="0">
+                <a:solidFill>
+                  <a:srgbClr val="16171D"/>
+                </a:solidFill>
+                <a:latin typeface="Cambria"/>
+                <a:cs typeface="Cambria"/>
+              </a:rPr>
+              <a:t xml:space="preserve">4</a:t>
+            </a:r>
+            <a:endParaRPr lang="en-US" sz="2325" dirty="0"/>
+          </a:p>
+        </p:txBody>
+      </p:sp>
+      <p:sp>
+        <p:nvSpPr>
+          <p:cNvPr id="22" name="Shape 22"/>
+          <p:cNvSpPr txBox="1"/>
+          <p:nvPr/>
+        </p:nvSpPr>
+        <p:spPr>
+          <a:xfrm>
+            <a:off x="8051597" y="1618488"/>
+            <a:ext cx="3454298" cy="2742438"/>
+          </a:xfrm>
+          <a:prstGeom prst="roundRect">
+            <a:avLst>
+              <a:gd name="adj" fmla="val 8000"/>
+            </a:avLst>
+          </a:prstGeom>
+          <a:solidFill>
+            <a:srgbClr val="FFFFFF"/>
+          </a:solidFill>
+          <a:ln w="12700">
+            <a:solidFill>
+              <a:srgbClr val="E3E4EC"/>
+            </a:solidFill>
+          </a:ln>
+        </p:spPr>
+        <p:txBody>
+          <a:bodyPr wrap="square" lIns="36576" tIns="27432" rIns="36576" bIns="27432" anchor="t">
+            <a:noAutofit/>
+          </a:bodyPr>
+          <a:lstStyle/>
+          <a:p>
+            <a:pPr algn="l">
+              <a:lnSpc>
+                <a:spcPct val="100000"/>
+              </a:lnSpc>
+            </a:pPr>
+            <a:endParaRPr lang="en-US" sz="1950" dirty="0"/>
+          </a:p>
+        </p:txBody>
+      </p:sp>
+      <p:sp>
+        <p:nvSpPr>
+          <p:cNvPr id="17" name="Shape 17"/>
+          <p:cNvSpPr txBox="1"/>
+          <p:nvPr/>
+        </p:nvSpPr>
+        <p:spPr>
+          <a:xfrm>
+            <a:off x="8261147" y="1789938"/>
+            <a:ext cx="3035198" cy="374904"/>
+          </a:xfrm>
+          <a:prstGeom prst="rect">
+            <a:avLst/>
+          </a:prstGeom>
+          <a:noFill/>
+          <a:ln>
+            <a:noFill/>
+          </a:ln>
+        </p:spPr>
+        <p:txBody>
+          <a:bodyPr wrap="square" lIns="36576" tIns="27432" rIns="36576" bIns="27432" anchor="t">
+            <a:noAutofit/>
+          </a:bodyPr>
+          <a:lstStyle/>
+          <a:p>
+            <a:pPr algn="l">
+              <a:lnSpc>
+                <a:spcPct val="100000"/>
+              </a:lnSpc>
+            </a:pPr>
+            <a:r>
+              <a:rPr lang="en-US" sz="2100" dirty="0" b="1">
+                <a:solidFill>
+                  <a:srgbClr val="16171D"/>
+                </a:solidFill>
+                <a:latin typeface="Segoe UI"/>
+                <a:cs typeface="Segoe UI"/>
+              </a:rPr>
+              <a:t xml:space="preserve">3. </a:t>
+            </a:r>
+            <a:r>
+              <a:rPr lang="en-US" sz="2100" dirty="0" b="1">
+                <a:solidFill>
+                  <a:srgbClr val="16171D"/>
+                </a:solidFill>
+                <a:latin typeface="Segoe UI"/>
+                <a:cs typeface="Segoe UI"/>
+              </a:rPr>
+              <a:t xml:space="preserve">1</a:t>
+            </a:r>
+            <a:r>
+              <a:rPr lang="en-US" sz="2100" dirty="0" b="1">
+                <a:solidFill>
+                  <a:srgbClr val="16171D"/>
+                </a:solidFill>
+                <a:latin typeface="Segoe UI"/>
+                <a:cs typeface="Segoe UI"/>
+              </a:rPr>
+              <a:t xml:space="preserve">/</a:t>
+            </a:r>
+            <a:r>
+              <a:rPr lang="en-US" sz="2100" dirty="0" b="1">
+                <a:solidFill>
+                  <a:srgbClr val="16171D"/>
+                </a:solidFill>
+                <a:latin typeface="Segoe UI"/>
+                <a:cs typeface="Segoe UI"/>
+              </a:rPr>
+              <a:t xml:space="preserve">2</a:t>
+            </a:r>
+            <a:endParaRPr lang="en-US" sz="2100" dirty="0"/>
+          </a:p>
+        </p:txBody>
+      </p:sp>
+      <p:sp>
+        <p:nvSpPr>
+          <p:cNvPr id="18" name="Shape 18"/>
+          <p:cNvSpPr txBox="1"/>
+          <p:nvPr/>
+        </p:nvSpPr>
+        <p:spPr>
+          <a:xfrm>
+            <a:off x="8261147" y="2260092"/>
+            <a:ext cx="3035198" cy="294894"/>
+          </a:xfrm>
+          <a:prstGeom prst="rect">
+            <a:avLst/>
+          </a:prstGeom>
+          <a:noFill/>
+          <a:ln>
+            <a:noFill/>
+          </a:ln>
+        </p:spPr>
+        <p:txBody>
+          <a:bodyPr wrap="square" lIns="36576" tIns="27432" rIns="36576" bIns="27432" anchor="t">
+            <a:noAutofit/>
+          </a:bodyPr>
+          <a:lstStyle/>
+          <a:p>
+            <a:pPr algn="l">
+              <a:lnSpc>
+                <a:spcPct val="100000"/>
+              </a:lnSpc>
+            </a:pPr>
+            <a:r>
+              <a:rPr lang="en-US" sz="1575" dirty="0" b="1">
+                <a:solidFill>
+                  <a:srgbClr val="16171D"/>
+                </a:solidFill>
+                <a:latin typeface="Segoe UI"/>
+                <a:cs typeface="Segoe UI"/>
+              </a:rPr>
+              <a:t xml:space="preserve">Step 1.</a:t>
+            </a:r>
+            <a:r>
+              <a:rPr lang="en-US" sz="1575" dirty="0">
+                <a:solidFill>
+                  <a:srgbClr val="16171D"/>
+                </a:solidFill>
+                <a:latin typeface="Segoe UI"/>
+                <a:cs typeface="Segoe UI"/>
+              </a:rPr>
+              <a:t xml:space="preserve"> Flip it: </a:t>
+            </a:r>
+            <a:r>
+              <a:rPr lang="en-US" sz="1575" dirty="0">
+                <a:solidFill>
+                  <a:srgbClr val="16171D"/>
+                </a:solidFill>
+                <a:latin typeface="Segoe UI"/>
+                <a:cs typeface="Segoe UI"/>
+              </a:rPr>
+              <a:t xml:space="preserve">2</a:t>
+            </a:r>
+            <a:r>
+              <a:rPr lang="en-US" sz="1575" dirty="0">
+                <a:solidFill>
+                  <a:srgbClr val="16171D"/>
+                </a:solidFill>
+                <a:latin typeface="Segoe UI"/>
+                <a:cs typeface="Segoe UI"/>
+              </a:rPr>
+              <a:t xml:space="preserve">/</a:t>
+            </a:r>
+            <a:r>
+              <a:rPr lang="en-US" sz="1575" dirty="0">
+                <a:solidFill>
+                  <a:srgbClr val="16171D"/>
+                </a:solidFill>
+                <a:latin typeface="Segoe UI"/>
+                <a:cs typeface="Segoe UI"/>
+              </a:rPr>
+              <a:t xml:space="preserve">1</a:t>
+            </a:r>
+            <a:r>
+              <a:rPr lang="en-US" sz="1575" dirty="0">
+                <a:solidFill>
+                  <a:srgbClr val="16171D"/>
+                </a:solidFill>
+                <a:latin typeface="Segoe UI"/>
+                <a:cs typeface="Segoe UI"/>
+              </a:rPr>
+              <a:t xml:space="preserve"> = 2.</a:t>
+            </a:r>
+            <a:endParaRPr lang="en-US" sz="1575" dirty="0"/>
+          </a:p>
+        </p:txBody>
+      </p:sp>
+      <p:sp>
+        <p:nvSpPr>
+          <p:cNvPr id="19" name="Shape 19"/>
+          <p:cNvSpPr txBox="1"/>
+          <p:nvPr/>
+        </p:nvSpPr>
+        <p:spPr>
+          <a:xfrm>
+            <a:off x="8261147" y="2650236"/>
+            <a:ext cx="3035198" cy="294894"/>
+          </a:xfrm>
+          <a:prstGeom prst="rect">
+            <a:avLst/>
+          </a:prstGeom>
+          <a:noFill/>
+          <a:ln>
+            <a:noFill/>
+          </a:ln>
+        </p:spPr>
+        <p:txBody>
+          <a:bodyPr wrap="square" lIns="36576" tIns="27432" rIns="36576" bIns="27432" anchor="t">
+            <a:noAutofit/>
+          </a:bodyPr>
+          <a:lstStyle/>
+          <a:p>
+            <a:pPr algn="l">
+              <a:lnSpc>
+                <a:spcPct val="100000"/>
+              </a:lnSpc>
+            </a:pPr>
+            <a:r>
+              <a:rPr lang="en-US" sz="1575" dirty="0" b="1">
+                <a:solidFill>
+                  <a:srgbClr val="16171D"/>
+                </a:solidFill>
+                <a:latin typeface="Segoe UI"/>
+                <a:cs typeface="Segoe UI"/>
+              </a:rPr>
+              <a:t xml:space="preserve">Step 2.</a:t>
+            </a:r>
+            <a:r>
+              <a:rPr lang="en-US" sz="1575" dirty="0">
+                <a:solidFill>
+                  <a:srgbClr val="16171D"/>
+                </a:solidFill>
+                <a:latin typeface="Segoe UI"/>
+                <a:cs typeface="Segoe UI"/>
+              </a:rPr>
+              <a:t xml:space="preserve"> Change the sign: −2.</a:t>
+            </a:r>
+            <a:endParaRPr lang="en-US" sz="1575" dirty="0"/>
+          </a:p>
+        </p:txBody>
+      </p:sp>
+      <p:sp>
+        <p:nvSpPr>
+          <p:cNvPr id="20" name="Shape 20"/>
+          <p:cNvSpPr txBox="1"/>
+          <p:nvPr/>
+        </p:nvSpPr>
+        <p:spPr>
+          <a:xfrm>
+            <a:off x="8261147" y="3040380"/>
+            <a:ext cx="3035198" cy="534924"/>
+          </a:xfrm>
+          <a:prstGeom prst="rect">
+            <a:avLst/>
+          </a:prstGeom>
+          <a:noFill/>
+          <a:ln>
+            <a:noFill/>
+          </a:ln>
+        </p:spPr>
+        <p:txBody>
+          <a:bodyPr wrap="square" lIns="36576" tIns="27432" rIns="36576" bIns="27432" anchor="t">
+            <a:noAutofit/>
+          </a:bodyPr>
+          <a:lstStyle/>
+          <a:p>
+            <a:pPr algn="l">
+              <a:lnSpc>
+                <a:spcPct val="100000"/>
+              </a:lnSpc>
+            </a:pPr>
+            <a:r>
+              <a:rPr lang="en-US" sz="1575" dirty="0" b="1">
+                <a:solidFill>
+                  <a:srgbClr val="16171D"/>
+                </a:solidFill>
+                <a:latin typeface="Segoe UI"/>
+                <a:cs typeface="Segoe UI"/>
+              </a:rPr>
+              <a:t xml:space="preserve">Step 3.</a:t>
+            </a:r>
+            <a:r>
+              <a:rPr lang="en-US" sz="1575" dirty="0">
+                <a:solidFill>
+                  <a:srgbClr val="16171D"/>
+                </a:solidFill>
+                <a:latin typeface="Segoe UI"/>
+                <a:cs typeface="Segoe UI"/>
+              </a:rPr>
+              <a:t xml:space="preserve"> Check: </a:t>
+            </a:r>
+            <a:r>
+              <a:rPr lang="en-US" sz="1575" dirty="0">
+                <a:solidFill>
+                  <a:srgbClr val="16171D"/>
+                </a:solidFill>
+                <a:latin typeface="Segoe UI"/>
+                <a:cs typeface="Segoe UI"/>
+              </a:rPr>
+              <a:t xml:space="preserve">1</a:t>
+            </a:r>
+            <a:r>
+              <a:rPr lang="en-US" sz="1575" dirty="0">
+                <a:solidFill>
+                  <a:srgbClr val="16171D"/>
+                </a:solidFill>
+                <a:latin typeface="Segoe UI"/>
+                <a:cs typeface="Segoe UI"/>
+              </a:rPr>
+              <a:t xml:space="preserve">/</a:t>
+            </a:r>
+            <a:r>
+              <a:rPr lang="en-US" sz="1575" dirty="0">
+                <a:solidFill>
+                  <a:srgbClr val="16171D"/>
+                </a:solidFill>
+                <a:latin typeface="Segoe UI"/>
+                <a:cs typeface="Segoe UI"/>
+              </a:rPr>
+              <a:t xml:space="preserve">2</a:t>
+            </a:r>
+            <a:r>
+              <a:rPr lang="en-US" sz="1575" dirty="0">
+                <a:solidFill>
+                  <a:srgbClr val="16171D"/>
+                </a:solidFill>
+                <a:latin typeface="Segoe UI"/>
+                <a:cs typeface="Segoe UI"/>
+              </a:rPr>
+              <a:t xml:space="preserve"> · (−2) = −1 ✓</a:t>
+            </a:r>
+            <a:endParaRPr lang="en-US" sz="1575" dirty="0"/>
+          </a:p>
+        </p:txBody>
+      </p:sp>
+      <p:sp>
+        <p:nvSpPr>
+          <p:cNvPr id="21" name="Shape 21"/>
+          <p:cNvSpPr txBox="1"/>
+          <p:nvPr/>
+        </p:nvSpPr>
+        <p:spPr>
+          <a:xfrm>
+            <a:off x="8261147" y="3670554"/>
+            <a:ext cx="2244715" cy="518922"/>
+          </a:xfrm>
+          <a:prstGeom prst="roundRect">
+            <a:avLst>
+              <a:gd name="adj" fmla="val 8000"/>
+            </a:avLst>
+          </a:prstGeom>
+          <a:solidFill>
+            <a:srgbClr val="EDF5E9"/>
+          </a:solidFill>
+          <a:ln>
+            <a:noFill/>
+          </a:ln>
+        </p:spPr>
+        <p:txBody>
+          <a:bodyPr wrap="square" lIns="164592" tIns="64008" rIns="164592" bIns="64008" anchor="ctr">
+            <a:noAutofit/>
+          </a:bodyPr>
+          <a:lstStyle/>
+          <a:p>
+            <a:pPr algn="l">
+              <a:lnSpc>
+                <a:spcPct val="100000"/>
+              </a:lnSpc>
+            </a:pPr>
+            <a:r>
+              <a:rPr lang="en-US" sz="1125" dirty="0" b="1" spc="100">
+                <a:solidFill>
+                  <a:srgbClr val="4F8A3C"/>
+                </a:solidFill>
+                <a:latin typeface="Segoe UI"/>
+                <a:cs typeface="Segoe UI"/>
+              </a:rPr>
+              <a:t xml:space="preserve">ANSWER   </a:t>
+            </a:r>
+            <a:r>
+              <a:rPr lang="en-US" sz="2325" dirty="0">
+                <a:solidFill>
+                  <a:srgbClr val="16171D"/>
+                </a:solidFill>
+                <a:latin typeface="Cambria"/>
+                <a:cs typeface="Cambria"/>
+              </a:rPr>
+              <a:t xml:space="preserve">−2</a:t>
+            </a:r>
+            <a:endParaRPr lang="en-US" sz="2325" dirty="0"/>
+          </a:p>
+        </p:txBody>
+      </p:sp>
+      <p:sp>
+        <p:nvSpPr>
+          <p:cNvPr id="23" name="Slide Number 23"/>
           <p:cNvSpPr txBox="1"/>
           <p:nvPr/>
         </p:nvSpPr>
@@ -4553,6 +6105,1323 @@
   <p:transition spd="med">
     <p:fade/>
   </p:transition>
+  <p:timing>
+    <p:tnLst>
+      <p:par>
+        <p:cTn id="1" dur="indefinite" restart="never" nodeType="tmRoot">
+          <p:childTnLst>
+            <p:seq concurrent="1" nextAc="seek">
+              <p:cTn id="2" dur="indefinite" nodeType="mainSeq">
+                <p:childTnLst>
+                  <p:par>
+                    <p:cTn id="8" fill="hold">
+                      <p:stCondLst>
+                        <p:cond delay="indefinite"/>
+                      </p:stCondLst>
+                      <p:childTnLst>
+                        <p:par>
+                          <p:cTn id="9" fill="hold">
+                            <p:stCondLst>
+                              <p:cond delay="0"/>
+                            </p:stCondLst>
+                            <p:childTnLst>
+                              <p:par>
+                                <p:cTn id="7" presetID="42" presetClass="entr" presetSubtype="0" fill="hold" nodeType="clickEffect">
+                                  <p:stCondLst>
+                                    <p:cond delay="0"/>
+                                  </p:stCondLst>
+                                  <p:childTnLst>
+                                    <p:set>
+                                      <p:cBhvr>
+                                        <p:cTn id="3" dur="1" fill="hold">
+                                          <p:stCondLst>
+                                            <p:cond delay="0"/>
+                                          </p:stCondLst>
+                                        </p:cTn>
+                                        <p:tgtEl>
+                                          <p:spTgt spid="5"/>
+                                        </p:tgtEl>
+                                        <p:attrNameLst>
+                                          <p:attrName>style.visibility</p:attrName>
+                                        </p:attrNameLst>
+                                      </p:cBhvr>
+                                      <p:to>
+                                        <p:strVal val="visible"/>
+                                      </p:to>
+                                    </p:set>
+                                    <p:animEffect transition="in" filter="fade">
+                                      <p:cBhvr>
+                                        <p:cTn id="4" dur="500"/>
+                                        <p:tgtEl>
+                                          <p:spTgt spid="5"/>
+                                        </p:tgtEl>
+                                      </p:cBhvr>
+                                    </p:animEffect>
+                                    <p:anim calcmode="lin" valueType="num">
+                                      <p:cBhvr>
+                                        <p:cTn id="5" dur="500" fill="hold"/>
+                                        <p:tgtEl>
+                                          <p:spTgt spid="5"/>
+                                        </p:tgtEl>
+                                        <p:attrNameLst>
+                                          <p:attrName>ppt_x</p:attrName>
+                                        </p:attrNameLst>
+                                      </p:cBhvr>
+                                      <p:tavLst>
+                                        <p:tav tm="0">
+                                          <p:val>
+                                            <p:strVal val="#ppt_x"/>
+                                          </p:val>
+                                        </p:tav>
+                                        <p:tav tm="100000">
+                                          <p:val>
+                                            <p:strVal val="#ppt_x"/>
+                                          </p:val>
+                                        </p:tav>
+                                      </p:tavLst>
+                                    </p:anim>
+                                    <p:anim calcmode="lin" valueType="num">
+                                      <p:cBhvr>
+                                        <p:cTn id="6" dur="500" fill="hold"/>
+                                        <p:tgtEl>
+                                          <p:spTgt spid="5"/>
+                                        </p:tgtEl>
+                                        <p:attrNameLst>
+                                          <p:attrName>ppt_y</p:attrName>
+                                        </p:attrNameLst>
+                                      </p:cBhvr>
+                                      <p:tavLst>
+                                        <p:tav tm="0">
+                                          <p:val>
+                                            <p:strVal val="#ppt_y+.1"/>
+                                          </p:val>
+                                        </p:tav>
+                                        <p:tav tm="100000">
+                                          <p:val>
+                                            <p:strVal val="#ppt_y"/>
+                                          </p:val>
+                                        </p:tav>
+                                      </p:tavLst>
+                                    </p:anim>
+                                  </p:childTnLst>
+                                </p:cTn>
+                              </p:par>
+                            </p:childTnLst>
+                          </p:cTn>
+                        </p:par>
+                      </p:childTnLst>
+                    </p:cTn>
+                  </p:par>
+                  <p:par>
+                    <p:cTn id="15" fill="hold">
+                      <p:stCondLst>
+                        <p:cond delay="indefinite"/>
+                      </p:stCondLst>
+                      <p:childTnLst>
+                        <p:par>
+                          <p:cTn id="16" fill="hold">
+                            <p:stCondLst>
+                              <p:cond delay="0"/>
+                            </p:stCondLst>
+                            <p:childTnLst>
+                              <p:par>
+                                <p:cTn id="14" presetID="42" presetClass="entr" presetSubtype="0" fill="hold" nodeType="clickEffect">
+                                  <p:stCondLst>
+                                    <p:cond delay="0"/>
+                                  </p:stCondLst>
+                                  <p:childTnLst>
+                                    <p:set>
+                                      <p:cBhvr>
+                                        <p:cTn id="10" dur="1" fill="hold">
+                                          <p:stCondLst>
+                                            <p:cond delay="0"/>
+                                          </p:stCondLst>
+                                        </p:cTn>
+                                        <p:tgtEl>
+                                          <p:spTgt spid="6"/>
+                                        </p:tgtEl>
+                                        <p:attrNameLst>
+                                          <p:attrName>style.visibility</p:attrName>
+                                        </p:attrNameLst>
+                                      </p:cBhvr>
+                                      <p:to>
+                                        <p:strVal val="visible"/>
+                                      </p:to>
+                                    </p:set>
+                                    <p:animEffect transition="in" filter="fade">
+                                      <p:cBhvr>
+                                        <p:cTn id="11" dur="500"/>
+                                        <p:tgtEl>
+                                          <p:spTgt spid="6"/>
+                                        </p:tgtEl>
+                                      </p:cBhvr>
+                                    </p:animEffect>
+                                    <p:anim calcmode="lin" valueType="num">
+                                      <p:cBhvr>
+                                        <p:cTn id="12" dur="500" fill="hold"/>
+                                        <p:tgtEl>
+                                          <p:spTgt spid="6"/>
+                                        </p:tgtEl>
+                                        <p:attrNameLst>
+                                          <p:attrName>ppt_x</p:attrName>
+                                        </p:attrNameLst>
+                                      </p:cBhvr>
+                                      <p:tavLst>
+                                        <p:tav tm="0">
+                                          <p:val>
+                                            <p:strVal val="#ppt_x"/>
+                                          </p:val>
+                                        </p:tav>
+                                        <p:tav tm="100000">
+                                          <p:val>
+                                            <p:strVal val="#ppt_x"/>
+                                          </p:val>
+                                        </p:tav>
+                                      </p:tavLst>
+                                    </p:anim>
+                                    <p:anim calcmode="lin" valueType="num">
+                                      <p:cBhvr>
+                                        <p:cTn id="13" dur="500" fill="hold"/>
+                                        <p:tgtEl>
+                                          <p:spTgt spid="6"/>
+                                        </p:tgtEl>
+                                        <p:attrNameLst>
+                                          <p:attrName>ppt_y</p:attrName>
+                                        </p:attrNameLst>
+                                      </p:cBhvr>
+                                      <p:tavLst>
+                                        <p:tav tm="0">
+                                          <p:val>
+                                            <p:strVal val="#ppt_y+.1"/>
+                                          </p:val>
+                                        </p:tav>
+                                        <p:tav tm="100000">
+                                          <p:val>
+                                            <p:strVal val="#ppt_y"/>
+                                          </p:val>
+                                        </p:tav>
+                                      </p:tavLst>
+                                    </p:anim>
+                                  </p:childTnLst>
+                                </p:cTn>
+                              </p:par>
+                            </p:childTnLst>
+                          </p:cTn>
+                        </p:par>
+                      </p:childTnLst>
+                    </p:cTn>
+                  </p:par>
+                  <p:par>
+                    <p:cTn id="22" fill="hold">
+                      <p:stCondLst>
+                        <p:cond delay="indefinite"/>
+                      </p:stCondLst>
+                      <p:childTnLst>
+                        <p:par>
+                          <p:cTn id="23" fill="hold">
+                            <p:stCondLst>
+                              <p:cond delay="0"/>
+                            </p:stCondLst>
+                            <p:childTnLst>
+                              <p:par>
+                                <p:cTn id="21" presetID="42" presetClass="entr" presetSubtype="0" fill="hold" nodeType="clickEffect">
+                                  <p:stCondLst>
+                                    <p:cond delay="0"/>
+                                  </p:stCondLst>
+                                  <p:childTnLst>
+                                    <p:set>
+                                      <p:cBhvr>
+                                        <p:cTn id="17" dur="1" fill="hold">
+                                          <p:stCondLst>
+                                            <p:cond delay="0"/>
+                                          </p:stCondLst>
+                                        </p:cTn>
+                                        <p:tgtEl>
+                                          <p:spTgt spid="7"/>
+                                        </p:tgtEl>
+                                        <p:attrNameLst>
+                                          <p:attrName>style.visibility</p:attrName>
+                                        </p:attrNameLst>
+                                      </p:cBhvr>
+                                      <p:to>
+                                        <p:strVal val="visible"/>
+                                      </p:to>
+                                    </p:set>
+                                    <p:animEffect transition="in" filter="fade">
+                                      <p:cBhvr>
+                                        <p:cTn id="18" dur="500"/>
+                                        <p:tgtEl>
+                                          <p:spTgt spid="7"/>
+                                        </p:tgtEl>
+                                      </p:cBhvr>
+                                    </p:animEffect>
+                                    <p:anim calcmode="lin" valueType="num">
+                                      <p:cBhvr>
+                                        <p:cTn id="19" dur="500" fill="hold"/>
+                                        <p:tgtEl>
+                                          <p:spTgt spid="7"/>
+                                        </p:tgtEl>
+                                        <p:attrNameLst>
+                                          <p:attrName>ppt_x</p:attrName>
+                                        </p:attrNameLst>
+                                      </p:cBhvr>
+                                      <p:tavLst>
+                                        <p:tav tm="0">
+                                          <p:val>
+                                            <p:strVal val="#ppt_x"/>
+                                          </p:val>
+                                        </p:tav>
+                                        <p:tav tm="100000">
+                                          <p:val>
+                                            <p:strVal val="#ppt_x"/>
+                                          </p:val>
+                                        </p:tav>
+                                      </p:tavLst>
+                                    </p:anim>
+                                    <p:anim calcmode="lin" valueType="num">
+                                      <p:cBhvr>
+                                        <p:cTn id="20" dur="500" fill="hold"/>
+                                        <p:tgtEl>
+                                          <p:spTgt spid="7"/>
+                                        </p:tgtEl>
+                                        <p:attrNameLst>
+                                          <p:attrName>ppt_y</p:attrName>
+                                        </p:attrNameLst>
+                                      </p:cBhvr>
+                                      <p:tavLst>
+                                        <p:tav tm="0">
+                                          <p:val>
+                                            <p:strVal val="#ppt_y+.1"/>
+                                          </p:val>
+                                        </p:tav>
+                                        <p:tav tm="100000">
+                                          <p:val>
+                                            <p:strVal val="#ppt_y"/>
+                                          </p:val>
+                                        </p:tav>
+                                      </p:tavLst>
+                                    </p:anim>
+                                  </p:childTnLst>
+                                </p:cTn>
+                              </p:par>
+                            </p:childTnLst>
+                          </p:cTn>
+                        </p:par>
+                      </p:childTnLst>
+                    </p:cTn>
+                  </p:par>
+                  <p:par>
+                    <p:cTn id="29" fill="hold">
+                      <p:stCondLst>
+                        <p:cond delay="indefinite"/>
+                      </p:stCondLst>
+                      <p:childTnLst>
+                        <p:par>
+                          <p:cTn id="30" fill="hold">
+                            <p:stCondLst>
+                              <p:cond delay="0"/>
+                            </p:stCondLst>
+                            <p:childTnLst>
+                              <p:par>
+                                <p:cTn id="28" presetID="42" presetClass="entr" presetSubtype="0" fill="hold" nodeType="clickEffect">
+                                  <p:stCondLst>
+                                    <p:cond delay="0"/>
+                                  </p:stCondLst>
+                                  <p:childTnLst>
+                                    <p:set>
+                                      <p:cBhvr>
+                                        <p:cTn id="24" dur="1" fill="hold">
+                                          <p:stCondLst>
+                                            <p:cond delay="0"/>
+                                          </p:stCondLst>
+                                        </p:cTn>
+                                        <p:tgtEl>
+                                          <p:spTgt spid="8"/>
+                                        </p:tgtEl>
+                                        <p:attrNameLst>
+                                          <p:attrName>style.visibility</p:attrName>
+                                        </p:attrNameLst>
+                                      </p:cBhvr>
+                                      <p:to>
+                                        <p:strVal val="visible"/>
+                                      </p:to>
+                                    </p:set>
+                                    <p:animEffect transition="in" filter="fade">
+                                      <p:cBhvr>
+                                        <p:cTn id="25" dur="500"/>
+                                        <p:tgtEl>
+                                          <p:spTgt spid="8"/>
+                                        </p:tgtEl>
+                                      </p:cBhvr>
+                                    </p:animEffect>
+                                    <p:anim calcmode="lin" valueType="num">
+                                      <p:cBhvr>
+                                        <p:cTn id="26" dur="500" fill="hold"/>
+                                        <p:tgtEl>
+                                          <p:spTgt spid="8"/>
+                                        </p:tgtEl>
+                                        <p:attrNameLst>
+                                          <p:attrName>ppt_x</p:attrName>
+                                        </p:attrNameLst>
+                                      </p:cBhvr>
+                                      <p:tavLst>
+                                        <p:tav tm="0">
+                                          <p:val>
+                                            <p:strVal val="#ppt_x"/>
+                                          </p:val>
+                                        </p:tav>
+                                        <p:tav tm="100000">
+                                          <p:val>
+                                            <p:strVal val="#ppt_x"/>
+                                          </p:val>
+                                        </p:tav>
+                                      </p:tavLst>
+                                    </p:anim>
+                                    <p:anim calcmode="lin" valueType="num">
+                                      <p:cBhvr>
+                                        <p:cTn id="27" dur="500" fill="hold"/>
+                                        <p:tgtEl>
+                                          <p:spTgt spid="8"/>
+                                        </p:tgtEl>
+                                        <p:attrNameLst>
+                                          <p:attrName>ppt_y</p:attrName>
+                                        </p:attrNameLst>
+                                      </p:cBhvr>
+                                      <p:tavLst>
+                                        <p:tav tm="0">
+                                          <p:val>
+                                            <p:strVal val="#ppt_y+.1"/>
+                                          </p:val>
+                                        </p:tav>
+                                        <p:tav tm="100000">
+                                          <p:val>
+                                            <p:strVal val="#ppt_y"/>
+                                          </p:val>
+                                        </p:tav>
+                                      </p:tavLst>
+                                    </p:anim>
+                                  </p:childTnLst>
+                                </p:cTn>
+                              </p:par>
+                            </p:childTnLst>
+                          </p:cTn>
+                        </p:par>
+                      </p:childTnLst>
+                    </p:cTn>
+                  </p:par>
+                  <p:par>
+                    <p:cTn id="36" fill="hold">
+                      <p:stCondLst>
+                        <p:cond delay="indefinite"/>
+                      </p:stCondLst>
+                      <p:childTnLst>
+                        <p:par>
+                          <p:cTn id="37" fill="hold">
+                            <p:stCondLst>
+                              <p:cond delay="0"/>
+                            </p:stCondLst>
+                            <p:childTnLst>
+                              <p:par>
+                                <p:cTn id="35" presetID="53" presetClass="entr" presetSubtype="16" fill="hold" nodeType="clickEffect">
+                                  <p:stCondLst>
+                                    <p:cond delay="0"/>
+                                  </p:stCondLst>
+                                  <p:childTnLst>
+                                    <p:set>
+                                      <p:cBhvr>
+                                        <p:cTn id="31" dur="1" fill="hold">
+                                          <p:stCondLst>
+                                            <p:cond delay="0"/>
+                                          </p:stCondLst>
+                                        </p:cTn>
+                                        <p:tgtEl>
+                                          <p:spTgt spid="9"/>
+                                        </p:tgtEl>
+                                        <p:attrNameLst>
+                                          <p:attrName>style.visibility</p:attrName>
+                                        </p:attrNameLst>
+                                      </p:cBhvr>
+                                      <p:to>
+                                        <p:strVal val="visible"/>
+                                      </p:to>
+                                    </p:set>
+                                    <p:animEffect transition="in" filter="fade">
+                                      <p:cBhvr>
+                                        <p:cTn id="32" dur="500"/>
+                                        <p:tgtEl>
+                                          <p:spTgt spid="9"/>
+                                        </p:tgtEl>
+                                      </p:cBhvr>
+                                    </p:animEffect>
+                                    <p:anim calcmode="lin" valueType="num">
+                                      <p:cBhvr>
+                                        <p:cTn id="33" dur="500" fill="hold"/>
+                                        <p:tgtEl>
+                                          <p:spTgt spid="9"/>
+                                        </p:tgtEl>
+                                        <p:attrNameLst>
+                                          <p:attrName>ppt_w</p:attrName>
+                                        </p:attrNameLst>
+                                      </p:cBhvr>
+                                      <p:tavLst>
+                                        <p:tav tm="0">
+                                          <p:val>
+                                            <p:fltVal val="0"/>
+                                          </p:val>
+                                        </p:tav>
+                                        <p:tav tm="100000">
+                                          <p:val>
+                                            <p:strVal val="#ppt_w"/>
+                                          </p:val>
+                                        </p:tav>
+                                      </p:tavLst>
+                                    </p:anim>
+                                    <p:anim calcmode="lin" valueType="num">
+                                      <p:cBhvr>
+                                        <p:cTn id="34" dur="500" fill="hold"/>
+                                        <p:tgtEl>
+                                          <p:spTgt spid="9"/>
+                                        </p:tgtEl>
+                                        <p:attrNameLst>
+                                          <p:attrName>ppt_h</p:attrName>
+                                        </p:attrNameLst>
+                                      </p:cBhvr>
+                                      <p:tavLst>
+                                        <p:tav tm="0">
+                                          <p:val>
+                                            <p:fltVal val="0"/>
+                                          </p:val>
+                                        </p:tav>
+                                        <p:tav tm="100000">
+                                          <p:val>
+                                            <p:strVal val="#ppt_h"/>
+                                          </p:val>
+                                        </p:tav>
+                                      </p:tavLst>
+                                    </p:anim>
+                                  </p:childTnLst>
+                                </p:cTn>
+                              </p:par>
+                            </p:childTnLst>
+                          </p:cTn>
+                        </p:par>
+                      </p:childTnLst>
+                    </p:cTn>
+                  </p:par>
+                  <p:par>
+                    <p:cTn id="43" fill="hold">
+                      <p:stCondLst>
+                        <p:cond delay="indefinite"/>
+                      </p:stCondLst>
+                      <p:childTnLst>
+                        <p:par>
+                          <p:cTn id="44" fill="hold">
+                            <p:stCondLst>
+                              <p:cond delay="0"/>
+                            </p:stCondLst>
+                            <p:childTnLst>
+                              <p:par>
+                                <p:cTn id="42" presetID="42" presetClass="entr" presetSubtype="0" fill="hold" nodeType="clickEffect">
+                                  <p:stCondLst>
+                                    <p:cond delay="0"/>
+                                  </p:stCondLst>
+                                  <p:childTnLst>
+                                    <p:set>
+                                      <p:cBhvr>
+                                        <p:cTn id="38" dur="1" fill="hold">
+                                          <p:stCondLst>
+                                            <p:cond delay="0"/>
+                                          </p:stCondLst>
+                                        </p:cTn>
+                                        <p:tgtEl>
+                                          <p:spTgt spid="12"/>
+                                        </p:tgtEl>
+                                        <p:attrNameLst>
+                                          <p:attrName>style.visibility</p:attrName>
+                                        </p:attrNameLst>
+                                      </p:cBhvr>
+                                      <p:to>
+                                        <p:strVal val="visible"/>
+                                      </p:to>
+                                    </p:set>
+                                    <p:animEffect transition="in" filter="fade">
+                                      <p:cBhvr>
+                                        <p:cTn id="39" dur="500"/>
+                                        <p:tgtEl>
+                                          <p:spTgt spid="12"/>
+                                        </p:tgtEl>
+                                      </p:cBhvr>
+                                    </p:animEffect>
+                                    <p:anim calcmode="lin" valueType="num">
+                                      <p:cBhvr>
+                                        <p:cTn id="40" dur="500" fill="hold"/>
+                                        <p:tgtEl>
+                                          <p:spTgt spid="12"/>
+                                        </p:tgtEl>
+                                        <p:attrNameLst>
+                                          <p:attrName>ppt_x</p:attrName>
+                                        </p:attrNameLst>
+                                      </p:cBhvr>
+                                      <p:tavLst>
+                                        <p:tav tm="0">
+                                          <p:val>
+                                            <p:strVal val="#ppt_x"/>
+                                          </p:val>
+                                        </p:tav>
+                                        <p:tav tm="100000">
+                                          <p:val>
+                                            <p:strVal val="#ppt_x"/>
+                                          </p:val>
+                                        </p:tav>
+                                      </p:tavLst>
+                                    </p:anim>
+                                    <p:anim calcmode="lin" valueType="num">
+                                      <p:cBhvr>
+                                        <p:cTn id="41" dur="500" fill="hold"/>
+                                        <p:tgtEl>
+                                          <p:spTgt spid="12"/>
+                                        </p:tgtEl>
+                                        <p:attrNameLst>
+                                          <p:attrName>ppt_y</p:attrName>
+                                        </p:attrNameLst>
+                                      </p:cBhvr>
+                                      <p:tavLst>
+                                        <p:tav tm="0">
+                                          <p:val>
+                                            <p:strVal val="#ppt_y+.1"/>
+                                          </p:val>
+                                        </p:tav>
+                                        <p:tav tm="100000">
+                                          <p:val>
+                                            <p:strVal val="#ppt_y"/>
+                                          </p:val>
+                                        </p:tav>
+                                      </p:tavLst>
+                                    </p:anim>
+                                  </p:childTnLst>
+                                </p:cTn>
+                              </p:par>
+                            </p:childTnLst>
+                          </p:cTn>
+                        </p:par>
+                      </p:childTnLst>
+                    </p:cTn>
+                  </p:par>
+                  <p:par>
+                    <p:cTn id="50" fill="hold">
+                      <p:stCondLst>
+                        <p:cond delay="indefinite"/>
+                      </p:stCondLst>
+                      <p:childTnLst>
+                        <p:par>
+                          <p:cTn id="51" fill="hold">
+                            <p:stCondLst>
+                              <p:cond delay="0"/>
+                            </p:stCondLst>
+                            <p:childTnLst>
+                              <p:par>
+                                <p:cTn id="49" presetID="42" presetClass="entr" presetSubtype="0" fill="hold" nodeType="clickEffect">
+                                  <p:stCondLst>
+                                    <p:cond delay="0"/>
+                                  </p:stCondLst>
+                                  <p:childTnLst>
+                                    <p:set>
+                                      <p:cBhvr>
+                                        <p:cTn id="45" dur="1" fill="hold">
+                                          <p:stCondLst>
+                                            <p:cond delay="0"/>
+                                          </p:stCondLst>
+                                        </p:cTn>
+                                        <p:tgtEl>
+                                          <p:spTgt spid="13"/>
+                                        </p:tgtEl>
+                                        <p:attrNameLst>
+                                          <p:attrName>style.visibility</p:attrName>
+                                        </p:attrNameLst>
+                                      </p:cBhvr>
+                                      <p:to>
+                                        <p:strVal val="visible"/>
+                                      </p:to>
+                                    </p:set>
+                                    <p:animEffect transition="in" filter="fade">
+                                      <p:cBhvr>
+                                        <p:cTn id="46" dur="500"/>
+                                        <p:tgtEl>
+                                          <p:spTgt spid="13"/>
+                                        </p:tgtEl>
+                                      </p:cBhvr>
+                                    </p:animEffect>
+                                    <p:anim calcmode="lin" valueType="num">
+                                      <p:cBhvr>
+                                        <p:cTn id="47" dur="500" fill="hold"/>
+                                        <p:tgtEl>
+                                          <p:spTgt spid="13"/>
+                                        </p:tgtEl>
+                                        <p:attrNameLst>
+                                          <p:attrName>ppt_x</p:attrName>
+                                        </p:attrNameLst>
+                                      </p:cBhvr>
+                                      <p:tavLst>
+                                        <p:tav tm="0">
+                                          <p:val>
+                                            <p:strVal val="#ppt_x"/>
+                                          </p:val>
+                                        </p:tav>
+                                        <p:tav tm="100000">
+                                          <p:val>
+                                            <p:strVal val="#ppt_x"/>
+                                          </p:val>
+                                        </p:tav>
+                                      </p:tavLst>
+                                    </p:anim>
+                                    <p:anim calcmode="lin" valueType="num">
+                                      <p:cBhvr>
+                                        <p:cTn id="48" dur="500" fill="hold"/>
+                                        <p:tgtEl>
+                                          <p:spTgt spid="13"/>
+                                        </p:tgtEl>
+                                        <p:attrNameLst>
+                                          <p:attrName>ppt_y</p:attrName>
+                                        </p:attrNameLst>
+                                      </p:cBhvr>
+                                      <p:tavLst>
+                                        <p:tav tm="0">
+                                          <p:val>
+                                            <p:strVal val="#ppt_y+.1"/>
+                                          </p:val>
+                                        </p:tav>
+                                        <p:tav tm="100000">
+                                          <p:val>
+                                            <p:strVal val="#ppt_y"/>
+                                          </p:val>
+                                        </p:tav>
+                                      </p:tavLst>
+                                    </p:anim>
+                                  </p:childTnLst>
+                                </p:cTn>
+                              </p:par>
+                            </p:childTnLst>
+                          </p:cTn>
+                        </p:par>
+                      </p:childTnLst>
+                    </p:cTn>
+                  </p:par>
+                  <p:par>
+                    <p:cTn id="57" fill="hold">
+                      <p:stCondLst>
+                        <p:cond delay="indefinite"/>
+                      </p:stCondLst>
+                      <p:childTnLst>
+                        <p:par>
+                          <p:cTn id="58" fill="hold">
+                            <p:stCondLst>
+                              <p:cond delay="0"/>
+                            </p:stCondLst>
+                            <p:childTnLst>
+                              <p:par>
+                                <p:cTn id="56" presetID="42" presetClass="entr" presetSubtype="0" fill="hold" nodeType="clickEffect">
+                                  <p:stCondLst>
+                                    <p:cond delay="0"/>
+                                  </p:stCondLst>
+                                  <p:childTnLst>
+                                    <p:set>
+                                      <p:cBhvr>
+                                        <p:cTn id="52" dur="1" fill="hold">
+                                          <p:stCondLst>
+                                            <p:cond delay="0"/>
+                                          </p:stCondLst>
+                                        </p:cTn>
+                                        <p:tgtEl>
+                                          <p:spTgt spid="14"/>
+                                        </p:tgtEl>
+                                        <p:attrNameLst>
+                                          <p:attrName>style.visibility</p:attrName>
+                                        </p:attrNameLst>
+                                      </p:cBhvr>
+                                      <p:to>
+                                        <p:strVal val="visible"/>
+                                      </p:to>
+                                    </p:set>
+                                    <p:animEffect transition="in" filter="fade">
+                                      <p:cBhvr>
+                                        <p:cTn id="53" dur="500"/>
+                                        <p:tgtEl>
+                                          <p:spTgt spid="14"/>
+                                        </p:tgtEl>
+                                      </p:cBhvr>
+                                    </p:animEffect>
+                                    <p:anim calcmode="lin" valueType="num">
+                                      <p:cBhvr>
+                                        <p:cTn id="54" dur="500" fill="hold"/>
+                                        <p:tgtEl>
+                                          <p:spTgt spid="14"/>
+                                        </p:tgtEl>
+                                        <p:attrNameLst>
+                                          <p:attrName>ppt_x</p:attrName>
+                                        </p:attrNameLst>
+                                      </p:cBhvr>
+                                      <p:tavLst>
+                                        <p:tav tm="0">
+                                          <p:val>
+                                            <p:strVal val="#ppt_x"/>
+                                          </p:val>
+                                        </p:tav>
+                                        <p:tav tm="100000">
+                                          <p:val>
+                                            <p:strVal val="#ppt_x"/>
+                                          </p:val>
+                                        </p:tav>
+                                      </p:tavLst>
+                                    </p:anim>
+                                    <p:anim calcmode="lin" valueType="num">
+                                      <p:cBhvr>
+                                        <p:cTn id="55" dur="500" fill="hold"/>
+                                        <p:tgtEl>
+                                          <p:spTgt spid="14"/>
+                                        </p:tgtEl>
+                                        <p:attrNameLst>
+                                          <p:attrName>ppt_y</p:attrName>
+                                        </p:attrNameLst>
+                                      </p:cBhvr>
+                                      <p:tavLst>
+                                        <p:tav tm="0">
+                                          <p:val>
+                                            <p:strVal val="#ppt_y+.1"/>
+                                          </p:val>
+                                        </p:tav>
+                                        <p:tav tm="100000">
+                                          <p:val>
+                                            <p:strVal val="#ppt_y"/>
+                                          </p:val>
+                                        </p:tav>
+                                      </p:tavLst>
+                                    </p:anim>
+                                  </p:childTnLst>
+                                </p:cTn>
+                              </p:par>
+                            </p:childTnLst>
+                          </p:cTn>
+                        </p:par>
+                      </p:childTnLst>
+                    </p:cTn>
+                  </p:par>
+                  <p:par>
+                    <p:cTn id="64" fill="hold">
+                      <p:stCondLst>
+                        <p:cond delay="indefinite"/>
+                      </p:stCondLst>
+                      <p:childTnLst>
+                        <p:par>
+                          <p:cTn id="65" fill="hold">
+                            <p:stCondLst>
+                              <p:cond delay="0"/>
+                            </p:stCondLst>
+                            <p:childTnLst>
+                              <p:par>
+                                <p:cTn id="63" presetID="53" presetClass="entr" presetSubtype="16" fill="hold" nodeType="clickEffect">
+                                  <p:stCondLst>
+                                    <p:cond delay="0"/>
+                                  </p:stCondLst>
+                                  <p:childTnLst>
+                                    <p:set>
+                                      <p:cBhvr>
+                                        <p:cTn id="59" dur="1" fill="hold">
+                                          <p:stCondLst>
+                                            <p:cond delay="0"/>
+                                          </p:stCondLst>
+                                        </p:cTn>
+                                        <p:tgtEl>
+                                          <p:spTgt spid="15"/>
+                                        </p:tgtEl>
+                                        <p:attrNameLst>
+                                          <p:attrName>style.visibility</p:attrName>
+                                        </p:attrNameLst>
+                                      </p:cBhvr>
+                                      <p:to>
+                                        <p:strVal val="visible"/>
+                                      </p:to>
+                                    </p:set>
+                                    <p:animEffect transition="in" filter="fade">
+                                      <p:cBhvr>
+                                        <p:cTn id="60" dur="500"/>
+                                        <p:tgtEl>
+                                          <p:spTgt spid="15"/>
+                                        </p:tgtEl>
+                                      </p:cBhvr>
+                                    </p:animEffect>
+                                    <p:anim calcmode="lin" valueType="num">
+                                      <p:cBhvr>
+                                        <p:cTn id="61" dur="500" fill="hold"/>
+                                        <p:tgtEl>
+                                          <p:spTgt spid="15"/>
+                                        </p:tgtEl>
+                                        <p:attrNameLst>
+                                          <p:attrName>ppt_w</p:attrName>
+                                        </p:attrNameLst>
+                                      </p:cBhvr>
+                                      <p:tavLst>
+                                        <p:tav tm="0">
+                                          <p:val>
+                                            <p:fltVal val="0"/>
+                                          </p:val>
+                                        </p:tav>
+                                        <p:tav tm="100000">
+                                          <p:val>
+                                            <p:strVal val="#ppt_w"/>
+                                          </p:val>
+                                        </p:tav>
+                                      </p:tavLst>
+                                    </p:anim>
+                                    <p:anim calcmode="lin" valueType="num">
+                                      <p:cBhvr>
+                                        <p:cTn id="62" dur="500" fill="hold"/>
+                                        <p:tgtEl>
+                                          <p:spTgt spid="15"/>
+                                        </p:tgtEl>
+                                        <p:attrNameLst>
+                                          <p:attrName>ppt_h</p:attrName>
+                                        </p:attrNameLst>
+                                      </p:cBhvr>
+                                      <p:tavLst>
+                                        <p:tav tm="0">
+                                          <p:val>
+                                            <p:fltVal val="0"/>
+                                          </p:val>
+                                        </p:tav>
+                                        <p:tav tm="100000">
+                                          <p:val>
+                                            <p:strVal val="#ppt_h"/>
+                                          </p:val>
+                                        </p:tav>
+                                      </p:tavLst>
+                                    </p:anim>
+                                  </p:childTnLst>
+                                </p:cTn>
+                              </p:par>
+                            </p:childTnLst>
+                          </p:cTn>
+                        </p:par>
+                      </p:childTnLst>
+                    </p:cTn>
+                  </p:par>
+                  <p:par>
+                    <p:cTn id="71" fill="hold">
+                      <p:stCondLst>
+                        <p:cond delay="indefinite"/>
+                      </p:stCondLst>
+                      <p:childTnLst>
+                        <p:par>
+                          <p:cTn id="72" fill="hold">
+                            <p:stCondLst>
+                              <p:cond delay="0"/>
+                            </p:stCondLst>
+                            <p:childTnLst>
+                              <p:par>
+                                <p:cTn id="70" presetID="42" presetClass="entr" presetSubtype="0" fill="hold" nodeType="clickEffect">
+                                  <p:stCondLst>
+                                    <p:cond delay="0"/>
+                                  </p:stCondLst>
+                                  <p:childTnLst>
+                                    <p:set>
+                                      <p:cBhvr>
+                                        <p:cTn id="66" dur="1" fill="hold">
+                                          <p:stCondLst>
+                                            <p:cond delay="0"/>
+                                          </p:stCondLst>
+                                        </p:cTn>
+                                        <p:tgtEl>
+                                          <p:spTgt spid="18"/>
+                                        </p:tgtEl>
+                                        <p:attrNameLst>
+                                          <p:attrName>style.visibility</p:attrName>
+                                        </p:attrNameLst>
+                                      </p:cBhvr>
+                                      <p:to>
+                                        <p:strVal val="visible"/>
+                                      </p:to>
+                                    </p:set>
+                                    <p:animEffect transition="in" filter="fade">
+                                      <p:cBhvr>
+                                        <p:cTn id="67" dur="500"/>
+                                        <p:tgtEl>
+                                          <p:spTgt spid="18"/>
+                                        </p:tgtEl>
+                                      </p:cBhvr>
+                                    </p:animEffect>
+                                    <p:anim calcmode="lin" valueType="num">
+                                      <p:cBhvr>
+                                        <p:cTn id="68" dur="500" fill="hold"/>
+                                        <p:tgtEl>
+                                          <p:spTgt spid="18"/>
+                                        </p:tgtEl>
+                                        <p:attrNameLst>
+                                          <p:attrName>ppt_x</p:attrName>
+                                        </p:attrNameLst>
+                                      </p:cBhvr>
+                                      <p:tavLst>
+                                        <p:tav tm="0">
+                                          <p:val>
+                                            <p:strVal val="#ppt_x"/>
+                                          </p:val>
+                                        </p:tav>
+                                        <p:tav tm="100000">
+                                          <p:val>
+                                            <p:strVal val="#ppt_x"/>
+                                          </p:val>
+                                        </p:tav>
+                                      </p:tavLst>
+                                    </p:anim>
+                                    <p:anim calcmode="lin" valueType="num">
+                                      <p:cBhvr>
+                                        <p:cTn id="69" dur="500" fill="hold"/>
+                                        <p:tgtEl>
+                                          <p:spTgt spid="18"/>
+                                        </p:tgtEl>
+                                        <p:attrNameLst>
+                                          <p:attrName>ppt_y</p:attrName>
+                                        </p:attrNameLst>
+                                      </p:cBhvr>
+                                      <p:tavLst>
+                                        <p:tav tm="0">
+                                          <p:val>
+                                            <p:strVal val="#ppt_y+.1"/>
+                                          </p:val>
+                                        </p:tav>
+                                        <p:tav tm="100000">
+                                          <p:val>
+                                            <p:strVal val="#ppt_y"/>
+                                          </p:val>
+                                        </p:tav>
+                                      </p:tavLst>
+                                    </p:anim>
+                                  </p:childTnLst>
+                                </p:cTn>
+                              </p:par>
+                            </p:childTnLst>
+                          </p:cTn>
+                        </p:par>
+                      </p:childTnLst>
+                    </p:cTn>
+                  </p:par>
+                  <p:par>
+                    <p:cTn id="78" fill="hold">
+                      <p:stCondLst>
+                        <p:cond delay="indefinite"/>
+                      </p:stCondLst>
+                      <p:childTnLst>
+                        <p:par>
+                          <p:cTn id="79" fill="hold">
+                            <p:stCondLst>
+                              <p:cond delay="0"/>
+                            </p:stCondLst>
+                            <p:childTnLst>
+                              <p:par>
+                                <p:cTn id="77" presetID="42" presetClass="entr" presetSubtype="0" fill="hold" nodeType="clickEffect">
+                                  <p:stCondLst>
+                                    <p:cond delay="0"/>
+                                  </p:stCondLst>
+                                  <p:childTnLst>
+                                    <p:set>
+                                      <p:cBhvr>
+                                        <p:cTn id="73" dur="1" fill="hold">
+                                          <p:stCondLst>
+                                            <p:cond delay="0"/>
+                                          </p:stCondLst>
+                                        </p:cTn>
+                                        <p:tgtEl>
+                                          <p:spTgt spid="19"/>
+                                        </p:tgtEl>
+                                        <p:attrNameLst>
+                                          <p:attrName>style.visibility</p:attrName>
+                                        </p:attrNameLst>
+                                      </p:cBhvr>
+                                      <p:to>
+                                        <p:strVal val="visible"/>
+                                      </p:to>
+                                    </p:set>
+                                    <p:animEffect transition="in" filter="fade">
+                                      <p:cBhvr>
+                                        <p:cTn id="74" dur="500"/>
+                                        <p:tgtEl>
+                                          <p:spTgt spid="19"/>
+                                        </p:tgtEl>
+                                      </p:cBhvr>
+                                    </p:animEffect>
+                                    <p:anim calcmode="lin" valueType="num">
+                                      <p:cBhvr>
+                                        <p:cTn id="75" dur="500" fill="hold"/>
+                                        <p:tgtEl>
+                                          <p:spTgt spid="19"/>
+                                        </p:tgtEl>
+                                        <p:attrNameLst>
+                                          <p:attrName>ppt_x</p:attrName>
+                                        </p:attrNameLst>
+                                      </p:cBhvr>
+                                      <p:tavLst>
+                                        <p:tav tm="0">
+                                          <p:val>
+                                            <p:strVal val="#ppt_x"/>
+                                          </p:val>
+                                        </p:tav>
+                                        <p:tav tm="100000">
+                                          <p:val>
+                                            <p:strVal val="#ppt_x"/>
+                                          </p:val>
+                                        </p:tav>
+                                      </p:tavLst>
+                                    </p:anim>
+                                    <p:anim calcmode="lin" valueType="num">
+                                      <p:cBhvr>
+                                        <p:cTn id="76" dur="500" fill="hold"/>
+                                        <p:tgtEl>
+                                          <p:spTgt spid="19"/>
+                                        </p:tgtEl>
+                                        <p:attrNameLst>
+                                          <p:attrName>ppt_y</p:attrName>
+                                        </p:attrNameLst>
+                                      </p:cBhvr>
+                                      <p:tavLst>
+                                        <p:tav tm="0">
+                                          <p:val>
+                                            <p:strVal val="#ppt_y+.1"/>
+                                          </p:val>
+                                        </p:tav>
+                                        <p:tav tm="100000">
+                                          <p:val>
+                                            <p:strVal val="#ppt_y"/>
+                                          </p:val>
+                                        </p:tav>
+                                      </p:tavLst>
+                                    </p:anim>
+                                  </p:childTnLst>
+                                </p:cTn>
+                              </p:par>
+                            </p:childTnLst>
+                          </p:cTn>
+                        </p:par>
+                      </p:childTnLst>
+                    </p:cTn>
+                  </p:par>
+                  <p:par>
+                    <p:cTn id="85" fill="hold">
+                      <p:stCondLst>
+                        <p:cond delay="indefinite"/>
+                      </p:stCondLst>
+                      <p:childTnLst>
+                        <p:par>
+                          <p:cTn id="86" fill="hold">
+                            <p:stCondLst>
+                              <p:cond delay="0"/>
+                            </p:stCondLst>
+                            <p:childTnLst>
+                              <p:par>
+                                <p:cTn id="84" presetID="42" presetClass="entr" presetSubtype="0" fill="hold" nodeType="clickEffect">
+                                  <p:stCondLst>
+                                    <p:cond delay="0"/>
+                                  </p:stCondLst>
+                                  <p:childTnLst>
+                                    <p:set>
+                                      <p:cBhvr>
+                                        <p:cTn id="80" dur="1" fill="hold">
+                                          <p:stCondLst>
+                                            <p:cond delay="0"/>
+                                          </p:stCondLst>
+                                        </p:cTn>
+                                        <p:tgtEl>
+                                          <p:spTgt spid="20"/>
+                                        </p:tgtEl>
+                                        <p:attrNameLst>
+                                          <p:attrName>style.visibility</p:attrName>
+                                        </p:attrNameLst>
+                                      </p:cBhvr>
+                                      <p:to>
+                                        <p:strVal val="visible"/>
+                                      </p:to>
+                                    </p:set>
+                                    <p:animEffect transition="in" filter="fade">
+                                      <p:cBhvr>
+                                        <p:cTn id="81" dur="500"/>
+                                        <p:tgtEl>
+                                          <p:spTgt spid="20"/>
+                                        </p:tgtEl>
+                                      </p:cBhvr>
+                                    </p:animEffect>
+                                    <p:anim calcmode="lin" valueType="num">
+                                      <p:cBhvr>
+                                        <p:cTn id="82" dur="500" fill="hold"/>
+                                        <p:tgtEl>
+                                          <p:spTgt spid="20"/>
+                                        </p:tgtEl>
+                                        <p:attrNameLst>
+                                          <p:attrName>ppt_x</p:attrName>
+                                        </p:attrNameLst>
+                                      </p:cBhvr>
+                                      <p:tavLst>
+                                        <p:tav tm="0">
+                                          <p:val>
+                                            <p:strVal val="#ppt_x"/>
+                                          </p:val>
+                                        </p:tav>
+                                        <p:tav tm="100000">
+                                          <p:val>
+                                            <p:strVal val="#ppt_x"/>
+                                          </p:val>
+                                        </p:tav>
+                                      </p:tavLst>
+                                    </p:anim>
+                                    <p:anim calcmode="lin" valueType="num">
+                                      <p:cBhvr>
+                                        <p:cTn id="83" dur="500" fill="hold"/>
+                                        <p:tgtEl>
+                                          <p:spTgt spid="20"/>
+                                        </p:tgtEl>
+                                        <p:attrNameLst>
+                                          <p:attrName>ppt_y</p:attrName>
+                                        </p:attrNameLst>
+                                      </p:cBhvr>
+                                      <p:tavLst>
+                                        <p:tav tm="0">
+                                          <p:val>
+                                            <p:strVal val="#ppt_y+.1"/>
+                                          </p:val>
+                                        </p:tav>
+                                        <p:tav tm="100000">
+                                          <p:val>
+                                            <p:strVal val="#ppt_y"/>
+                                          </p:val>
+                                        </p:tav>
+                                      </p:tavLst>
+                                    </p:anim>
+                                  </p:childTnLst>
+                                </p:cTn>
+                              </p:par>
+                            </p:childTnLst>
+                          </p:cTn>
+                        </p:par>
+                      </p:childTnLst>
+                    </p:cTn>
+                  </p:par>
+                  <p:par>
+                    <p:cTn id="92" fill="hold">
+                      <p:stCondLst>
+                        <p:cond delay="indefinite"/>
+                      </p:stCondLst>
+                      <p:childTnLst>
+                        <p:par>
+                          <p:cTn id="93" fill="hold">
+                            <p:stCondLst>
+                              <p:cond delay="0"/>
+                            </p:stCondLst>
+                            <p:childTnLst>
+                              <p:par>
+                                <p:cTn id="91" presetID="53" presetClass="entr" presetSubtype="16" fill="hold" nodeType="clickEffect">
+                                  <p:stCondLst>
+                                    <p:cond delay="0"/>
+                                  </p:stCondLst>
+                                  <p:childTnLst>
+                                    <p:set>
+                                      <p:cBhvr>
+                                        <p:cTn id="87" dur="1" fill="hold">
+                                          <p:stCondLst>
+                                            <p:cond delay="0"/>
+                                          </p:stCondLst>
+                                        </p:cTn>
+                                        <p:tgtEl>
+                                          <p:spTgt spid="21"/>
+                                        </p:tgtEl>
+                                        <p:attrNameLst>
+                                          <p:attrName>style.visibility</p:attrName>
+                                        </p:attrNameLst>
+                                      </p:cBhvr>
+                                      <p:to>
+                                        <p:strVal val="visible"/>
+                                      </p:to>
+                                    </p:set>
+                                    <p:animEffect transition="in" filter="fade">
+                                      <p:cBhvr>
+                                        <p:cTn id="88" dur="500"/>
+                                        <p:tgtEl>
+                                          <p:spTgt spid="21"/>
+                                        </p:tgtEl>
+                                      </p:cBhvr>
+                                    </p:animEffect>
+                                    <p:anim calcmode="lin" valueType="num">
+                                      <p:cBhvr>
+                                        <p:cTn id="89" dur="500" fill="hold"/>
+                                        <p:tgtEl>
+                                          <p:spTgt spid="21"/>
+                                        </p:tgtEl>
+                                        <p:attrNameLst>
+                                          <p:attrName>ppt_w</p:attrName>
+                                        </p:attrNameLst>
+                                      </p:cBhvr>
+                                      <p:tavLst>
+                                        <p:tav tm="0">
+                                          <p:val>
+                                            <p:fltVal val="0"/>
+                                          </p:val>
+                                        </p:tav>
+                                        <p:tav tm="100000">
+                                          <p:val>
+                                            <p:strVal val="#ppt_w"/>
+                                          </p:val>
+                                        </p:tav>
+                                      </p:tavLst>
+                                    </p:anim>
+                                    <p:anim calcmode="lin" valueType="num">
+                                      <p:cBhvr>
+                                        <p:cTn id="90" dur="500" fill="hold"/>
+                                        <p:tgtEl>
+                                          <p:spTgt spid="21"/>
+                                        </p:tgtEl>
+                                        <p:attrNameLst>
+                                          <p:attrName>ppt_h</p:attrName>
+                                        </p:attrNameLst>
+                                      </p:cBhvr>
+                                      <p:tavLst>
+                                        <p:tav tm="0">
+                                          <p:val>
+                                            <p:fltVal val="0"/>
+                                          </p:val>
+                                        </p:tav>
+                                        <p:tav tm="100000">
+                                          <p:val>
+                                            <p:strVal val="#ppt_h"/>
+                                          </p:val>
+                                        </p:tav>
+                                      </p:tavLst>
+                                    </p:anim>
+                                  </p:childTnLst>
+                                </p:cTn>
+                              </p:par>
+                            </p:childTnLst>
+                          </p:cTn>
+                        </p:par>
+                      </p:childTnLst>
+                    </p:cTn>
+                  </p:par>
+                </p:childTnLst>
+              </p:cTn>
+              <p:prevCondLst>
+                <p:cond evt="onPrev" delay="0">
+                  <p:tgtEl>
+                    <p:sldTgt/>
+                  </p:tgtEl>
+                </p:cond>
+              </p:prevCondLst>
+              <p:nextCondLst>
+                <p:cond evt="onNext" delay="0">
+                  <p:tgtEl>
+                    <p:sldTgt/>
+                  </p:tgtEl>
+                </p:cond>
+              </p:nextCondLst>
+            </p:seq>
+          </p:childTnLst>
+        </p:cTn>
+      </p:par>
+    </p:tnLst>
+  </p:timing>
 </p:sld>
 </file>
 
@@ -4611,7 +7480,7 @@
                 <a:latin typeface="Segoe UI"/>
                 <a:cs typeface="Segoe UI"/>
               </a:rPr>
-              <a:t xml:space="preserve">Topic 2 · Lesson 3 · Day 2 of 2 · Start here</a:t>
+              <a:t xml:space="preserve">Topic 2 · Lesson 3 · End of Day 1</a:t>
             </a:r>
             <a:endParaRPr lang="en-US" sz="1200" dirty="0"/>
           </a:p>
@@ -4655,7 +7524,7 @@
                 <a:latin typeface="Segoe UI"/>
                 <a:cs typeface="Segoe UI"/>
               </a:rPr>
-              <a:t xml:space="preserve">Start: Monday, November 2</a:t>
+              <a:t xml:space="preserve">Stop here: Thursday, October 29</a:t>
             </a:r>
             <a:endParaRPr lang="en-US" sz="8250" dirty="0"/>
           </a:p>
@@ -4670,7 +7539,7 @@
         <p:spPr>
           <a:xfrm>
             <a:off x="685800" y="5253228"/>
-            <a:ext cx="10820095" cy="694944"/>
+            <a:ext cx="10820095" cy="740664"/>
           </a:xfrm>
           <a:prstGeom prst="rect">
             <a:avLst/>
@@ -4692,16 +7561,16 @@
               </a:lnSpc>
             </a:pPr>
             <a:r>
-              <a:rPr lang="en-US" sz="2100" dirty="0">
-                <a:solidFill>
-                  <a:srgbClr val="16171D"/>
-                </a:solidFill>
-                <a:latin typeface="Segoe UI"/>
-                <a:cs typeface="Segoe UI"/>
-              </a:rPr>
-              <a:t xml:space="preserve">Today: bell work → Topic 1 catch-up (Changing the situation changes the function) → Lesson 3, Day 2.</a:t>
-            </a:r>
-            <a:endParaRPr lang="en-US" sz="2100" dirty="0"/>
+              <a:rPr lang="en-US" sz="2250" dirty="0">
+                <a:solidFill>
+                  <a:srgbClr val="16171D"/>
+                </a:solidFill>
+                <a:latin typeface="Segoe UI"/>
+                <a:cs typeface="Segoe UI"/>
+              </a:rPr>
+              <a:t xml:space="preserve">Next class: Monday, November 2. Start at the next slide, “Start: Monday, November 2.”</a:t>
+            </a:r>
+            <a:endParaRPr lang="en-US" sz="2250" dirty="0"/>
           </a:p>
         </p:txBody>
       </p:sp>
@@ -4775,7 +7644,7 @@
         </p:nvSpPr>
         <p:spPr>
           <a:xfrm>
-            <a:off x="685800" y="457200"/>
+            <a:off x="685800" y="2103120"/>
             <a:ext cx="10820095" cy="237744"/>
           </a:xfrm>
           <a:prstGeom prst="rect">
@@ -4805,7 +7674,7 @@
                 <a:latin typeface="Segoe UI"/>
                 <a:cs typeface="Segoe UI"/>
               </a:rPr>
-              <a:t xml:space="preserve">Day 2 · Bell Work · Review of Day 1 · Mon, Nov 2</a:t>
+              <a:t xml:space="preserve">Topic 2 · Lesson 3 · Day 2 of 2 · Start here</a:t>
             </a:r>
             <a:endParaRPr lang="en-US" sz="1200" dirty="0"/>
           </a:p>
@@ -4819,8 +7688,8 @@
         </p:nvSpPr>
         <p:spPr>
           <a:xfrm>
-            <a:off x="685800" y="866394"/>
-            <a:ext cx="10820095" cy="580644"/>
+            <a:off x="685800" y="2512314"/>
+            <a:ext cx="10820095" cy="2569464"/>
           </a:xfrm>
           <a:prstGeom prst="rect">
             <a:avLst/>
@@ -4842,16 +7711,16 @@
               </a:lnSpc>
             </a:pPr>
             <a:r>
-              <a:rPr lang="en-US" sz="3450" dirty="0" b="1">
-                <a:solidFill>
-                  <a:srgbClr val="16171D"/>
-                </a:solidFill>
-                <a:latin typeface="Segoe UI"/>
-                <a:cs typeface="Segoe UI"/>
-              </a:rPr>
-              <a:t xml:space="preserve">Warm up: work these on your own</a:t>
-            </a:r>
-            <a:endParaRPr lang="en-US" sz="3450" dirty="0"/>
+              <a:rPr lang="en-US" sz="8250" dirty="0" b="1">
+                <a:solidFill>
+                  <a:srgbClr val="16171D"/>
+                </a:solidFill>
+                <a:latin typeface="Segoe UI"/>
+                <a:cs typeface="Segoe UI"/>
+              </a:rPr>
+              <a:t xml:space="preserve">Start: Monday, November 2</a:t>
+            </a:r>
+            <a:endParaRPr lang="en-US" sz="8250" dirty="0"/>
           </a:p>
         </p:txBody>
       </p:sp>
@@ -4863,8 +7732,8 @@
         </p:nvSpPr>
         <p:spPr>
           <a:xfrm>
-            <a:off x="685800" y="1675638"/>
-            <a:ext cx="5143348" cy="946404"/>
+            <a:off x="685800" y="5253228"/>
+            <a:ext cx="10820095" cy="694944"/>
           </a:xfrm>
           <a:prstGeom prst="rect">
             <a:avLst/>
@@ -4886,6 +7755,200 @@
               </a:lnSpc>
             </a:pPr>
             <a:r>
+              <a:rPr lang="en-US" sz="2100" dirty="0">
+                <a:solidFill>
+                  <a:srgbClr val="16171D"/>
+                </a:solidFill>
+                <a:latin typeface="Segoe UI"/>
+                <a:cs typeface="Segoe UI"/>
+              </a:rPr>
+              <a:t xml:space="preserve">Today: bell work → Topic 1 catch-up (Changing the situation changes the function) → Lesson 3, Day 2.</a:t>
+            </a:r>
+            <a:endParaRPr lang="en-US" sz="2100" dirty="0"/>
+          </a:p>
+        </p:txBody>
+      </p:sp>
+      <p:sp>
+        <p:nvSpPr>
+          <p:cNvPr id="5" name="Slide Number 5"/>
+          <p:cNvSpPr txBox="1"/>
+          <p:nvPr/>
+        </p:nvSpPr>
+        <p:spPr>
+          <a:xfrm>
+            <a:off x="11277295" y="6611112"/>
+            <a:ext cx="685800" cy="201168"/>
+          </a:xfrm>
+          <a:prstGeom prst="rect">
+            <a:avLst/>
+          </a:prstGeom>
+          <a:noFill/>
+        </p:spPr>
+        <p:txBody>
+          <a:bodyPr wrap="none" lIns="0" tIns="0" rIns="0" bIns="0" anchor="b">
+            <a:noAutofit/>
+          </a:bodyPr>
+          <a:lstStyle/>
+          <a:p>
+            <a:pPr algn="r"/>
+            <a:fld id="{5C1A6E0B-3B1F-4D5E-9C7A-2F4B8D6E1A90}" type="slidenum">
+              <a:rPr lang="en-US" sz="1200" dirty="0">
+                <a:solidFill>
+                  <a:srgbClr val="5F6272"/>
+                </a:solidFill>
+              </a:rPr>
+              <a:t>14</a:t>
+            </a:fld>
+          </a:p>
+        </p:txBody>
+      </p:sp>
+    </p:spTree>
+  </p:cSld>
+  <p:clrMapOvr>
+    <a:masterClrMapping/>
+  </p:clrMapOvr>
+  <p:transition spd="med">
+    <p:fade/>
+  </p:transition>
+</p:sld>
+</file>
+
+<file path=ppt/slides/slide15.xml><?xml version="1.0" encoding="utf-8"?>
+<p:sld xmlns:a="http://schemas.openxmlformats.org/drawingml/2006/main" xmlns:r="http://schemas.openxmlformats.org/officeDocument/2006/relationships" xmlns:p="http://schemas.openxmlformats.org/presentationml/2006/main">
+  <p:cSld>
+    <p:spTree>
+      <p:nvGrpSpPr>
+        <p:cNvPr id="1" name=""/>
+        <p:cNvGrpSpPr/>
+        <p:nvPr/>
+      </p:nvGrpSpPr>
+      <p:grpSpPr>
+        <a:xfrm>
+          <a:off x="0" y="0"/>
+          <a:ext cx="0" cy="0"/>
+          <a:chOff x="0" y="0"/>
+          <a:chExt cx="0" cy="0"/>
+        </a:xfrm>
+      </p:grpSpPr>
+      <p:sp>
+        <p:nvSpPr>
+          <p:cNvPr id="2" name="Shape 2"/>
+          <p:cNvSpPr txBox="1"/>
+          <p:nvPr/>
+        </p:nvSpPr>
+        <p:spPr>
+          <a:xfrm>
+            <a:off x="685800" y="457200"/>
+            <a:ext cx="10820095" cy="237744"/>
+          </a:xfrm>
+          <a:prstGeom prst="rect">
+            <a:avLst/>
+          </a:prstGeom>
+          <a:noFill/>
+          <a:ln>
+            <a:noFill/>
+          </a:ln>
+        </p:spPr>
+        <p:txBody>
+          <a:bodyPr wrap="square" lIns="36576" tIns="27432" rIns="36576" bIns="27432" anchor="t">
+            <a:noAutofit/>
+          </a:bodyPr>
+          <a:lstStyle/>
+          <a:p>
+            <a:pPr algn="l">
+              <a:lnSpc>
+                <a:spcPct val="100000"/>
+              </a:lnSpc>
+            </a:pPr>
+            <a:r>
+              <a:rPr lang="en-US" sz="1200" dirty="0" b="1" spc="150" cap="all">
+                <a:solidFill>
+                  <a:srgbClr val="5F6272"/>
+                </a:solidFill>
+                <a:latin typeface="Segoe UI"/>
+                <a:cs typeface="Segoe UI"/>
+              </a:rPr>
+              <a:t xml:space="preserve">Day 2 · Bell Work · Review of Day 1 · Mon, Nov 2</a:t>
+            </a:r>
+            <a:endParaRPr lang="en-US" sz="1200" dirty="0"/>
+          </a:p>
+        </p:txBody>
+      </p:sp>
+      <p:sp>
+        <p:nvSpPr>
+          <p:cNvPr id="3" name="Shape 3"/>
+          <p:cNvSpPr txBox="1"/>
+          <p:nvPr/>
+        </p:nvSpPr>
+        <p:spPr>
+          <a:xfrm>
+            <a:off x="685800" y="866394"/>
+            <a:ext cx="10820095" cy="580644"/>
+          </a:xfrm>
+          <a:prstGeom prst="rect">
+            <a:avLst/>
+          </a:prstGeom>
+          <a:noFill/>
+          <a:ln>
+            <a:noFill/>
+          </a:ln>
+        </p:spPr>
+        <p:txBody>
+          <a:bodyPr wrap="square" lIns="36576" tIns="27432" rIns="36576" bIns="27432" anchor="t">
+            <a:noAutofit/>
+          </a:bodyPr>
+          <a:lstStyle/>
+          <a:p>
+            <a:pPr algn="l">
+              <a:lnSpc>
+                <a:spcPct val="100000"/>
+              </a:lnSpc>
+            </a:pPr>
+            <a:r>
+              <a:rPr lang="en-US" sz="3450" dirty="0" b="1">
+                <a:solidFill>
+                  <a:srgbClr val="16171D"/>
+                </a:solidFill>
+                <a:latin typeface="Segoe UI"/>
+                <a:cs typeface="Segoe UI"/>
+              </a:rPr>
+              <a:t xml:space="preserve">Warm up: work these on your own</a:t>
+            </a:r>
+            <a:endParaRPr lang="en-US" sz="3450" dirty="0"/>
+          </a:p>
+        </p:txBody>
+      </p:sp>
+      <p:sp>
+        <p:nvSpPr>
+          <p:cNvPr id="4" name="Shape 4"/>
+          <p:cNvSpPr txBox="1"/>
+          <p:nvPr/>
+        </p:nvSpPr>
+        <p:spPr>
+          <a:xfrm>
+            <a:off x="685800" y="1675638"/>
+            <a:ext cx="5143348" cy="946404"/>
+          </a:xfrm>
+          <a:prstGeom prst="rect">
+            <a:avLst/>
+          </a:prstGeom>
+          <a:noFill/>
+          <a:ln>
+            <a:noFill/>
+          </a:ln>
+        </p:spPr>
+        <p:txBody>
+          <a:bodyPr wrap="square" lIns="36576" tIns="27432" rIns="36576" bIns="27432" anchor="t">
+            <a:noAutofit/>
+          </a:bodyPr>
+          <a:lstStyle/>
+          <a:p>
+            <a:pPr algn="l">
+              <a:lnSpc>
+                <a:spcPct val="100000"/>
+              </a:lnSpc>
+            </a:pPr>
+            <a:r>
               <a:rPr lang="en-US" sz="1950" dirty="0">
                 <a:solidFill>
                   <a:srgbClr val="16171D"/>
@@ -5442,7 +8505,7 @@
                   <a:srgbClr val="5F6272"/>
                 </a:solidFill>
               </a:rPr>
-              <a:t>14</a:t>
+              <a:t>15</a:t>
             </a:fld>
           </a:p>
         </p:txBody>
@@ -5884,276 +8947,6 @@
 </p:sld>
 </file>
 
-<file path=ppt/slides/slide15.xml><?xml version="1.0" encoding="utf-8"?>
-<p:sld xmlns:a="http://schemas.openxmlformats.org/drawingml/2006/main" xmlns:r="http://schemas.openxmlformats.org/officeDocument/2006/relationships" xmlns:p="http://schemas.openxmlformats.org/presentationml/2006/main">
-  <p:cSld>
-    <p:spTree>
-      <p:nvGrpSpPr>
-        <p:cNvPr id="1" name=""/>
-        <p:cNvGrpSpPr/>
-        <p:nvPr/>
-      </p:nvGrpSpPr>
-      <p:grpSpPr>
-        <a:xfrm>
-          <a:off x="0" y="0"/>
-          <a:ext cx="0" cy="0"/>
-          <a:chOff x="0" y="0"/>
-          <a:chExt cx="0" cy="0"/>
-        </a:xfrm>
-      </p:grpSpPr>
-      <p:sp>
-        <p:nvSpPr>
-          <p:cNvPr id="2" name="Shape 2"/>
-          <p:cNvSpPr txBox="1"/>
-          <p:nvPr/>
-        </p:nvSpPr>
-        <p:spPr>
-          <a:xfrm>
-            <a:off x="685800" y="914400"/>
-            <a:ext cx="10820095" cy="237744"/>
-          </a:xfrm>
-          <a:prstGeom prst="rect">
-            <a:avLst/>
-          </a:prstGeom>
-          <a:noFill/>
-          <a:ln>
-            <a:noFill/>
-          </a:ln>
-        </p:spPr>
-        <p:txBody>
-          <a:bodyPr wrap="square" lIns="36576" tIns="27432" rIns="36576" bIns="27432" anchor="t">
-            <a:noAutofit/>
-          </a:bodyPr>
-          <a:lstStyle/>
-          <a:p>
-            <a:pPr algn="l">
-              <a:lnSpc>
-                <a:spcPct val="100000"/>
-              </a:lnSpc>
-            </a:pPr>
-            <a:r>
-              <a:rPr lang="en-US" sz="1200" dirty="0" b="1" spc="150" cap="all">
-                <a:solidFill>
-                  <a:srgbClr val="5F6272"/>
-                </a:solidFill>
-                <a:latin typeface="Segoe UI"/>
-                <a:cs typeface="Segoe UI"/>
-              </a:rPr>
-              <a:t xml:space="preserve">Topic 1 Catch-Up · Mon, Nov 2 · about 15 minutes</a:t>
-            </a:r>
-            <a:endParaRPr lang="en-US" sz="1200" dirty="0"/>
-          </a:p>
-        </p:txBody>
-      </p:sp>
-      <p:sp>
-        <p:nvSpPr>
-          <p:cNvPr id="3" name="Shape 3"/>
-          <p:cNvSpPr txBox="1"/>
-          <p:nvPr/>
-        </p:nvSpPr>
-        <p:spPr>
-          <a:xfrm>
-            <a:off x="685800" y="1323594"/>
-            <a:ext cx="10820095" cy="2660904"/>
-          </a:xfrm>
-          <a:prstGeom prst="rect">
-            <a:avLst/>
-          </a:prstGeom>
-          <a:noFill/>
-          <a:ln>
-            <a:noFill/>
-          </a:ln>
-        </p:spPr>
-        <p:txBody>
-          <a:bodyPr wrap="square" lIns="36576" tIns="27432" rIns="36576" bIns="27432" anchor="t">
-            <a:noAutofit/>
-          </a:bodyPr>
-          <a:lstStyle/>
-          <a:p>
-            <a:pPr algn="l">
-              <a:lnSpc>
-                <a:spcPct val="100000"/>
-              </a:lnSpc>
-            </a:pPr>
-            <a:r>
-              <a:rPr lang="en-US" sz="5700" dirty="0" b="1">
-                <a:solidFill>
-                  <a:srgbClr val="16171D"/>
-                </a:solidFill>
-                <a:latin typeface="Segoe UI"/>
-                <a:cs typeface="Segoe UI"/>
-              </a:rPr>
-              <a:t xml:space="preserve">Topic 1 Lesson 6: Changing the situation changes the function</a:t>
-            </a:r>
-            <a:endParaRPr lang="en-US" sz="5700" dirty="0"/>
-          </a:p>
-        </p:txBody>
-      </p:sp>
-      <p:sp>
-        <p:nvSpPr>
-          <p:cNvPr id="4" name="Shape 4"/>
-          <p:cNvSpPr txBox="1"/>
-          <p:nvPr/>
-        </p:nvSpPr>
-        <p:spPr>
-          <a:xfrm>
-            <a:off x="685800" y="4155948"/>
-            <a:ext cx="10820095" cy="740664"/>
-          </a:xfrm>
-          <a:prstGeom prst="rect">
-            <a:avLst/>
-          </a:prstGeom>
-          <a:noFill/>
-          <a:ln>
-            <a:noFill/>
-          </a:ln>
-        </p:spPr>
-        <p:txBody>
-          <a:bodyPr wrap="square" lIns="36576" tIns="27432" rIns="36576" bIns="27432" anchor="t">
-            <a:noAutofit/>
-          </a:bodyPr>
-          <a:lstStyle/>
-          <a:p>
-            <a:pPr algn="l">
-              <a:lnSpc>
-                <a:spcPct val="100000"/>
-              </a:lnSpc>
-            </a:pPr>
-            <a:r>
-              <a:rPr lang="en-US" sz="2250" dirty="0">
-                <a:solidFill>
-                  <a:srgbClr val="16171D"/>
-                </a:solidFill>
-                <a:latin typeface="Segoe UI"/>
-                <a:cs typeface="Segoe UI"/>
-              </a:rPr>
-              <a:t xml:space="preserve">Giving away 3 T-shirts shifts the function: the same idea as a Topic 2 translation.</a:t>
-            </a:r>
-            <a:endParaRPr lang="en-US" sz="2250" dirty="0"/>
-          </a:p>
-        </p:txBody>
-      </p:sp>
-      <p:sp>
-        <p:nvSpPr>
-          <p:cNvPr id="5" name="Shape 5"/>
-          <p:cNvSpPr txBox="1"/>
-          <p:nvPr/>
-        </p:nvSpPr>
-        <p:spPr>
-          <a:xfrm>
-            <a:off x="685800" y="5068062"/>
-            <a:ext cx="10820095" cy="329184"/>
-          </a:xfrm>
-          <a:prstGeom prst="rect">
-            <a:avLst/>
-          </a:prstGeom>
-          <a:noFill/>
-          <a:ln>
-            <a:noFill/>
-          </a:ln>
-        </p:spPr>
-        <p:txBody>
-          <a:bodyPr wrap="square" lIns="36576" tIns="27432" rIns="36576" bIns="27432" anchor="t">
-            <a:noAutofit/>
-          </a:bodyPr>
-          <a:lstStyle/>
-          <a:p>
-            <a:pPr algn="l">
-              <a:lnSpc>
-                <a:spcPct val="100000"/>
-              </a:lnSpc>
-            </a:pPr>
-            <a:r>
-              <a:rPr lang="en-US" sz="1800" dirty="0">
-                <a:solidFill>
-                  <a:srgbClr val="16171D"/>
-                </a:solidFill>
-                <a:latin typeface="Segoe UI"/>
-                <a:cs typeface="Segoe UI"/>
-              </a:rPr>
-              <a:t xml:space="preserve">Topic 1 Lesson 6 practice: </a:t>
-            </a:r>
-            <a:r>
-              <a:rPr lang="en-US" sz="1800" dirty="0">
-                <a:solidFill>
-                  <a:srgbClr val="3050B8"/>
-                </a:solidFill>
-                <a:latin typeface="Segoe UI"/>
-                <a:cs typeface="Segoe UI"/>
-                <a:hlinkClick r:id="rId3"/>
-              </a:rPr>
-              <a:t xml:space="preserve">Homework →</a:t>
-            </a:r>
-            <a:r>
-              <a:rPr lang="en-US" sz="1800" dirty="0">
-                <a:solidFill>
-                  <a:srgbClr val="16171D"/>
-                </a:solidFill>
-                <a:latin typeface="Segoe UI"/>
-                <a:cs typeface="Segoe UI"/>
-              </a:rPr>
-              <a:t xml:space="preserve"> · </a:t>
-            </a:r>
-            <a:r>
-              <a:rPr lang="en-US" sz="1800" dirty="0">
-                <a:solidFill>
-                  <a:srgbClr val="3050B8"/>
-                </a:solidFill>
-                <a:latin typeface="Segoe UI"/>
-                <a:cs typeface="Segoe UI"/>
-                <a:hlinkClick r:id="rId4"/>
-              </a:rPr>
-              <a:t xml:space="preserve">Quiz →</a:t>
-            </a:r>
-            <a:endParaRPr lang="en-US" sz="1800" dirty="0"/>
-          </a:p>
-        </p:txBody>
-      </p:sp>
-      <p:sp>
-        <p:nvSpPr>
-          <p:cNvPr id="6" name="Slide Number 6"/>
-          <p:cNvSpPr txBox="1"/>
-          <p:nvPr/>
-        </p:nvSpPr>
-        <p:spPr>
-          <a:xfrm>
-            <a:off x="11277295" y="6611112"/>
-            <a:ext cx="685800" cy="201168"/>
-          </a:xfrm>
-          <a:prstGeom prst="rect">
-            <a:avLst/>
-          </a:prstGeom>
-          <a:noFill/>
-        </p:spPr>
-        <p:txBody>
-          <a:bodyPr wrap="none" lIns="0" tIns="0" rIns="0" bIns="0" anchor="b">
-            <a:noAutofit/>
-          </a:bodyPr>
-          <a:lstStyle/>
-          <a:p>
-            <a:pPr algn="r"/>
-            <a:fld id="{5C1A6E0B-3B1F-4D5E-9C7A-2F4B8D6E1A90}" type="slidenum">
-              <a:rPr lang="en-US" sz="1200" dirty="0">
-                <a:solidFill>
-                  <a:srgbClr val="5F6272"/>
-                </a:solidFill>
-              </a:rPr>
-              <a:t>15</a:t>
-            </a:fld>
-          </a:p>
-        </p:txBody>
-      </p:sp>
-    </p:spTree>
-  </p:cSld>
-  <p:clrMapOvr>
-    <a:masterClrMapping/>
-  </p:clrMapOvr>
-  <p:transition spd="med">
-    <p:fade/>
-  </p:transition>
-</p:sld>
-</file>
-
 <file path=ppt/slides/slide16.xml><?xml version="1.0" encoding="utf-8"?>
 <p:sld xmlns:a="http://schemas.openxmlformats.org/drawingml/2006/main" xmlns:r="http://schemas.openxmlformats.org/officeDocument/2006/relationships" xmlns:p="http://schemas.openxmlformats.org/presentationml/2006/main">
   <p:cSld>
@@ -6179,6 +8972,276 @@
         </p:nvSpPr>
         <p:spPr>
           <a:xfrm>
+            <a:off x="685800" y="914400"/>
+            <a:ext cx="10820095" cy="237744"/>
+          </a:xfrm>
+          <a:prstGeom prst="rect">
+            <a:avLst/>
+          </a:prstGeom>
+          <a:noFill/>
+          <a:ln>
+            <a:noFill/>
+          </a:ln>
+        </p:spPr>
+        <p:txBody>
+          <a:bodyPr wrap="square" lIns="36576" tIns="27432" rIns="36576" bIns="27432" anchor="t">
+            <a:noAutofit/>
+          </a:bodyPr>
+          <a:lstStyle/>
+          <a:p>
+            <a:pPr algn="l">
+              <a:lnSpc>
+                <a:spcPct val="100000"/>
+              </a:lnSpc>
+            </a:pPr>
+            <a:r>
+              <a:rPr lang="en-US" sz="1200" dirty="0" b="1" spc="150" cap="all">
+                <a:solidFill>
+                  <a:srgbClr val="5F6272"/>
+                </a:solidFill>
+                <a:latin typeface="Segoe UI"/>
+                <a:cs typeface="Segoe UI"/>
+              </a:rPr>
+              <a:t xml:space="preserve">Topic 1 Catch-Up · Mon, Nov 2 · about 15 minutes</a:t>
+            </a:r>
+            <a:endParaRPr lang="en-US" sz="1200" dirty="0"/>
+          </a:p>
+        </p:txBody>
+      </p:sp>
+      <p:sp>
+        <p:nvSpPr>
+          <p:cNvPr id="3" name="Shape 3"/>
+          <p:cNvSpPr txBox="1"/>
+          <p:nvPr/>
+        </p:nvSpPr>
+        <p:spPr>
+          <a:xfrm>
+            <a:off x="685800" y="1323594"/>
+            <a:ext cx="10820095" cy="2660904"/>
+          </a:xfrm>
+          <a:prstGeom prst="rect">
+            <a:avLst/>
+          </a:prstGeom>
+          <a:noFill/>
+          <a:ln>
+            <a:noFill/>
+          </a:ln>
+        </p:spPr>
+        <p:txBody>
+          <a:bodyPr wrap="square" lIns="36576" tIns="27432" rIns="36576" bIns="27432" anchor="t">
+            <a:noAutofit/>
+          </a:bodyPr>
+          <a:lstStyle/>
+          <a:p>
+            <a:pPr algn="l">
+              <a:lnSpc>
+                <a:spcPct val="100000"/>
+              </a:lnSpc>
+            </a:pPr>
+            <a:r>
+              <a:rPr lang="en-US" sz="5700" dirty="0" b="1">
+                <a:solidFill>
+                  <a:srgbClr val="16171D"/>
+                </a:solidFill>
+                <a:latin typeface="Segoe UI"/>
+                <a:cs typeface="Segoe UI"/>
+              </a:rPr>
+              <a:t xml:space="preserve">Topic 1 Lesson 6: Changing the situation changes the function</a:t>
+            </a:r>
+            <a:endParaRPr lang="en-US" sz="5700" dirty="0"/>
+          </a:p>
+        </p:txBody>
+      </p:sp>
+      <p:sp>
+        <p:nvSpPr>
+          <p:cNvPr id="4" name="Shape 4"/>
+          <p:cNvSpPr txBox="1"/>
+          <p:nvPr/>
+        </p:nvSpPr>
+        <p:spPr>
+          <a:xfrm>
+            <a:off x="685800" y="4155948"/>
+            <a:ext cx="10820095" cy="740664"/>
+          </a:xfrm>
+          <a:prstGeom prst="rect">
+            <a:avLst/>
+          </a:prstGeom>
+          <a:noFill/>
+          <a:ln>
+            <a:noFill/>
+          </a:ln>
+        </p:spPr>
+        <p:txBody>
+          <a:bodyPr wrap="square" lIns="36576" tIns="27432" rIns="36576" bIns="27432" anchor="t">
+            <a:noAutofit/>
+          </a:bodyPr>
+          <a:lstStyle/>
+          <a:p>
+            <a:pPr algn="l">
+              <a:lnSpc>
+                <a:spcPct val="100000"/>
+              </a:lnSpc>
+            </a:pPr>
+            <a:r>
+              <a:rPr lang="en-US" sz="2250" dirty="0">
+                <a:solidFill>
+                  <a:srgbClr val="16171D"/>
+                </a:solidFill>
+                <a:latin typeface="Segoe UI"/>
+                <a:cs typeface="Segoe UI"/>
+              </a:rPr>
+              <a:t xml:space="preserve">Giving away 3 T-shirts shifts the function: the same idea as a Topic 2 translation.</a:t>
+            </a:r>
+            <a:endParaRPr lang="en-US" sz="2250" dirty="0"/>
+          </a:p>
+        </p:txBody>
+      </p:sp>
+      <p:sp>
+        <p:nvSpPr>
+          <p:cNvPr id="5" name="Shape 5"/>
+          <p:cNvSpPr txBox="1"/>
+          <p:nvPr/>
+        </p:nvSpPr>
+        <p:spPr>
+          <a:xfrm>
+            <a:off x="685800" y="5068062"/>
+            <a:ext cx="10820095" cy="329184"/>
+          </a:xfrm>
+          <a:prstGeom prst="rect">
+            <a:avLst/>
+          </a:prstGeom>
+          <a:noFill/>
+          <a:ln>
+            <a:noFill/>
+          </a:ln>
+        </p:spPr>
+        <p:txBody>
+          <a:bodyPr wrap="square" lIns="36576" tIns="27432" rIns="36576" bIns="27432" anchor="t">
+            <a:noAutofit/>
+          </a:bodyPr>
+          <a:lstStyle/>
+          <a:p>
+            <a:pPr algn="l">
+              <a:lnSpc>
+                <a:spcPct val="100000"/>
+              </a:lnSpc>
+            </a:pPr>
+            <a:r>
+              <a:rPr lang="en-US" sz="1800" dirty="0">
+                <a:solidFill>
+                  <a:srgbClr val="16171D"/>
+                </a:solidFill>
+                <a:latin typeface="Segoe UI"/>
+                <a:cs typeface="Segoe UI"/>
+              </a:rPr>
+              <a:t xml:space="preserve">Topic 1 Lesson 6 practice: </a:t>
+            </a:r>
+            <a:r>
+              <a:rPr lang="en-US" sz="1800" dirty="0">
+                <a:solidFill>
+                  <a:srgbClr val="3050B8"/>
+                </a:solidFill>
+                <a:latin typeface="Segoe UI"/>
+                <a:cs typeface="Segoe UI"/>
+                <a:hlinkClick r:id="rId3"/>
+              </a:rPr>
+              <a:t xml:space="preserve">Homework →</a:t>
+            </a:r>
+            <a:r>
+              <a:rPr lang="en-US" sz="1800" dirty="0">
+                <a:solidFill>
+                  <a:srgbClr val="16171D"/>
+                </a:solidFill>
+                <a:latin typeface="Segoe UI"/>
+                <a:cs typeface="Segoe UI"/>
+              </a:rPr>
+              <a:t xml:space="preserve"> · </a:t>
+            </a:r>
+            <a:r>
+              <a:rPr lang="en-US" sz="1800" dirty="0">
+                <a:solidFill>
+                  <a:srgbClr val="3050B8"/>
+                </a:solidFill>
+                <a:latin typeface="Segoe UI"/>
+                <a:cs typeface="Segoe UI"/>
+                <a:hlinkClick r:id="rId4"/>
+              </a:rPr>
+              <a:t xml:space="preserve">Quiz →</a:t>
+            </a:r>
+            <a:endParaRPr lang="en-US" sz="1800" dirty="0"/>
+          </a:p>
+        </p:txBody>
+      </p:sp>
+      <p:sp>
+        <p:nvSpPr>
+          <p:cNvPr id="6" name="Slide Number 6"/>
+          <p:cNvSpPr txBox="1"/>
+          <p:nvPr/>
+        </p:nvSpPr>
+        <p:spPr>
+          <a:xfrm>
+            <a:off x="11277295" y="6611112"/>
+            <a:ext cx="685800" cy="201168"/>
+          </a:xfrm>
+          <a:prstGeom prst="rect">
+            <a:avLst/>
+          </a:prstGeom>
+          <a:noFill/>
+        </p:spPr>
+        <p:txBody>
+          <a:bodyPr wrap="none" lIns="0" tIns="0" rIns="0" bIns="0" anchor="b">
+            <a:noAutofit/>
+          </a:bodyPr>
+          <a:lstStyle/>
+          <a:p>
+            <a:pPr algn="r"/>
+            <a:fld id="{5C1A6E0B-3B1F-4D5E-9C7A-2F4B8D6E1A90}" type="slidenum">
+              <a:rPr lang="en-US" sz="1200" dirty="0">
+                <a:solidFill>
+                  <a:srgbClr val="5F6272"/>
+                </a:solidFill>
+              </a:rPr>
+              <a:t>16</a:t>
+            </a:fld>
+          </a:p>
+        </p:txBody>
+      </p:sp>
+    </p:spTree>
+  </p:cSld>
+  <p:clrMapOvr>
+    <a:masterClrMapping/>
+  </p:clrMapOvr>
+  <p:transition spd="med">
+    <p:fade/>
+  </p:transition>
+</p:sld>
+</file>
+
+<file path=ppt/slides/slide17.xml><?xml version="1.0" encoding="utf-8"?>
+<p:sld xmlns:a="http://schemas.openxmlformats.org/drawingml/2006/main" xmlns:r="http://schemas.openxmlformats.org/officeDocument/2006/relationships" xmlns:p="http://schemas.openxmlformats.org/presentationml/2006/main">
+  <p:cSld>
+    <p:spTree>
+      <p:nvGrpSpPr>
+        <p:cNvPr id="1" name=""/>
+        <p:cNvGrpSpPr/>
+        <p:nvPr/>
+      </p:nvGrpSpPr>
+      <p:grpSpPr>
+        <a:xfrm>
+          <a:off x="0" y="0"/>
+          <a:ext cx="0" cy="0"/>
+          <a:chOff x="0" y="0"/>
+          <a:chExt cx="0" cy="0"/>
+        </a:xfrm>
+      </p:grpSpPr>
+      <p:sp>
+        <p:nvSpPr>
+          <p:cNvPr id="2" name="Shape 2"/>
+          <p:cNvSpPr txBox="1"/>
+          <p:nvPr/>
+        </p:nvSpPr>
+        <p:spPr>
+          <a:xfrm>
             <a:off x="685800" y="457200"/>
             <a:ext cx="10820095" cy="237744"/>
           </a:xfrm>
@@ -8422,7 +11485,7 @@
                   <a:srgbClr val="5F6272"/>
                 </a:solidFill>
               </a:rPr>
-              <a:t>16</a:t>
+              <a:t>17</a:t>
             </a:fld>
           </a:p>
         </p:txBody>
@@ -8719,200 +11782,6 @@
 </p:sld>
 </file>
 
-<file path=ppt/slides/slide17.xml><?xml version="1.0" encoding="utf-8"?>
-<p:sld xmlns:a="http://schemas.openxmlformats.org/drawingml/2006/main" xmlns:r="http://schemas.openxmlformats.org/officeDocument/2006/relationships" xmlns:p="http://schemas.openxmlformats.org/presentationml/2006/main">
-  <p:cSld>
-    <p:spTree>
-      <p:nvGrpSpPr>
-        <p:cNvPr id="1" name=""/>
-        <p:cNvGrpSpPr/>
-        <p:nvPr/>
-      </p:nvGrpSpPr>
-      <p:grpSpPr>
-        <a:xfrm>
-          <a:off x="0" y="0"/>
-          <a:ext cx="0" cy="0"/>
-          <a:chOff x="0" y="0"/>
-          <a:chExt cx="0" cy="0"/>
-        </a:xfrm>
-      </p:grpSpPr>
-      <p:sp>
-        <p:nvSpPr>
-          <p:cNvPr id="2" name="Shape 2"/>
-          <p:cNvSpPr txBox="1"/>
-          <p:nvPr/>
-        </p:nvSpPr>
-        <p:spPr>
-          <a:xfrm>
-            <a:off x="685800" y="2103120"/>
-            <a:ext cx="10820095" cy="237744"/>
-          </a:xfrm>
-          <a:prstGeom prst="rect">
-            <a:avLst/>
-          </a:prstGeom>
-          <a:noFill/>
-          <a:ln>
-            <a:noFill/>
-          </a:ln>
-        </p:spPr>
-        <p:txBody>
-          <a:bodyPr wrap="square" lIns="36576" tIns="27432" rIns="36576" bIns="27432" anchor="t">
-            <a:noAutofit/>
-          </a:bodyPr>
-          <a:lstStyle/>
-          <a:p>
-            <a:pPr algn="l">
-              <a:lnSpc>
-                <a:spcPct val="100000"/>
-              </a:lnSpc>
-            </a:pPr>
-            <a:r>
-              <a:rPr lang="en-US" sz="1200" dirty="0" b="1" spc="150" cap="all">
-                <a:solidFill>
-                  <a:srgbClr val="5F6272"/>
-                </a:solidFill>
-                <a:latin typeface="Segoe UI"/>
-                <a:cs typeface="Segoe UI"/>
-              </a:rPr>
-              <a:t xml:space="preserve">Topic 2 · Lesson 3</a:t>
-            </a:r>
-            <a:endParaRPr lang="en-US" sz="1200" dirty="0"/>
-          </a:p>
-        </p:txBody>
-      </p:sp>
-      <p:sp>
-        <p:nvSpPr>
-          <p:cNvPr id="3" name="Shape 3"/>
-          <p:cNvSpPr txBox="1"/>
-          <p:nvPr/>
-        </p:nvSpPr>
-        <p:spPr>
-          <a:xfrm>
-            <a:off x="685800" y="2512314"/>
-            <a:ext cx="10820095" cy="1312164"/>
-          </a:xfrm>
-          <a:prstGeom prst="rect">
-            <a:avLst/>
-          </a:prstGeom>
-          <a:noFill/>
-          <a:ln>
-            <a:noFill/>
-          </a:ln>
-        </p:spPr>
-        <p:txBody>
-          <a:bodyPr wrap="square" lIns="36576" tIns="27432" rIns="36576" bIns="27432" anchor="t">
-            <a:noAutofit/>
-          </a:bodyPr>
-          <a:lstStyle/>
-          <a:p>
-            <a:pPr algn="l">
-              <a:lnSpc>
-                <a:spcPct val="100000"/>
-              </a:lnSpc>
-            </a:pPr>
-            <a:r>
-              <a:rPr lang="en-US" sz="8250" dirty="0" b="1">
-                <a:solidFill>
-                  <a:srgbClr val="16171D"/>
-                </a:solidFill>
-                <a:latin typeface="Segoe UI"/>
-                <a:cs typeface="Segoe UI"/>
-              </a:rPr>
-              <a:t xml:space="preserve">Back to Topic 2</a:t>
-            </a:r>
-            <a:endParaRPr lang="en-US" sz="8250" dirty="0"/>
-          </a:p>
-        </p:txBody>
-      </p:sp>
-      <p:sp>
-        <p:nvSpPr>
-          <p:cNvPr id="4" name="Shape 4"/>
-          <p:cNvSpPr txBox="1"/>
-          <p:nvPr/>
-        </p:nvSpPr>
-        <p:spPr>
-          <a:xfrm>
-            <a:off x="685800" y="3995928"/>
-            <a:ext cx="10820095" cy="397764"/>
-          </a:xfrm>
-          <a:prstGeom prst="rect">
-            <a:avLst/>
-          </a:prstGeom>
-          <a:noFill/>
-          <a:ln>
-            <a:noFill/>
-          </a:ln>
-        </p:spPr>
-        <p:txBody>
-          <a:bodyPr wrap="square" lIns="36576" tIns="27432" rIns="36576" bIns="27432" anchor="t">
-            <a:noAutofit/>
-          </a:bodyPr>
-          <a:lstStyle/>
-          <a:p>
-            <a:pPr algn="l">
-              <a:lnSpc>
-                <a:spcPct val="100000"/>
-              </a:lnSpc>
-            </a:pPr>
-            <a:r>
-              <a:rPr lang="en-US" sz="2250" dirty="0">
-                <a:solidFill>
-                  <a:srgbClr val="16171D"/>
-                </a:solidFill>
-                <a:latin typeface="Segoe UI"/>
-                <a:cs typeface="Segoe UI"/>
-              </a:rPr>
-              <a:t xml:space="preserve">Catch-up done. Now today's Topic 2 lesson.</a:t>
-            </a:r>
-            <a:endParaRPr lang="en-US" sz="2250" dirty="0"/>
-          </a:p>
-        </p:txBody>
-      </p:sp>
-      <p:sp>
-        <p:nvSpPr>
-          <p:cNvPr id="5" name="Slide Number 5"/>
-          <p:cNvSpPr txBox="1"/>
-          <p:nvPr/>
-        </p:nvSpPr>
-        <p:spPr>
-          <a:xfrm>
-            <a:off x="11277295" y="6611112"/>
-            <a:ext cx="685800" cy="201168"/>
-          </a:xfrm>
-          <a:prstGeom prst="rect">
-            <a:avLst/>
-          </a:prstGeom>
-          <a:noFill/>
-        </p:spPr>
-        <p:txBody>
-          <a:bodyPr wrap="none" lIns="0" tIns="0" rIns="0" bIns="0" anchor="b">
-            <a:noAutofit/>
-          </a:bodyPr>
-          <a:lstStyle/>
-          <a:p>
-            <a:pPr algn="r"/>
-            <a:fld id="{5C1A6E0B-3B1F-4D5E-9C7A-2F4B8D6E1A90}" type="slidenum">
-              <a:rPr lang="en-US" sz="1200" dirty="0">
-                <a:solidFill>
-                  <a:srgbClr val="5F6272"/>
-                </a:solidFill>
-              </a:rPr>
-              <a:t>17</a:t>
-            </a:fld>
-          </a:p>
-        </p:txBody>
-      </p:sp>
-    </p:spTree>
-  </p:cSld>
-  <p:clrMapOvr>
-    <a:masterClrMapping/>
-  </p:clrMapOvr>
-  <p:transition spd="med">
-    <p:fade/>
-  </p:transition>
-</p:sld>
-</file>
-
 <file path=ppt/slides/slide18.xml><?xml version="1.0" encoding="utf-8"?>
 <p:sld xmlns:a="http://schemas.openxmlformats.org/drawingml/2006/main" xmlns:r="http://schemas.openxmlformats.org/officeDocument/2006/relationships" xmlns:p="http://schemas.openxmlformats.org/presentationml/2006/main">
   <p:cSld>
@@ -8938,6 +11807,200 @@
         </p:nvSpPr>
         <p:spPr>
           <a:xfrm>
+            <a:off x="685800" y="2103120"/>
+            <a:ext cx="10820095" cy="237744"/>
+          </a:xfrm>
+          <a:prstGeom prst="rect">
+            <a:avLst/>
+          </a:prstGeom>
+          <a:noFill/>
+          <a:ln>
+            <a:noFill/>
+          </a:ln>
+        </p:spPr>
+        <p:txBody>
+          <a:bodyPr wrap="square" lIns="36576" tIns="27432" rIns="36576" bIns="27432" anchor="t">
+            <a:noAutofit/>
+          </a:bodyPr>
+          <a:lstStyle/>
+          <a:p>
+            <a:pPr algn="l">
+              <a:lnSpc>
+                <a:spcPct val="100000"/>
+              </a:lnSpc>
+            </a:pPr>
+            <a:r>
+              <a:rPr lang="en-US" sz="1200" dirty="0" b="1" spc="150" cap="all">
+                <a:solidFill>
+                  <a:srgbClr val="5F6272"/>
+                </a:solidFill>
+                <a:latin typeface="Segoe UI"/>
+                <a:cs typeface="Segoe UI"/>
+              </a:rPr>
+              <a:t xml:space="preserve">Topic 2 · Lesson 3</a:t>
+            </a:r>
+            <a:endParaRPr lang="en-US" sz="1200" dirty="0"/>
+          </a:p>
+        </p:txBody>
+      </p:sp>
+      <p:sp>
+        <p:nvSpPr>
+          <p:cNvPr id="3" name="Shape 3"/>
+          <p:cNvSpPr txBox="1"/>
+          <p:nvPr/>
+        </p:nvSpPr>
+        <p:spPr>
+          <a:xfrm>
+            <a:off x="685800" y="2512314"/>
+            <a:ext cx="10820095" cy="1312164"/>
+          </a:xfrm>
+          <a:prstGeom prst="rect">
+            <a:avLst/>
+          </a:prstGeom>
+          <a:noFill/>
+          <a:ln>
+            <a:noFill/>
+          </a:ln>
+        </p:spPr>
+        <p:txBody>
+          <a:bodyPr wrap="square" lIns="36576" tIns="27432" rIns="36576" bIns="27432" anchor="t">
+            <a:noAutofit/>
+          </a:bodyPr>
+          <a:lstStyle/>
+          <a:p>
+            <a:pPr algn="l">
+              <a:lnSpc>
+                <a:spcPct val="100000"/>
+              </a:lnSpc>
+            </a:pPr>
+            <a:r>
+              <a:rPr lang="en-US" sz="8250" dirty="0" b="1">
+                <a:solidFill>
+                  <a:srgbClr val="16171D"/>
+                </a:solidFill>
+                <a:latin typeface="Segoe UI"/>
+                <a:cs typeface="Segoe UI"/>
+              </a:rPr>
+              <a:t xml:space="preserve">Back to Topic 2</a:t>
+            </a:r>
+            <a:endParaRPr lang="en-US" sz="8250" dirty="0"/>
+          </a:p>
+        </p:txBody>
+      </p:sp>
+      <p:sp>
+        <p:nvSpPr>
+          <p:cNvPr id="4" name="Shape 4"/>
+          <p:cNvSpPr txBox="1"/>
+          <p:nvPr/>
+        </p:nvSpPr>
+        <p:spPr>
+          <a:xfrm>
+            <a:off x="685800" y="3995928"/>
+            <a:ext cx="10820095" cy="397764"/>
+          </a:xfrm>
+          <a:prstGeom prst="rect">
+            <a:avLst/>
+          </a:prstGeom>
+          <a:noFill/>
+          <a:ln>
+            <a:noFill/>
+          </a:ln>
+        </p:spPr>
+        <p:txBody>
+          <a:bodyPr wrap="square" lIns="36576" tIns="27432" rIns="36576" bIns="27432" anchor="t">
+            <a:noAutofit/>
+          </a:bodyPr>
+          <a:lstStyle/>
+          <a:p>
+            <a:pPr algn="l">
+              <a:lnSpc>
+                <a:spcPct val="100000"/>
+              </a:lnSpc>
+            </a:pPr>
+            <a:r>
+              <a:rPr lang="en-US" sz="2250" dirty="0">
+                <a:solidFill>
+                  <a:srgbClr val="16171D"/>
+                </a:solidFill>
+                <a:latin typeface="Segoe UI"/>
+                <a:cs typeface="Segoe UI"/>
+              </a:rPr>
+              <a:t xml:space="preserve">Catch-up done. Now today's Topic 2 lesson.</a:t>
+            </a:r>
+            <a:endParaRPr lang="en-US" sz="2250" dirty="0"/>
+          </a:p>
+        </p:txBody>
+      </p:sp>
+      <p:sp>
+        <p:nvSpPr>
+          <p:cNvPr id="5" name="Slide Number 5"/>
+          <p:cNvSpPr txBox="1"/>
+          <p:nvPr/>
+        </p:nvSpPr>
+        <p:spPr>
+          <a:xfrm>
+            <a:off x="11277295" y="6611112"/>
+            <a:ext cx="685800" cy="201168"/>
+          </a:xfrm>
+          <a:prstGeom prst="rect">
+            <a:avLst/>
+          </a:prstGeom>
+          <a:noFill/>
+        </p:spPr>
+        <p:txBody>
+          <a:bodyPr wrap="none" lIns="0" tIns="0" rIns="0" bIns="0" anchor="b">
+            <a:noAutofit/>
+          </a:bodyPr>
+          <a:lstStyle/>
+          <a:p>
+            <a:pPr algn="r"/>
+            <a:fld id="{5C1A6E0B-3B1F-4D5E-9C7A-2F4B8D6E1A90}" type="slidenum">
+              <a:rPr lang="en-US" sz="1200" dirty="0">
+                <a:solidFill>
+                  <a:srgbClr val="5F6272"/>
+                </a:solidFill>
+              </a:rPr>
+              <a:t>18</a:t>
+            </a:fld>
+          </a:p>
+        </p:txBody>
+      </p:sp>
+    </p:spTree>
+  </p:cSld>
+  <p:clrMapOvr>
+    <a:masterClrMapping/>
+  </p:clrMapOvr>
+  <p:transition spd="med">
+    <p:fade/>
+  </p:transition>
+</p:sld>
+</file>
+
+<file path=ppt/slides/slide19.xml><?xml version="1.0" encoding="utf-8"?>
+<p:sld xmlns:a="http://schemas.openxmlformats.org/drawingml/2006/main" xmlns:r="http://schemas.openxmlformats.org/officeDocument/2006/relationships" xmlns:p="http://schemas.openxmlformats.org/presentationml/2006/main">
+  <p:cSld>
+    <p:spTree>
+      <p:nvGrpSpPr>
+        <p:cNvPr id="1" name=""/>
+        <p:cNvGrpSpPr/>
+        <p:nvPr/>
+      </p:nvGrpSpPr>
+      <p:grpSpPr>
+        <a:xfrm>
+          <a:off x="0" y="0"/>
+          <a:ext cx="0" cy="0"/>
+          <a:chOff x="0" y="0"/>
+          <a:chExt cx="0" cy="0"/>
+        </a:xfrm>
+      </p:grpSpPr>
+      <p:sp>
+        <p:nvSpPr>
+          <p:cNvPr id="2" name="Shape 2"/>
+          <p:cNvSpPr txBox="1"/>
+          <p:nvPr/>
+        </p:nvSpPr>
+        <p:spPr>
+          <a:xfrm>
             <a:off x="685800" y="457200"/>
             <a:ext cx="10820095" cy="237744"/>
           </a:xfrm>
@@ -10947,7 +14010,7 @@
                   <a:srgbClr val="5F6272"/>
                 </a:solidFill>
               </a:rPr>
-              <a:t>18</a:t>
+              <a:t>19</a:t>
             </a:fld>
           </a:p>
         </p:txBody>
@@ -11367,7 +14430,7 @@
 </p:sld>
 </file>
 
-<file path=ppt/slides/slide19.xml><?xml version="1.0" encoding="utf-8"?>
+<file path=ppt/slides/slide2.xml><?xml version="1.0" encoding="utf-8"?>
 <p:sld xmlns:a="http://schemas.openxmlformats.org/drawingml/2006/main" xmlns:r="http://schemas.openxmlformats.org/officeDocument/2006/relationships" xmlns:p="http://schemas.openxmlformats.org/presentationml/2006/main">
   <p:cSld>
     <p:spTree>
@@ -11392,7 +14455,7 @@
         </p:nvSpPr>
         <p:spPr>
           <a:xfrm>
-            <a:off x="685800" y="457200"/>
+            <a:off x="685800" y="2103120"/>
             <a:ext cx="10820095" cy="237744"/>
           </a:xfrm>
           <a:prstGeom prst="rect">
@@ -11422,7 +14485,7 @@
                 <a:latin typeface="Segoe UI"/>
                 <a:cs typeface="Segoe UI"/>
               </a:rPr>
-              <a:t xml:space="preserve">I do · Write it</a:t>
+              <a:t xml:space="preserve">Topic 2 · Lesson 3 · Day 1 of 2 · Start here</a:t>
             </a:r>
             <a:endParaRPr lang="en-US" sz="1200" dirty="0"/>
           </a:p>
@@ -11436,8 +14499,8 @@
         </p:nvSpPr>
         <p:spPr>
           <a:xfrm>
-            <a:off x="685800" y="866394"/>
-            <a:ext cx="10820095" cy="580644"/>
+            <a:off x="685800" y="2512314"/>
+            <a:ext cx="10820095" cy="2569464"/>
           </a:xfrm>
           <a:prstGeom prst="rect">
             <a:avLst/>
@@ -11459,56 +14522,16 @@
               </a:lnSpc>
             </a:pPr>
             <a:r>
-              <a:rPr lang="en-US" sz="3450" dirty="0" b="1">
-                <a:solidFill>
-                  <a:srgbClr val="16171D"/>
-                </a:solidFill>
-                <a:latin typeface="Segoe UI"/>
-                <a:cs typeface="Segoe UI"/>
-              </a:rPr>
-              <a:t xml:space="preserve">⊥ to </a:t>
-            </a:r>
-            <a:r>
-              <a:rPr lang="en-US" sz="3450" dirty="0" b="1" i="1">
-                <a:solidFill>
-                  <a:srgbClr val="16171D"/>
-                </a:solidFill>
-                <a:latin typeface="Segoe UI"/>
-                <a:cs typeface="Segoe UI"/>
-              </a:rPr>
-              <a:t xml:space="preserve">y</a:t>
-            </a:r>
-            <a:r>
-              <a:rPr lang="en-US" sz="3450" dirty="0" b="1">
-                <a:solidFill>
-                  <a:srgbClr val="16171D"/>
-                </a:solidFill>
-                <a:latin typeface="Segoe UI"/>
-                <a:cs typeface="Segoe UI"/>
-              </a:rPr>
-              <a:t xml:space="preserve"> = 2</a:t>
-            </a:r>
-            <a:r>
-              <a:rPr lang="en-US" sz="3450" dirty="0" b="1" i="1">
-                <a:solidFill>
-                  <a:srgbClr val="16171D"/>
-                </a:solidFill>
-                <a:latin typeface="Segoe UI"/>
-                <a:cs typeface="Segoe UI"/>
-              </a:rPr>
-              <a:t xml:space="preserve">x</a:t>
-            </a:r>
-            <a:r>
-              <a:rPr lang="en-US" sz="3450" dirty="0" b="1">
-                <a:solidFill>
-                  <a:srgbClr val="16171D"/>
-                </a:solidFill>
-                <a:latin typeface="Segoe UI"/>
-                <a:cs typeface="Segoe UI"/>
-              </a:rPr>
-              <a:t xml:space="preserve"> + 1, through (6, 2)</a:t>
-            </a:r>
-            <a:endParaRPr lang="en-US" sz="3450" dirty="0"/>
+              <a:rPr lang="en-US" sz="8250" dirty="0" b="1">
+                <a:solidFill>
+                  <a:srgbClr val="16171D"/>
+                </a:solidFill>
+                <a:latin typeface="Segoe UI"/>
+                <a:cs typeface="Segoe UI"/>
+              </a:rPr>
+              <a:t xml:space="preserve">Start: Thursday, October 29</a:t>
+            </a:r>
+            <a:endParaRPr lang="en-US" sz="8250" dirty="0"/>
           </a:p>
         </p:txBody>
       </p:sp>
@@ -11520,8 +14543,8 @@
         </p:nvSpPr>
         <p:spPr>
           <a:xfrm>
-            <a:off x="685800" y="1618488"/>
-            <a:ext cx="10820095" cy="352044"/>
+            <a:off x="685800" y="5253228"/>
+            <a:ext cx="10820095" cy="694944"/>
           </a:xfrm>
           <a:prstGeom prst="rect">
             <a:avLst/>
@@ -11543,6 +14566,240 @@
               </a:lnSpc>
             </a:pPr>
             <a:r>
+              <a:rPr lang="en-US" sz="2100" dirty="0">
+                <a:solidFill>
+                  <a:srgbClr val="16171D"/>
+                </a:solidFill>
+                <a:latin typeface="Segoe UI"/>
+                <a:cs typeface="Segoe UI"/>
+              </a:rPr>
+              <a:t xml:space="preserve">Today: bell work → Topic 1 catch-up (Write, evaluate and solve a function in context) → Lesson 3, Day 1.</a:t>
+            </a:r>
+            <a:endParaRPr lang="en-US" sz="2100" dirty="0"/>
+          </a:p>
+        </p:txBody>
+      </p:sp>
+      <p:sp>
+        <p:nvSpPr>
+          <p:cNvPr id="5" name="Slide Number 5"/>
+          <p:cNvSpPr txBox="1"/>
+          <p:nvPr/>
+        </p:nvSpPr>
+        <p:spPr>
+          <a:xfrm>
+            <a:off x="11277295" y="6611112"/>
+            <a:ext cx="685800" cy="201168"/>
+          </a:xfrm>
+          <a:prstGeom prst="rect">
+            <a:avLst/>
+          </a:prstGeom>
+          <a:noFill/>
+        </p:spPr>
+        <p:txBody>
+          <a:bodyPr wrap="none" lIns="0" tIns="0" rIns="0" bIns="0" anchor="b">
+            <a:noAutofit/>
+          </a:bodyPr>
+          <a:lstStyle/>
+          <a:p>
+            <a:pPr algn="r"/>
+            <a:fld id="{5C1A6E0B-3B1F-4D5E-9C7A-2F4B8D6E1A90}" type="slidenum">
+              <a:rPr lang="en-US" sz="1200" dirty="0">
+                <a:solidFill>
+                  <a:srgbClr val="5F6272"/>
+                </a:solidFill>
+              </a:rPr>
+              <a:t>2</a:t>
+            </a:fld>
+          </a:p>
+        </p:txBody>
+      </p:sp>
+    </p:spTree>
+  </p:cSld>
+  <p:clrMapOvr>
+    <a:masterClrMapping/>
+  </p:clrMapOvr>
+  <p:transition spd="med">
+    <p:fade/>
+  </p:transition>
+</p:sld>
+</file>
+
+<file path=ppt/slides/slide20.xml><?xml version="1.0" encoding="utf-8"?>
+<p:sld xmlns:a="http://schemas.openxmlformats.org/drawingml/2006/main" xmlns:r="http://schemas.openxmlformats.org/officeDocument/2006/relationships" xmlns:p="http://schemas.openxmlformats.org/presentationml/2006/main">
+  <p:cSld>
+    <p:spTree>
+      <p:nvGrpSpPr>
+        <p:cNvPr id="1" name=""/>
+        <p:cNvGrpSpPr/>
+        <p:nvPr/>
+      </p:nvGrpSpPr>
+      <p:grpSpPr>
+        <a:xfrm>
+          <a:off x="0" y="0"/>
+          <a:ext cx="0" cy="0"/>
+          <a:chOff x="0" y="0"/>
+          <a:chExt cx="0" cy="0"/>
+        </a:xfrm>
+      </p:grpSpPr>
+      <p:sp>
+        <p:nvSpPr>
+          <p:cNvPr id="2" name="Shape 2"/>
+          <p:cNvSpPr txBox="1"/>
+          <p:nvPr/>
+        </p:nvSpPr>
+        <p:spPr>
+          <a:xfrm>
+            <a:off x="685800" y="457200"/>
+            <a:ext cx="10820095" cy="237744"/>
+          </a:xfrm>
+          <a:prstGeom prst="rect">
+            <a:avLst/>
+          </a:prstGeom>
+          <a:noFill/>
+          <a:ln>
+            <a:noFill/>
+          </a:ln>
+        </p:spPr>
+        <p:txBody>
+          <a:bodyPr wrap="square" lIns="36576" tIns="27432" rIns="36576" bIns="27432" anchor="t">
+            <a:noAutofit/>
+          </a:bodyPr>
+          <a:lstStyle/>
+          <a:p>
+            <a:pPr algn="l">
+              <a:lnSpc>
+                <a:spcPct val="100000"/>
+              </a:lnSpc>
+            </a:pPr>
+            <a:r>
+              <a:rPr lang="en-US" sz="1200" dirty="0" b="1" spc="150" cap="all">
+                <a:solidFill>
+                  <a:srgbClr val="5F6272"/>
+                </a:solidFill>
+                <a:latin typeface="Segoe UI"/>
+                <a:cs typeface="Segoe UI"/>
+              </a:rPr>
+              <a:t xml:space="preserve">I do · Write it</a:t>
+            </a:r>
+            <a:endParaRPr lang="en-US" sz="1200" dirty="0"/>
+          </a:p>
+        </p:txBody>
+      </p:sp>
+      <p:sp>
+        <p:nvSpPr>
+          <p:cNvPr id="3" name="Shape 3"/>
+          <p:cNvSpPr txBox="1"/>
+          <p:nvPr/>
+        </p:nvSpPr>
+        <p:spPr>
+          <a:xfrm>
+            <a:off x="685800" y="866394"/>
+            <a:ext cx="10820095" cy="580644"/>
+          </a:xfrm>
+          <a:prstGeom prst="rect">
+            <a:avLst/>
+          </a:prstGeom>
+          <a:noFill/>
+          <a:ln>
+            <a:noFill/>
+          </a:ln>
+        </p:spPr>
+        <p:txBody>
+          <a:bodyPr wrap="square" lIns="36576" tIns="27432" rIns="36576" bIns="27432" anchor="t">
+            <a:noAutofit/>
+          </a:bodyPr>
+          <a:lstStyle/>
+          <a:p>
+            <a:pPr algn="l">
+              <a:lnSpc>
+                <a:spcPct val="100000"/>
+              </a:lnSpc>
+            </a:pPr>
+            <a:r>
+              <a:rPr lang="en-US" sz="3450" dirty="0" b="1">
+                <a:solidFill>
+                  <a:srgbClr val="16171D"/>
+                </a:solidFill>
+                <a:latin typeface="Segoe UI"/>
+                <a:cs typeface="Segoe UI"/>
+              </a:rPr>
+              <a:t xml:space="preserve">⊥ to </a:t>
+            </a:r>
+            <a:r>
+              <a:rPr lang="en-US" sz="3450" dirty="0" b="1" i="1">
+                <a:solidFill>
+                  <a:srgbClr val="16171D"/>
+                </a:solidFill>
+                <a:latin typeface="Segoe UI"/>
+                <a:cs typeface="Segoe UI"/>
+              </a:rPr>
+              <a:t xml:space="preserve">y</a:t>
+            </a:r>
+            <a:r>
+              <a:rPr lang="en-US" sz="3450" dirty="0" b="1">
+                <a:solidFill>
+                  <a:srgbClr val="16171D"/>
+                </a:solidFill>
+                <a:latin typeface="Segoe UI"/>
+                <a:cs typeface="Segoe UI"/>
+              </a:rPr>
+              <a:t xml:space="preserve"> = 2</a:t>
+            </a:r>
+            <a:r>
+              <a:rPr lang="en-US" sz="3450" dirty="0" b="1" i="1">
+                <a:solidFill>
+                  <a:srgbClr val="16171D"/>
+                </a:solidFill>
+                <a:latin typeface="Segoe UI"/>
+                <a:cs typeface="Segoe UI"/>
+              </a:rPr>
+              <a:t xml:space="preserve">x</a:t>
+            </a:r>
+            <a:r>
+              <a:rPr lang="en-US" sz="3450" dirty="0" b="1">
+                <a:solidFill>
+                  <a:srgbClr val="16171D"/>
+                </a:solidFill>
+                <a:latin typeface="Segoe UI"/>
+                <a:cs typeface="Segoe UI"/>
+              </a:rPr>
+              <a:t xml:space="preserve"> + 1, through (6, 2)</a:t>
+            </a:r>
+            <a:endParaRPr lang="en-US" sz="3450" dirty="0"/>
+          </a:p>
+        </p:txBody>
+      </p:sp>
+      <p:sp>
+        <p:nvSpPr>
+          <p:cNvPr id="4" name="Shape 4"/>
+          <p:cNvSpPr txBox="1"/>
+          <p:nvPr/>
+        </p:nvSpPr>
+        <p:spPr>
+          <a:xfrm>
+            <a:off x="685800" y="1618488"/>
+            <a:ext cx="10820095" cy="352044"/>
+          </a:xfrm>
+          <a:prstGeom prst="rect">
+            <a:avLst/>
+          </a:prstGeom>
+          <a:noFill/>
+          <a:ln>
+            <a:noFill/>
+          </a:ln>
+        </p:spPr>
+        <p:txBody>
+          <a:bodyPr wrap="square" lIns="36576" tIns="27432" rIns="36576" bIns="27432" anchor="t">
+            <a:noAutofit/>
+          </a:bodyPr>
+          <a:lstStyle/>
+          <a:p>
+            <a:pPr algn="l">
+              <a:lnSpc>
+                <a:spcPct val="100000"/>
+              </a:lnSpc>
+            </a:pPr>
+            <a:r>
               <a:rPr lang="en-US" sz="1950" dirty="0">
                 <a:solidFill>
                   <a:srgbClr val="16171D"/>
@@ -12029,7 +15286,7 @@
                   <a:srgbClr val="5F6272"/>
                 </a:solidFill>
               </a:rPr>
-              <a:t>19</a:t>
+              <a:t>20</a:t>
             </a:fld>
           </a:p>
         </p:txBody>
@@ -12273,7 +15530,7 @@
 </p:sld>
 </file>
 
-<file path=ppt/slides/slide2.xml><?xml version="1.0" encoding="utf-8"?>
+<file path=ppt/slides/slide21.xml><?xml version="1.0" encoding="utf-8"?>
 <p:sld xmlns:a="http://schemas.openxmlformats.org/drawingml/2006/main" xmlns:r="http://schemas.openxmlformats.org/officeDocument/2006/relationships" xmlns:p="http://schemas.openxmlformats.org/presentationml/2006/main">
   <p:cSld>
     <p:spTree>
@@ -12298,7 +15555,7 @@
         </p:nvSpPr>
         <p:spPr>
           <a:xfrm>
-            <a:off x="685800" y="2103120"/>
+            <a:off x="685800" y="457200"/>
             <a:ext cx="10820095" cy="237744"/>
           </a:xfrm>
           <a:prstGeom prst="rect">
@@ -12328,7 +15585,7 @@
                 <a:latin typeface="Segoe UI"/>
                 <a:cs typeface="Segoe UI"/>
               </a:rPr>
-              <a:t xml:space="preserve">Topic 2 · Lesson 3 · Day 1 of 2 · Start here</a:t>
+              <a:t xml:space="preserve">You do · Try it</a:t>
             </a:r>
             <a:endParaRPr lang="en-US" sz="1200" dirty="0"/>
           </a:p>
@@ -12342,8 +15599,8 @@
         </p:nvSpPr>
         <p:spPr>
           <a:xfrm>
-            <a:off x="685800" y="2512314"/>
-            <a:ext cx="10820095" cy="2569464"/>
+            <a:off x="685800" y="866394"/>
+            <a:ext cx="10820095" cy="580644"/>
           </a:xfrm>
           <a:prstGeom prst="rect">
             <a:avLst/>
@@ -12365,16 +15622,56 @@
               </a:lnSpc>
             </a:pPr>
             <a:r>
-              <a:rPr lang="en-US" sz="8250" dirty="0" b="1">
-                <a:solidFill>
-                  <a:srgbClr val="16171D"/>
-                </a:solidFill>
-                <a:latin typeface="Segoe UI"/>
-                <a:cs typeface="Segoe UI"/>
-              </a:rPr>
-              <a:t xml:space="preserve">Start: Thursday, October 29</a:t>
-            </a:r>
-            <a:endParaRPr lang="en-US" sz="8250" dirty="0"/>
+              <a:rPr lang="en-US" sz="3450" dirty="0" b="1">
+                <a:solidFill>
+                  <a:srgbClr val="16171D"/>
+                </a:solidFill>
+                <a:latin typeface="Segoe UI"/>
+                <a:cs typeface="Segoe UI"/>
+              </a:rPr>
+              <a:t xml:space="preserve">⊥ to </a:t>
+            </a:r>
+            <a:r>
+              <a:rPr lang="en-US" sz="3450" dirty="0" b="1" i="1">
+                <a:solidFill>
+                  <a:srgbClr val="16171D"/>
+                </a:solidFill>
+                <a:latin typeface="Segoe UI"/>
+                <a:cs typeface="Segoe UI"/>
+              </a:rPr>
+              <a:t xml:space="preserve">y</a:t>
+            </a:r>
+            <a:r>
+              <a:rPr lang="en-US" sz="3450" dirty="0" b="1">
+                <a:solidFill>
+                  <a:srgbClr val="16171D"/>
+                </a:solidFill>
+                <a:latin typeface="Segoe UI"/>
+                <a:cs typeface="Segoe UI"/>
+              </a:rPr>
+              <a:t xml:space="preserve"> = 3</a:t>
+            </a:r>
+            <a:r>
+              <a:rPr lang="en-US" sz="3450" dirty="0" b="1" i="1">
+                <a:solidFill>
+                  <a:srgbClr val="16171D"/>
+                </a:solidFill>
+                <a:latin typeface="Segoe UI"/>
+                <a:cs typeface="Segoe UI"/>
+              </a:rPr>
+              <a:t xml:space="preserve">x</a:t>
+            </a:r>
+            <a:r>
+              <a:rPr lang="en-US" sz="3450" dirty="0" b="1">
+                <a:solidFill>
+                  <a:srgbClr val="16171D"/>
+                </a:solidFill>
+                <a:latin typeface="Segoe UI"/>
+                <a:cs typeface="Segoe UI"/>
+              </a:rPr>
+              <a:t xml:space="preserve">, through (3, 1)</a:t>
+            </a:r>
+            <a:endParaRPr lang="en-US" sz="3450" dirty="0"/>
           </a:p>
         </p:txBody>
       </p:sp>
@@ -12386,8 +15683,8 @@
         </p:nvSpPr>
         <p:spPr>
           <a:xfrm>
-            <a:off x="685800" y="5253228"/>
-            <a:ext cx="10820095" cy="694944"/>
+            <a:off x="685800" y="1618488"/>
+            <a:ext cx="10820095" cy="352044"/>
           </a:xfrm>
           <a:prstGeom prst="rect">
             <a:avLst/>
@@ -12409,102 +15706,44 @@
               </a:lnSpc>
             </a:pPr>
             <a:r>
-              <a:rPr lang="en-US" sz="2100" dirty="0">
-                <a:solidFill>
-                  <a:srgbClr val="16171D"/>
-                </a:solidFill>
-                <a:latin typeface="Segoe UI"/>
-                <a:cs typeface="Segoe UI"/>
-              </a:rPr>
-              <a:t xml:space="preserve">Today: bell work → Topic 1 catch-up (Write, evaluate and solve a function in context) → Lesson 3, Day 1.</a:t>
-            </a:r>
-            <a:endParaRPr lang="en-US" sz="2100" dirty="0"/>
-          </a:p>
-        </p:txBody>
-      </p:sp>
-      <p:sp>
-        <p:nvSpPr>
-          <p:cNvPr id="5" name="Slide Number 5"/>
-          <p:cNvSpPr txBox="1"/>
-          <p:nvPr/>
-        </p:nvSpPr>
-        <p:spPr>
-          <a:xfrm>
-            <a:off x="11277295" y="6611112"/>
-            <a:ext cx="685800" cy="201168"/>
-          </a:xfrm>
-          <a:prstGeom prst="rect">
-            <a:avLst/>
-          </a:prstGeom>
-          <a:noFill/>
-        </p:spPr>
-        <p:txBody>
-          <a:bodyPr wrap="none" lIns="0" tIns="0" rIns="0" bIns="0" anchor="b">
-            <a:noAutofit/>
-          </a:bodyPr>
-          <a:lstStyle/>
-          <a:p>
-            <a:pPr algn="r"/>
-            <a:fld id="{5C1A6E0B-3B1F-4D5E-9C7A-2F4B8D6E1A90}" type="slidenum">
-              <a:rPr lang="en-US" sz="1200" dirty="0">
-                <a:solidFill>
-                  <a:srgbClr val="5F6272"/>
-                </a:solidFill>
-              </a:rPr>
-              <a:t>2</a:t>
-            </a:fld>
-          </a:p>
-        </p:txBody>
-      </p:sp>
-    </p:spTree>
-  </p:cSld>
-  <p:clrMapOvr>
-    <a:masterClrMapping/>
-  </p:clrMapOvr>
-  <p:transition spd="med">
-    <p:fade/>
-  </p:transition>
-</p:sld>
-</file>
-
-<file path=ppt/slides/slide20.xml><?xml version="1.0" encoding="utf-8"?>
-<p:sld xmlns:a="http://schemas.openxmlformats.org/drawingml/2006/main" xmlns:r="http://schemas.openxmlformats.org/officeDocument/2006/relationships" xmlns:p="http://schemas.openxmlformats.org/presentationml/2006/main">
-  <p:cSld>
-    <p:spTree>
-      <p:nvGrpSpPr>
-        <p:cNvPr id="1" name=""/>
-        <p:cNvGrpSpPr/>
-        <p:nvPr/>
-      </p:nvGrpSpPr>
-      <p:grpSpPr>
-        <a:xfrm>
-          <a:off x="0" y="0"/>
-          <a:ext cx="0" cy="0"/>
-          <a:chOff x="0" y="0"/>
-          <a:chExt cx="0" cy="0"/>
-        </a:xfrm>
-      </p:grpSpPr>
-      <p:sp>
-        <p:nvSpPr>
-          <p:cNvPr id="2" name="Shape 2"/>
-          <p:cNvSpPr txBox="1"/>
-          <p:nvPr/>
-        </p:nvSpPr>
-        <p:spPr>
-          <a:xfrm>
-            <a:off x="685800" y="457200"/>
-            <a:ext cx="10820095" cy="237744"/>
-          </a:xfrm>
-          <a:prstGeom prst="rect">
-            <a:avLst/>
-          </a:prstGeom>
-          <a:noFill/>
+              <a:rPr lang="en-US" sz="1950" dirty="0">
+                <a:solidFill>
+                  <a:srgbClr val="16171D"/>
+                </a:solidFill>
+                <a:latin typeface="Segoe UI"/>
+                <a:cs typeface="Segoe UI"/>
+              </a:rPr>
+              <a:t xml:space="preserve">New slope: ____</a:t>
+            </a:r>
+            <a:endParaRPr lang="en-US" sz="1950" dirty="0"/>
+          </a:p>
+        </p:txBody>
+      </p:sp>
+      <p:sp>
+        <p:nvSpPr>
+          <p:cNvPr id="5" name="Shape 5"/>
+          <p:cNvSpPr txBox="1"/>
+          <p:nvPr/>
+        </p:nvSpPr>
+        <p:spPr>
+          <a:xfrm>
+            <a:off x="685800" y="2141982"/>
+            <a:ext cx="2576368" cy="518922"/>
+          </a:xfrm>
+          <a:prstGeom prst="roundRect">
+            <a:avLst>
+              <a:gd name="adj" fmla="val 8000"/>
+            </a:avLst>
+          </a:prstGeom>
+          <a:solidFill>
+            <a:srgbClr val="EDF5E9"/>
+          </a:solidFill>
           <a:ln>
             <a:noFill/>
           </a:ln>
         </p:spPr>
         <p:txBody>
-          <a:bodyPr wrap="square" lIns="36576" tIns="27432" rIns="36576" bIns="27432" anchor="t">
+          <a:bodyPr wrap="square" lIns="164592" tIns="64008" rIns="164592" bIns="64008" anchor="ctr">
             <a:noAutofit/>
           </a:bodyPr>
           <a:lstStyle/>
@@ -12515,29 +15754,69 @@
               </a:lnSpc>
             </a:pPr>
             <a:r>
-              <a:rPr lang="en-US" sz="1200" dirty="0" b="1" spc="150" cap="all">
-                <a:solidFill>
-                  <a:srgbClr val="5F6272"/>
-                </a:solidFill>
-                <a:latin typeface="Segoe UI"/>
-                <a:cs typeface="Segoe UI"/>
-              </a:rPr>
-              <a:t xml:space="preserve">You do · Try it</a:t>
-            </a:r>
-            <a:endParaRPr lang="en-US" sz="1200" dirty="0"/>
-          </a:p>
-        </p:txBody>
-      </p:sp>
-      <p:sp>
-        <p:nvSpPr>
-          <p:cNvPr id="3" name="Shape 3"/>
-          <p:cNvSpPr txBox="1"/>
-          <p:nvPr/>
-        </p:nvSpPr>
-        <p:spPr>
-          <a:xfrm>
-            <a:off x="685800" y="866394"/>
-            <a:ext cx="10820095" cy="580644"/>
+              <a:rPr lang="en-US" sz="1125" dirty="0" b="1" spc="100">
+                <a:solidFill>
+                  <a:srgbClr val="4F8A3C"/>
+                </a:solidFill>
+                <a:latin typeface="Segoe UI"/>
+                <a:cs typeface="Segoe UI"/>
+              </a:rPr>
+              <a:t xml:space="preserve">ANSWER   </a:t>
+            </a:r>
+            <a:r>
+              <a:rPr lang="en-US" sz="2325" dirty="0">
+                <a:solidFill>
+                  <a:srgbClr val="16171D"/>
+                </a:solidFill>
+                <a:latin typeface="Cambria"/>
+                <a:cs typeface="Cambria"/>
+              </a:rPr>
+              <a:t xml:space="preserve">−</a:t>
+            </a:r>
+            <a:r>
+              <a:rPr lang="en-US" sz="2325" dirty="0">
+                <a:solidFill>
+                  <a:srgbClr val="16171D"/>
+                </a:solidFill>
+                <a:latin typeface="Cambria"/>
+                <a:cs typeface="Cambria"/>
+              </a:rPr>
+              <a:t xml:space="preserve">1</a:t>
+            </a:r>
+            <a:r>
+              <a:rPr lang="en-US" sz="2325" dirty="0">
+                <a:solidFill>
+                  <a:srgbClr val="16171D"/>
+                </a:solidFill>
+                <a:latin typeface="Cambria"/>
+                <a:cs typeface="Cambria"/>
+              </a:rPr>
+              <a:t xml:space="preserve">/</a:t>
+            </a:r>
+            <a:r>
+              <a:rPr lang="en-US" sz="2325" dirty="0">
+                <a:solidFill>
+                  <a:srgbClr val="16171D"/>
+                </a:solidFill>
+                <a:latin typeface="Cambria"/>
+                <a:cs typeface="Cambria"/>
+              </a:rPr>
+              <a:t xml:space="preserve">3</a:t>
+            </a:r>
+            <a:endParaRPr lang="en-US" sz="2325" dirty="0"/>
+          </a:p>
+        </p:txBody>
+      </p:sp>
+      <p:sp>
+        <p:nvSpPr>
+          <p:cNvPr id="6" name="Shape 6"/>
+          <p:cNvSpPr txBox="1"/>
+          <p:nvPr/>
+        </p:nvSpPr>
+        <p:spPr>
+          <a:xfrm>
+            <a:off x="685800" y="2832354"/>
+            <a:ext cx="10820095" cy="352044"/>
           </a:xfrm>
           <a:prstGeom prst="rect">
             <a:avLst/>
@@ -12559,17 +15838,7 @@
               </a:lnSpc>
             </a:pPr>
             <a:r>
-              <a:rPr lang="en-US" sz="3450" dirty="0" b="1">
-                <a:solidFill>
-                  <a:srgbClr val="16171D"/>
-                </a:solidFill>
-                <a:latin typeface="Segoe UI"/>
-                <a:cs typeface="Segoe UI"/>
-              </a:rPr>
-              <a:t xml:space="preserve">⊥ to </a:t>
-            </a:r>
-            <a:r>
-              <a:rPr lang="en-US" sz="3450" dirty="0" b="1" i="1">
+              <a:rPr lang="en-US" sz="1950" dirty="0" i="1">
                 <a:solidFill>
                   <a:srgbClr val="16171D"/>
                 </a:solidFill>
@@ -12579,17 +15848,17 @@
               <a:t xml:space="preserve">y</a:t>
             </a:r>
             <a:r>
-              <a:rPr lang="en-US" sz="3450" dirty="0" b="1">
-                <a:solidFill>
-                  <a:srgbClr val="16171D"/>
-                </a:solidFill>
-                <a:latin typeface="Segoe UI"/>
-                <a:cs typeface="Segoe UI"/>
-              </a:rPr>
-              <a:t xml:space="preserve"> = 3</a:t>
-            </a:r>
-            <a:r>
-              <a:rPr lang="en-US" sz="3450" dirty="0" b="1" i="1">
+              <a:rPr lang="en-US" sz="1950" dirty="0">
+                <a:solidFill>
+                  <a:srgbClr val="16171D"/>
+                </a:solidFill>
+                <a:latin typeface="Segoe UI"/>
+                <a:cs typeface="Segoe UI"/>
+              </a:rPr>
+              <a:t xml:space="preserve"> − 1 = ____(</a:t>
+            </a:r>
+            <a:r>
+              <a:rPr lang="en-US" sz="1950" dirty="0" i="1">
                 <a:solidFill>
                   <a:srgbClr val="16171D"/>
                 </a:solidFill>
@@ -12599,40 +15868,44 @@
               <a:t xml:space="preserve">x</a:t>
             </a:r>
             <a:r>
-              <a:rPr lang="en-US" sz="3450" dirty="0" b="1">
-                <a:solidFill>
-                  <a:srgbClr val="16171D"/>
-                </a:solidFill>
-                <a:latin typeface="Segoe UI"/>
-                <a:cs typeface="Segoe UI"/>
-              </a:rPr>
-              <a:t xml:space="preserve">, through (3, 1)</a:t>
-            </a:r>
-            <a:endParaRPr lang="en-US" sz="3450" dirty="0"/>
-          </a:p>
-        </p:txBody>
-      </p:sp>
-      <p:sp>
-        <p:nvSpPr>
-          <p:cNvPr id="4" name="Shape 4"/>
-          <p:cNvSpPr txBox="1"/>
-          <p:nvPr/>
-        </p:nvSpPr>
-        <p:spPr>
-          <a:xfrm>
-            <a:off x="685800" y="1618488"/>
-            <a:ext cx="10820095" cy="352044"/>
-          </a:xfrm>
-          <a:prstGeom prst="rect">
-            <a:avLst/>
-          </a:prstGeom>
-          <a:noFill/>
+              <a:rPr lang="en-US" sz="1950" dirty="0">
+                <a:solidFill>
+                  <a:srgbClr val="16171D"/>
+                </a:solidFill>
+                <a:latin typeface="Segoe UI"/>
+                <a:cs typeface="Segoe UI"/>
+              </a:rPr>
+              <a:t xml:space="preserve"> − 3)</a:t>
+            </a:r>
+            <a:endParaRPr lang="en-US" sz="1950" dirty="0"/>
+          </a:p>
+        </p:txBody>
+      </p:sp>
+      <p:sp>
+        <p:nvSpPr>
+          <p:cNvPr id="7" name="Shape 7"/>
+          <p:cNvSpPr txBox="1"/>
+          <p:nvPr/>
+        </p:nvSpPr>
+        <p:spPr>
+          <a:xfrm>
+            <a:off x="685800" y="3355848"/>
+            <a:ext cx="5063764" cy="518922"/>
+          </a:xfrm>
+          <a:prstGeom prst="roundRect">
+            <a:avLst>
+              <a:gd name="adj" fmla="val 8000"/>
+            </a:avLst>
+          </a:prstGeom>
+          <a:solidFill>
+            <a:srgbClr val="EDF5E9"/>
+          </a:solidFill>
           <a:ln>
             <a:noFill/>
           </a:ln>
         </p:spPr>
         <p:txBody>
-          <a:bodyPr wrap="square" lIns="36576" tIns="27432" rIns="36576" bIns="27432" anchor="t">
+          <a:bodyPr wrap="square" lIns="164592" tIns="64008" rIns="164592" bIns="64008" anchor="ctr">
             <a:noAutofit/>
           </a:bodyPr>
           <a:lstStyle/>
@@ -12643,6 +15916,140 @@
               </a:lnSpc>
             </a:pPr>
             <a:r>
+              <a:rPr lang="en-US" sz="1125" dirty="0" b="1" spc="100">
+                <a:solidFill>
+                  <a:srgbClr val="4F8A3C"/>
+                </a:solidFill>
+                <a:latin typeface="Segoe UI"/>
+                <a:cs typeface="Segoe UI"/>
+              </a:rPr>
+              <a:t xml:space="preserve">ANSWER   </a:t>
+            </a:r>
+            <a:r>
+              <a:rPr lang="en-US" sz="2325" dirty="0" i="1">
+                <a:solidFill>
+                  <a:srgbClr val="16171D"/>
+                </a:solidFill>
+                <a:latin typeface="Cambria"/>
+                <a:cs typeface="Cambria"/>
+              </a:rPr>
+              <a:t xml:space="preserve">y</a:t>
+            </a:r>
+            <a:r>
+              <a:rPr lang="en-US" sz="2325" dirty="0">
+                <a:solidFill>
+                  <a:srgbClr val="16171D"/>
+                </a:solidFill>
+                <a:latin typeface="Cambria"/>
+                <a:cs typeface="Cambria"/>
+              </a:rPr>
+              <a:t xml:space="preserve"> − 1 = −</a:t>
+            </a:r>
+            <a:r>
+              <a:rPr lang="en-US" sz="2325" dirty="0">
+                <a:solidFill>
+                  <a:srgbClr val="16171D"/>
+                </a:solidFill>
+                <a:latin typeface="Cambria"/>
+                <a:cs typeface="Cambria"/>
+              </a:rPr>
+              <a:t xml:space="preserve">1</a:t>
+            </a:r>
+            <a:r>
+              <a:rPr lang="en-US" sz="2325" dirty="0">
+                <a:solidFill>
+                  <a:srgbClr val="16171D"/>
+                </a:solidFill>
+                <a:latin typeface="Cambria"/>
+                <a:cs typeface="Cambria"/>
+              </a:rPr>
+              <a:t xml:space="preserve">/</a:t>
+            </a:r>
+            <a:r>
+              <a:rPr lang="en-US" sz="2325" dirty="0">
+                <a:solidFill>
+                  <a:srgbClr val="16171D"/>
+                </a:solidFill>
+                <a:latin typeface="Cambria"/>
+                <a:cs typeface="Cambria"/>
+              </a:rPr>
+              <a:t xml:space="preserve">3</a:t>
+            </a:r>
+            <a:r>
+              <a:rPr lang="en-US" sz="2325" dirty="0">
+                <a:solidFill>
+                  <a:srgbClr val="16171D"/>
+                </a:solidFill>
+                <a:latin typeface="Cambria"/>
+                <a:cs typeface="Cambria"/>
+              </a:rPr>
+              <a:t xml:space="preserve">(</a:t>
+            </a:r>
+            <a:r>
+              <a:rPr lang="en-US" sz="2325" dirty="0" i="1">
+                <a:solidFill>
+                  <a:srgbClr val="16171D"/>
+                </a:solidFill>
+                <a:latin typeface="Cambria"/>
+                <a:cs typeface="Cambria"/>
+              </a:rPr>
+              <a:t xml:space="preserve">x</a:t>
+            </a:r>
+            <a:r>
+              <a:rPr lang="en-US" sz="2325" dirty="0">
+                <a:solidFill>
+                  <a:srgbClr val="16171D"/>
+                </a:solidFill>
+                <a:latin typeface="Cambria"/>
+                <a:cs typeface="Cambria"/>
+              </a:rPr>
+              <a:t xml:space="preserve"> − 3)</a:t>
+            </a:r>
+            <a:endParaRPr lang="en-US" sz="2325" dirty="0"/>
+          </a:p>
+        </p:txBody>
+      </p:sp>
+      <p:sp>
+        <p:nvSpPr>
+          <p:cNvPr id="8" name="Shape 8"/>
+          <p:cNvSpPr txBox="1"/>
+          <p:nvPr/>
+        </p:nvSpPr>
+        <p:spPr>
+          <a:xfrm>
+            <a:off x="685800" y="4046220"/>
+            <a:ext cx="10820095" cy="352044"/>
+          </a:xfrm>
+          <a:prstGeom prst="rect">
+            <a:avLst/>
+          </a:prstGeom>
+          <a:noFill/>
+          <a:ln>
+            <a:noFill/>
+          </a:ln>
+        </p:spPr>
+        <p:txBody>
+          <a:bodyPr wrap="square" lIns="36576" tIns="27432" rIns="36576" bIns="27432" anchor="t">
+            <a:noAutofit/>
+          </a:bodyPr>
+          <a:lstStyle/>
+          <a:p>
+            <a:pPr algn="l">
+              <a:lnSpc>
+                <a:spcPct val="100000"/>
+              </a:lnSpc>
+            </a:pPr>
+            <a:r>
+              <a:rPr lang="en-US" sz="1950" dirty="0" i="1">
+                <a:solidFill>
+                  <a:srgbClr val="16171D"/>
+                </a:solidFill>
+                <a:latin typeface="Segoe UI"/>
+                <a:cs typeface="Segoe UI"/>
+              </a:rPr>
+              <a:t xml:space="preserve">y</a:t>
+            </a:r>
+            <a:r>
               <a:rPr lang="en-US" sz="1950" dirty="0">
                 <a:solidFill>
                   <a:srgbClr val="16171D"/>
@@ -12650,7 +16057,7 @@
                 <a:latin typeface="Segoe UI"/>
                 <a:cs typeface="Segoe UI"/>
               </a:rPr>
-              <a:t xml:space="preserve">New slope: ____</a:t>
+              <a:t xml:space="preserve"> = ____</a:t>
             </a:r>
             <a:endParaRPr lang="en-US" sz="1950" dirty="0"/>
           </a:p>
@@ -12658,14 +16065,14 @@
       </p:sp>
       <p:sp>
         <p:nvSpPr>
-          <p:cNvPr id="5" name="Shape 5"/>
-          <p:cNvSpPr txBox="1"/>
-          <p:nvPr/>
-        </p:nvSpPr>
-        <p:spPr>
-          <a:xfrm>
-            <a:off x="685800" y="2141982"/>
-            <a:ext cx="2576368" cy="518922"/>
+          <p:cNvPr id="9" name="Shape 9"/>
+          <p:cNvSpPr txBox="1"/>
+          <p:nvPr/>
+        </p:nvSpPr>
+        <p:spPr>
+          <a:xfrm>
+            <a:off x="685800" y="4569714"/>
+            <a:ext cx="4068806" cy="518922"/>
           </a:xfrm>
           <a:prstGeom prst="roundRect">
             <a:avLst>
@@ -12701,350 +16108,6 @@
               <a:t xml:space="preserve">ANSWER   </a:t>
             </a:r>
             <a:r>
-              <a:rPr lang="en-US" sz="2325" dirty="0">
-                <a:solidFill>
-                  <a:srgbClr val="16171D"/>
-                </a:solidFill>
-                <a:latin typeface="Cambria"/>
-                <a:cs typeface="Cambria"/>
-              </a:rPr>
-              <a:t xml:space="preserve">−</a:t>
-            </a:r>
-            <a:r>
-              <a:rPr lang="en-US" sz="2325" dirty="0">
-                <a:solidFill>
-                  <a:srgbClr val="16171D"/>
-                </a:solidFill>
-                <a:latin typeface="Cambria"/>
-                <a:cs typeface="Cambria"/>
-              </a:rPr>
-              <a:t xml:space="preserve">1</a:t>
-            </a:r>
-            <a:r>
-              <a:rPr lang="en-US" sz="2325" dirty="0">
-                <a:solidFill>
-                  <a:srgbClr val="16171D"/>
-                </a:solidFill>
-                <a:latin typeface="Cambria"/>
-                <a:cs typeface="Cambria"/>
-              </a:rPr>
-              <a:t xml:space="preserve">/</a:t>
-            </a:r>
-            <a:r>
-              <a:rPr lang="en-US" sz="2325" dirty="0">
-                <a:solidFill>
-                  <a:srgbClr val="16171D"/>
-                </a:solidFill>
-                <a:latin typeface="Cambria"/>
-                <a:cs typeface="Cambria"/>
-              </a:rPr>
-              <a:t xml:space="preserve">3</a:t>
-            </a:r>
-            <a:endParaRPr lang="en-US" sz="2325" dirty="0"/>
-          </a:p>
-        </p:txBody>
-      </p:sp>
-      <p:sp>
-        <p:nvSpPr>
-          <p:cNvPr id="6" name="Shape 6"/>
-          <p:cNvSpPr txBox="1"/>
-          <p:nvPr/>
-        </p:nvSpPr>
-        <p:spPr>
-          <a:xfrm>
-            <a:off x="685800" y="2832354"/>
-            <a:ext cx="10820095" cy="352044"/>
-          </a:xfrm>
-          <a:prstGeom prst="rect">
-            <a:avLst/>
-          </a:prstGeom>
-          <a:noFill/>
-          <a:ln>
-            <a:noFill/>
-          </a:ln>
-        </p:spPr>
-        <p:txBody>
-          <a:bodyPr wrap="square" lIns="36576" tIns="27432" rIns="36576" bIns="27432" anchor="t">
-            <a:noAutofit/>
-          </a:bodyPr>
-          <a:lstStyle/>
-          <a:p>
-            <a:pPr algn="l">
-              <a:lnSpc>
-                <a:spcPct val="100000"/>
-              </a:lnSpc>
-            </a:pPr>
-            <a:r>
-              <a:rPr lang="en-US" sz="1950" dirty="0" i="1">
-                <a:solidFill>
-                  <a:srgbClr val="16171D"/>
-                </a:solidFill>
-                <a:latin typeface="Segoe UI"/>
-                <a:cs typeface="Segoe UI"/>
-              </a:rPr>
-              <a:t xml:space="preserve">y</a:t>
-            </a:r>
-            <a:r>
-              <a:rPr lang="en-US" sz="1950" dirty="0">
-                <a:solidFill>
-                  <a:srgbClr val="16171D"/>
-                </a:solidFill>
-                <a:latin typeface="Segoe UI"/>
-                <a:cs typeface="Segoe UI"/>
-              </a:rPr>
-              <a:t xml:space="preserve"> − 1 = ____(</a:t>
-            </a:r>
-            <a:r>
-              <a:rPr lang="en-US" sz="1950" dirty="0" i="1">
-                <a:solidFill>
-                  <a:srgbClr val="16171D"/>
-                </a:solidFill>
-                <a:latin typeface="Segoe UI"/>
-                <a:cs typeface="Segoe UI"/>
-              </a:rPr>
-              <a:t xml:space="preserve">x</a:t>
-            </a:r>
-            <a:r>
-              <a:rPr lang="en-US" sz="1950" dirty="0">
-                <a:solidFill>
-                  <a:srgbClr val="16171D"/>
-                </a:solidFill>
-                <a:latin typeface="Segoe UI"/>
-                <a:cs typeface="Segoe UI"/>
-              </a:rPr>
-              <a:t xml:space="preserve"> − 3)</a:t>
-            </a:r>
-            <a:endParaRPr lang="en-US" sz="1950" dirty="0"/>
-          </a:p>
-        </p:txBody>
-      </p:sp>
-      <p:sp>
-        <p:nvSpPr>
-          <p:cNvPr id="7" name="Shape 7"/>
-          <p:cNvSpPr txBox="1"/>
-          <p:nvPr/>
-        </p:nvSpPr>
-        <p:spPr>
-          <a:xfrm>
-            <a:off x="685800" y="3355848"/>
-            <a:ext cx="5063764" cy="518922"/>
-          </a:xfrm>
-          <a:prstGeom prst="roundRect">
-            <a:avLst>
-              <a:gd name="adj" fmla="val 8000"/>
-            </a:avLst>
-          </a:prstGeom>
-          <a:solidFill>
-            <a:srgbClr val="EDF5E9"/>
-          </a:solidFill>
-          <a:ln>
-            <a:noFill/>
-          </a:ln>
-        </p:spPr>
-        <p:txBody>
-          <a:bodyPr wrap="square" lIns="164592" tIns="64008" rIns="164592" bIns="64008" anchor="ctr">
-            <a:noAutofit/>
-          </a:bodyPr>
-          <a:lstStyle/>
-          <a:p>
-            <a:pPr algn="l">
-              <a:lnSpc>
-                <a:spcPct val="100000"/>
-              </a:lnSpc>
-            </a:pPr>
-            <a:r>
-              <a:rPr lang="en-US" sz="1125" dirty="0" b="1" spc="100">
-                <a:solidFill>
-                  <a:srgbClr val="4F8A3C"/>
-                </a:solidFill>
-                <a:latin typeface="Segoe UI"/>
-                <a:cs typeface="Segoe UI"/>
-              </a:rPr>
-              <a:t xml:space="preserve">ANSWER   </a:t>
-            </a:r>
-            <a:r>
-              <a:rPr lang="en-US" sz="2325" dirty="0" i="1">
-                <a:solidFill>
-                  <a:srgbClr val="16171D"/>
-                </a:solidFill>
-                <a:latin typeface="Cambria"/>
-                <a:cs typeface="Cambria"/>
-              </a:rPr>
-              <a:t xml:space="preserve">y</a:t>
-            </a:r>
-            <a:r>
-              <a:rPr lang="en-US" sz="2325" dirty="0">
-                <a:solidFill>
-                  <a:srgbClr val="16171D"/>
-                </a:solidFill>
-                <a:latin typeface="Cambria"/>
-                <a:cs typeface="Cambria"/>
-              </a:rPr>
-              <a:t xml:space="preserve"> − 1 = −</a:t>
-            </a:r>
-            <a:r>
-              <a:rPr lang="en-US" sz="2325" dirty="0">
-                <a:solidFill>
-                  <a:srgbClr val="16171D"/>
-                </a:solidFill>
-                <a:latin typeface="Cambria"/>
-                <a:cs typeface="Cambria"/>
-              </a:rPr>
-              <a:t xml:space="preserve">1</a:t>
-            </a:r>
-            <a:r>
-              <a:rPr lang="en-US" sz="2325" dirty="0">
-                <a:solidFill>
-                  <a:srgbClr val="16171D"/>
-                </a:solidFill>
-                <a:latin typeface="Cambria"/>
-                <a:cs typeface="Cambria"/>
-              </a:rPr>
-              <a:t xml:space="preserve">/</a:t>
-            </a:r>
-            <a:r>
-              <a:rPr lang="en-US" sz="2325" dirty="0">
-                <a:solidFill>
-                  <a:srgbClr val="16171D"/>
-                </a:solidFill>
-                <a:latin typeface="Cambria"/>
-                <a:cs typeface="Cambria"/>
-              </a:rPr>
-              <a:t xml:space="preserve">3</a:t>
-            </a:r>
-            <a:r>
-              <a:rPr lang="en-US" sz="2325" dirty="0">
-                <a:solidFill>
-                  <a:srgbClr val="16171D"/>
-                </a:solidFill>
-                <a:latin typeface="Cambria"/>
-                <a:cs typeface="Cambria"/>
-              </a:rPr>
-              <a:t xml:space="preserve">(</a:t>
-            </a:r>
-            <a:r>
-              <a:rPr lang="en-US" sz="2325" dirty="0" i="1">
-                <a:solidFill>
-                  <a:srgbClr val="16171D"/>
-                </a:solidFill>
-                <a:latin typeface="Cambria"/>
-                <a:cs typeface="Cambria"/>
-              </a:rPr>
-              <a:t xml:space="preserve">x</a:t>
-            </a:r>
-            <a:r>
-              <a:rPr lang="en-US" sz="2325" dirty="0">
-                <a:solidFill>
-                  <a:srgbClr val="16171D"/>
-                </a:solidFill>
-                <a:latin typeface="Cambria"/>
-                <a:cs typeface="Cambria"/>
-              </a:rPr>
-              <a:t xml:space="preserve"> − 3)</a:t>
-            </a:r>
-            <a:endParaRPr lang="en-US" sz="2325" dirty="0"/>
-          </a:p>
-        </p:txBody>
-      </p:sp>
-      <p:sp>
-        <p:nvSpPr>
-          <p:cNvPr id="8" name="Shape 8"/>
-          <p:cNvSpPr txBox="1"/>
-          <p:nvPr/>
-        </p:nvSpPr>
-        <p:spPr>
-          <a:xfrm>
-            <a:off x="685800" y="4046220"/>
-            <a:ext cx="10820095" cy="352044"/>
-          </a:xfrm>
-          <a:prstGeom prst="rect">
-            <a:avLst/>
-          </a:prstGeom>
-          <a:noFill/>
-          <a:ln>
-            <a:noFill/>
-          </a:ln>
-        </p:spPr>
-        <p:txBody>
-          <a:bodyPr wrap="square" lIns="36576" tIns="27432" rIns="36576" bIns="27432" anchor="t">
-            <a:noAutofit/>
-          </a:bodyPr>
-          <a:lstStyle/>
-          <a:p>
-            <a:pPr algn="l">
-              <a:lnSpc>
-                <a:spcPct val="100000"/>
-              </a:lnSpc>
-            </a:pPr>
-            <a:r>
-              <a:rPr lang="en-US" sz="1950" dirty="0" i="1">
-                <a:solidFill>
-                  <a:srgbClr val="16171D"/>
-                </a:solidFill>
-                <a:latin typeface="Segoe UI"/>
-                <a:cs typeface="Segoe UI"/>
-              </a:rPr>
-              <a:t xml:space="preserve">y</a:t>
-            </a:r>
-            <a:r>
-              <a:rPr lang="en-US" sz="1950" dirty="0">
-                <a:solidFill>
-                  <a:srgbClr val="16171D"/>
-                </a:solidFill>
-                <a:latin typeface="Segoe UI"/>
-                <a:cs typeface="Segoe UI"/>
-              </a:rPr>
-              <a:t xml:space="preserve"> = ____</a:t>
-            </a:r>
-            <a:endParaRPr lang="en-US" sz="1950" dirty="0"/>
-          </a:p>
-        </p:txBody>
-      </p:sp>
-      <p:sp>
-        <p:nvSpPr>
-          <p:cNvPr id="9" name="Shape 9"/>
-          <p:cNvSpPr txBox="1"/>
-          <p:nvPr/>
-        </p:nvSpPr>
-        <p:spPr>
-          <a:xfrm>
-            <a:off x="685800" y="4569714"/>
-            <a:ext cx="4068806" cy="518922"/>
-          </a:xfrm>
-          <a:prstGeom prst="roundRect">
-            <a:avLst>
-              <a:gd name="adj" fmla="val 8000"/>
-            </a:avLst>
-          </a:prstGeom>
-          <a:solidFill>
-            <a:srgbClr val="EDF5E9"/>
-          </a:solidFill>
-          <a:ln>
-            <a:noFill/>
-          </a:ln>
-        </p:spPr>
-        <p:txBody>
-          <a:bodyPr wrap="square" lIns="164592" tIns="64008" rIns="164592" bIns="64008" anchor="ctr">
-            <a:noAutofit/>
-          </a:bodyPr>
-          <a:lstStyle/>
-          <a:p>
-            <a:pPr algn="l">
-              <a:lnSpc>
-                <a:spcPct val="100000"/>
-              </a:lnSpc>
-            </a:pPr>
-            <a:r>
-              <a:rPr lang="en-US" sz="1125" dirty="0" b="1" spc="100">
-                <a:solidFill>
-                  <a:srgbClr val="4F8A3C"/>
-                </a:solidFill>
-                <a:latin typeface="Segoe UI"/>
-                <a:cs typeface="Segoe UI"/>
-              </a:rPr>
-              <a:t xml:space="preserve">ANSWER   </a:t>
-            </a:r>
-            <a:r>
               <a:rPr lang="en-US" sz="2325" dirty="0" i="1">
                 <a:solidFill>
                   <a:srgbClr val="16171D"/>
@@ -13147,7 +16210,7 @@
                   <a:srgbClr val="5F6272"/>
                 </a:solidFill>
               </a:rPr>
-              <a:t>20</a:t>
+              <a:t>21</a:t>
             </a:fld>
           </a:p>
         </p:txBody>
@@ -13490,7 +16553,7 @@
 </p:sld>
 </file>
 
-<file path=ppt/slides/slide21.xml><?xml version="1.0" encoding="utf-8"?>
+<file path=ppt/slides/slide22.xml><?xml version="1.0" encoding="utf-8"?>
 <p:sld xmlns:a="http://schemas.openxmlformats.org/drawingml/2006/main" xmlns:r="http://schemas.openxmlformats.org/officeDocument/2006/relationships" xmlns:p="http://schemas.openxmlformats.org/presentationml/2006/main">
   <p:cSld>
     <p:spTree>
@@ -13545,7 +16608,7 @@
                 <a:latin typeface="Segoe UI"/>
                 <a:cs typeface="Segoe UI"/>
               </a:rPr>
-              <a:t xml:space="preserve">Exit Ticket</a:t>
+              <a:t xml:space="preserve">Check it · Step by step</a:t>
             </a:r>
             <a:endParaRPr lang="en-US" sz="1200" dirty="0"/>
           </a:p>
@@ -13589,7 +16652,47 @@
                 <a:latin typeface="Segoe UI"/>
                 <a:cs typeface="Segoe UI"/>
               </a:rPr>
-              <a:t xml:space="preserve">Show what you know</a:t>
+              <a:t xml:space="preserve">⊥ to </a:t>
+            </a:r>
+            <a:r>
+              <a:rPr lang="en-US" sz="3450" dirty="0" b="1" i="1">
+                <a:solidFill>
+                  <a:srgbClr val="16171D"/>
+                </a:solidFill>
+                <a:latin typeface="Segoe UI"/>
+                <a:cs typeface="Segoe UI"/>
+              </a:rPr>
+              <a:t xml:space="preserve">y</a:t>
+            </a:r>
+            <a:r>
+              <a:rPr lang="en-US" sz="3450" dirty="0" b="1">
+                <a:solidFill>
+                  <a:srgbClr val="16171D"/>
+                </a:solidFill>
+                <a:latin typeface="Segoe UI"/>
+                <a:cs typeface="Segoe UI"/>
+              </a:rPr>
+              <a:t xml:space="preserve"> = 3</a:t>
+            </a:r>
+            <a:r>
+              <a:rPr lang="en-US" sz="3450" dirty="0" b="1" i="1">
+                <a:solidFill>
+                  <a:srgbClr val="16171D"/>
+                </a:solidFill>
+                <a:latin typeface="Segoe UI"/>
+                <a:cs typeface="Segoe UI"/>
+              </a:rPr>
+              <a:t xml:space="preserve">x</a:t>
+            </a:r>
+            <a:r>
+              <a:rPr lang="en-US" sz="3450" dirty="0" b="1">
+                <a:solidFill>
+                  <a:srgbClr val="16171D"/>
+                </a:solidFill>
+                <a:latin typeface="Segoe UI"/>
+                <a:cs typeface="Segoe UI"/>
+              </a:rPr>
+              <a:t xml:space="preserve">, through (3, 1)</a:t>
             </a:r>
             <a:endParaRPr lang="en-US" sz="3450" dirty="0"/>
           </a:p>
@@ -13597,14 +16700,14 @@
       </p:sp>
       <p:sp>
         <p:nvSpPr>
-          <p:cNvPr id="6" name="Shape 6"/>
+          <p:cNvPr id="11" name="Shape 11"/>
           <p:cNvSpPr txBox="1"/>
           <p:nvPr/>
         </p:nvSpPr>
         <p:spPr>
           <a:xfrm>
             <a:off x="685800" y="1618488"/>
-            <a:ext cx="10820095" cy="1309116"/>
+            <a:ext cx="10820095" cy="3282696"/>
           </a:xfrm>
           <a:prstGeom prst="roundRect">
             <a:avLst>
@@ -13644,7 +16747,7 @@
         <p:spPr>
           <a:xfrm>
             <a:off x="895350" y="1789938"/>
-            <a:ext cx="10400995" cy="352044"/>
+            <a:ext cx="10400995" cy="374904"/>
           </a:xfrm>
           <a:prstGeom prst="rect">
             <a:avLst/>
@@ -13666,17 +16769,145 @@
               </a:lnSpc>
             </a:pPr>
             <a:r>
-              <a:rPr lang="en-US" sz="1950" dirty="0">
-                <a:solidFill>
-                  <a:srgbClr val="16171D"/>
-                </a:solidFill>
-                <a:latin typeface="Segoe UI"/>
-                <a:cs typeface="Segoe UI"/>
-              </a:rPr>
-              <a:t xml:space="preserve">1. What slope is perpendicular to </a:t>
-            </a:r>
-            <a:r>
-              <a:rPr lang="en-US" sz="1950" dirty="0">
+              <a:rPr lang="en-US" sz="2100" dirty="0" b="1">
+                <a:solidFill>
+                  <a:srgbClr val="16171D"/>
+                </a:solidFill>
+                <a:latin typeface="Segoe UI"/>
+                <a:cs typeface="Segoe UI"/>
+              </a:rPr>
+              <a:t xml:space="preserve">Write the perpendicular line</a:t>
+            </a:r>
+            <a:endParaRPr lang="en-US" sz="2100" dirty="0"/>
+          </a:p>
+        </p:txBody>
+      </p:sp>
+      <p:sp>
+        <p:nvSpPr>
+          <p:cNvPr id="5" name="Shape 5"/>
+          <p:cNvSpPr txBox="1"/>
+          <p:nvPr/>
+        </p:nvSpPr>
+        <p:spPr>
+          <a:xfrm>
+            <a:off x="895350" y="2260092"/>
+            <a:ext cx="10400995" cy="294894"/>
+          </a:xfrm>
+          <a:prstGeom prst="rect">
+            <a:avLst/>
+          </a:prstGeom>
+          <a:noFill/>
+          <a:ln>
+            <a:noFill/>
+          </a:ln>
+        </p:spPr>
+        <p:txBody>
+          <a:bodyPr wrap="square" lIns="36576" tIns="27432" rIns="36576" bIns="27432" anchor="t">
+            <a:noAutofit/>
+          </a:bodyPr>
+          <a:lstStyle/>
+          <a:p>
+            <a:pPr algn="l">
+              <a:lnSpc>
+                <a:spcPct val="100000"/>
+              </a:lnSpc>
+            </a:pPr>
+            <a:r>
+              <a:rPr lang="en-US" sz="1575" dirty="0" b="1">
+                <a:solidFill>
+                  <a:srgbClr val="16171D"/>
+                </a:solidFill>
+                <a:latin typeface="Segoe UI"/>
+                <a:cs typeface="Segoe UI"/>
+              </a:rPr>
+              <a:t xml:space="preserve">Step 1.</a:t>
+            </a:r>
+            <a:r>
+              <a:rPr lang="en-US" sz="1575" dirty="0">
+                <a:solidFill>
+                  <a:srgbClr val="16171D"/>
+                </a:solidFill>
+                <a:latin typeface="Segoe UI"/>
+                <a:cs typeface="Segoe UI"/>
+              </a:rPr>
+              <a:t xml:space="preserve"> The given slope is the number with </a:t>
+            </a:r>
+            <a:r>
+              <a:rPr lang="en-US" sz="1575" dirty="0" i="1">
+                <a:solidFill>
+                  <a:srgbClr val="16171D"/>
+                </a:solidFill>
+                <a:latin typeface="Segoe UI"/>
+                <a:cs typeface="Segoe UI"/>
+              </a:rPr>
+              <a:t xml:space="preserve">x</a:t>
+            </a:r>
+            <a:r>
+              <a:rPr lang="en-US" sz="1575" dirty="0">
+                <a:solidFill>
+                  <a:srgbClr val="16171D"/>
+                </a:solidFill>
+                <a:latin typeface="Segoe UI"/>
+                <a:cs typeface="Segoe UI"/>
+              </a:rPr>
+              <a:t xml:space="preserve">: 3.</a:t>
+            </a:r>
+            <a:endParaRPr lang="en-US" sz="1575" dirty="0"/>
+          </a:p>
+        </p:txBody>
+      </p:sp>
+      <p:sp>
+        <p:nvSpPr>
+          <p:cNvPr id="6" name="Shape 6"/>
+          <p:cNvSpPr txBox="1"/>
+          <p:nvPr/>
+        </p:nvSpPr>
+        <p:spPr>
+          <a:xfrm>
+            <a:off x="895350" y="2650236"/>
+            <a:ext cx="10400995" cy="294894"/>
+          </a:xfrm>
+          <a:prstGeom prst="rect">
+            <a:avLst/>
+          </a:prstGeom>
+          <a:noFill/>
+          <a:ln>
+            <a:noFill/>
+          </a:ln>
+        </p:spPr>
+        <p:txBody>
+          <a:bodyPr wrap="square" lIns="36576" tIns="27432" rIns="36576" bIns="27432" anchor="t">
+            <a:noAutofit/>
+          </a:bodyPr>
+          <a:lstStyle/>
+          <a:p>
+            <a:pPr algn="l">
+              <a:lnSpc>
+                <a:spcPct val="100000"/>
+              </a:lnSpc>
+            </a:pPr>
+            <a:r>
+              <a:rPr lang="en-US" sz="1575" dirty="0" b="1">
+                <a:solidFill>
+                  <a:srgbClr val="16171D"/>
+                </a:solidFill>
+                <a:latin typeface="Segoe UI"/>
+                <a:cs typeface="Segoe UI"/>
+              </a:rPr>
+              <a:t xml:space="preserve">Step 2.</a:t>
+            </a:r>
+            <a:r>
+              <a:rPr lang="en-US" sz="1575" dirty="0">
+                <a:solidFill>
+                  <a:srgbClr val="16171D"/>
+                </a:solidFill>
+                <a:latin typeface="Segoe UI"/>
+                <a:cs typeface="Segoe UI"/>
+              </a:rPr>
+              <a:t xml:space="preserve"> 3 = </a:t>
+            </a:r>
+            <a:r>
+              <a:rPr lang="en-US" sz="1575" dirty="0">
                 <a:solidFill>
                   <a:srgbClr val="16171D"/>
                 </a:solidFill>
@@ -13686,7 +16917,7 @@
               <a:t xml:space="preserve">3</a:t>
             </a:r>
             <a:r>
-              <a:rPr lang="en-US" sz="1950" dirty="0">
+              <a:rPr lang="en-US" sz="1575" dirty="0">
                 <a:solidFill>
                   <a:srgbClr val="16171D"/>
                 </a:solidFill>
@@ -13696,39 +16927,841 @@
               <a:t xml:space="preserve">/</a:t>
             </a:r>
             <a:r>
-              <a:rPr lang="en-US" sz="1950" dirty="0">
-                <a:solidFill>
-                  <a:srgbClr val="16171D"/>
-                </a:solidFill>
-                <a:latin typeface="Segoe UI"/>
-                <a:cs typeface="Segoe UI"/>
-              </a:rPr>
-              <a:t xml:space="preserve">4</a:t>
-            </a:r>
-            <a:r>
-              <a:rPr lang="en-US" sz="1950" dirty="0">
-                <a:solidFill>
-                  <a:srgbClr val="16171D"/>
-                </a:solidFill>
-                <a:latin typeface="Segoe UI"/>
-                <a:cs typeface="Segoe UI"/>
-              </a:rPr>
-              <a:t xml:space="preserve">?</a:t>
-            </a:r>
-            <a:endParaRPr lang="en-US" sz="1950" dirty="0"/>
-          </a:p>
-        </p:txBody>
-      </p:sp>
-      <p:sp>
-        <p:nvSpPr>
-          <p:cNvPr id="5" name="Shape 5"/>
-          <p:cNvSpPr txBox="1"/>
-          <p:nvPr/>
-        </p:nvSpPr>
-        <p:spPr>
-          <a:xfrm>
-            <a:off x="895350" y="2237232"/>
-            <a:ext cx="2576368" cy="518922"/>
+              <a:rPr lang="en-US" sz="1575" dirty="0">
+                <a:solidFill>
+                  <a:srgbClr val="16171D"/>
+                </a:solidFill>
+                <a:latin typeface="Segoe UI"/>
+                <a:cs typeface="Segoe UI"/>
+              </a:rPr>
+              <a:t xml:space="preserve">1</a:t>
+            </a:r>
+            <a:r>
+              <a:rPr lang="en-US" sz="1575" dirty="0">
+                <a:solidFill>
+                  <a:srgbClr val="16171D"/>
+                </a:solidFill>
+                <a:latin typeface="Segoe UI"/>
+                <a:cs typeface="Segoe UI"/>
+              </a:rPr>
+              <a:t xml:space="preserve">. Flip it to </a:t>
+            </a:r>
+            <a:r>
+              <a:rPr lang="en-US" sz="1575" dirty="0">
+                <a:solidFill>
+                  <a:srgbClr val="16171D"/>
+                </a:solidFill>
+                <a:latin typeface="Segoe UI"/>
+                <a:cs typeface="Segoe UI"/>
+              </a:rPr>
+              <a:t xml:space="preserve">1</a:t>
+            </a:r>
+            <a:r>
+              <a:rPr lang="en-US" sz="1575" dirty="0">
+                <a:solidFill>
+                  <a:srgbClr val="16171D"/>
+                </a:solidFill>
+                <a:latin typeface="Segoe UI"/>
+                <a:cs typeface="Segoe UI"/>
+              </a:rPr>
+              <a:t xml:space="preserve">/</a:t>
+            </a:r>
+            <a:r>
+              <a:rPr lang="en-US" sz="1575" dirty="0">
+                <a:solidFill>
+                  <a:srgbClr val="16171D"/>
+                </a:solidFill>
+                <a:latin typeface="Segoe UI"/>
+                <a:cs typeface="Segoe UI"/>
+              </a:rPr>
+              <a:t xml:space="preserve">3</a:t>
+            </a:r>
+            <a:r>
+              <a:rPr lang="en-US" sz="1575" dirty="0">
+                <a:solidFill>
+                  <a:srgbClr val="16171D"/>
+                </a:solidFill>
+                <a:latin typeface="Segoe UI"/>
+                <a:cs typeface="Segoe UI"/>
+              </a:rPr>
+              <a:t xml:space="preserve">, then change the sign: the new slope is −</a:t>
+            </a:r>
+            <a:r>
+              <a:rPr lang="en-US" sz="1575" dirty="0">
+                <a:solidFill>
+                  <a:srgbClr val="16171D"/>
+                </a:solidFill>
+                <a:latin typeface="Segoe UI"/>
+                <a:cs typeface="Segoe UI"/>
+              </a:rPr>
+              <a:t xml:space="preserve">1</a:t>
+            </a:r>
+            <a:r>
+              <a:rPr lang="en-US" sz="1575" dirty="0">
+                <a:solidFill>
+                  <a:srgbClr val="16171D"/>
+                </a:solidFill>
+                <a:latin typeface="Segoe UI"/>
+                <a:cs typeface="Segoe UI"/>
+              </a:rPr>
+              <a:t xml:space="preserve">/</a:t>
+            </a:r>
+            <a:r>
+              <a:rPr lang="en-US" sz="1575" dirty="0">
+                <a:solidFill>
+                  <a:srgbClr val="16171D"/>
+                </a:solidFill>
+                <a:latin typeface="Segoe UI"/>
+                <a:cs typeface="Segoe UI"/>
+              </a:rPr>
+              <a:t xml:space="preserve">3</a:t>
+            </a:r>
+            <a:r>
+              <a:rPr lang="en-US" sz="1575" dirty="0">
+                <a:solidFill>
+                  <a:srgbClr val="16171D"/>
+                </a:solidFill>
+                <a:latin typeface="Segoe UI"/>
+                <a:cs typeface="Segoe UI"/>
+              </a:rPr>
+              <a:t xml:space="preserve">.</a:t>
+            </a:r>
+            <a:endParaRPr lang="en-US" sz="1575" dirty="0"/>
+          </a:p>
+        </p:txBody>
+      </p:sp>
+      <p:sp>
+        <p:nvSpPr>
+          <p:cNvPr id="7" name="Shape 7"/>
+          <p:cNvSpPr txBox="1"/>
+          <p:nvPr/>
+        </p:nvSpPr>
+        <p:spPr>
+          <a:xfrm>
+            <a:off x="895350" y="3040380"/>
+            <a:ext cx="10400995" cy="294894"/>
+          </a:xfrm>
+          <a:prstGeom prst="rect">
+            <a:avLst/>
+          </a:prstGeom>
+          <a:noFill/>
+          <a:ln>
+            <a:noFill/>
+          </a:ln>
+        </p:spPr>
+        <p:txBody>
+          <a:bodyPr wrap="square" lIns="36576" tIns="27432" rIns="36576" bIns="27432" anchor="t">
+            <a:noAutofit/>
+          </a:bodyPr>
+          <a:lstStyle/>
+          <a:p>
+            <a:pPr algn="l">
+              <a:lnSpc>
+                <a:spcPct val="100000"/>
+              </a:lnSpc>
+            </a:pPr>
+            <a:r>
+              <a:rPr lang="en-US" sz="1575" dirty="0" b="1">
+                <a:solidFill>
+                  <a:srgbClr val="16171D"/>
+                </a:solidFill>
+                <a:latin typeface="Segoe UI"/>
+                <a:cs typeface="Segoe UI"/>
+              </a:rPr>
+              <a:t xml:space="preserve">Step 3.</a:t>
+            </a:r>
+            <a:r>
+              <a:rPr lang="en-US" sz="1575" dirty="0">
+                <a:solidFill>
+                  <a:srgbClr val="16171D"/>
+                </a:solidFill>
+                <a:latin typeface="Segoe UI"/>
+                <a:cs typeface="Segoe UI"/>
+              </a:rPr>
+              <a:t xml:space="preserve"> Put </a:t>
+            </a:r>
+            <a:r>
+              <a:rPr lang="en-US" sz="1575" dirty="0" i="1">
+                <a:solidFill>
+                  <a:srgbClr val="16171D"/>
+                </a:solidFill>
+                <a:latin typeface="Segoe UI"/>
+                <a:cs typeface="Segoe UI"/>
+              </a:rPr>
+              <a:t xml:space="preserve">m</a:t>
+            </a:r>
+            <a:r>
+              <a:rPr lang="en-US" sz="1575" dirty="0">
+                <a:solidFill>
+                  <a:srgbClr val="16171D"/>
+                </a:solidFill>
+                <a:latin typeface="Segoe UI"/>
+                <a:cs typeface="Segoe UI"/>
+              </a:rPr>
+              <a:t xml:space="preserve"> = −</a:t>
+            </a:r>
+            <a:r>
+              <a:rPr lang="en-US" sz="1575" dirty="0">
+                <a:solidFill>
+                  <a:srgbClr val="16171D"/>
+                </a:solidFill>
+                <a:latin typeface="Segoe UI"/>
+                <a:cs typeface="Segoe UI"/>
+              </a:rPr>
+              <a:t xml:space="preserve">1</a:t>
+            </a:r>
+            <a:r>
+              <a:rPr lang="en-US" sz="1575" dirty="0">
+                <a:solidFill>
+                  <a:srgbClr val="16171D"/>
+                </a:solidFill>
+                <a:latin typeface="Segoe UI"/>
+                <a:cs typeface="Segoe UI"/>
+              </a:rPr>
+              <a:t xml:space="preserve">/</a:t>
+            </a:r>
+            <a:r>
+              <a:rPr lang="en-US" sz="1575" dirty="0">
+                <a:solidFill>
+                  <a:srgbClr val="16171D"/>
+                </a:solidFill>
+                <a:latin typeface="Segoe UI"/>
+                <a:cs typeface="Segoe UI"/>
+              </a:rPr>
+              <a:t xml:space="preserve">3</a:t>
+            </a:r>
+            <a:r>
+              <a:rPr lang="en-US" sz="1575" dirty="0">
+                <a:solidFill>
+                  <a:srgbClr val="16171D"/>
+                </a:solidFill>
+                <a:latin typeface="Segoe UI"/>
+                <a:cs typeface="Segoe UI"/>
+              </a:rPr>
+              <a:t xml:space="preserve">, </a:t>
+            </a:r>
+            <a:r>
+              <a:rPr lang="en-US" sz="1575" dirty="0" i="1">
+                <a:solidFill>
+                  <a:srgbClr val="16171D"/>
+                </a:solidFill>
+                <a:latin typeface="Segoe UI"/>
+                <a:cs typeface="Segoe UI"/>
+              </a:rPr>
+              <a:t xml:space="preserve">x</a:t>
+            </a:r>
+            <a:r>
+              <a:rPr lang="en-US" sz="1339" dirty="0" baseline="-25000">
+                <a:solidFill>
+                  <a:srgbClr val="16171D"/>
+                </a:solidFill>
+                <a:latin typeface="Segoe UI"/>
+                <a:cs typeface="Segoe UI"/>
+              </a:rPr>
+              <a:t xml:space="preserve">1</a:t>
+            </a:r>
+            <a:r>
+              <a:rPr lang="en-US" sz="1575" dirty="0">
+                <a:solidFill>
+                  <a:srgbClr val="16171D"/>
+                </a:solidFill>
+                <a:latin typeface="Segoe UI"/>
+                <a:cs typeface="Segoe UI"/>
+              </a:rPr>
+              <a:t xml:space="preserve"> = 3, </a:t>
+            </a:r>
+            <a:r>
+              <a:rPr lang="en-US" sz="1575" dirty="0" i="1">
+                <a:solidFill>
+                  <a:srgbClr val="16171D"/>
+                </a:solidFill>
+                <a:latin typeface="Segoe UI"/>
+                <a:cs typeface="Segoe UI"/>
+              </a:rPr>
+              <a:t xml:space="preserve">y</a:t>
+            </a:r>
+            <a:r>
+              <a:rPr lang="en-US" sz="1339" dirty="0" baseline="-25000">
+                <a:solidFill>
+                  <a:srgbClr val="16171D"/>
+                </a:solidFill>
+                <a:latin typeface="Segoe UI"/>
+                <a:cs typeface="Segoe UI"/>
+              </a:rPr>
+              <a:t xml:space="preserve">1</a:t>
+            </a:r>
+            <a:r>
+              <a:rPr lang="en-US" sz="1575" dirty="0">
+                <a:solidFill>
+                  <a:srgbClr val="16171D"/>
+                </a:solidFill>
+                <a:latin typeface="Segoe UI"/>
+                <a:cs typeface="Segoe UI"/>
+              </a:rPr>
+              <a:t xml:space="preserve"> = 1 into </a:t>
+            </a:r>
+            <a:r>
+              <a:rPr lang="en-US" sz="1575" dirty="0" i="1">
+                <a:solidFill>
+                  <a:srgbClr val="16171D"/>
+                </a:solidFill>
+                <a:latin typeface="Segoe UI"/>
+                <a:cs typeface="Segoe UI"/>
+              </a:rPr>
+              <a:t xml:space="preserve">y</a:t>
+            </a:r>
+            <a:r>
+              <a:rPr lang="en-US" sz="1575" dirty="0">
+                <a:solidFill>
+                  <a:srgbClr val="16171D"/>
+                </a:solidFill>
+                <a:latin typeface="Segoe UI"/>
+                <a:cs typeface="Segoe UI"/>
+              </a:rPr>
+              <a:t xml:space="preserve"> − </a:t>
+            </a:r>
+            <a:r>
+              <a:rPr lang="en-US" sz="1575" dirty="0" i="1">
+                <a:solidFill>
+                  <a:srgbClr val="16171D"/>
+                </a:solidFill>
+                <a:latin typeface="Segoe UI"/>
+                <a:cs typeface="Segoe UI"/>
+              </a:rPr>
+              <a:t xml:space="preserve">y</a:t>
+            </a:r>
+            <a:r>
+              <a:rPr lang="en-US" sz="1339" dirty="0" baseline="-25000">
+                <a:solidFill>
+                  <a:srgbClr val="16171D"/>
+                </a:solidFill>
+                <a:latin typeface="Segoe UI"/>
+                <a:cs typeface="Segoe UI"/>
+              </a:rPr>
+              <a:t xml:space="preserve">1</a:t>
+            </a:r>
+            <a:r>
+              <a:rPr lang="en-US" sz="1575" dirty="0">
+                <a:solidFill>
+                  <a:srgbClr val="16171D"/>
+                </a:solidFill>
+                <a:latin typeface="Segoe UI"/>
+                <a:cs typeface="Segoe UI"/>
+              </a:rPr>
+              <a:t xml:space="preserve"> = </a:t>
+            </a:r>
+            <a:r>
+              <a:rPr lang="en-US" sz="1575" dirty="0" i="1">
+                <a:solidFill>
+                  <a:srgbClr val="16171D"/>
+                </a:solidFill>
+                <a:latin typeface="Segoe UI"/>
+                <a:cs typeface="Segoe UI"/>
+              </a:rPr>
+              <a:t xml:space="preserve">m</a:t>
+            </a:r>
+            <a:r>
+              <a:rPr lang="en-US" sz="1575" dirty="0">
+                <a:solidFill>
+                  <a:srgbClr val="16171D"/>
+                </a:solidFill>
+                <a:latin typeface="Segoe UI"/>
+                <a:cs typeface="Segoe UI"/>
+              </a:rPr>
+              <a:t xml:space="preserve">(</a:t>
+            </a:r>
+            <a:r>
+              <a:rPr lang="en-US" sz="1575" dirty="0" i="1">
+                <a:solidFill>
+                  <a:srgbClr val="16171D"/>
+                </a:solidFill>
+                <a:latin typeface="Segoe UI"/>
+                <a:cs typeface="Segoe UI"/>
+              </a:rPr>
+              <a:t xml:space="preserve">x</a:t>
+            </a:r>
+            <a:r>
+              <a:rPr lang="en-US" sz="1575" dirty="0">
+                <a:solidFill>
+                  <a:srgbClr val="16171D"/>
+                </a:solidFill>
+                <a:latin typeface="Segoe UI"/>
+                <a:cs typeface="Segoe UI"/>
+              </a:rPr>
+              <a:t xml:space="preserve"> − </a:t>
+            </a:r>
+            <a:r>
+              <a:rPr lang="en-US" sz="1575" dirty="0" i="1">
+                <a:solidFill>
+                  <a:srgbClr val="16171D"/>
+                </a:solidFill>
+                <a:latin typeface="Segoe UI"/>
+                <a:cs typeface="Segoe UI"/>
+              </a:rPr>
+              <a:t xml:space="preserve">x</a:t>
+            </a:r>
+            <a:r>
+              <a:rPr lang="en-US" sz="1339" dirty="0" baseline="-25000">
+                <a:solidFill>
+                  <a:srgbClr val="16171D"/>
+                </a:solidFill>
+                <a:latin typeface="Segoe UI"/>
+                <a:cs typeface="Segoe UI"/>
+              </a:rPr>
+              <a:t xml:space="preserve">1</a:t>
+            </a:r>
+            <a:r>
+              <a:rPr lang="en-US" sz="1575" dirty="0">
+                <a:solidFill>
+                  <a:srgbClr val="16171D"/>
+                </a:solidFill>
+                <a:latin typeface="Segoe UI"/>
+                <a:cs typeface="Segoe UI"/>
+              </a:rPr>
+              <a:t xml:space="preserve">): </a:t>
+            </a:r>
+            <a:r>
+              <a:rPr lang="en-US" sz="1575" dirty="0" i="1">
+                <a:solidFill>
+                  <a:srgbClr val="16171D"/>
+                </a:solidFill>
+                <a:latin typeface="Segoe UI"/>
+                <a:cs typeface="Segoe UI"/>
+              </a:rPr>
+              <a:t xml:space="preserve">y</a:t>
+            </a:r>
+            <a:r>
+              <a:rPr lang="en-US" sz="1575" dirty="0">
+                <a:solidFill>
+                  <a:srgbClr val="16171D"/>
+                </a:solidFill>
+                <a:latin typeface="Segoe UI"/>
+                <a:cs typeface="Segoe UI"/>
+              </a:rPr>
+              <a:t xml:space="preserve"> − 1 = −</a:t>
+            </a:r>
+            <a:r>
+              <a:rPr lang="en-US" sz="1575" dirty="0">
+                <a:solidFill>
+                  <a:srgbClr val="16171D"/>
+                </a:solidFill>
+                <a:latin typeface="Segoe UI"/>
+                <a:cs typeface="Segoe UI"/>
+              </a:rPr>
+              <a:t xml:space="preserve">1</a:t>
+            </a:r>
+            <a:r>
+              <a:rPr lang="en-US" sz="1575" dirty="0">
+                <a:solidFill>
+                  <a:srgbClr val="16171D"/>
+                </a:solidFill>
+                <a:latin typeface="Segoe UI"/>
+                <a:cs typeface="Segoe UI"/>
+              </a:rPr>
+              <a:t xml:space="preserve">/</a:t>
+            </a:r>
+            <a:r>
+              <a:rPr lang="en-US" sz="1575" dirty="0">
+                <a:solidFill>
+                  <a:srgbClr val="16171D"/>
+                </a:solidFill>
+                <a:latin typeface="Segoe UI"/>
+                <a:cs typeface="Segoe UI"/>
+              </a:rPr>
+              <a:t xml:space="preserve">3</a:t>
+            </a:r>
+            <a:r>
+              <a:rPr lang="en-US" sz="1575" dirty="0">
+                <a:solidFill>
+                  <a:srgbClr val="16171D"/>
+                </a:solidFill>
+                <a:latin typeface="Segoe UI"/>
+                <a:cs typeface="Segoe UI"/>
+              </a:rPr>
+              <a:t xml:space="preserve">(</a:t>
+            </a:r>
+            <a:r>
+              <a:rPr lang="en-US" sz="1575" dirty="0" i="1">
+                <a:solidFill>
+                  <a:srgbClr val="16171D"/>
+                </a:solidFill>
+                <a:latin typeface="Segoe UI"/>
+                <a:cs typeface="Segoe UI"/>
+              </a:rPr>
+              <a:t xml:space="preserve">x</a:t>
+            </a:r>
+            <a:r>
+              <a:rPr lang="en-US" sz="1575" dirty="0">
+                <a:solidFill>
+                  <a:srgbClr val="16171D"/>
+                </a:solidFill>
+                <a:latin typeface="Segoe UI"/>
+                <a:cs typeface="Segoe UI"/>
+              </a:rPr>
+              <a:t xml:space="preserve"> − 3).</a:t>
+            </a:r>
+            <a:endParaRPr lang="en-US" sz="1575" dirty="0"/>
+          </a:p>
+        </p:txBody>
+      </p:sp>
+      <p:sp>
+        <p:nvSpPr>
+          <p:cNvPr id="8" name="Shape 8"/>
+          <p:cNvSpPr txBox="1"/>
+          <p:nvPr/>
+        </p:nvSpPr>
+        <p:spPr>
+          <a:xfrm>
+            <a:off x="895350" y="3430524"/>
+            <a:ext cx="10400995" cy="294894"/>
+          </a:xfrm>
+          <a:prstGeom prst="rect">
+            <a:avLst/>
+          </a:prstGeom>
+          <a:noFill/>
+          <a:ln>
+            <a:noFill/>
+          </a:ln>
+        </p:spPr>
+        <p:txBody>
+          <a:bodyPr wrap="square" lIns="36576" tIns="27432" rIns="36576" bIns="27432" anchor="t">
+            <a:noAutofit/>
+          </a:bodyPr>
+          <a:lstStyle/>
+          <a:p>
+            <a:pPr algn="l">
+              <a:lnSpc>
+                <a:spcPct val="100000"/>
+              </a:lnSpc>
+            </a:pPr>
+            <a:r>
+              <a:rPr lang="en-US" sz="1575" dirty="0" b="1">
+                <a:solidFill>
+                  <a:srgbClr val="16171D"/>
+                </a:solidFill>
+                <a:latin typeface="Segoe UI"/>
+                <a:cs typeface="Segoe UI"/>
+              </a:rPr>
+              <a:t xml:space="preserve">Step 4.</a:t>
+            </a:r>
+            <a:r>
+              <a:rPr lang="en-US" sz="1575" dirty="0">
+                <a:solidFill>
+                  <a:srgbClr val="16171D"/>
+                </a:solidFill>
+                <a:latin typeface="Segoe UI"/>
+                <a:cs typeface="Segoe UI"/>
+              </a:rPr>
+              <a:t xml:space="preserve"> Distribute: −</a:t>
+            </a:r>
+            <a:r>
+              <a:rPr lang="en-US" sz="1575" dirty="0">
+                <a:solidFill>
+                  <a:srgbClr val="16171D"/>
+                </a:solidFill>
+                <a:latin typeface="Segoe UI"/>
+                <a:cs typeface="Segoe UI"/>
+              </a:rPr>
+              <a:t xml:space="preserve">1</a:t>
+            </a:r>
+            <a:r>
+              <a:rPr lang="en-US" sz="1575" dirty="0">
+                <a:solidFill>
+                  <a:srgbClr val="16171D"/>
+                </a:solidFill>
+                <a:latin typeface="Segoe UI"/>
+                <a:cs typeface="Segoe UI"/>
+              </a:rPr>
+              <a:t xml:space="preserve">/</a:t>
+            </a:r>
+            <a:r>
+              <a:rPr lang="en-US" sz="1575" dirty="0">
+                <a:solidFill>
+                  <a:srgbClr val="16171D"/>
+                </a:solidFill>
+                <a:latin typeface="Segoe UI"/>
+                <a:cs typeface="Segoe UI"/>
+              </a:rPr>
+              <a:t xml:space="preserve">3</a:t>
+            </a:r>
+            <a:r>
+              <a:rPr lang="en-US" sz="1575" dirty="0">
+                <a:solidFill>
+                  <a:srgbClr val="16171D"/>
+                </a:solidFill>
+                <a:latin typeface="Segoe UI"/>
+                <a:cs typeface="Segoe UI"/>
+              </a:rPr>
+              <a:t xml:space="preserve"> · </a:t>
+            </a:r>
+            <a:r>
+              <a:rPr lang="en-US" sz="1575" dirty="0" i="1">
+                <a:solidFill>
+                  <a:srgbClr val="16171D"/>
+                </a:solidFill>
+                <a:latin typeface="Segoe UI"/>
+                <a:cs typeface="Segoe UI"/>
+              </a:rPr>
+              <a:t xml:space="preserve">x</a:t>
+            </a:r>
+            <a:r>
+              <a:rPr lang="en-US" sz="1575" dirty="0">
+                <a:solidFill>
+                  <a:srgbClr val="16171D"/>
+                </a:solidFill>
+                <a:latin typeface="Segoe UI"/>
+                <a:cs typeface="Segoe UI"/>
+              </a:rPr>
+              <a:t xml:space="preserve"> = −</a:t>
+            </a:r>
+            <a:r>
+              <a:rPr lang="en-US" sz="1575" dirty="0">
+                <a:solidFill>
+                  <a:srgbClr val="16171D"/>
+                </a:solidFill>
+                <a:latin typeface="Segoe UI"/>
+                <a:cs typeface="Segoe UI"/>
+              </a:rPr>
+              <a:t xml:space="preserve">1</a:t>
+            </a:r>
+            <a:r>
+              <a:rPr lang="en-US" sz="1575" dirty="0">
+                <a:solidFill>
+                  <a:srgbClr val="16171D"/>
+                </a:solidFill>
+                <a:latin typeface="Segoe UI"/>
+                <a:cs typeface="Segoe UI"/>
+              </a:rPr>
+              <a:t xml:space="preserve">/</a:t>
+            </a:r>
+            <a:r>
+              <a:rPr lang="en-US" sz="1575" dirty="0">
+                <a:solidFill>
+                  <a:srgbClr val="16171D"/>
+                </a:solidFill>
+                <a:latin typeface="Segoe UI"/>
+                <a:cs typeface="Segoe UI"/>
+              </a:rPr>
+              <a:t xml:space="preserve">3</a:t>
+            </a:r>
+            <a:r>
+              <a:rPr lang="en-US" sz="1575" dirty="0" i="1">
+                <a:solidFill>
+                  <a:srgbClr val="16171D"/>
+                </a:solidFill>
+                <a:latin typeface="Segoe UI"/>
+                <a:cs typeface="Segoe UI"/>
+              </a:rPr>
+              <a:t xml:space="preserve">x</a:t>
+            </a:r>
+            <a:r>
+              <a:rPr lang="en-US" sz="1575" dirty="0">
+                <a:solidFill>
+                  <a:srgbClr val="16171D"/>
+                </a:solidFill>
+                <a:latin typeface="Segoe UI"/>
+                <a:cs typeface="Segoe UI"/>
+              </a:rPr>
+              <a:t xml:space="preserve"> and −</a:t>
+            </a:r>
+            <a:r>
+              <a:rPr lang="en-US" sz="1575" dirty="0">
+                <a:solidFill>
+                  <a:srgbClr val="16171D"/>
+                </a:solidFill>
+                <a:latin typeface="Segoe UI"/>
+                <a:cs typeface="Segoe UI"/>
+              </a:rPr>
+              <a:t xml:space="preserve">1</a:t>
+            </a:r>
+            <a:r>
+              <a:rPr lang="en-US" sz="1575" dirty="0">
+                <a:solidFill>
+                  <a:srgbClr val="16171D"/>
+                </a:solidFill>
+                <a:latin typeface="Segoe UI"/>
+                <a:cs typeface="Segoe UI"/>
+              </a:rPr>
+              <a:t xml:space="preserve">/</a:t>
+            </a:r>
+            <a:r>
+              <a:rPr lang="en-US" sz="1575" dirty="0">
+                <a:solidFill>
+                  <a:srgbClr val="16171D"/>
+                </a:solidFill>
+                <a:latin typeface="Segoe UI"/>
+                <a:cs typeface="Segoe UI"/>
+              </a:rPr>
+              <a:t xml:space="preserve">3</a:t>
+            </a:r>
+            <a:r>
+              <a:rPr lang="en-US" sz="1575" dirty="0">
+                <a:solidFill>
+                  <a:srgbClr val="16171D"/>
+                </a:solidFill>
+                <a:latin typeface="Segoe UI"/>
+                <a:cs typeface="Segoe UI"/>
+              </a:rPr>
+              <a:t xml:space="preserve"> · (−3) = +1. Now </a:t>
+            </a:r>
+            <a:r>
+              <a:rPr lang="en-US" sz="1575" dirty="0" i="1">
+                <a:solidFill>
+                  <a:srgbClr val="16171D"/>
+                </a:solidFill>
+                <a:latin typeface="Segoe UI"/>
+                <a:cs typeface="Segoe UI"/>
+              </a:rPr>
+              <a:t xml:space="preserve">y</a:t>
+            </a:r>
+            <a:r>
+              <a:rPr lang="en-US" sz="1575" dirty="0">
+                <a:solidFill>
+                  <a:srgbClr val="16171D"/>
+                </a:solidFill>
+                <a:latin typeface="Segoe UI"/>
+                <a:cs typeface="Segoe UI"/>
+              </a:rPr>
+              <a:t xml:space="preserve"> − 1 = −</a:t>
+            </a:r>
+            <a:r>
+              <a:rPr lang="en-US" sz="1575" dirty="0">
+                <a:solidFill>
+                  <a:srgbClr val="16171D"/>
+                </a:solidFill>
+                <a:latin typeface="Segoe UI"/>
+                <a:cs typeface="Segoe UI"/>
+              </a:rPr>
+              <a:t xml:space="preserve">1</a:t>
+            </a:r>
+            <a:r>
+              <a:rPr lang="en-US" sz="1575" dirty="0">
+                <a:solidFill>
+                  <a:srgbClr val="16171D"/>
+                </a:solidFill>
+                <a:latin typeface="Segoe UI"/>
+                <a:cs typeface="Segoe UI"/>
+              </a:rPr>
+              <a:t xml:space="preserve">/</a:t>
+            </a:r>
+            <a:r>
+              <a:rPr lang="en-US" sz="1575" dirty="0">
+                <a:solidFill>
+                  <a:srgbClr val="16171D"/>
+                </a:solidFill>
+                <a:latin typeface="Segoe UI"/>
+                <a:cs typeface="Segoe UI"/>
+              </a:rPr>
+              <a:t xml:space="preserve">3</a:t>
+            </a:r>
+            <a:r>
+              <a:rPr lang="en-US" sz="1575" dirty="0" i="1">
+                <a:solidFill>
+                  <a:srgbClr val="16171D"/>
+                </a:solidFill>
+                <a:latin typeface="Segoe UI"/>
+                <a:cs typeface="Segoe UI"/>
+              </a:rPr>
+              <a:t xml:space="preserve">x</a:t>
+            </a:r>
+            <a:r>
+              <a:rPr lang="en-US" sz="1575" dirty="0">
+                <a:solidFill>
+                  <a:srgbClr val="16171D"/>
+                </a:solidFill>
+                <a:latin typeface="Segoe UI"/>
+                <a:cs typeface="Segoe UI"/>
+              </a:rPr>
+              <a:t xml:space="preserve"> + 1.</a:t>
+            </a:r>
+            <a:endParaRPr lang="en-US" sz="1575" dirty="0"/>
+          </a:p>
+        </p:txBody>
+      </p:sp>
+      <p:sp>
+        <p:nvSpPr>
+          <p:cNvPr id="9" name="Shape 9"/>
+          <p:cNvSpPr txBox="1"/>
+          <p:nvPr/>
+        </p:nvSpPr>
+        <p:spPr>
+          <a:xfrm>
+            <a:off x="895350" y="3820668"/>
+            <a:ext cx="10400995" cy="294894"/>
+          </a:xfrm>
+          <a:prstGeom prst="rect">
+            <a:avLst/>
+          </a:prstGeom>
+          <a:noFill/>
+          <a:ln>
+            <a:noFill/>
+          </a:ln>
+        </p:spPr>
+        <p:txBody>
+          <a:bodyPr wrap="square" lIns="36576" tIns="27432" rIns="36576" bIns="27432" anchor="t">
+            <a:noAutofit/>
+          </a:bodyPr>
+          <a:lstStyle/>
+          <a:p>
+            <a:pPr algn="l">
+              <a:lnSpc>
+                <a:spcPct val="100000"/>
+              </a:lnSpc>
+            </a:pPr>
+            <a:r>
+              <a:rPr lang="en-US" sz="1575" dirty="0" b="1">
+                <a:solidFill>
+                  <a:srgbClr val="16171D"/>
+                </a:solidFill>
+                <a:latin typeface="Segoe UI"/>
+                <a:cs typeface="Segoe UI"/>
+              </a:rPr>
+              <a:t xml:space="preserve">Step 5.</a:t>
+            </a:r>
+            <a:r>
+              <a:rPr lang="en-US" sz="1575" dirty="0">
+                <a:solidFill>
+                  <a:srgbClr val="16171D"/>
+                </a:solidFill>
+                <a:latin typeface="Segoe UI"/>
+                <a:cs typeface="Segoe UI"/>
+              </a:rPr>
+              <a:t xml:space="preserve"> Add 1 to both sides to get </a:t>
+            </a:r>
+            <a:r>
+              <a:rPr lang="en-US" sz="1575" dirty="0" i="1">
+                <a:solidFill>
+                  <a:srgbClr val="16171D"/>
+                </a:solidFill>
+                <a:latin typeface="Segoe UI"/>
+                <a:cs typeface="Segoe UI"/>
+              </a:rPr>
+              <a:t xml:space="preserve">y</a:t>
+            </a:r>
+            <a:r>
+              <a:rPr lang="en-US" sz="1575" dirty="0">
+                <a:solidFill>
+                  <a:srgbClr val="16171D"/>
+                </a:solidFill>
+                <a:latin typeface="Segoe UI"/>
+                <a:cs typeface="Segoe UI"/>
+              </a:rPr>
+              <a:t xml:space="preserve"> alone: 1 + 1 = 2.</a:t>
+            </a:r>
+            <a:endParaRPr lang="en-US" sz="1575" dirty="0"/>
+          </a:p>
+        </p:txBody>
+      </p:sp>
+      <p:sp>
+        <p:nvSpPr>
+          <p:cNvPr id="10" name="Shape 10"/>
+          <p:cNvSpPr txBox="1"/>
+          <p:nvPr/>
+        </p:nvSpPr>
+        <p:spPr>
+          <a:xfrm>
+            <a:off x="895350" y="4210812"/>
+            <a:ext cx="4068806" cy="518922"/>
           </a:xfrm>
           <a:prstGeom prst="roundRect">
             <a:avLst>
@@ -13764,14 +17797,14 @@
               <a:t xml:space="preserve">ANSWER   </a:t>
             </a:r>
             <a:r>
-              <a:rPr lang="en-US" sz="2325" dirty="0">
+              <a:rPr lang="en-US" sz="2325" dirty="0" i="1">
                 <a:solidFill>
                   <a:srgbClr val="16171D"/>
                 </a:solidFill>
                 <a:latin typeface="Cambria"/>
                 <a:cs typeface="Cambria"/>
               </a:rPr>
-              <a:t xml:space="preserve">−</a:t>
+              <a:t xml:space="preserve">y</a:t>
             </a:r>
             <a:r>
               <a:rPr lang="en-US" sz="2325" dirty="0">
@@ -13781,7 +17814,7 @@
                 <a:latin typeface="Cambria"/>
                 <a:cs typeface="Cambria"/>
               </a:rPr>
-              <a:t xml:space="preserve">4</a:t>
+              <a:t xml:space="preserve"> = −</a:t>
             </a:r>
             <a:r>
               <a:rPr lang="en-US" sz="2325" dirty="0">
@@ -13791,7 +17824,7 @@
                 <a:latin typeface="Cambria"/>
                 <a:cs typeface="Cambria"/>
               </a:rPr>
-              <a:t xml:space="preserve">/</a:t>
+              <a:t xml:space="preserve">1</a:t>
             </a:r>
             <a:r>
               <a:rPr lang="en-US" sz="2325" dirty="0">
@@ -13801,21 +17834,825 @@
                 <a:latin typeface="Cambria"/>
                 <a:cs typeface="Cambria"/>
               </a:rPr>
+              <a:t xml:space="preserve">/</a:t>
+            </a:r>
+            <a:r>
+              <a:rPr lang="en-US" sz="2325" dirty="0">
+                <a:solidFill>
+                  <a:srgbClr val="16171D"/>
+                </a:solidFill>
+                <a:latin typeface="Cambria"/>
+                <a:cs typeface="Cambria"/>
+              </a:rPr>
               <a:t xml:space="preserve">3</a:t>
             </a:r>
+            <a:r>
+              <a:rPr lang="en-US" sz="2325" dirty="0" i="1">
+                <a:solidFill>
+                  <a:srgbClr val="16171D"/>
+                </a:solidFill>
+                <a:latin typeface="Cambria"/>
+                <a:cs typeface="Cambria"/>
+              </a:rPr>
+              <a:t xml:space="preserve">x</a:t>
+            </a:r>
+            <a:r>
+              <a:rPr lang="en-US" sz="2325" dirty="0">
+                <a:solidFill>
+                  <a:srgbClr val="16171D"/>
+                </a:solidFill>
+                <a:latin typeface="Cambria"/>
+                <a:cs typeface="Cambria"/>
+              </a:rPr>
+              <a:t xml:space="preserve"> + 2</a:t>
+            </a:r>
             <a:endParaRPr lang="en-US" sz="2325" dirty="0"/>
           </a:p>
         </p:txBody>
       </p:sp>
       <p:sp>
         <p:nvSpPr>
-          <p:cNvPr id="9" name="Shape 9"/>
-          <p:cNvSpPr txBox="1"/>
-          <p:nvPr/>
-        </p:nvSpPr>
-        <p:spPr>
-          <a:xfrm>
-            <a:off x="685800" y="3060954"/>
+          <p:cNvPr id="12" name="Slide Number 12"/>
+          <p:cNvSpPr txBox="1"/>
+          <p:nvPr/>
+        </p:nvSpPr>
+        <p:spPr>
+          <a:xfrm>
+            <a:off x="11277295" y="6611112"/>
+            <a:ext cx="685800" cy="201168"/>
+          </a:xfrm>
+          <a:prstGeom prst="rect">
+            <a:avLst/>
+          </a:prstGeom>
+          <a:noFill/>
+        </p:spPr>
+        <p:txBody>
+          <a:bodyPr wrap="none" lIns="0" tIns="0" rIns="0" bIns="0" anchor="b">
+            <a:noAutofit/>
+          </a:bodyPr>
+          <a:lstStyle/>
+          <a:p>
+            <a:pPr algn="r"/>
+            <a:fld id="{5C1A6E0B-3B1F-4D5E-9C7A-2F4B8D6E1A90}" type="slidenum">
+              <a:rPr lang="en-US" sz="1200" dirty="0">
+                <a:solidFill>
+                  <a:srgbClr val="5F6272"/>
+                </a:solidFill>
+              </a:rPr>
+              <a:t>22</a:t>
+            </a:fld>
+          </a:p>
+        </p:txBody>
+      </p:sp>
+    </p:spTree>
+  </p:cSld>
+  <p:clrMapOvr>
+    <a:masterClrMapping/>
+  </p:clrMapOvr>
+  <p:transition spd="med">
+    <p:fade/>
+  </p:transition>
+  <p:timing>
+    <p:tnLst>
+      <p:par>
+        <p:cTn id="1" dur="indefinite" restart="never" nodeType="tmRoot">
+          <p:childTnLst>
+            <p:seq concurrent="1" nextAc="seek">
+              <p:cTn id="2" dur="indefinite" nodeType="mainSeq">
+                <p:childTnLst>
+                  <p:par>
+                    <p:cTn id="8" fill="hold">
+                      <p:stCondLst>
+                        <p:cond delay="indefinite"/>
+                      </p:stCondLst>
+                      <p:childTnLst>
+                        <p:par>
+                          <p:cTn id="9" fill="hold">
+                            <p:stCondLst>
+                              <p:cond delay="0"/>
+                            </p:stCondLst>
+                            <p:childTnLst>
+                              <p:par>
+                                <p:cTn id="7" presetID="42" presetClass="entr" presetSubtype="0" fill="hold" nodeType="clickEffect">
+                                  <p:stCondLst>
+                                    <p:cond delay="0"/>
+                                  </p:stCondLst>
+                                  <p:childTnLst>
+                                    <p:set>
+                                      <p:cBhvr>
+                                        <p:cTn id="3" dur="1" fill="hold">
+                                          <p:stCondLst>
+                                            <p:cond delay="0"/>
+                                          </p:stCondLst>
+                                        </p:cTn>
+                                        <p:tgtEl>
+                                          <p:spTgt spid="5"/>
+                                        </p:tgtEl>
+                                        <p:attrNameLst>
+                                          <p:attrName>style.visibility</p:attrName>
+                                        </p:attrNameLst>
+                                      </p:cBhvr>
+                                      <p:to>
+                                        <p:strVal val="visible"/>
+                                      </p:to>
+                                    </p:set>
+                                    <p:animEffect transition="in" filter="fade">
+                                      <p:cBhvr>
+                                        <p:cTn id="4" dur="500"/>
+                                        <p:tgtEl>
+                                          <p:spTgt spid="5"/>
+                                        </p:tgtEl>
+                                      </p:cBhvr>
+                                    </p:animEffect>
+                                    <p:anim calcmode="lin" valueType="num">
+                                      <p:cBhvr>
+                                        <p:cTn id="5" dur="500" fill="hold"/>
+                                        <p:tgtEl>
+                                          <p:spTgt spid="5"/>
+                                        </p:tgtEl>
+                                        <p:attrNameLst>
+                                          <p:attrName>ppt_x</p:attrName>
+                                        </p:attrNameLst>
+                                      </p:cBhvr>
+                                      <p:tavLst>
+                                        <p:tav tm="0">
+                                          <p:val>
+                                            <p:strVal val="#ppt_x"/>
+                                          </p:val>
+                                        </p:tav>
+                                        <p:tav tm="100000">
+                                          <p:val>
+                                            <p:strVal val="#ppt_x"/>
+                                          </p:val>
+                                        </p:tav>
+                                      </p:tavLst>
+                                    </p:anim>
+                                    <p:anim calcmode="lin" valueType="num">
+                                      <p:cBhvr>
+                                        <p:cTn id="6" dur="500" fill="hold"/>
+                                        <p:tgtEl>
+                                          <p:spTgt spid="5"/>
+                                        </p:tgtEl>
+                                        <p:attrNameLst>
+                                          <p:attrName>ppt_y</p:attrName>
+                                        </p:attrNameLst>
+                                      </p:cBhvr>
+                                      <p:tavLst>
+                                        <p:tav tm="0">
+                                          <p:val>
+                                            <p:strVal val="#ppt_y+.1"/>
+                                          </p:val>
+                                        </p:tav>
+                                        <p:tav tm="100000">
+                                          <p:val>
+                                            <p:strVal val="#ppt_y"/>
+                                          </p:val>
+                                        </p:tav>
+                                      </p:tavLst>
+                                    </p:anim>
+                                  </p:childTnLst>
+                                </p:cTn>
+                              </p:par>
+                            </p:childTnLst>
+                          </p:cTn>
+                        </p:par>
+                      </p:childTnLst>
+                    </p:cTn>
+                  </p:par>
+                  <p:par>
+                    <p:cTn id="15" fill="hold">
+                      <p:stCondLst>
+                        <p:cond delay="indefinite"/>
+                      </p:stCondLst>
+                      <p:childTnLst>
+                        <p:par>
+                          <p:cTn id="16" fill="hold">
+                            <p:stCondLst>
+                              <p:cond delay="0"/>
+                            </p:stCondLst>
+                            <p:childTnLst>
+                              <p:par>
+                                <p:cTn id="14" presetID="42" presetClass="entr" presetSubtype="0" fill="hold" nodeType="clickEffect">
+                                  <p:stCondLst>
+                                    <p:cond delay="0"/>
+                                  </p:stCondLst>
+                                  <p:childTnLst>
+                                    <p:set>
+                                      <p:cBhvr>
+                                        <p:cTn id="10" dur="1" fill="hold">
+                                          <p:stCondLst>
+                                            <p:cond delay="0"/>
+                                          </p:stCondLst>
+                                        </p:cTn>
+                                        <p:tgtEl>
+                                          <p:spTgt spid="6"/>
+                                        </p:tgtEl>
+                                        <p:attrNameLst>
+                                          <p:attrName>style.visibility</p:attrName>
+                                        </p:attrNameLst>
+                                      </p:cBhvr>
+                                      <p:to>
+                                        <p:strVal val="visible"/>
+                                      </p:to>
+                                    </p:set>
+                                    <p:animEffect transition="in" filter="fade">
+                                      <p:cBhvr>
+                                        <p:cTn id="11" dur="500"/>
+                                        <p:tgtEl>
+                                          <p:spTgt spid="6"/>
+                                        </p:tgtEl>
+                                      </p:cBhvr>
+                                    </p:animEffect>
+                                    <p:anim calcmode="lin" valueType="num">
+                                      <p:cBhvr>
+                                        <p:cTn id="12" dur="500" fill="hold"/>
+                                        <p:tgtEl>
+                                          <p:spTgt spid="6"/>
+                                        </p:tgtEl>
+                                        <p:attrNameLst>
+                                          <p:attrName>ppt_x</p:attrName>
+                                        </p:attrNameLst>
+                                      </p:cBhvr>
+                                      <p:tavLst>
+                                        <p:tav tm="0">
+                                          <p:val>
+                                            <p:strVal val="#ppt_x"/>
+                                          </p:val>
+                                        </p:tav>
+                                        <p:tav tm="100000">
+                                          <p:val>
+                                            <p:strVal val="#ppt_x"/>
+                                          </p:val>
+                                        </p:tav>
+                                      </p:tavLst>
+                                    </p:anim>
+                                    <p:anim calcmode="lin" valueType="num">
+                                      <p:cBhvr>
+                                        <p:cTn id="13" dur="500" fill="hold"/>
+                                        <p:tgtEl>
+                                          <p:spTgt spid="6"/>
+                                        </p:tgtEl>
+                                        <p:attrNameLst>
+                                          <p:attrName>ppt_y</p:attrName>
+                                        </p:attrNameLst>
+                                      </p:cBhvr>
+                                      <p:tavLst>
+                                        <p:tav tm="0">
+                                          <p:val>
+                                            <p:strVal val="#ppt_y+.1"/>
+                                          </p:val>
+                                        </p:tav>
+                                        <p:tav tm="100000">
+                                          <p:val>
+                                            <p:strVal val="#ppt_y"/>
+                                          </p:val>
+                                        </p:tav>
+                                      </p:tavLst>
+                                    </p:anim>
+                                  </p:childTnLst>
+                                </p:cTn>
+                              </p:par>
+                            </p:childTnLst>
+                          </p:cTn>
+                        </p:par>
+                      </p:childTnLst>
+                    </p:cTn>
+                  </p:par>
+                  <p:par>
+                    <p:cTn id="22" fill="hold">
+                      <p:stCondLst>
+                        <p:cond delay="indefinite"/>
+                      </p:stCondLst>
+                      <p:childTnLst>
+                        <p:par>
+                          <p:cTn id="23" fill="hold">
+                            <p:stCondLst>
+                              <p:cond delay="0"/>
+                            </p:stCondLst>
+                            <p:childTnLst>
+                              <p:par>
+                                <p:cTn id="21" presetID="42" presetClass="entr" presetSubtype="0" fill="hold" nodeType="clickEffect">
+                                  <p:stCondLst>
+                                    <p:cond delay="0"/>
+                                  </p:stCondLst>
+                                  <p:childTnLst>
+                                    <p:set>
+                                      <p:cBhvr>
+                                        <p:cTn id="17" dur="1" fill="hold">
+                                          <p:stCondLst>
+                                            <p:cond delay="0"/>
+                                          </p:stCondLst>
+                                        </p:cTn>
+                                        <p:tgtEl>
+                                          <p:spTgt spid="7"/>
+                                        </p:tgtEl>
+                                        <p:attrNameLst>
+                                          <p:attrName>style.visibility</p:attrName>
+                                        </p:attrNameLst>
+                                      </p:cBhvr>
+                                      <p:to>
+                                        <p:strVal val="visible"/>
+                                      </p:to>
+                                    </p:set>
+                                    <p:animEffect transition="in" filter="fade">
+                                      <p:cBhvr>
+                                        <p:cTn id="18" dur="500"/>
+                                        <p:tgtEl>
+                                          <p:spTgt spid="7"/>
+                                        </p:tgtEl>
+                                      </p:cBhvr>
+                                    </p:animEffect>
+                                    <p:anim calcmode="lin" valueType="num">
+                                      <p:cBhvr>
+                                        <p:cTn id="19" dur="500" fill="hold"/>
+                                        <p:tgtEl>
+                                          <p:spTgt spid="7"/>
+                                        </p:tgtEl>
+                                        <p:attrNameLst>
+                                          <p:attrName>ppt_x</p:attrName>
+                                        </p:attrNameLst>
+                                      </p:cBhvr>
+                                      <p:tavLst>
+                                        <p:tav tm="0">
+                                          <p:val>
+                                            <p:strVal val="#ppt_x"/>
+                                          </p:val>
+                                        </p:tav>
+                                        <p:tav tm="100000">
+                                          <p:val>
+                                            <p:strVal val="#ppt_x"/>
+                                          </p:val>
+                                        </p:tav>
+                                      </p:tavLst>
+                                    </p:anim>
+                                    <p:anim calcmode="lin" valueType="num">
+                                      <p:cBhvr>
+                                        <p:cTn id="20" dur="500" fill="hold"/>
+                                        <p:tgtEl>
+                                          <p:spTgt spid="7"/>
+                                        </p:tgtEl>
+                                        <p:attrNameLst>
+                                          <p:attrName>ppt_y</p:attrName>
+                                        </p:attrNameLst>
+                                      </p:cBhvr>
+                                      <p:tavLst>
+                                        <p:tav tm="0">
+                                          <p:val>
+                                            <p:strVal val="#ppt_y+.1"/>
+                                          </p:val>
+                                        </p:tav>
+                                        <p:tav tm="100000">
+                                          <p:val>
+                                            <p:strVal val="#ppt_y"/>
+                                          </p:val>
+                                        </p:tav>
+                                      </p:tavLst>
+                                    </p:anim>
+                                  </p:childTnLst>
+                                </p:cTn>
+                              </p:par>
+                            </p:childTnLst>
+                          </p:cTn>
+                        </p:par>
+                      </p:childTnLst>
+                    </p:cTn>
+                  </p:par>
+                  <p:par>
+                    <p:cTn id="29" fill="hold">
+                      <p:stCondLst>
+                        <p:cond delay="indefinite"/>
+                      </p:stCondLst>
+                      <p:childTnLst>
+                        <p:par>
+                          <p:cTn id="30" fill="hold">
+                            <p:stCondLst>
+                              <p:cond delay="0"/>
+                            </p:stCondLst>
+                            <p:childTnLst>
+                              <p:par>
+                                <p:cTn id="28" presetID="42" presetClass="entr" presetSubtype="0" fill="hold" nodeType="clickEffect">
+                                  <p:stCondLst>
+                                    <p:cond delay="0"/>
+                                  </p:stCondLst>
+                                  <p:childTnLst>
+                                    <p:set>
+                                      <p:cBhvr>
+                                        <p:cTn id="24" dur="1" fill="hold">
+                                          <p:stCondLst>
+                                            <p:cond delay="0"/>
+                                          </p:stCondLst>
+                                        </p:cTn>
+                                        <p:tgtEl>
+                                          <p:spTgt spid="8"/>
+                                        </p:tgtEl>
+                                        <p:attrNameLst>
+                                          <p:attrName>style.visibility</p:attrName>
+                                        </p:attrNameLst>
+                                      </p:cBhvr>
+                                      <p:to>
+                                        <p:strVal val="visible"/>
+                                      </p:to>
+                                    </p:set>
+                                    <p:animEffect transition="in" filter="fade">
+                                      <p:cBhvr>
+                                        <p:cTn id="25" dur="500"/>
+                                        <p:tgtEl>
+                                          <p:spTgt spid="8"/>
+                                        </p:tgtEl>
+                                      </p:cBhvr>
+                                    </p:animEffect>
+                                    <p:anim calcmode="lin" valueType="num">
+                                      <p:cBhvr>
+                                        <p:cTn id="26" dur="500" fill="hold"/>
+                                        <p:tgtEl>
+                                          <p:spTgt spid="8"/>
+                                        </p:tgtEl>
+                                        <p:attrNameLst>
+                                          <p:attrName>ppt_x</p:attrName>
+                                        </p:attrNameLst>
+                                      </p:cBhvr>
+                                      <p:tavLst>
+                                        <p:tav tm="0">
+                                          <p:val>
+                                            <p:strVal val="#ppt_x"/>
+                                          </p:val>
+                                        </p:tav>
+                                        <p:tav tm="100000">
+                                          <p:val>
+                                            <p:strVal val="#ppt_x"/>
+                                          </p:val>
+                                        </p:tav>
+                                      </p:tavLst>
+                                    </p:anim>
+                                    <p:anim calcmode="lin" valueType="num">
+                                      <p:cBhvr>
+                                        <p:cTn id="27" dur="500" fill="hold"/>
+                                        <p:tgtEl>
+                                          <p:spTgt spid="8"/>
+                                        </p:tgtEl>
+                                        <p:attrNameLst>
+                                          <p:attrName>ppt_y</p:attrName>
+                                        </p:attrNameLst>
+                                      </p:cBhvr>
+                                      <p:tavLst>
+                                        <p:tav tm="0">
+                                          <p:val>
+                                            <p:strVal val="#ppt_y+.1"/>
+                                          </p:val>
+                                        </p:tav>
+                                        <p:tav tm="100000">
+                                          <p:val>
+                                            <p:strVal val="#ppt_y"/>
+                                          </p:val>
+                                        </p:tav>
+                                      </p:tavLst>
+                                    </p:anim>
+                                  </p:childTnLst>
+                                </p:cTn>
+                              </p:par>
+                            </p:childTnLst>
+                          </p:cTn>
+                        </p:par>
+                      </p:childTnLst>
+                    </p:cTn>
+                  </p:par>
+                  <p:par>
+                    <p:cTn id="36" fill="hold">
+                      <p:stCondLst>
+                        <p:cond delay="indefinite"/>
+                      </p:stCondLst>
+                      <p:childTnLst>
+                        <p:par>
+                          <p:cTn id="37" fill="hold">
+                            <p:stCondLst>
+                              <p:cond delay="0"/>
+                            </p:stCondLst>
+                            <p:childTnLst>
+                              <p:par>
+                                <p:cTn id="35" presetID="42" presetClass="entr" presetSubtype="0" fill="hold" nodeType="clickEffect">
+                                  <p:stCondLst>
+                                    <p:cond delay="0"/>
+                                  </p:stCondLst>
+                                  <p:childTnLst>
+                                    <p:set>
+                                      <p:cBhvr>
+                                        <p:cTn id="31" dur="1" fill="hold">
+                                          <p:stCondLst>
+                                            <p:cond delay="0"/>
+                                          </p:stCondLst>
+                                        </p:cTn>
+                                        <p:tgtEl>
+                                          <p:spTgt spid="9"/>
+                                        </p:tgtEl>
+                                        <p:attrNameLst>
+                                          <p:attrName>style.visibility</p:attrName>
+                                        </p:attrNameLst>
+                                      </p:cBhvr>
+                                      <p:to>
+                                        <p:strVal val="visible"/>
+                                      </p:to>
+                                    </p:set>
+                                    <p:animEffect transition="in" filter="fade">
+                                      <p:cBhvr>
+                                        <p:cTn id="32" dur="500"/>
+                                        <p:tgtEl>
+                                          <p:spTgt spid="9"/>
+                                        </p:tgtEl>
+                                      </p:cBhvr>
+                                    </p:animEffect>
+                                    <p:anim calcmode="lin" valueType="num">
+                                      <p:cBhvr>
+                                        <p:cTn id="33" dur="500" fill="hold"/>
+                                        <p:tgtEl>
+                                          <p:spTgt spid="9"/>
+                                        </p:tgtEl>
+                                        <p:attrNameLst>
+                                          <p:attrName>ppt_x</p:attrName>
+                                        </p:attrNameLst>
+                                      </p:cBhvr>
+                                      <p:tavLst>
+                                        <p:tav tm="0">
+                                          <p:val>
+                                            <p:strVal val="#ppt_x"/>
+                                          </p:val>
+                                        </p:tav>
+                                        <p:tav tm="100000">
+                                          <p:val>
+                                            <p:strVal val="#ppt_x"/>
+                                          </p:val>
+                                        </p:tav>
+                                      </p:tavLst>
+                                    </p:anim>
+                                    <p:anim calcmode="lin" valueType="num">
+                                      <p:cBhvr>
+                                        <p:cTn id="34" dur="500" fill="hold"/>
+                                        <p:tgtEl>
+                                          <p:spTgt spid="9"/>
+                                        </p:tgtEl>
+                                        <p:attrNameLst>
+                                          <p:attrName>ppt_y</p:attrName>
+                                        </p:attrNameLst>
+                                      </p:cBhvr>
+                                      <p:tavLst>
+                                        <p:tav tm="0">
+                                          <p:val>
+                                            <p:strVal val="#ppt_y+.1"/>
+                                          </p:val>
+                                        </p:tav>
+                                        <p:tav tm="100000">
+                                          <p:val>
+                                            <p:strVal val="#ppt_y"/>
+                                          </p:val>
+                                        </p:tav>
+                                      </p:tavLst>
+                                    </p:anim>
+                                  </p:childTnLst>
+                                </p:cTn>
+                              </p:par>
+                            </p:childTnLst>
+                          </p:cTn>
+                        </p:par>
+                      </p:childTnLst>
+                    </p:cTn>
+                  </p:par>
+                  <p:par>
+                    <p:cTn id="43" fill="hold">
+                      <p:stCondLst>
+                        <p:cond delay="indefinite"/>
+                      </p:stCondLst>
+                      <p:childTnLst>
+                        <p:par>
+                          <p:cTn id="44" fill="hold">
+                            <p:stCondLst>
+                              <p:cond delay="0"/>
+                            </p:stCondLst>
+                            <p:childTnLst>
+                              <p:par>
+                                <p:cTn id="42" presetID="53" presetClass="entr" presetSubtype="16" fill="hold" nodeType="clickEffect">
+                                  <p:stCondLst>
+                                    <p:cond delay="0"/>
+                                  </p:stCondLst>
+                                  <p:childTnLst>
+                                    <p:set>
+                                      <p:cBhvr>
+                                        <p:cTn id="38" dur="1" fill="hold">
+                                          <p:stCondLst>
+                                            <p:cond delay="0"/>
+                                          </p:stCondLst>
+                                        </p:cTn>
+                                        <p:tgtEl>
+                                          <p:spTgt spid="10"/>
+                                        </p:tgtEl>
+                                        <p:attrNameLst>
+                                          <p:attrName>style.visibility</p:attrName>
+                                        </p:attrNameLst>
+                                      </p:cBhvr>
+                                      <p:to>
+                                        <p:strVal val="visible"/>
+                                      </p:to>
+                                    </p:set>
+                                    <p:animEffect transition="in" filter="fade">
+                                      <p:cBhvr>
+                                        <p:cTn id="39" dur="500"/>
+                                        <p:tgtEl>
+                                          <p:spTgt spid="10"/>
+                                        </p:tgtEl>
+                                      </p:cBhvr>
+                                    </p:animEffect>
+                                    <p:anim calcmode="lin" valueType="num">
+                                      <p:cBhvr>
+                                        <p:cTn id="40" dur="500" fill="hold"/>
+                                        <p:tgtEl>
+                                          <p:spTgt spid="10"/>
+                                        </p:tgtEl>
+                                        <p:attrNameLst>
+                                          <p:attrName>ppt_w</p:attrName>
+                                        </p:attrNameLst>
+                                      </p:cBhvr>
+                                      <p:tavLst>
+                                        <p:tav tm="0">
+                                          <p:val>
+                                            <p:fltVal val="0"/>
+                                          </p:val>
+                                        </p:tav>
+                                        <p:tav tm="100000">
+                                          <p:val>
+                                            <p:strVal val="#ppt_w"/>
+                                          </p:val>
+                                        </p:tav>
+                                      </p:tavLst>
+                                    </p:anim>
+                                    <p:anim calcmode="lin" valueType="num">
+                                      <p:cBhvr>
+                                        <p:cTn id="41" dur="500" fill="hold"/>
+                                        <p:tgtEl>
+                                          <p:spTgt spid="10"/>
+                                        </p:tgtEl>
+                                        <p:attrNameLst>
+                                          <p:attrName>ppt_h</p:attrName>
+                                        </p:attrNameLst>
+                                      </p:cBhvr>
+                                      <p:tavLst>
+                                        <p:tav tm="0">
+                                          <p:val>
+                                            <p:fltVal val="0"/>
+                                          </p:val>
+                                        </p:tav>
+                                        <p:tav tm="100000">
+                                          <p:val>
+                                            <p:strVal val="#ppt_h"/>
+                                          </p:val>
+                                        </p:tav>
+                                      </p:tavLst>
+                                    </p:anim>
+                                  </p:childTnLst>
+                                </p:cTn>
+                              </p:par>
+                            </p:childTnLst>
+                          </p:cTn>
+                        </p:par>
+                      </p:childTnLst>
+                    </p:cTn>
+                  </p:par>
+                </p:childTnLst>
+              </p:cTn>
+              <p:prevCondLst>
+                <p:cond evt="onPrev" delay="0">
+                  <p:tgtEl>
+                    <p:sldTgt/>
+                  </p:tgtEl>
+                </p:cond>
+              </p:prevCondLst>
+              <p:nextCondLst>
+                <p:cond evt="onNext" delay="0">
+                  <p:tgtEl>
+                    <p:sldTgt/>
+                  </p:tgtEl>
+                </p:cond>
+              </p:nextCondLst>
+            </p:seq>
+          </p:childTnLst>
+        </p:cTn>
+      </p:par>
+    </p:tnLst>
+  </p:timing>
+</p:sld>
+</file>
+
+<file path=ppt/slides/slide23.xml><?xml version="1.0" encoding="utf-8"?>
+<p:sld xmlns:a="http://schemas.openxmlformats.org/drawingml/2006/main" xmlns:r="http://schemas.openxmlformats.org/officeDocument/2006/relationships" xmlns:p="http://schemas.openxmlformats.org/presentationml/2006/main">
+  <p:cSld>
+    <p:spTree>
+      <p:nvGrpSpPr>
+        <p:cNvPr id="1" name=""/>
+        <p:cNvGrpSpPr/>
+        <p:nvPr/>
+      </p:nvGrpSpPr>
+      <p:grpSpPr>
+        <a:xfrm>
+          <a:off x="0" y="0"/>
+          <a:ext cx="0" cy="0"/>
+          <a:chOff x="0" y="0"/>
+          <a:chExt cx="0" cy="0"/>
+        </a:xfrm>
+      </p:grpSpPr>
+      <p:sp>
+        <p:nvSpPr>
+          <p:cNvPr id="2" name="Shape 2"/>
+          <p:cNvSpPr txBox="1"/>
+          <p:nvPr/>
+        </p:nvSpPr>
+        <p:spPr>
+          <a:xfrm>
+            <a:off x="685800" y="457200"/>
+            <a:ext cx="10820095" cy="237744"/>
+          </a:xfrm>
+          <a:prstGeom prst="rect">
+            <a:avLst/>
+          </a:prstGeom>
+          <a:noFill/>
+          <a:ln>
+            <a:noFill/>
+          </a:ln>
+        </p:spPr>
+        <p:txBody>
+          <a:bodyPr wrap="square" lIns="36576" tIns="27432" rIns="36576" bIns="27432" anchor="t">
+            <a:noAutofit/>
+          </a:bodyPr>
+          <a:lstStyle/>
+          <a:p>
+            <a:pPr algn="l">
+              <a:lnSpc>
+                <a:spcPct val="100000"/>
+              </a:lnSpc>
+            </a:pPr>
+            <a:r>
+              <a:rPr lang="en-US" sz="1200" dirty="0" b="1" spc="150" cap="all">
+                <a:solidFill>
+                  <a:srgbClr val="5F6272"/>
+                </a:solidFill>
+                <a:latin typeface="Segoe UI"/>
+                <a:cs typeface="Segoe UI"/>
+              </a:rPr>
+              <a:t xml:space="preserve">Exit Ticket</a:t>
+            </a:r>
+            <a:endParaRPr lang="en-US" sz="1200" dirty="0"/>
+          </a:p>
+        </p:txBody>
+      </p:sp>
+      <p:sp>
+        <p:nvSpPr>
+          <p:cNvPr id="3" name="Shape 3"/>
+          <p:cNvSpPr txBox="1"/>
+          <p:nvPr/>
+        </p:nvSpPr>
+        <p:spPr>
+          <a:xfrm>
+            <a:off x="685800" y="866394"/>
+            <a:ext cx="10820095" cy="580644"/>
+          </a:xfrm>
+          <a:prstGeom prst="rect">
+            <a:avLst/>
+          </a:prstGeom>
+          <a:noFill/>
+          <a:ln>
+            <a:noFill/>
+          </a:ln>
+        </p:spPr>
+        <p:txBody>
+          <a:bodyPr wrap="square" lIns="36576" tIns="27432" rIns="36576" bIns="27432" anchor="t">
+            <a:noAutofit/>
+          </a:bodyPr>
+          <a:lstStyle/>
+          <a:p>
+            <a:pPr algn="l">
+              <a:lnSpc>
+                <a:spcPct val="100000"/>
+              </a:lnSpc>
+            </a:pPr>
+            <a:r>
+              <a:rPr lang="en-US" sz="3450" dirty="0" b="1">
+                <a:solidFill>
+                  <a:srgbClr val="16171D"/>
+                </a:solidFill>
+                <a:latin typeface="Segoe UI"/>
+                <a:cs typeface="Segoe UI"/>
+              </a:rPr>
+              <a:t xml:space="preserve">Show what you know</a:t>
+            </a:r>
+            <a:endParaRPr lang="en-US" sz="3450" dirty="0"/>
+          </a:p>
+        </p:txBody>
+      </p:sp>
+      <p:sp>
+        <p:nvSpPr>
+          <p:cNvPr id="6" name="Shape 6"/>
+          <p:cNvSpPr txBox="1"/>
+          <p:nvPr/>
+        </p:nvSpPr>
+        <p:spPr>
+          <a:xfrm>
+            <a:off x="685800" y="1618488"/>
             <a:ext cx="10820095" cy="1309116"/>
           </a:xfrm>
           <a:prstGeom prst="roundRect">
@@ -13849,13 +18686,13 @@
       </p:sp>
       <p:sp>
         <p:nvSpPr>
-          <p:cNvPr id="7" name="Shape 7"/>
-          <p:cNvSpPr txBox="1"/>
-          <p:nvPr/>
-        </p:nvSpPr>
-        <p:spPr>
-          <a:xfrm>
-            <a:off x="895350" y="3232404"/>
+          <p:cNvPr id="4" name="Shape 4"/>
+          <p:cNvSpPr txBox="1"/>
+          <p:nvPr/>
+        </p:nvSpPr>
+        <p:spPr>
+          <a:xfrm>
+            <a:off x="895350" y="1789938"/>
             <a:ext cx="10400995" cy="352044"/>
           </a:xfrm>
           <a:prstGeom prst="rect">
@@ -13885,7 +18722,47 @@
                 <a:latin typeface="Segoe UI"/>
                 <a:cs typeface="Segoe UI"/>
               </a:rPr>
-              <a:t xml:space="preserve">2. Write the vertical line through (5, 6).</a:t>
+              <a:t xml:space="preserve">1. What slope is perpendicular to </a:t>
+            </a:r>
+            <a:r>
+              <a:rPr lang="en-US" sz="1950" dirty="0">
+                <a:solidFill>
+                  <a:srgbClr val="16171D"/>
+                </a:solidFill>
+                <a:latin typeface="Segoe UI"/>
+                <a:cs typeface="Segoe UI"/>
+              </a:rPr>
+              <a:t xml:space="preserve">3</a:t>
+            </a:r>
+            <a:r>
+              <a:rPr lang="en-US" sz="1950" dirty="0">
+                <a:solidFill>
+                  <a:srgbClr val="16171D"/>
+                </a:solidFill>
+                <a:latin typeface="Segoe UI"/>
+                <a:cs typeface="Segoe UI"/>
+              </a:rPr>
+              <a:t xml:space="preserve">/</a:t>
+            </a:r>
+            <a:r>
+              <a:rPr lang="en-US" sz="1950" dirty="0">
+                <a:solidFill>
+                  <a:srgbClr val="16171D"/>
+                </a:solidFill>
+                <a:latin typeface="Segoe UI"/>
+                <a:cs typeface="Segoe UI"/>
+              </a:rPr>
+              <a:t xml:space="preserve">4</a:t>
+            </a:r>
+            <a:r>
+              <a:rPr lang="en-US" sz="1950" dirty="0">
+                <a:solidFill>
+                  <a:srgbClr val="16171D"/>
+                </a:solidFill>
+                <a:latin typeface="Segoe UI"/>
+                <a:cs typeface="Segoe UI"/>
+              </a:rPr>
+              <a:t xml:space="preserve">?</a:t>
             </a:r>
             <a:endParaRPr lang="en-US" sz="1950" dirty="0"/>
           </a:p>
@@ -13893,14 +18770,14 @@
       </p:sp>
       <p:sp>
         <p:nvSpPr>
-          <p:cNvPr id="8" name="Shape 8"/>
-          <p:cNvSpPr txBox="1"/>
-          <p:nvPr/>
-        </p:nvSpPr>
-        <p:spPr>
-          <a:xfrm>
-            <a:off x="895350" y="3679698"/>
-            <a:ext cx="2742194" cy="518922"/>
+          <p:cNvPr id="5" name="Shape 5"/>
+          <p:cNvSpPr txBox="1"/>
+          <p:nvPr/>
+        </p:nvSpPr>
+        <p:spPr>
+          <a:xfrm>
+            <a:off x="895350" y="2237232"/>
+            <a:ext cx="2576368" cy="518922"/>
           </a:xfrm>
           <a:prstGeom prst="roundRect">
             <a:avLst>
@@ -13936,14 +18813,14 @@
               <a:t xml:space="preserve">ANSWER   </a:t>
             </a:r>
             <a:r>
-              <a:rPr lang="en-US" sz="2325" dirty="0" i="1">
+              <a:rPr lang="en-US" sz="2325" dirty="0">
                 <a:solidFill>
                   <a:srgbClr val="16171D"/>
                 </a:solidFill>
                 <a:latin typeface="Cambria"/>
                 <a:cs typeface="Cambria"/>
               </a:rPr>
-              <a:t xml:space="preserve">x</a:t>
+              <a:t xml:space="preserve">−</a:t>
             </a:r>
             <a:r>
               <a:rPr lang="en-US" sz="2325" dirty="0">
@@ -13953,7 +18830,27 @@
                 <a:latin typeface="Cambria"/>
                 <a:cs typeface="Cambria"/>
               </a:rPr>
-              <a:t xml:space="preserve"> = 5</a:t>
+              <a:t xml:space="preserve">4</a:t>
+            </a:r>
+            <a:r>
+              <a:rPr lang="en-US" sz="2325" dirty="0">
+                <a:solidFill>
+                  <a:srgbClr val="16171D"/>
+                </a:solidFill>
+                <a:latin typeface="Cambria"/>
+                <a:cs typeface="Cambria"/>
+              </a:rPr>
+              <a:t xml:space="preserve">/</a:t>
+            </a:r>
+            <a:r>
+              <a:rPr lang="en-US" sz="2325" dirty="0">
+                <a:solidFill>
+                  <a:srgbClr val="16171D"/>
+                </a:solidFill>
+                <a:latin typeface="Cambria"/>
+                <a:cs typeface="Cambria"/>
+              </a:rPr>
+              <a:t xml:space="preserve">3</a:t>
             </a:r>
             <a:endParaRPr lang="en-US" sz="2325" dirty="0"/>
           </a:p>
@@ -13961,13 +18858,13 @@
       </p:sp>
       <p:sp>
         <p:nvSpPr>
-          <p:cNvPr id="12" name="Shape 12"/>
-          <p:cNvSpPr txBox="1"/>
-          <p:nvPr/>
-        </p:nvSpPr>
-        <p:spPr>
-          <a:xfrm>
-            <a:off x="685800" y="4503420"/>
+          <p:cNvPr id="9" name="Shape 9"/>
+          <p:cNvSpPr txBox="1"/>
+          <p:nvPr/>
+        </p:nvSpPr>
+        <p:spPr>
+          <a:xfrm>
+            <a:off x="685800" y="3060954"/>
             <a:ext cx="10820095" cy="1309116"/>
           </a:xfrm>
           <a:prstGeom prst="roundRect">
@@ -14001,13 +18898,13 @@
       </p:sp>
       <p:sp>
         <p:nvSpPr>
-          <p:cNvPr id="10" name="Shape 10"/>
-          <p:cNvSpPr txBox="1"/>
-          <p:nvPr/>
-        </p:nvSpPr>
-        <p:spPr>
-          <a:xfrm>
-            <a:off x="895350" y="4674870"/>
+          <p:cNvPr id="7" name="Shape 7"/>
+          <p:cNvSpPr txBox="1"/>
+          <p:nvPr/>
+        </p:nvSpPr>
+        <p:spPr>
+          <a:xfrm>
+            <a:off x="895350" y="3232404"/>
             <a:ext cx="10400995" cy="352044"/>
           </a:xfrm>
           <a:prstGeom prst="rect">
@@ -14037,47 +18934,7 @@
                 <a:latin typeface="Segoe UI"/>
                 <a:cs typeface="Segoe UI"/>
               </a:rPr>
-              <a:t xml:space="preserve">3. Write the line ⊥ to </a:t>
-            </a:r>
-            <a:r>
-              <a:rPr lang="en-US" sz="1950" dirty="0" i="1">
-                <a:solidFill>
-                  <a:srgbClr val="16171D"/>
-                </a:solidFill>
-                <a:latin typeface="Segoe UI"/>
-                <a:cs typeface="Segoe UI"/>
-              </a:rPr>
-              <a:t xml:space="preserve">y</a:t>
-            </a:r>
-            <a:r>
-              <a:rPr lang="en-US" sz="1950" dirty="0">
-                <a:solidFill>
-                  <a:srgbClr val="16171D"/>
-                </a:solidFill>
-                <a:latin typeface="Segoe UI"/>
-                <a:cs typeface="Segoe UI"/>
-              </a:rPr>
-              <a:t xml:space="preserve"> = −</a:t>
-            </a:r>
-            <a:r>
-              <a:rPr lang="en-US" sz="1950" dirty="0" i="1">
-                <a:solidFill>
-                  <a:srgbClr val="16171D"/>
-                </a:solidFill>
-                <a:latin typeface="Segoe UI"/>
-                <a:cs typeface="Segoe UI"/>
-              </a:rPr>
-              <a:t xml:space="preserve">x</a:t>
-            </a:r>
-            <a:r>
-              <a:rPr lang="en-US" sz="1950" dirty="0">
-                <a:solidFill>
-                  <a:srgbClr val="16171D"/>
-                </a:solidFill>
-                <a:latin typeface="Segoe UI"/>
-                <a:cs typeface="Segoe UI"/>
-              </a:rPr>
-              <a:t xml:space="preserve"> through (0, 3).</a:t>
+              <a:t xml:space="preserve">2. Write the vertical line through (5, 6).</a:t>
             </a:r>
             <a:endParaRPr lang="en-US" sz="1950" dirty="0"/>
           </a:p>
@@ -14085,14 +18942,14 @@
       </p:sp>
       <p:sp>
         <p:nvSpPr>
-          <p:cNvPr id="11" name="Shape 11"/>
-          <p:cNvSpPr txBox="1"/>
-          <p:nvPr/>
-        </p:nvSpPr>
-        <p:spPr>
-          <a:xfrm>
-            <a:off x="895350" y="5122164"/>
-            <a:ext cx="3405500" cy="518922"/>
+          <p:cNvPr id="8" name="Shape 8"/>
+          <p:cNvSpPr txBox="1"/>
+          <p:nvPr/>
+        </p:nvSpPr>
+        <p:spPr>
+          <a:xfrm>
+            <a:off x="895350" y="3679698"/>
+            <a:ext cx="2742194" cy="518922"/>
           </a:xfrm>
           <a:prstGeom prst="roundRect">
             <a:avLst>
@@ -14135,6 +18992,198 @@
                 <a:latin typeface="Cambria"/>
                 <a:cs typeface="Cambria"/>
               </a:rPr>
+              <a:t xml:space="preserve">x</a:t>
+            </a:r>
+            <a:r>
+              <a:rPr lang="en-US" sz="2325" dirty="0">
+                <a:solidFill>
+                  <a:srgbClr val="16171D"/>
+                </a:solidFill>
+                <a:latin typeface="Cambria"/>
+                <a:cs typeface="Cambria"/>
+              </a:rPr>
+              <a:t xml:space="preserve"> = 5</a:t>
+            </a:r>
+            <a:endParaRPr lang="en-US" sz="2325" dirty="0"/>
+          </a:p>
+        </p:txBody>
+      </p:sp>
+      <p:sp>
+        <p:nvSpPr>
+          <p:cNvPr id="12" name="Shape 12"/>
+          <p:cNvSpPr txBox="1"/>
+          <p:nvPr/>
+        </p:nvSpPr>
+        <p:spPr>
+          <a:xfrm>
+            <a:off x="685800" y="4503420"/>
+            <a:ext cx="10820095" cy="1309116"/>
+          </a:xfrm>
+          <a:prstGeom prst="roundRect">
+            <a:avLst>
+              <a:gd name="adj" fmla="val 8000"/>
+            </a:avLst>
+          </a:prstGeom>
+          <a:solidFill>
+            <a:srgbClr val="FFFFFF"/>
+          </a:solidFill>
+          <a:ln w="12700">
+            <a:solidFill>
+              <a:srgbClr val="E3E4EC"/>
+            </a:solidFill>
+          </a:ln>
+        </p:spPr>
+        <p:txBody>
+          <a:bodyPr wrap="square" lIns="36576" tIns="27432" rIns="36576" bIns="27432" anchor="t">
+            <a:noAutofit/>
+          </a:bodyPr>
+          <a:lstStyle/>
+          <a:p>
+            <a:pPr algn="l">
+              <a:lnSpc>
+                <a:spcPct val="100000"/>
+              </a:lnSpc>
+            </a:pPr>
+            <a:endParaRPr lang="en-US" sz="1950" dirty="0"/>
+          </a:p>
+        </p:txBody>
+      </p:sp>
+      <p:sp>
+        <p:nvSpPr>
+          <p:cNvPr id="10" name="Shape 10"/>
+          <p:cNvSpPr txBox="1"/>
+          <p:nvPr/>
+        </p:nvSpPr>
+        <p:spPr>
+          <a:xfrm>
+            <a:off x="895350" y="4674870"/>
+            <a:ext cx="10400995" cy="352044"/>
+          </a:xfrm>
+          <a:prstGeom prst="rect">
+            <a:avLst/>
+          </a:prstGeom>
+          <a:noFill/>
+          <a:ln>
+            <a:noFill/>
+          </a:ln>
+        </p:spPr>
+        <p:txBody>
+          <a:bodyPr wrap="square" lIns="36576" tIns="27432" rIns="36576" bIns="27432" anchor="t">
+            <a:noAutofit/>
+          </a:bodyPr>
+          <a:lstStyle/>
+          <a:p>
+            <a:pPr algn="l">
+              <a:lnSpc>
+                <a:spcPct val="100000"/>
+              </a:lnSpc>
+            </a:pPr>
+            <a:r>
+              <a:rPr lang="en-US" sz="1950" dirty="0">
+                <a:solidFill>
+                  <a:srgbClr val="16171D"/>
+                </a:solidFill>
+                <a:latin typeface="Segoe UI"/>
+                <a:cs typeface="Segoe UI"/>
+              </a:rPr>
+              <a:t xml:space="preserve">3. Write the line ⊥ to </a:t>
+            </a:r>
+            <a:r>
+              <a:rPr lang="en-US" sz="1950" dirty="0" i="1">
+                <a:solidFill>
+                  <a:srgbClr val="16171D"/>
+                </a:solidFill>
+                <a:latin typeface="Segoe UI"/>
+                <a:cs typeface="Segoe UI"/>
+              </a:rPr>
+              <a:t xml:space="preserve">y</a:t>
+            </a:r>
+            <a:r>
+              <a:rPr lang="en-US" sz="1950" dirty="0">
+                <a:solidFill>
+                  <a:srgbClr val="16171D"/>
+                </a:solidFill>
+                <a:latin typeface="Segoe UI"/>
+                <a:cs typeface="Segoe UI"/>
+              </a:rPr>
+              <a:t xml:space="preserve"> = −</a:t>
+            </a:r>
+            <a:r>
+              <a:rPr lang="en-US" sz="1950" dirty="0" i="1">
+                <a:solidFill>
+                  <a:srgbClr val="16171D"/>
+                </a:solidFill>
+                <a:latin typeface="Segoe UI"/>
+                <a:cs typeface="Segoe UI"/>
+              </a:rPr>
+              <a:t xml:space="preserve">x</a:t>
+            </a:r>
+            <a:r>
+              <a:rPr lang="en-US" sz="1950" dirty="0">
+                <a:solidFill>
+                  <a:srgbClr val="16171D"/>
+                </a:solidFill>
+                <a:latin typeface="Segoe UI"/>
+                <a:cs typeface="Segoe UI"/>
+              </a:rPr>
+              <a:t xml:space="preserve"> through (0, 3).</a:t>
+            </a:r>
+            <a:endParaRPr lang="en-US" sz="1950" dirty="0"/>
+          </a:p>
+        </p:txBody>
+      </p:sp>
+      <p:sp>
+        <p:nvSpPr>
+          <p:cNvPr id="11" name="Shape 11"/>
+          <p:cNvSpPr txBox="1"/>
+          <p:nvPr/>
+        </p:nvSpPr>
+        <p:spPr>
+          <a:xfrm>
+            <a:off x="895350" y="5122164"/>
+            <a:ext cx="3405500" cy="518922"/>
+          </a:xfrm>
+          <a:prstGeom prst="roundRect">
+            <a:avLst>
+              <a:gd name="adj" fmla="val 8000"/>
+            </a:avLst>
+          </a:prstGeom>
+          <a:solidFill>
+            <a:srgbClr val="EDF5E9"/>
+          </a:solidFill>
+          <a:ln>
+            <a:noFill/>
+          </a:ln>
+        </p:spPr>
+        <p:txBody>
+          <a:bodyPr wrap="square" lIns="164592" tIns="64008" rIns="164592" bIns="64008" anchor="ctr">
+            <a:noAutofit/>
+          </a:bodyPr>
+          <a:lstStyle/>
+          <a:p>
+            <a:pPr algn="l">
+              <a:lnSpc>
+                <a:spcPct val="100000"/>
+              </a:lnSpc>
+            </a:pPr>
+            <a:r>
+              <a:rPr lang="en-US" sz="1125" dirty="0" b="1" spc="100">
+                <a:solidFill>
+                  <a:srgbClr val="4F8A3C"/>
+                </a:solidFill>
+                <a:latin typeface="Segoe UI"/>
+                <a:cs typeface="Segoe UI"/>
+              </a:rPr>
+              <a:t xml:space="preserve">ANSWER   </a:t>
+            </a:r>
+            <a:r>
+              <a:rPr lang="en-US" sz="2325" dirty="0" i="1">
+                <a:solidFill>
+                  <a:srgbClr val="16171D"/>
+                </a:solidFill>
+                <a:latin typeface="Cambria"/>
+                <a:cs typeface="Cambria"/>
+              </a:rPr>
               <a:t xml:space="preserve">y</a:t>
             </a:r>
             <a:r>
@@ -14200,7 +19249,7 @@
                   <a:srgbClr val="5F6272"/>
                 </a:solidFill>
               </a:rPr>
-              <a:t>21</a:t>
+              <a:t>23</a:t>
             </a:fld>
           </a:p>
         </p:txBody>
@@ -14543,7 +19592,7 @@
 </p:sld>
 </file>
 
-<file path=ppt/slides/slide22.xml><?xml version="1.0" encoding="utf-8"?>
+<file path=ppt/slides/slide24.xml><?xml version="1.0" encoding="utf-8"?>
 <p:sld xmlns:a="http://schemas.openxmlformats.org/drawingml/2006/main" xmlns:r="http://schemas.openxmlformats.org/officeDocument/2006/relationships" xmlns:p="http://schemas.openxmlformats.org/presentationml/2006/main">
   <p:cSld>
     <p:spTree>
@@ -14721,7 +19770,7 @@
                   <a:srgbClr val="5F6272"/>
                 </a:solidFill>
               </a:rPr>
-              <a:t>22</a:t>
+              <a:t>24</a:t>
             </a:fld>
           </a:p>
         </p:txBody>
@@ -14737,7 +19786,7 @@
 </p:sld>
 </file>
 
-<file path=ppt/slides/slide23.xml><?xml version="1.0" encoding="utf-8"?>
+<file path=ppt/slides/slide25.xml><?xml version="1.0" encoding="utf-8"?>
 <p:sld xmlns:a="http://schemas.openxmlformats.org/drawingml/2006/main" xmlns:r="http://schemas.openxmlformats.org/officeDocument/2006/relationships" xmlns:p="http://schemas.openxmlformats.org/presentationml/2006/main">
   <p:cSld>
     <p:spTree>
@@ -15033,7 +20082,7 @@
                   <a:srgbClr val="5F6272"/>
                 </a:solidFill>
               </a:rPr>
-              <a:t>23</a:t>
+              <a:t>25</a:t>
             </a:fld>
           </a:p>
         </p:txBody>

--- a/IEP/t2-lesson3-perpendicular-slopes-IEP-catchup.pptx
+++ b/IEP/t2-lesson3-perpendicular-slopes-IEP-catchup.pptx
@@ -533,7 +533,7 @@
           <a:p>
             <a:r>
               <a:rPr lang="en-US" dirty="0"/>
-              <a:t>Added for this deck; not from the textbook. Have this up as students walk in; they work silently while you take attendance (about 5 minutes). The same 4 questions are on the online Day 2 bell work. Reveal the answers one at a time. Answer key: 1. Perpendicular slopes are negative reciprocals: ⅔ · (−3/2) = −1. 2. On a horizontal line y never changes, so the rise is 0. 3. Every point on a vertical line has the same x-value, here 2. 4. Negative reciprocals multiply to −1.</a:t>
+              <a:t>Have this up as students walk in (about 5 minutes). The same 4 questions are on the online IEP Day 2 bell work, which shows the same formula under each question and these steps after each answer. Click to reveal one answer at a time; read each step aloud and point to where the formula is used.</a:t>
             </a:r>
           </a:p>
         </p:txBody>
@@ -1232,7 +1232,7 @@
           <a:p>
             <a:r>
               <a:rPr lang="en-US" dirty="0"/>
-              <a:t>Added for this deck; not from the textbook. Have this up as students walk in; they work silently while you take attendance (about 5 minutes). The same 4 questions are on the online Day 1 bell work. Reveal the answers one at a time. Answer key: 1. Flip the fraction: ⅔ · 3/2 = 1. 2. A 90° counterclockwise rotation maps (x, y) to (−y, x). 3. Slope = (5 − 0) ÷ (8 − 0) = 5/8. 4. In y = mx + b, m = −3.</a:t>
+              <a:t>Have this up as students walk in (about 5 minutes). The same 4 questions are on the online IEP Day 1 bell work, which shows the same formula under each question and these steps after each answer. Click to reveal one answer at a time; read each step aloud and point to where the formula is used.</a:t>
             </a:r>
           </a:p>
         </p:txBody>
@@ -7868,7 +7868,7 @@
                 <a:latin typeface="Segoe UI"/>
                 <a:cs typeface="Segoe UI"/>
               </a:rPr>
-              <a:t xml:space="preserve">Day 2 · Bell Work · Review of Day 1 · Mon, Nov 2</a:t>
+              <a:t xml:space="preserve">Day 2 · Bell Work · Review · Mon, Nov 2</a:t>
             </a:r>
             <a:endParaRPr lang="en-US" sz="1200" dirty="0"/>
           </a:p>
@@ -7920,21 +7920,27 @@
       </p:sp>
       <p:sp>
         <p:nvSpPr>
-          <p:cNvPr id="4" name="Shape 4"/>
-          <p:cNvSpPr txBox="1"/>
-          <p:nvPr/>
-        </p:nvSpPr>
-        <p:spPr>
-          <a:xfrm>
-            <a:off x="685800" y="1675638"/>
-            <a:ext cx="5143348" cy="946404"/>
-          </a:xfrm>
-          <a:prstGeom prst="rect">
-            <a:avLst/>
-          </a:prstGeom>
-          <a:noFill/>
-          <a:ln>
-            <a:noFill/>
+          <p:cNvPr id="7" name="Shape 7"/>
+          <p:cNvSpPr txBox="1"/>
+          <p:nvPr/>
+        </p:nvSpPr>
+        <p:spPr>
+          <a:xfrm>
+            <a:off x="685800" y="1618488"/>
+            <a:ext cx="5295748" cy="2282190"/>
+          </a:xfrm>
+          <a:prstGeom prst="roundRect">
+            <a:avLst>
+              <a:gd name="adj" fmla="val 8000"/>
+            </a:avLst>
+          </a:prstGeom>
+          <a:solidFill>
+            <a:srgbClr val="FFFFFF"/>
+          </a:solidFill>
+          <a:ln w="12700">
+            <a:solidFill>
+              <a:srgbClr val="E3E4EC"/>
+            </a:solidFill>
           </a:ln>
         </p:spPr>
         <p:txBody>
@@ -7948,18 +7954,62 @@
                 <a:spcPct val="100000"/>
               </a:lnSpc>
             </a:pPr>
-            <a:r>
-              <a:rPr lang="en-US" sz="1950" dirty="0">
-                <a:solidFill>
-                  <a:srgbClr val="16171D"/>
-                </a:solidFill>
-                <a:latin typeface="Segoe UI"/>
-                <a:cs typeface="Segoe UI"/>
-              </a:rPr>
-              <a:t xml:space="preserve">1. Line </a:t>
-            </a:r>
-            <a:r>
-              <a:rPr lang="en-US" sz="1950" dirty="0" i="1">
+            <a:endParaRPr lang="en-US" sz="1950" dirty="0"/>
+          </a:p>
+        </p:txBody>
+      </p:sp>
+      <p:sp>
+        <p:nvSpPr>
+          <p:cNvPr id="4" name="Shape 4"/>
+          <p:cNvSpPr txBox="1"/>
+          <p:nvPr/>
+        </p:nvSpPr>
+        <p:spPr>
+          <a:xfrm>
+            <a:off x="895350" y="1789938"/>
+            <a:ext cx="4876648" cy="534924"/>
+          </a:xfrm>
+          <a:prstGeom prst="rect">
+            <a:avLst/>
+          </a:prstGeom>
+          <a:noFill/>
+          <a:ln>
+            <a:noFill/>
+          </a:ln>
+        </p:spPr>
+        <p:txBody>
+          <a:bodyPr wrap="square" lIns="36576" tIns="27432" rIns="36576" bIns="27432" anchor="t">
+            <a:noAutofit/>
+          </a:bodyPr>
+          <a:lstStyle/>
+          <a:p>
+            <a:pPr algn="l">
+              <a:lnSpc>
+                <a:spcPct val="100000"/>
+              </a:lnSpc>
+            </a:pPr>
+            <a:r>
+              <a:rPr lang="en-US" sz="1575" dirty="0" b="1">
+                <a:solidFill>
+                  <a:srgbClr val="16171D"/>
+                </a:solidFill>
+                <a:latin typeface="Segoe UI"/>
+                <a:cs typeface="Segoe UI"/>
+              </a:rPr>
+              <a:t xml:space="preserve">1.</a:t>
+            </a:r>
+            <a:r>
+              <a:rPr lang="en-US" sz="1575" dirty="0">
+                <a:solidFill>
+                  <a:srgbClr val="16171D"/>
+                </a:solidFill>
+                <a:latin typeface="Segoe UI"/>
+                <a:cs typeface="Segoe UI"/>
+              </a:rPr>
+              <a:t xml:space="preserve"> Line </a:t>
+            </a:r>
+            <a:r>
+              <a:rPr lang="en-US" sz="1575" dirty="0" i="1">
                 <a:solidFill>
                   <a:srgbClr val="16171D"/>
                 </a:solidFill>
@@ -7969,7 +8019,7 @@
               <a:t xml:space="preserve">j</a:t>
             </a:r>
             <a:r>
-              <a:rPr lang="en-US" sz="1950" dirty="0">
+              <a:rPr lang="en-US" sz="1575" dirty="0">
                 <a:solidFill>
                   <a:srgbClr val="16171D"/>
                 </a:solidFill>
@@ -7979,7 +8029,7 @@
               <a:t xml:space="preserve"> has slope </a:t>
             </a:r>
             <a:r>
-              <a:rPr lang="en-US" sz="1950" dirty="0">
+              <a:rPr lang="en-US" sz="1575" dirty="0">
                 <a:solidFill>
                   <a:srgbClr val="16171D"/>
                 </a:solidFill>
@@ -7989,7 +8039,7 @@
               <a:t xml:space="preserve">⅔</a:t>
             </a:r>
             <a:r>
-              <a:rPr lang="en-US" sz="1950" dirty="0">
+              <a:rPr lang="en-US" sz="1575" dirty="0">
                 <a:solidFill>
                   <a:srgbClr val="16171D"/>
                 </a:solidFill>
@@ -7999,7 +8049,7 @@
               <a:t xml:space="preserve">. Line </a:t>
             </a:r>
             <a:r>
-              <a:rPr lang="en-US" sz="1950" dirty="0" i="1">
+              <a:rPr lang="en-US" sz="1575" dirty="0" i="1">
                 <a:solidFill>
                   <a:srgbClr val="16171D"/>
                 </a:solidFill>
@@ -8009,7 +8059,7 @@
               <a:t xml:space="preserve">k</a:t>
             </a:r>
             <a:r>
-              <a:rPr lang="en-US" sz="1950" dirty="0">
+              <a:rPr lang="en-US" sz="1575" dirty="0">
                 <a:solidFill>
                   <a:srgbClr val="16171D"/>
                 </a:solidFill>
@@ -8019,7 +8069,7 @@
               <a:t xml:space="preserve"> is perpendicular to it. What is the slope of </a:t>
             </a:r>
             <a:r>
-              <a:rPr lang="en-US" sz="1950" dirty="0" i="1">
+              <a:rPr lang="en-US" sz="1575" dirty="0" i="1">
                 <a:solidFill>
                   <a:srgbClr val="16171D"/>
                 </a:solidFill>
@@ -8029,26 +8079,16 @@
               <a:t xml:space="preserve">k</a:t>
             </a:r>
             <a:r>
-              <a:rPr lang="en-US" sz="1950" dirty="0">
-                <a:solidFill>
-                  <a:srgbClr val="16171D"/>
-                </a:solidFill>
-                <a:latin typeface="Segoe UI"/>
-                <a:cs typeface="Segoe UI"/>
-              </a:rPr>
-              <a:t xml:space="preserve">? </a:t>
-            </a:r>
-            <a:r>
               <a:rPr lang="en-US" sz="1575" dirty="0">
                 <a:solidFill>
-                  <a:srgbClr val="5F6272"/>
-                </a:solidFill>
-                <a:latin typeface="Segoe UI"/>
-                <a:cs typeface="Segoe UI"/>
-              </a:rPr>
-              <a:t xml:space="preserve">(SE p. 309)</a:t>
-            </a:r>
-            <a:endParaRPr lang="en-US" sz="1950" dirty="0"/>
+                  <a:srgbClr val="16171D"/>
+                </a:solidFill>
+                <a:latin typeface="Segoe UI"/>
+                <a:cs typeface="Segoe UI"/>
+              </a:rPr>
+              <a:t xml:space="preserve">?</a:t>
+            </a:r>
+            <a:endParaRPr lang="en-US" sz="1575" dirty="0"/>
           </a:p>
         </p:txBody>
       </p:sp>
@@ -8060,8 +8100,62 @@
         </p:nvSpPr>
         <p:spPr>
           <a:xfrm>
-            <a:off x="685800" y="2755392"/>
-            <a:ext cx="2576368" cy="518922"/>
+            <a:off x="895350" y="2362962"/>
+            <a:ext cx="4876648" cy="294894"/>
+          </a:xfrm>
+          <a:prstGeom prst="rect">
+            <a:avLst/>
+          </a:prstGeom>
+          <a:noFill/>
+          <a:ln>
+            <a:noFill/>
+          </a:ln>
+        </p:spPr>
+        <p:txBody>
+          <a:bodyPr wrap="square" lIns="36576" tIns="27432" rIns="36576" bIns="27432" anchor="t">
+            <a:noAutofit/>
+          </a:bodyPr>
+          <a:lstStyle/>
+          <a:p>
+            <a:pPr algn="l">
+              <a:lnSpc>
+                <a:spcPct val="100000"/>
+              </a:lnSpc>
+            </a:pPr>
+            <a:r>
+              <a:rPr lang="en-US" sz="1575" dirty="0" b="1">
+                <a:solidFill>
+                  <a:srgbClr val="16171D"/>
+                </a:solidFill>
+                <a:latin typeface="Segoe UI"/>
+                <a:cs typeface="Segoe UI"/>
+              </a:rPr>
+              <a:t xml:space="preserve">Formula:</a:t>
+            </a:r>
+            <a:r>
+              <a:rPr lang="en-US" sz="1575" dirty="0">
+                <a:solidFill>
+                  <a:srgbClr val="16171D"/>
+                </a:solidFill>
+                <a:latin typeface="Segoe UI"/>
+                <a:cs typeface="Segoe UI"/>
+              </a:rPr>
+              <a:t xml:space="preserve"> perpendicular: flip and change the sign</a:t>
+            </a:r>
+            <a:endParaRPr lang="en-US" sz="1575" dirty="0"/>
+          </a:p>
+        </p:txBody>
+      </p:sp>
+      <p:sp>
+        <p:nvSpPr>
+          <p:cNvPr id="6" name="Shape 6"/>
+          <p:cNvSpPr txBox="1"/>
+          <p:nvPr/>
+        </p:nvSpPr>
+        <p:spPr>
+          <a:xfrm>
+            <a:off x="895350" y="2695956"/>
+            <a:ext cx="2910695" cy="1033272"/>
           </a:xfrm>
           <a:prstGeom prst="roundRect">
             <a:avLst>
@@ -8097,7 +8191,7 @@
               <a:t xml:space="preserve">ANSWER   </a:t>
             </a:r>
             <a:r>
-              <a:rPr lang="en-US" sz="2325" dirty="0">
+              <a:rPr lang="en-US" sz="1425" dirty="0" b="1">
                 <a:solidFill>
                   <a:srgbClr val="16171D"/>
                 </a:solidFill>
@@ -8106,27 +8200,200 @@
               </a:rPr>
               <a:t xml:space="preserve">−3/2</a:t>
             </a:r>
-            <a:endParaRPr lang="en-US" sz="2325" dirty="0"/>
-          </a:p>
-        </p:txBody>
-      </p:sp>
-      <p:sp>
-        <p:nvSpPr>
-          <p:cNvPr id="6" name="Shape 6"/>
-          <p:cNvSpPr txBox="1"/>
-          <p:nvPr/>
-        </p:nvSpPr>
-        <p:spPr>
-          <a:xfrm>
-            <a:off x="685800" y="3541014"/>
-            <a:ext cx="5143348" cy="649224"/>
-          </a:xfrm>
-          <a:prstGeom prst="rect">
-            <a:avLst/>
-          </a:prstGeom>
-          <a:noFill/>
-          <a:ln>
-            <a:noFill/>
+            <a:br>
+              <a:rPr lang="en-US" sz="1425" dirty="0">
+                <a:solidFill>
+                  <a:srgbClr val="16171D"/>
+                </a:solidFill>
+                <a:latin typeface="Segoe UI"/>
+                <a:cs typeface="Segoe UI"/>
+              </a:rPr>
+            </a:br>
+            <a:r>
+              <a:rPr lang="en-US" sz="1425" dirty="0" b="1">
+                <a:solidFill>
+                  <a:srgbClr val="16171D"/>
+                </a:solidFill>
+                <a:latin typeface="Segoe UI"/>
+                <a:cs typeface="Segoe UI"/>
+              </a:rPr>
+              <a:t xml:space="preserve">1.</a:t>
+            </a:r>
+            <a:r>
+              <a:rPr lang="en-US" sz="1425" dirty="0">
+                <a:solidFill>
+                  <a:srgbClr val="16171D"/>
+                </a:solidFill>
+                <a:latin typeface="Segoe UI"/>
+                <a:cs typeface="Segoe UI"/>
+              </a:rPr>
+              <a:t xml:space="preserve"> Flip </a:t>
+            </a:r>
+            <a:r>
+              <a:rPr lang="en-US" sz="1425" dirty="0">
+                <a:solidFill>
+                  <a:srgbClr val="16171D"/>
+                </a:solidFill>
+                <a:latin typeface="Cambria"/>
+                <a:cs typeface="Cambria"/>
+              </a:rPr>
+              <a:t xml:space="preserve">⅔</a:t>
+            </a:r>
+            <a:r>
+              <a:rPr lang="en-US" sz="1425" dirty="0">
+                <a:solidFill>
+                  <a:srgbClr val="16171D"/>
+                </a:solidFill>
+                <a:latin typeface="Segoe UI"/>
+                <a:cs typeface="Segoe UI"/>
+              </a:rPr>
+              <a:t xml:space="preserve">: </a:t>
+            </a:r>
+            <a:r>
+              <a:rPr lang="en-US" sz="1425" dirty="0">
+                <a:solidFill>
+                  <a:srgbClr val="16171D"/>
+                </a:solidFill>
+                <a:latin typeface="Cambria"/>
+                <a:cs typeface="Cambria"/>
+              </a:rPr>
+              <a:t xml:space="preserve">3/2</a:t>
+            </a:r>
+            <a:r>
+              <a:rPr lang="en-US" sz="1425" dirty="0">
+                <a:solidFill>
+                  <a:srgbClr val="16171D"/>
+                </a:solidFill>
+                <a:latin typeface="Segoe UI"/>
+                <a:cs typeface="Segoe UI"/>
+              </a:rPr>
+              <a:t xml:space="preserve">.</a:t>
+            </a:r>
+            <a:br>
+              <a:rPr lang="en-US" sz="1425" dirty="0">
+                <a:solidFill>
+                  <a:srgbClr val="16171D"/>
+                </a:solidFill>
+                <a:latin typeface="Segoe UI"/>
+                <a:cs typeface="Segoe UI"/>
+              </a:rPr>
+            </a:br>
+            <a:r>
+              <a:rPr lang="en-US" sz="1425" dirty="0" b="1">
+                <a:solidFill>
+                  <a:srgbClr val="16171D"/>
+                </a:solidFill>
+                <a:latin typeface="Segoe UI"/>
+                <a:cs typeface="Segoe UI"/>
+              </a:rPr>
+              <a:t xml:space="preserve">2.</a:t>
+            </a:r>
+            <a:r>
+              <a:rPr lang="en-US" sz="1425" dirty="0">
+                <a:solidFill>
+                  <a:srgbClr val="16171D"/>
+                </a:solidFill>
+                <a:latin typeface="Segoe UI"/>
+                <a:cs typeface="Segoe UI"/>
+              </a:rPr>
+              <a:t xml:space="preserve"> Change the sign: </a:t>
+            </a:r>
+            <a:r>
+              <a:rPr lang="en-US" sz="1425" dirty="0">
+                <a:solidFill>
+                  <a:srgbClr val="16171D"/>
+                </a:solidFill>
+                <a:latin typeface="Cambria"/>
+                <a:cs typeface="Cambria"/>
+              </a:rPr>
+              <a:t xml:space="preserve">−3/2</a:t>
+            </a:r>
+            <a:r>
+              <a:rPr lang="en-US" sz="1425" dirty="0">
+                <a:solidFill>
+                  <a:srgbClr val="16171D"/>
+                </a:solidFill>
+                <a:latin typeface="Segoe UI"/>
+                <a:cs typeface="Segoe UI"/>
+              </a:rPr>
+              <a:t xml:space="preserve">.</a:t>
+            </a:r>
+            <a:br>
+              <a:rPr lang="en-US" sz="1425" dirty="0">
+                <a:solidFill>
+                  <a:srgbClr val="16171D"/>
+                </a:solidFill>
+                <a:latin typeface="Segoe UI"/>
+                <a:cs typeface="Segoe UI"/>
+              </a:rPr>
+            </a:br>
+            <a:r>
+              <a:rPr lang="en-US" sz="1425" dirty="0" b="1">
+                <a:solidFill>
+                  <a:srgbClr val="16171D"/>
+                </a:solidFill>
+                <a:latin typeface="Segoe UI"/>
+                <a:cs typeface="Segoe UI"/>
+              </a:rPr>
+              <a:t xml:space="preserve">3.</a:t>
+            </a:r>
+            <a:r>
+              <a:rPr lang="en-US" sz="1425" dirty="0">
+                <a:solidFill>
+                  <a:srgbClr val="16171D"/>
+                </a:solidFill>
+                <a:latin typeface="Segoe UI"/>
+                <a:cs typeface="Segoe UI"/>
+              </a:rPr>
+              <a:t xml:space="preserve"> Check: </a:t>
+            </a:r>
+            <a:r>
+              <a:rPr lang="en-US" sz="1425" dirty="0">
+                <a:solidFill>
+                  <a:srgbClr val="16171D"/>
+                </a:solidFill>
+                <a:latin typeface="Cambria"/>
+                <a:cs typeface="Cambria"/>
+              </a:rPr>
+              <a:t xml:space="preserve">⅔ · (−3/2) = −1</a:t>
+            </a:r>
+            <a:r>
+              <a:rPr lang="en-US" sz="1425" dirty="0">
+                <a:solidFill>
+                  <a:srgbClr val="16171D"/>
+                </a:solidFill>
+                <a:latin typeface="Segoe UI"/>
+                <a:cs typeface="Segoe UI"/>
+              </a:rPr>
+              <a:t xml:space="preserve">.</a:t>
+            </a:r>
+            <a:endParaRPr lang="en-US" sz="1425" dirty="0"/>
+          </a:p>
+        </p:txBody>
+      </p:sp>
+      <p:sp>
+        <p:nvSpPr>
+          <p:cNvPr id="11" name="Shape 11"/>
+          <p:cNvSpPr txBox="1"/>
+          <p:nvPr/>
+        </p:nvSpPr>
+        <p:spPr>
+          <a:xfrm>
+            <a:off x="685800" y="4034028"/>
+            <a:ext cx="5295748" cy="2042160"/>
+          </a:xfrm>
+          <a:prstGeom prst="roundRect">
+            <a:avLst>
+              <a:gd name="adj" fmla="val 8000"/>
+            </a:avLst>
+          </a:prstGeom>
+          <a:solidFill>
+            <a:srgbClr val="FFFFFF"/>
+          </a:solidFill>
+          <a:ln w="12700">
+            <a:solidFill>
+              <a:srgbClr val="E3E4EC"/>
+            </a:solidFill>
           </a:ln>
         </p:spPr>
         <p:txBody>
@@ -8140,40 +8407,128 @@
                 <a:spcPct val="100000"/>
               </a:lnSpc>
             </a:pPr>
-            <a:r>
-              <a:rPr lang="en-US" sz="1950" dirty="0">
-                <a:solidFill>
-                  <a:srgbClr val="16171D"/>
-                </a:solidFill>
-                <a:latin typeface="Segoe UI"/>
-                <a:cs typeface="Segoe UI"/>
-              </a:rPr>
-              <a:t xml:space="preserve">2. What is the slope of any horizontal line? </a:t>
+            <a:endParaRPr lang="en-US" sz="1950" dirty="0"/>
+          </a:p>
+        </p:txBody>
+      </p:sp>
+      <p:sp>
+        <p:nvSpPr>
+          <p:cNvPr id="8" name="Shape 8"/>
+          <p:cNvSpPr txBox="1"/>
+          <p:nvPr/>
+        </p:nvSpPr>
+        <p:spPr>
+          <a:xfrm>
+            <a:off x="895350" y="4205478"/>
+            <a:ext cx="4876648" cy="294894"/>
+          </a:xfrm>
+          <a:prstGeom prst="rect">
+            <a:avLst/>
+          </a:prstGeom>
+          <a:noFill/>
+          <a:ln>
+            <a:noFill/>
+          </a:ln>
+        </p:spPr>
+        <p:txBody>
+          <a:bodyPr wrap="square" lIns="36576" tIns="27432" rIns="36576" bIns="27432" anchor="t">
+            <a:noAutofit/>
+          </a:bodyPr>
+          <a:lstStyle/>
+          <a:p>
+            <a:pPr algn="l">
+              <a:lnSpc>
+                <a:spcPct val="100000"/>
+              </a:lnSpc>
+            </a:pPr>
+            <a:r>
+              <a:rPr lang="en-US" sz="1575" dirty="0" b="1">
+                <a:solidFill>
+                  <a:srgbClr val="16171D"/>
+                </a:solidFill>
+                <a:latin typeface="Segoe UI"/>
+                <a:cs typeface="Segoe UI"/>
+              </a:rPr>
+              <a:t xml:space="preserve">2.</a:t>
             </a:r>
             <a:r>
               <a:rPr lang="en-US" sz="1575" dirty="0">
                 <a:solidFill>
-                  <a:srgbClr val="5F6272"/>
-                </a:solidFill>
-                <a:latin typeface="Segoe UI"/>
-                <a:cs typeface="Segoe UI"/>
-              </a:rPr>
-              <a:t xml:space="preserve">(SE p. 310)</a:t>
-            </a:r>
-            <a:endParaRPr lang="en-US" sz="1950" dirty="0"/>
-          </a:p>
-        </p:txBody>
-      </p:sp>
-      <p:sp>
-        <p:nvSpPr>
-          <p:cNvPr id="7" name="Shape 7"/>
-          <p:cNvSpPr txBox="1"/>
-          <p:nvPr/>
-        </p:nvSpPr>
-        <p:spPr>
-          <a:xfrm>
-            <a:off x="685800" y="4323588"/>
-            <a:ext cx="2078888" cy="518922"/>
+                  <a:srgbClr val="16171D"/>
+                </a:solidFill>
+                <a:latin typeface="Segoe UI"/>
+                <a:cs typeface="Segoe UI"/>
+              </a:rPr>
+              <a:t xml:space="preserve"> What is the slope of any horizontal line?</a:t>
+            </a:r>
+            <a:endParaRPr lang="en-US" sz="1575" dirty="0"/>
+          </a:p>
+        </p:txBody>
+      </p:sp>
+      <p:sp>
+        <p:nvSpPr>
+          <p:cNvPr id="9" name="Shape 9"/>
+          <p:cNvSpPr txBox="1"/>
+          <p:nvPr/>
+        </p:nvSpPr>
+        <p:spPr>
+          <a:xfrm>
+            <a:off x="895350" y="4538472"/>
+            <a:ext cx="4876648" cy="294894"/>
+          </a:xfrm>
+          <a:prstGeom prst="rect">
+            <a:avLst/>
+          </a:prstGeom>
+          <a:noFill/>
+          <a:ln>
+            <a:noFill/>
+          </a:ln>
+        </p:spPr>
+        <p:txBody>
+          <a:bodyPr wrap="square" lIns="36576" tIns="27432" rIns="36576" bIns="27432" anchor="t">
+            <a:noAutofit/>
+          </a:bodyPr>
+          <a:lstStyle/>
+          <a:p>
+            <a:pPr algn="l">
+              <a:lnSpc>
+                <a:spcPct val="100000"/>
+              </a:lnSpc>
+            </a:pPr>
+            <a:r>
+              <a:rPr lang="en-US" sz="1575" dirty="0" b="1">
+                <a:solidFill>
+                  <a:srgbClr val="16171D"/>
+                </a:solidFill>
+                <a:latin typeface="Segoe UI"/>
+                <a:cs typeface="Segoe UI"/>
+              </a:rPr>
+              <a:t xml:space="preserve">Formula:</a:t>
+            </a:r>
+            <a:r>
+              <a:rPr lang="en-US" sz="1575" dirty="0">
+                <a:solidFill>
+                  <a:srgbClr val="16171D"/>
+                </a:solidFill>
+                <a:latin typeface="Segoe UI"/>
+                <a:cs typeface="Segoe UI"/>
+              </a:rPr>
+              <a:t xml:space="preserve"> slope = rise ÷ run</a:t>
+            </a:r>
+            <a:endParaRPr lang="en-US" sz="1575" dirty="0"/>
+          </a:p>
+        </p:txBody>
+      </p:sp>
+      <p:sp>
+        <p:nvSpPr>
+          <p:cNvPr id="10" name="Shape 10"/>
+          <p:cNvSpPr txBox="1"/>
+          <p:nvPr/>
+        </p:nvSpPr>
+        <p:spPr>
+          <a:xfrm>
+            <a:off x="895350" y="4871466"/>
+            <a:ext cx="4876648" cy="1033272"/>
           </a:xfrm>
           <a:prstGeom prst="roundRect">
             <a:avLst>
@@ -8209,7 +8564,7 @@
               <a:t xml:space="preserve">ANSWER   </a:t>
             </a:r>
             <a:r>
-              <a:rPr lang="en-US" sz="2325" dirty="0">
+              <a:rPr lang="en-US" sz="1425" dirty="0" b="1">
                 <a:solidFill>
                   <a:srgbClr val="16171D"/>
                 </a:solidFill>
@@ -8218,27 +8573,151 @@
               </a:rPr>
               <a:t xml:space="preserve">0</a:t>
             </a:r>
-            <a:endParaRPr lang="en-US" sz="2325" dirty="0"/>
-          </a:p>
-        </p:txBody>
-      </p:sp>
-      <p:sp>
-        <p:nvSpPr>
-          <p:cNvPr id="8" name="Shape 8"/>
-          <p:cNvSpPr txBox="1"/>
-          <p:nvPr/>
-        </p:nvSpPr>
-        <p:spPr>
-          <a:xfrm>
-            <a:off x="6362548" y="1675638"/>
-            <a:ext cx="5143348" cy="649224"/>
-          </a:xfrm>
-          <a:prstGeom prst="rect">
-            <a:avLst/>
-          </a:prstGeom>
-          <a:noFill/>
-          <a:ln>
-            <a:noFill/>
+            <a:br>
+              <a:rPr lang="en-US" sz="1425" dirty="0">
+                <a:solidFill>
+                  <a:srgbClr val="16171D"/>
+                </a:solidFill>
+                <a:latin typeface="Segoe UI"/>
+                <a:cs typeface="Segoe UI"/>
+              </a:rPr>
+            </a:br>
+            <a:r>
+              <a:rPr lang="en-US" sz="1425" dirty="0" b="1">
+                <a:solidFill>
+                  <a:srgbClr val="16171D"/>
+                </a:solidFill>
+                <a:latin typeface="Segoe UI"/>
+                <a:cs typeface="Segoe UI"/>
+              </a:rPr>
+              <a:t xml:space="preserve">1.</a:t>
+            </a:r>
+            <a:r>
+              <a:rPr lang="en-US" sz="1425" dirty="0">
+                <a:solidFill>
+                  <a:srgbClr val="16171D"/>
+                </a:solidFill>
+                <a:latin typeface="Segoe UI"/>
+                <a:cs typeface="Segoe UI"/>
+              </a:rPr>
+              <a:t xml:space="preserve"> A horizontal line is flat: it never goes up or down, so the rise is 0.</a:t>
+            </a:r>
+            <a:br>
+              <a:rPr lang="en-US" sz="1425" dirty="0">
+                <a:solidFill>
+                  <a:srgbClr val="16171D"/>
+                </a:solidFill>
+                <a:latin typeface="Segoe UI"/>
+                <a:cs typeface="Segoe UI"/>
+              </a:rPr>
+            </a:br>
+            <a:r>
+              <a:rPr lang="en-US" sz="1425" dirty="0" b="1">
+                <a:solidFill>
+                  <a:srgbClr val="16171D"/>
+                </a:solidFill>
+                <a:latin typeface="Segoe UI"/>
+                <a:cs typeface="Segoe UI"/>
+              </a:rPr>
+              <a:t xml:space="preserve">2.</a:t>
+            </a:r>
+            <a:r>
+              <a:rPr lang="en-US" sz="1425" dirty="0">
+                <a:solidFill>
+                  <a:srgbClr val="16171D"/>
+                </a:solidFill>
+                <a:latin typeface="Segoe UI"/>
+                <a:cs typeface="Segoe UI"/>
+              </a:rPr>
+              <a:t xml:space="preserve"> </a:t>
+            </a:r>
+            <a:r>
+              <a:rPr lang="en-US" sz="1425" dirty="0">
+                <a:solidFill>
+                  <a:srgbClr val="16171D"/>
+                </a:solidFill>
+                <a:latin typeface="Cambria"/>
+                <a:cs typeface="Cambria"/>
+              </a:rPr>
+              <a:t xml:space="preserve">0 ÷ </a:t>
+            </a:r>
+            <a:r>
+              <a:rPr lang="en-US" sz="1425" dirty="0" i="1">
+                <a:solidFill>
+                  <a:srgbClr val="16171D"/>
+                </a:solidFill>
+                <a:latin typeface="Cambria"/>
+                <a:cs typeface="Cambria"/>
+              </a:rPr>
+              <a:t xml:space="preserve">r</a:t>
+            </a:r>
+            <a:r>
+              <a:rPr lang="en-US" sz="1425" dirty="0" i="1">
+                <a:solidFill>
+                  <a:srgbClr val="16171D"/>
+                </a:solidFill>
+                <a:latin typeface="Cambria"/>
+                <a:cs typeface="Cambria"/>
+              </a:rPr>
+              <a:t xml:space="preserve">u</a:t>
+            </a:r>
+            <a:r>
+              <a:rPr lang="en-US" sz="1425" dirty="0" i="1">
+                <a:solidFill>
+                  <a:srgbClr val="16171D"/>
+                </a:solidFill>
+                <a:latin typeface="Cambria"/>
+                <a:cs typeface="Cambria"/>
+              </a:rPr>
+              <a:t xml:space="preserve">n</a:t>
+            </a:r>
+            <a:r>
+              <a:rPr lang="en-US" sz="1425" dirty="0">
+                <a:solidFill>
+                  <a:srgbClr val="16171D"/>
+                </a:solidFill>
+                <a:latin typeface="Cambria"/>
+                <a:cs typeface="Cambria"/>
+              </a:rPr>
+              <a:t xml:space="preserve"> = 0</a:t>
+            </a:r>
+            <a:r>
+              <a:rPr lang="en-US" sz="1425" dirty="0">
+                <a:solidFill>
+                  <a:srgbClr val="16171D"/>
+                </a:solidFill>
+                <a:latin typeface="Segoe UI"/>
+                <a:cs typeface="Segoe UI"/>
+              </a:rPr>
+              <a:t xml:space="preserve">. The slope is 0.</a:t>
+            </a:r>
+            <a:endParaRPr lang="en-US" sz="1425" dirty="0"/>
+          </a:p>
+        </p:txBody>
+      </p:sp>
+      <p:sp>
+        <p:nvSpPr>
+          <p:cNvPr id="15" name="Shape 15"/>
+          <p:cNvSpPr txBox="1"/>
+          <p:nvPr/>
+        </p:nvSpPr>
+        <p:spPr>
+          <a:xfrm>
+            <a:off x="6210148" y="1618488"/>
+            <a:ext cx="5295748" cy="2065020"/>
+          </a:xfrm>
+          <a:prstGeom prst="roundRect">
+            <a:avLst>
+              <a:gd name="adj" fmla="val 8000"/>
+            </a:avLst>
+          </a:prstGeom>
+          <a:solidFill>
+            <a:srgbClr val="FFFFFF"/>
+          </a:solidFill>
+          <a:ln w="12700">
+            <a:solidFill>
+              <a:srgbClr val="E3E4EC"/>
+            </a:solidFill>
           </a:ln>
         </p:spPr>
         <p:txBody>
@@ -8252,18 +8731,62 @@
                 <a:spcPct val="100000"/>
               </a:lnSpc>
             </a:pPr>
-            <a:r>
-              <a:rPr lang="en-US" sz="1950" dirty="0">
-                <a:solidFill>
-                  <a:srgbClr val="16171D"/>
-                </a:solidFill>
-                <a:latin typeface="Segoe UI"/>
-                <a:cs typeface="Segoe UI"/>
-              </a:rPr>
-              <a:t xml:space="preserve">3. Which is the equation of the vertical line through </a:t>
-            </a:r>
-            <a:r>
-              <a:rPr lang="en-US" sz="1950" dirty="0">
+            <a:endParaRPr lang="en-US" sz="1950" dirty="0"/>
+          </a:p>
+        </p:txBody>
+      </p:sp>
+      <p:sp>
+        <p:nvSpPr>
+          <p:cNvPr id="12" name="Shape 12"/>
+          <p:cNvSpPr txBox="1"/>
+          <p:nvPr/>
+        </p:nvSpPr>
+        <p:spPr>
+          <a:xfrm>
+            <a:off x="6419698" y="1789938"/>
+            <a:ext cx="4876648" cy="534924"/>
+          </a:xfrm>
+          <a:prstGeom prst="rect">
+            <a:avLst/>
+          </a:prstGeom>
+          <a:noFill/>
+          <a:ln>
+            <a:noFill/>
+          </a:ln>
+        </p:spPr>
+        <p:txBody>
+          <a:bodyPr wrap="square" lIns="36576" tIns="27432" rIns="36576" bIns="27432" anchor="t">
+            <a:noAutofit/>
+          </a:bodyPr>
+          <a:lstStyle/>
+          <a:p>
+            <a:pPr algn="l">
+              <a:lnSpc>
+                <a:spcPct val="100000"/>
+              </a:lnSpc>
+            </a:pPr>
+            <a:r>
+              <a:rPr lang="en-US" sz="1575" dirty="0" b="1">
+                <a:solidFill>
+                  <a:srgbClr val="16171D"/>
+                </a:solidFill>
+                <a:latin typeface="Segoe UI"/>
+                <a:cs typeface="Segoe UI"/>
+              </a:rPr>
+              <a:t xml:space="preserve">3.</a:t>
+            </a:r>
+            <a:r>
+              <a:rPr lang="en-US" sz="1575" dirty="0">
+                <a:solidFill>
+                  <a:srgbClr val="16171D"/>
+                </a:solidFill>
+                <a:latin typeface="Segoe UI"/>
+                <a:cs typeface="Segoe UI"/>
+              </a:rPr>
+              <a:t xml:space="preserve"> Which is the equation of the vertical line through </a:t>
+            </a:r>
+            <a:r>
+              <a:rPr lang="en-US" sz="1575" dirty="0">
                 <a:solidFill>
                   <a:srgbClr val="16171D"/>
                 </a:solidFill>
@@ -8273,39 +8796,113 @@
               <a:t xml:space="preserve">(2, −1)</a:t>
             </a:r>
             <a:r>
-              <a:rPr lang="en-US" sz="1950" dirty="0">
-                <a:solidFill>
-                  <a:srgbClr val="16171D"/>
-                </a:solidFill>
-                <a:latin typeface="Segoe UI"/>
-                <a:cs typeface="Segoe UI"/>
-              </a:rPr>
-              <a:t xml:space="preserve">? </a:t>
-            </a:r>
-            <a:r>
               <a:rPr lang="en-US" sz="1575" dirty="0">
                 <a:solidFill>
-                  <a:srgbClr val="5F6272"/>
-                </a:solidFill>
-                <a:latin typeface="Segoe UI"/>
-                <a:cs typeface="Segoe UI"/>
-              </a:rPr>
-              <a:t xml:space="preserve">(SE p. 311)</a:t>
-            </a:r>
-            <a:endParaRPr lang="en-US" sz="1950" dirty="0"/>
-          </a:p>
-        </p:txBody>
-      </p:sp>
-      <p:sp>
-        <p:nvSpPr>
-          <p:cNvPr id="9" name="Shape 9"/>
-          <p:cNvSpPr txBox="1"/>
-          <p:nvPr/>
-        </p:nvSpPr>
-        <p:spPr>
-          <a:xfrm>
-            <a:off x="6362548" y="2458212"/>
-            <a:ext cx="2742194" cy="518922"/>
+                  <a:srgbClr val="16171D"/>
+                </a:solidFill>
+                <a:latin typeface="Segoe UI"/>
+                <a:cs typeface="Segoe UI"/>
+              </a:rPr>
+              <a:t xml:space="preserve">?</a:t>
+            </a:r>
+            <a:endParaRPr lang="en-US" sz="1575" dirty="0"/>
+          </a:p>
+        </p:txBody>
+      </p:sp>
+      <p:sp>
+        <p:nvSpPr>
+          <p:cNvPr id="13" name="Shape 13"/>
+          <p:cNvSpPr txBox="1"/>
+          <p:nvPr/>
+        </p:nvSpPr>
+        <p:spPr>
+          <a:xfrm>
+            <a:off x="6419698" y="2362962"/>
+            <a:ext cx="4876648" cy="294894"/>
+          </a:xfrm>
+          <a:prstGeom prst="rect">
+            <a:avLst/>
+          </a:prstGeom>
+          <a:noFill/>
+          <a:ln>
+            <a:noFill/>
+          </a:ln>
+        </p:spPr>
+        <p:txBody>
+          <a:bodyPr wrap="square" lIns="36576" tIns="27432" rIns="36576" bIns="27432" anchor="t">
+            <a:noAutofit/>
+          </a:bodyPr>
+          <a:lstStyle/>
+          <a:p>
+            <a:pPr algn="l">
+              <a:lnSpc>
+                <a:spcPct val="100000"/>
+              </a:lnSpc>
+            </a:pPr>
+            <a:r>
+              <a:rPr lang="en-US" sz="1575" dirty="0" b="1">
+                <a:solidFill>
+                  <a:srgbClr val="16171D"/>
+                </a:solidFill>
+                <a:latin typeface="Segoe UI"/>
+                <a:cs typeface="Segoe UI"/>
+              </a:rPr>
+              <a:t xml:space="preserve">Formula:</a:t>
+            </a:r>
+            <a:r>
+              <a:rPr lang="en-US" sz="1575" dirty="0">
+                <a:solidFill>
+                  <a:srgbClr val="16171D"/>
+                </a:solidFill>
+                <a:latin typeface="Segoe UI"/>
+                <a:cs typeface="Segoe UI"/>
+              </a:rPr>
+              <a:t xml:space="preserve"> vertical line: </a:t>
+            </a:r>
+            <a:r>
+              <a:rPr lang="en-US" sz="1575" dirty="0" i="1">
+                <a:solidFill>
+                  <a:srgbClr val="16171D"/>
+                </a:solidFill>
+                <a:latin typeface="Cambria"/>
+                <a:cs typeface="Cambria"/>
+              </a:rPr>
+              <a:t xml:space="preserve">x</a:t>
+            </a:r>
+            <a:r>
+              <a:rPr lang="en-US" sz="1575" dirty="0">
+                <a:solidFill>
+                  <a:srgbClr val="16171D"/>
+                </a:solidFill>
+                <a:latin typeface="Cambria"/>
+                <a:cs typeface="Cambria"/>
+              </a:rPr>
+              <a:t xml:space="preserve"> =</a:t>
+            </a:r>
+            <a:r>
+              <a:rPr lang="en-US" sz="1575" dirty="0">
+                <a:solidFill>
+                  <a:srgbClr val="16171D"/>
+                </a:solidFill>
+                <a:latin typeface="Segoe UI"/>
+                <a:cs typeface="Segoe UI"/>
+              </a:rPr>
+              <a:t xml:space="preserve"> a number</a:t>
+            </a:r>
+            <a:endParaRPr lang="en-US" sz="1575" dirty="0"/>
+          </a:p>
+        </p:txBody>
+      </p:sp>
+      <p:sp>
+        <p:nvSpPr>
+          <p:cNvPr id="14" name="Shape 14"/>
+          <p:cNvSpPr txBox="1"/>
+          <p:nvPr/>
+        </p:nvSpPr>
+        <p:spPr>
+          <a:xfrm>
+            <a:off x="6419698" y="2695956"/>
+            <a:ext cx="4730363" cy="816102"/>
           </a:xfrm>
           <a:prstGeom prst="roundRect">
             <a:avLst>
@@ -8341,7 +8938,7 @@
               <a:t xml:space="preserve">ANSWER   </a:t>
             </a:r>
             <a:r>
-              <a:rPr lang="en-US" sz="2325" dirty="0" i="1">
+              <a:rPr lang="en-US" sz="1425" dirty="0" b="1" i="1">
                 <a:solidFill>
                   <a:srgbClr val="16171D"/>
                 </a:solidFill>
@@ -8351,7 +8948,7 @@
               <a:t xml:space="preserve">x</a:t>
             </a:r>
             <a:r>
-              <a:rPr lang="en-US" sz="2325" dirty="0">
+              <a:rPr lang="en-US" sz="1425" dirty="0" b="1">
                 <a:solidFill>
                   <a:srgbClr val="16171D"/>
                 </a:solidFill>
@@ -8360,27 +8957,171 @@
               </a:rPr>
               <a:t xml:space="preserve"> = 2</a:t>
             </a:r>
-            <a:endParaRPr lang="en-US" sz="2325" dirty="0"/>
-          </a:p>
-        </p:txBody>
-      </p:sp>
-      <p:sp>
-        <p:nvSpPr>
-          <p:cNvPr id="10" name="Shape 10"/>
-          <p:cNvSpPr txBox="1"/>
-          <p:nvPr/>
-        </p:nvSpPr>
-        <p:spPr>
-          <a:xfrm>
-            <a:off x="6362548" y="3243834"/>
-            <a:ext cx="5143348" cy="946404"/>
-          </a:xfrm>
-          <a:prstGeom prst="rect">
-            <a:avLst/>
-          </a:prstGeom>
-          <a:noFill/>
-          <a:ln>
-            <a:noFill/>
+            <a:br>
+              <a:rPr lang="en-US" sz="1425" dirty="0">
+                <a:solidFill>
+                  <a:srgbClr val="16171D"/>
+                </a:solidFill>
+                <a:latin typeface="Segoe UI"/>
+                <a:cs typeface="Segoe UI"/>
+              </a:rPr>
+            </a:br>
+            <a:r>
+              <a:rPr lang="en-US" sz="1425" dirty="0" b="1">
+                <a:solidFill>
+                  <a:srgbClr val="16171D"/>
+                </a:solidFill>
+                <a:latin typeface="Segoe UI"/>
+                <a:cs typeface="Segoe UI"/>
+              </a:rPr>
+              <a:t xml:space="preserve">1.</a:t>
+            </a:r>
+            <a:r>
+              <a:rPr lang="en-US" sz="1425" dirty="0">
+                <a:solidFill>
+                  <a:srgbClr val="16171D"/>
+                </a:solidFill>
+                <a:latin typeface="Segoe UI"/>
+                <a:cs typeface="Segoe UI"/>
+              </a:rPr>
+              <a:t xml:space="preserve"> On a vertical line, </a:t>
+            </a:r>
+            <a:r>
+              <a:rPr lang="en-US" sz="1425" dirty="0" i="1">
+                <a:solidFill>
+                  <a:srgbClr val="16171D"/>
+                </a:solidFill>
+                <a:latin typeface="Cambria"/>
+                <a:cs typeface="Cambria"/>
+              </a:rPr>
+              <a:t xml:space="preserve">x</a:t>
+            </a:r>
+            <a:r>
+              <a:rPr lang="en-US" sz="1425" dirty="0">
+                <a:solidFill>
+                  <a:srgbClr val="16171D"/>
+                </a:solidFill>
+                <a:latin typeface="Segoe UI"/>
+                <a:cs typeface="Segoe UI"/>
+              </a:rPr>
+              <a:t xml:space="preserve"> never changes.</a:t>
+            </a:r>
+            <a:br>
+              <a:rPr lang="en-US" sz="1425" dirty="0">
+                <a:solidFill>
+                  <a:srgbClr val="16171D"/>
+                </a:solidFill>
+                <a:latin typeface="Segoe UI"/>
+                <a:cs typeface="Segoe UI"/>
+              </a:rPr>
+            </a:br>
+            <a:r>
+              <a:rPr lang="en-US" sz="1425" dirty="0" b="1">
+                <a:solidFill>
+                  <a:srgbClr val="16171D"/>
+                </a:solidFill>
+                <a:latin typeface="Segoe UI"/>
+                <a:cs typeface="Segoe UI"/>
+              </a:rPr>
+              <a:t xml:space="preserve">2.</a:t>
+            </a:r>
+            <a:r>
+              <a:rPr lang="en-US" sz="1425" dirty="0">
+                <a:solidFill>
+                  <a:srgbClr val="16171D"/>
+                </a:solidFill>
+                <a:latin typeface="Segoe UI"/>
+                <a:cs typeface="Segoe UI"/>
+              </a:rPr>
+              <a:t xml:space="preserve"> The point has </a:t>
+            </a:r>
+            <a:r>
+              <a:rPr lang="en-US" sz="1425" dirty="0" i="1">
+                <a:solidFill>
+                  <a:srgbClr val="16171D"/>
+                </a:solidFill>
+                <a:latin typeface="Cambria"/>
+                <a:cs typeface="Cambria"/>
+              </a:rPr>
+              <a:t xml:space="preserve">x</a:t>
+            </a:r>
+            <a:r>
+              <a:rPr lang="en-US" sz="1425" dirty="0">
+                <a:solidFill>
+                  <a:srgbClr val="16171D"/>
+                </a:solidFill>
+                <a:latin typeface="Cambria"/>
+                <a:cs typeface="Cambria"/>
+              </a:rPr>
+              <a:t xml:space="preserve"> = 2</a:t>
+            </a:r>
+            <a:r>
+              <a:rPr lang="en-US" sz="1425" dirty="0">
+                <a:solidFill>
+                  <a:srgbClr val="16171D"/>
+                </a:solidFill>
+                <a:latin typeface="Segoe UI"/>
+                <a:cs typeface="Segoe UI"/>
+              </a:rPr>
+              <a:t xml:space="preserve">, so the line is </a:t>
+            </a:r>
+            <a:r>
+              <a:rPr lang="en-US" sz="1425" dirty="0" i="1">
+                <a:solidFill>
+                  <a:srgbClr val="16171D"/>
+                </a:solidFill>
+                <a:latin typeface="Cambria"/>
+                <a:cs typeface="Cambria"/>
+              </a:rPr>
+              <a:t xml:space="preserve">x</a:t>
+            </a:r>
+            <a:r>
+              <a:rPr lang="en-US" sz="1425" dirty="0">
+                <a:solidFill>
+                  <a:srgbClr val="16171D"/>
+                </a:solidFill>
+                <a:latin typeface="Cambria"/>
+                <a:cs typeface="Cambria"/>
+              </a:rPr>
+              <a:t xml:space="preserve"> = 2</a:t>
+            </a:r>
+            <a:r>
+              <a:rPr lang="en-US" sz="1425" dirty="0">
+                <a:solidFill>
+                  <a:srgbClr val="16171D"/>
+                </a:solidFill>
+                <a:latin typeface="Segoe UI"/>
+                <a:cs typeface="Segoe UI"/>
+              </a:rPr>
+              <a:t xml:space="preserve">.</a:t>
+            </a:r>
+            <a:endParaRPr lang="en-US" sz="1425" dirty="0"/>
+          </a:p>
+        </p:txBody>
+      </p:sp>
+      <p:sp>
+        <p:nvSpPr>
+          <p:cNvPr id="19" name="Shape 19"/>
+          <p:cNvSpPr txBox="1"/>
+          <p:nvPr/>
+        </p:nvSpPr>
+        <p:spPr>
+          <a:xfrm>
+            <a:off x="6210148" y="3816858"/>
+            <a:ext cx="5295748" cy="2065020"/>
+          </a:xfrm>
+          <a:prstGeom prst="roundRect">
+            <a:avLst>
+              <a:gd name="adj" fmla="val 8000"/>
+            </a:avLst>
+          </a:prstGeom>
+          <a:solidFill>
+            <a:srgbClr val="FFFFFF"/>
+          </a:solidFill>
+          <a:ln w="12700">
+            <a:solidFill>
+              <a:srgbClr val="E3E4EC"/>
+            </a:solidFill>
           </a:ln>
         </p:spPr>
         <p:txBody>
@@ -8394,40 +9135,168 @@
                 <a:spcPct val="100000"/>
               </a:lnSpc>
             </a:pPr>
-            <a:r>
-              <a:rPr lang="en-US" sz="1950" dirty="0">
-                <a:solidFill>
-                  <a:srgbClr val="16171D"/>
-                </a:solidFill>
-                <a:latin typeface="Segoe UI"/>
-                <a:cs typeface="Segoe UI"/>
-              </a:rPr>
-              <a:t xml:space="preserve">4. What is the product of the slopes of two perpendicular lines (neither vertical)? </a:t>
+            <a:endParaRPr lang="en-US" sz="1950" dirty="0"/>
+          </a:p>
+        </p:txBody>
+      </p:sp>
+      <p:sp>
+        <p:nvSpPr>
+          <p:cNvPr id="16" name="Shape 16"/>
+          <p:cNvSpPr txBox="1"/>
+          <p:nvPr/>
+        </p:nvSpPr>
+        <p:spPr>
+          <a:xfrm>
+            <a:off x="6419698" y="3988308"/>
+            <a:ext cx="4876648" cy="534924"/>
+          </a:xfrm>
+          <a:prstGeom prst="rect">
+            <a:avLst/>
+          </a:prstGeom>
+          <a:noFill/>
+          <a:ln>
+            <a:noFill/>
+          </a:ln>
+        </p:spPr>
+        <p:txBody>
+          <a:bodyPr wrap="square" lIns="36576" tIns="27432" rIns="36576" bIns="27432" anchor="t">
+            <a:noAutofit/>
+          </a:bodyPr>
+          <a:lstStyle/>
+          <a:p>
+            <a:pPr algn="l">
+              <a:lnSpc>
+                <a:spcPct val="100000"/>
+              </a:lnSpc>
+            </a:pPr>
+            <a:r>
+              <a:rPr lang="en-US" sz="1575" dirty="0" b="1">
+                <a:solidFill>
+                  <a:srgbClr val="16171D"/>
+                </a:solidFill>
+                <a:latin typeface="Segoe UI"/>
+                <a:cs typeface="Segoe UI"/>
+              </a:rPr>
+              <a:t xml:space="preserve">4.</a:t>
             </a:r>
             <a:r>
               <a:rPr lang="en-US" sz="1575" dirty="0">
                 <a:solidFill>
-                  <a:srgbClr val="5F6272"/>
-                </a:solidFill>
-                <a:latin typeface="Segoe UI"/>
-                <a:cs typeface="Segoe UI"/>
-              </a:rPr>
-              <a:t xml:space="preserve">(SE p. 308)</a:t>
-            </a:r>
-            <a:endParaRPr lang="en-US" sz="1950" dirty="0"/>
-          </a:p>
-        </p:txBody>
-      </p:sp>
-      <p:sp>
-        <p:nvSpPr>
-          <p:cNvPr id="11" name="Shape 11"/>
-          <p:cNvSpPr txBox="1"/>
-          <p:nvPr/>
-        </p:nvSpPr>
-        <p:spPr>
-          <a:xfrm>
-            <a:off x="6362548" y="4323588"/>
-            <a:ext cx="2244715" cy="518922"/>
+                  <a:srgbClr val="16171D"/>
+                </a:solidFill>
+                <a:latin typeface="Segoe UI"/>
+                <a:cs typeface="Segoe UI"/>
+              </a:rPr>
+              <a:t xml:space="preserve"> What is the product of the slopes of two perpendicular lines (neither vertical)?</a:t>
+            </a:r>
+            <a:endParaRPr lang="en-US" sz="1575" dirty="0"/>
+          </a:p>
+        </p:txBody>
+      </p:sp>
+      <p:sp>
+        <p:nvSpPr>
+          <p:cNvPr id="17" name="Shape 17"/>
+          <p:cNvSpPr txBox="1"/>
+          <p:nvPr/>
+        </p:nvSpPr>
+        <p:spPr>
+          <a:xfrm>
+            <a:off x="6419698" y="4561332"/>
+            <a:ext cx="4876648" cy="294894"/>
+          </a:xfrm>
+          <a:prstGeom prst="rect">
+            <a:avLst/>
+          </a:prstGeom>
+          <a:noFill/>
+          <a:ln>
+            <a:noFill/>
+          </a:ln>
+        </p:spPr>
+        <p:txBody>
+          <a:bodyPr wrap="square" lIns="36576" tIns="27432" rIns="36576" bIns="27432" anchor="t">
+            <a:noAutofit/>
+          </a:bodyPr>
+          <a:lstStyle/>
+          <a:p>
+            <a:pPr algn="l">
+              <a:lnSpc>
+                <a:spcPct val="100000"/>
+              </a:lnSpc>
+            </a:pPr>
+            <a:r>
+              <a:rPr lang="en-US" sz="1575" dirty="0" b="1">
+                <a:solidFill>
+                  <a:srgbClr val="16171D"/>
+                </a:solidFill>
+                <a:latin typeface="Segoe UI"/>
+                <a:cs typeface="Segoe UI"/>
+              </a:rPr>
+              <a:t xml:space="preserve">Formula:</a:t>
+            </a:r>
+            <a:r>
+              <a:rPr lang="en-US" sz="1575" dirty="0">
+                <a:solidFill>
+                  <a:srgbClr val="16171D"/>
+                </a:solidFill>
+                <a:latin typeface="Segoe UI"/>
+                <a:cs typeface="Segoe UI"/>
+              </a:rPr>
+              <a:t xml:space="preserve"> </a:t>
+            </a:r>
+            <a:r>
+              <a:rPr lang="en-US" sz="1575" dirty="0" i="1">
+                <a:solidFill>
+                  <a:srgbClr val="16171D"/>
+                </a:solidFill>
+                <a:latin typeface="Cambria"/>
+                <a:cs typeface="Cambria"/>
+              </a:rPr>
+              <a:t xml:space="preserve">m</a:t>
+            </a:r>
+            <a:r>
+              <a:rPr lang="en-US" sz="1575" dirty="0">
+                <a:solidFill>
+                  <a:srgbClr val="16171D"/>
+                </a:solidFill>
+                <a:latin typeface="Cambria"/>
+                <a:cs typeface="Cambria"/>
+              </a:rPr>
+              <a:t xml:space="preserve">₁ · </a:t>
+            </a:r>
+            <a:r>
+              <a:rPr lang="en-US" sz="1575" dirty="0" i="1">
+                <a:solidFill>
+                  <a:srgbClr val="16171D"/>
+                </a:solidFill>
+                <a:latin typeface="Cambria"/>
+                <a:cs typeface="Cambria"/>
+              </a:rPr>
+              <a:t xml:space="preserve">m</a:t>
+            </a:r>
+            <a:r>
+              <a:rPr lang="en-US" sz="1575" dirty="0">
+                <a:solidFill>
+                  <a:srgbClr val="16171D"/>
+                </a:solidFill>
+                <a:latin typeface="Cambria"/>
+                <a:cs typeface="Cambria"/>
+              </a:rPr>
+              <a:t xml:space="preserve">₂ = −1</a:t>
+            </a:r>
+            <a:endParaRPr lang="en-US" sz="1575" dirty="0"/>
+          </a:p>
+        </p:txBody>
+      </p:sp>
+      <p:sp>
+        <p:nvSpPr>
+          <p:cNvPr id="18" name="Shape 18"/>
+          <p:cNvSpPr txBox="1"/>
+          <p:nvPr/>
+        </p:nvSpPr>
+        <p:spPr>
+          <a:xfrm>
+            <a:off x="6419698" y="4894326"/>
+            <a:ext cx="4826135" cy="816102"/>
           </a:xfrm>
           <a:prstGeom prst="roundRect">
             <a:avLst>
@@ -8463,7 +9332,7 @@
               <a:t xml:space="preserve">ANSWER   </a:t>
             </a:r>
             <a:r>
-              <a:rPr lang="en-US" sz="2325" dirty="0">
+              <a:rPr lang="en-US" sz="1425" dirty="0" b="1">
                 <a:solidFill>
                   <a:srgbClr val="16171D"/>
                 </a:solidFill>
@@ -8472,13 +9341,151 @@
               </a:rPr>
               <a:t xml:space="preserve">−1</a:t>
             </a:r>
-            <a:endParaRPr lang="en-US" sz="2325" dirty="0"/>
-          </a:p>
-        </p:txBody>
-      </p:sp>
-      <p:sp>
-        <p:nvSpPr>
-          <p:cNvPr id="12" name="Slide Number 12"/>
+            <a:br>
+              <a:rPr lang="en-US" sz="1425" dirty="0">
+                <a:solidFill>
+                  <a:srgbClr val="16171D"/>
+                </a:solidFill>
+                <a:latin typeface="Segoe UI"/>
+                <a:cs typeface="Segoe UI"/>
+              </a:rPr>
+            </a:br>
+            <a:r>
+              <a:rPr lang="en-US" sz="1425" dirty="0" b="1">
+                <a:solidFill>
+                  <a:srgbClr val="16171D"/>
+                </a:solidFill>
+                <a:latin typeface="Segoe UI"/>
+                <a:cs typeface="Segoe UI"/>
+              </a:rPr>
+              <a:t xml:space="preserve">1.</a:t>
+            </a:r>
+            <a:r>
+              <a:rPr lang="en-US" sz="1425" dirty="0">
+                <a:solidFill>
+                  <a:srgbClr val="16171D"/>
+                </a:solidFill>
+                <a:latin typeface="Segoe UI"/>
+                <a:cs typeface="Segoe UI"/>
+              </a:rPr>
+              <a:t xml:space="preserve"> Example: slopes </a:t>
+            </a:r>
+            <a:r>
+              <a:rPr lang="en-US" sz="1425" dirty="0">
+                <a:solidFill>
+                  <a:srgbClr val="16171D"/>
+                </a:solidFill>
+                <a:latin typeface="Cambria"/>
+                <a:cs typeface="Cambria"/>
+              </a:rPr>
+              <a:t xml:space="preserve">2</a:t>
+            </a:r>
+            <a:r>
+              <a:rPr lang="en-US" sz="1425" dirty="0">
+                <a:solidFill>
+                  <a:srgbClr val="16171D"/>
+                </a:solidFill>
+                <a:latin typeface="Segoe UI"/>
+                <a:cs typeface="Segoe UI"/>
+              </a:rPr>
+              <a:t xml:space="preserve"> and </a:t>
+            </a:r>
+            <a:r>
+              <a:rPr lang="en-US" sz="1425" dirty="0">
+                <a:solidFill>
+                  <a:srgbClr val="16171D"/>
+                </a:solidFill>
+                <a:latin typeface="Cambria"/>
+                <a:cs typeface="Cambria"/>
+              </a:rPr>
+              <a:t xml:space="preserve">−½</a:t>
+            </a:r>
+            <a:r>
+              <a:rPr lang="en-US" sz="1425" dirty="0">
+                <a:solidFill>
+                  <a:srgbClr val="16171D"/>
+                </a:solidFill>
+                <a:latin typeface="Segoe UI"/>
+                <a:cs typeface="Segoe UI"/>
+              </a:rPr>
+              <a:t xml:space="preserve"> are perpendicular.</a:t>
+            </a:r>
+            <a:br>
+              <a:rPr lang="en-US" sz="1425" dirty="0">
+                <a:solidFill>
+                  <a:srgbClr val="16171D"/>
+                </a:solidFill>
+                <a:latin typeface="Segoe UI"/>
+                <a:cs typeface="Segoe UI"/>
+              </a:rPr>
+            </a:br>
+            <a:r>
+              <a:rPr lang="en-US" sz="1425" dirty="0" b="1">
+                <a:solidFill>
+                  <a:srgbClr val="16171D"/>
+                </a:solidFill>
+                <a:latin typeface="Segoe UI"/>
+                <a:cs typeface="Segoe UI"/>
+              </a:rPr>
+              <a:t xml:space="preserve">2.</a:t>
+            </a:r>
+            <a:r>
+              <a:rPr lang="en-US" sz="1425" dirty="0">
+                <a:solidFill>
+                  <a:srgbClr val="16171D"/>
+                </a:solidFill>
+                <a:latin typeface="Segoe UI"/>
+                <a:cs typeface="Segoe UI"/>
+              </a:rPr>
+              <a:t xml:space="preserve"> </a:t>
+            </a:r>
+            <a:r>
+              <a:rPr lang="en-US" sz="1425" dirty="0">
+                <a:solidFill>
+                  <a:srgbClr val="16171D"/>
+                </a:solidFill>
+                <a:latin typeface="Cambria"/>
+                <a:cs typeface="Cambria"/>
+              </a:rPr>
+              <a:t xml:space="preserve">2 · (−½) = −1</a:t>
+            </a:r>
+            <a:r>
+              <a:rPr lang="en-US" sz="1425" dirty="0">
+                <a:solidFill>
+                  <a:srgbClr val="16171D"/>
+                </a:solidFill>
+                <a:latin typeface="Segoe UI"/>
+                <a:cs typeface="Segoe UI"/>
+              </a:rPr>
+              <a:t xml:space="preserve">. The product is always </a:t>
+            </a:r>
+            <a:r>
+              <a:rPr lang="en-US" sz="1425" dirty="0">
+                <a:solidFill>
+                  <a:srgbClr val="16171D"/>
+                </a:solidFill>
+                <a:latin typeface="Cambria"/>
+                <a:cs typeface="Cambria"/>
+              </a:rPr>
+              <a:t xml:space="preserve">−1</a:t>
+            </a:r>
+            <a:r>
+              <a:rPr lang="en-US" sz="1425" dirty="0">
+                <a:solidFill>
+                  <a:srgbClr val="16171D"/>
+                </a:solidFill>
+                <a:latin typeface="Segoe UI"/>
+                <a:cs typeface="Segoe UI"/>
+              </a:rPr>
+              <a:t xml:space="preserve">.</a:t>
+            </a:r>
+            <a:endParaRPr lang="en-US" sz="1425" dirty="0"/>
+          </a:p>
+        </p:txBody>
+      </p:sp>
+      <p:sp>
+        <p:nvSpPr>
+          <p:cNvPr id="20" name="Slide Number 20"/>
           <p:cNvSpPr txBox="1"/>
           <p:nvPr/>
         </p:nvSpPr>
@@ -8552,7 +9559,7 @@
                                           </p:stCondLst>
                                         </p:cTn>
                                         <p:tgtEl>
-                                          <p:spTgt spid="5"/>
+                                          <p:spTgt spid="6"/>
                                         </p:tgtEl>
                                         <p:attrNameLst>
                                           <p:attrName>style.visibility</p:attrName>
@@ -8566,7 +9573,7 @@
                                       <p:cBhvr>
                                         <p:cTn id="4" dur="500"/>
                                         <p:tgtEl>
-                                          <p:spTgt spid="5"/>
+                                          <p:spTgt spid="6"/>
                                         </p:tgtEl>
                                       </p:cBhvr>
                                     </p:animEffect>
@@ -8574,7 +9581,7 @@
                                       <p:cBhvr>
                                         <p:cTn id="5" dur="500" fill="hold"/>
                                         <p:tgtEl>
-                                          <p:spTgt spid="5"/>
+                                          <p:spTgt spid="6"/>
                                         </p:tgtEl>
                                         <p:attrNameLst>
                                           <p:attrName>ppt_w</p:attrName>
@@ -8597,7 +9604,7 @@
                                       <p:cBhvr>
                                         <p:cTn id="6" dur="500" fill="hold"/>
                                         <p:tgtEl>
-                                          <p:spTgt spid="5"/>
+                                          <p:spTgt spid="6"/>
                                         </p:tgtEl>
                                         <p:attrNameLst>
                                           <p:attrName>ppt_h</p:attrName>
@@ -8651,7 +9658,7 @@
                                           </p:stCondLst>
                                         </p:cTn>
                                         <p:tgtEl>
-                                          <p:spTgt spid="7"/>
+                                          <p:spTgt spid="10"/>
                                         </p:tgtEl>
                                         <p:attrNameLst>
                                           <p:attrName>style.visibility</p:attrName>
@@ -8665,7 +9672,7 @@
                                       <p:cBhvr>
                                         <p:cTn id="11" dur="500"/>
                                         <p:tgtEl>
-                                          <p:spTgt spid="7"/>
+                                          <p:spTgt spid="10"/>
                                         </p:tgtEl>
                                       </p:cBhvr>
                                     </p:animEffect>
@@ -8673,7 +9680,7 @@
                                       <p:cBhvr>
                                         <p:cTn id="12" dur="500" fill="hold"/>
                                         <p:tgtEl>
-                                          <p:spTgt spid="7"/>
+                                          <p:spTgt spid="10"/>
                                         </p:tgtEl>
                                         <p:attrNameLst>
                                           <p:attrName>ppt_w</p:attrName>
@@ -8696,7 +9703,7 @@
                                       <p:cBhvr>
                                         <p:cTn id="13" dur="500" fill="hold"/>
                                         <p:tgtEl>
-                                          <p:spTgt spid="7"/>
+                                          <p:spTgt spid="10"/>
                                         </p:tgtEl>
                                         <p:attrNameLst>
                                           <p:attrName>ppt_h</p:attrName>
@@ -8750,7 +9757,7 @@
                                           </p:stCondLst>
                                         </p:cTn>
                                         <p:tgtEl>
-                                          <p:spTgt spid="9"/>
+                                          <p:spTgt spid="14"/>
                                         </p:tgtEl>
                                         <p:attrNameLst>
                                           <p:attrName>style.visibility</p:attrName>
@@ -8764,7 +9771,7 @@
                                       <p:cBhvr>
                                         <p:cTn id="18" dur="500"/>
                                         <p:tgtEl>
-                                          <p:spTgt spid="9"/>
+                                          <p:spTgt spid="14"/>
                                         </p:tgtEl>
                                       </p:cBhvr>
                                     </p:animEffect>
@@ -8772,7 +9779,7 @@
                                       <p:cBhvr>
                                         <p:cTn id="19" dur="500" fill="hold"/>
                                         <p:tgtEl>
-                                          <p:spTgt spid="9"/>
+                                          <p:spTgt spid="14"/>
                                         </p:tgtEl>
                                         <p:attrNameLst>
                                           <p:attrName>ppt_w</p:attrName>
@@ -8795,7 +9802,7 @@
                                       <p:cBhvr>
                                         <p:cTn id="20" dur="500" fill="hold"/>
                                         <p:tgtEl>
-                                          <p:spTgt spid="9"/>
+                                          <p:spTgt spid="14"/>
                                         </p:tgtEl>
                                         <p:attrNameLst>
                                           <p:attrName>ppt_h</p:attrName>
@@ -8849,7 +9856,7 @@
                                           </p:stCondLst>
                                         </p:cTn>
                                         <p:tgtEl>
-                                          <p:spTgt spid="11"/>
+                                          <p:spTgt spid="18"/>
                                         </p:tgtEl>
                                         <p:attrNameLst>
                                           <p:attrName>style.visibility</p:attrName>
@@ -8863,7 +9870,7 @@
                                       <p:cBhvr>
                                         <p:cTn id="25" dur="500"/>
                                         <p:tgtEl>
-                                          <p:spTgt spid="11"/>
+                                          <p:spTgt spid="18"/>
                                         </p:tgtEl>
                                       </p:cBhvr>
                                     </p:animEffect>
@@ -8871,7 +9878,7 @@
                                       <p:cBhvr>
                                         <p:cTn id="26" dur="500" fill="hold"/>
                                         <p:tgtEl>
-                                          <p:spTgt spid="11"/>
+                                          <p:spTgt spid="18"/>
                                         </p:tgtEl>
                                         <p:attrNameLst>
                                           <p:attrName>ppt_w</p:attrName>
@@ -8894,7 +9901,7 @@
                                       <p:cBhvr>
                                         <p:cTn id="27" dur="500" fill="hold"/>
                                         <p:tgtEl>
-                                          <p:spTgt spid="11"/>
+                                          <p:spTgt spid="18"/>
                                         </p:tgtEl>
                                         <p:attrNameLst>
                                           <p:attrName>ppt_h</p:attrName>
@@ -20205,21 +21212,27 @@
       </p:sp>
       <p:sp>
         <p:nvSpPr>
-          <p:cNvPr id="4" name="Shape 4"/>
-          <p:cNvSpPr txBox="1"/>
-          <p:nvPr/>
-        </p:nvSpPr>
-        <p:spPr>
-          <a:xfrm>
-            <a:off x="685800" y="1675638"/>
-            <a:ext cx="5143348" cy="352044"/>
-          </a:xfrm>
-          <a:prstGeom prst="rect">
-            <a:avLst/>
-          </a:prstGeom>
-          <a:noFill/>
-          <a:ln>
-            <a:noFill/>
+          <p:cNvPr id="7" name="Shape 7"/>
+          <p:cNvSpPr txBox="1"/>
+          <p:nvPr/>
+        </p:nvSpPr>
+        <p:spPr>
+          <a:xfrm>
+            <a:off x="685800" y="1618488"/>
+            <a:ext cx="5295748" cy="2042160"/>
+          </a:xfrm>
+          <a:prstGeom prst="roundRect">
+            <a:avLst>
+              <a:gd name="adj" fmla="val 8000"/>
+            </a:avLst>
+          </a:prstGeom>
+          <a:solidFill>
+            <a:srgbClr val="FFFFFF"/>
+          </a:solidFill>
+          <a:ln w="12700">
+            <a:solidFill>
+              <a:srgbClr val="E3E4EC"/>
+            </a:solidFill>
           </a:ln>
         </p:spPr>
         <p:txBody>
@@ -20233,18 +21246,62 @@
                 <a:spcPct val="100000"/>
               </a:lnSpc>
             </a:pPr>
-            <a:r>
-              <a:rPr lang="en-US" sz="1950" dirty="0">
-                <a:solidFill>
-                  <a:srgbClr val="16171D"/>
-                </a:solidFill>
-                <a:latin typeface="Segoe UI"/>
-                <a:cs typeface="Segoe UI"/>
-              </a:rPr>
-              <a:t xml:space="preserve">1. What is the reciprocal of </a:t>
-            </a:r>
-            <a:r>
-              <a:rPr lang="en-US" sz="1950" dirty="0">
+            <a:endParaRPr lang="en-US" sz="1950" dirty="0"/>
+          </a:p>
+        </p:txBody>
+      </p:sp>
+      <p:sp>
+        <p:nvSpPr>
+          <p:cNvPr id="4" name="Shape 4"/>
+          <p:cNvSpPr txBox="1"/>
+          <p:nvPr/>
+        </p:nvSpPr>
+        <p:spPr>
+          <a:xfrm>
+            <a:off x="895350" y="1789938"/>
+            <a:ext cx="4876648" cy="294894"/>
+          </a:xfrm>
+          <a:prstGeom prst="rect">
+            <a:avLst/>
+          </a:prstGeom>
+          <a:noFill/>
+          <a:ln>
+            <a:noFill/>
+          </a:ln>
+        </p:spPr>
+        <p:txBody>
+          <a:bodyPr wrap="square" lIns="36576" tIns="27432" rIns="36576" bIns="27432" anchor="t">
+            <a:noAutofit/>
+          </a:bodyPr>
+          <a:lstStyle/>
+          <a:p>
+            <a:pPr algn="l">
+              <a:lnSpc>
+                <a:spcPct val="100000"/>
+              </a:lnSpc>
+            </a:pPr>
+            <a:r>
+              <a:rPr lang="en-US" sz="1575" dirty="0" b="1">
+                <a:solidFill>
+                  <a:srgbClr val="16171D"/>
+                </a:solidFill>
+                <a:latin typeface="Segoe UI"/>
+                <a:cs typeface="Segoe UI"/>
+              </a:rPr>
+              <a:t xml:space="preserve">1.</a:t>
+            </a:r>
+            <a:r>
+              <a:rPr lang="en-US" sz="1575" dirty="0">
+                <a:solidFill>
+                  <a:srgbClr val="16171D"/>
+                </a:solidFill>
+                <a:latin typeface="Segoe UI"/>
+                <a:cs typeface="Segoe UI"/>
+              </a:rPr>
+              <a:t xml:space="preserve"> What is the reciprocal of </a:t>
+            </a:r>
+            <a:r>
+              <a:rPr lang="en-US" sz="1575" dirty="0">
                 <a:solidFill>
                   <a:srgbClr val="16171D"/>
                 </a:solidFill>
@@ -20254,7 +21311,7 @@
               <a:t xml:space="preserve">⅔</a:t>
             </a:r>
             <a:r>
-              <a:rPr lang="en-US" sz="1950" dirty="0">
+              <a:rPr lang="en-US" sz="1575" dirty="0">
                 <a:solidFill>
                   <a:srgbClr val="16171D"/>
                 </a:solidFill>
@@ -20263,7 +21320,7 @@
               </a:rPr>
               <a:t xml:space="preserve">?</a:t>
             </a:r>
-            <a:endParaRPr lang="en-US" sz="1950" dirty="0"/>
+            <a:endParaRPr lang="en-US" sz="1575" dirty="0"/>
           </a:p>
         </p:txBody>
       </p:sp>
@@ -20275,8 +21332,62 @@
         </p:nvSpPr>
         <p:spPr>
           <a:xfrm>
-            <a:off x="685800" y="2161032"/>
-            <a:ext cx="2410541" cy="518922"/>
+            <a:off x="895350" y="2122932"/>
+            <a:ext cx="4876648" cy="294894"/>
+          </a:xfrm>
+          <a:prstGeom prst="rect">
+            <a:avLst/>
+          </a:prstGeom>
+          <a:noFill/>
+          <a:ln>
+            <a:noFill/>
+          </a:ln>
+        </p:spPr>
+        <p:txBody>
+          <a:bodyPr wrap="square" lIns="36576" tIns="27432" rIns="36576" bIns="27432" anchor="t">
+            <a:noAutofit/>
+          </a:bodyPr>
+          <a:lstStyle/>
+          <a:p>
+            <a:pPr algn="l">
+              <a:lnSpc>
+                <a:spcPct val="100000"/>
+              </a:lnSpc>
+            </a:pPr>
+            <a:r>
+              <a:rPr lang="en-US" sz="1575" dirty="0" b="1">
+                <a:solidFill>
+                  <a:srgbClr val="16171D"/>
+                </a:solidFill>
+                <a:latin typeface="Segoe UI"/>
+                <a:cs typeface="Segoe UI"/>
+              </a:rPr>
+              <a:t xml:space="preserve">Formula:</a:t>
+            </a:r>
+            <a:r>
+              <a:rPr lang="en-US" sz="1575" dirty="0">
+                <a:solidFill>
+                  <a:srgbClr val="16171D"/>
+                </a:solidFill>
+                <a:latin typeface="Segoe UI"/>
+                <a:cs typeface="Segoe UI"/>
+              </a:rPr>
+              <a:t xml:space="preserve"> reciprocal: flip the fraction</a:t>
+            </a:r>
+            <a:endParaRPr lang="en-US" sz="1575" dirty="0"/>
+          </a:p>
+        </p:txBody>
+      </p:sp>
+      <p:sp>
+        <p:nvSpPr>
+          <p:cNvPr id="6" name="Shape 6"/>
+          <p:cNvSpPr txBox="1"/>
+          <p:nvPr/>
+        </p:nvSpPr>
+        <p:spPr>
+          <a:xfrm>
+            <a:off x="895350" y="2455926"/>
+            <a:ext cx="4876648" cy="1033272"/>
           </a:xfrm>
           <a:prstGeom prst="roundRect">
             <a:avLst>
@@ -20312,7 +21423,7 @@
               <a:t xml:space="preserve">ANSWER   </a:t>
             </a:r>
             <a:r>
-              <a:rPr lang="en-US" sz="2325" dirty="0">
+              <a:rPr lang="en-US" sz="1425" dirty="0" b="1">
                 <a:solidFill>
                   <a:srgbClr val="16171D"/>
                 </a:solidFill>
@@ -20321,27 +21432,151 @@
               </a:rPr>
               <a:t xml:space="preserve">3/2</a:t>
             </a:r>
-            <a:endParaRPr lang="en-US" sz="2325" dirty="0"/>
-          </a:p>
-        </p:txBody>
-      </p:sp>
-      <p:sp>
-        <p:nvSpPr>
-          <p:cNvPr id="6" name="Shape 6"/>
-          <p:cNvSpPr txBox="1"/>
-          <p:nvPr/>
-        </p:nvSpPr>
-        <p:spPr>
-          <a:xfrm>
-            <a:off x="685800" y="2946654"/>
-            <a:ext cx="5143348" cy="946404"/>
-          </a:xfrm>
-          <a:prstGeom prst="rect">
-            <a:avLst/>
-          </a:prstGeom>
-          <a:noFill/>
-          <a:ln>
-            <a:noFill/>
+            <a:br>
+              <a:rPr lang="en-US" sz="1425" dirty="0">
+                <a:solidFill>
+                  <a:srgbClr val="16171D"/>
+                </a:solidFill>
+                <a:latin typeface="Segoe UI"/>
+                <a:cs typeface="Segoe UI"/>
+              </a:rPr>
+            </a:br>
+            <a:r>
+              <a:rPr lang="en-US" sz="1425" dirty="0" b="1">
+                <a:solidFill>
+                  <a:srgbClr val="16171D"/>
+                </a:solidFill>
+                <a:latin typeface="Segoe UI"/>
+                <a:cs typeface="Segoe UI"/>
+              </a:rPr>
+              <a:t xml:space="preserve">1.</a:t>
+            </a:r>
+            <a:r>
+              <a:rPr lang="en-US" sz="1425" dirty="0">
+                <a:solidFill>
+                  <a:srgbClr val="16171D"/>
+                </a:solidFill>
+                <a:latin typeface="Segoe UI"/>
+                <a:cs typeface="Segoe UI"/>
+              </a:rPr>
+              <a:t xml:space="preserve"> </a:t>
+            </a:r>
+            <a:r>
+              <a:rPr lang="en-US" sz="1425" dirty="0">
+                <a:solidFill>
+                  <a:srgbClr val="16171D"/>
+                </a:solidFill>
+                <a:latin typeface="Cambria"/>
+                <a:cs typeface="Cambria"/>
+              </a:rPr>
+              <a:t xml:space="preserve">⅔</a:t>
+            </a:r>
+            <a:r>
+              <a:rPr lang="en-US" sz="1425" dirty="0">
+                <a:solidFill>
+                  <a:srgbClr val="16171D"/>
+                </a:solidFill>
+                <a:latin typeface="Segoe UI"/>
+                <a:cs typeface="Segoe UI"/>
+              </a:rPr>
+              <a:t xml:space="preserve"> has 2 on top and 3 on the bottom. Flip them: </a:t>
+            </a:r>
+            <a:r>
+              <a:rPr lang="en-US" sz="1425" dirty="0">
+                <a:solidFill>
+                  <a:srgbClr val="16171D"/>
+                </a:solidFill>
+                <a:latin typeface="Cambria"/>
+                <a:cs typeface="Cambria"/>
+              </a:rPr>
+              <a:t xml:space="preserve">3/2</a:t>
+            </a:r>
+            <a:r>
+              <a:rPr lang="en-US" sz="1425" dirty="0">
+                <a:solidFill>
+                  <a:srgbClr val="16171D"/>
+                </a:solidFill>
+                <a:latin typeface="Segoe UI"/>
+                <a:cs typeface="Segoe UI"/>
+              </a:rPr>
+              <a:t xml:space="preserve">.</a:t>
+            </a:r>
+            <a:br>
+              <a:rPr lang="en-US" sz="1425" dirty="0">
+                <a:solidFill>
+                  <a:srgbClr val="16171D"/>
+                </a:solidFill>
+                <a:latin typeface="Segoe UI"/>
+                <a:cs typeface="Segoe UI"/>
+              </a:rPr>
+            </a:br>
+            <a:r>
+              <a:rPr lang="en-US" sz="1425" dirty="0" b="1">
+                <a:solidFill>
+                  <a:srgbClr val="16171D"/>
+                </a:solidFill>
+                <a:latin typeface="Segoe UI"/>
+                <a:cs typeface="Segoe UI"/>
+              </a:rPr>
+              <a:t xml:space="preserve">2.</a:t>
+            </a:r>
+            <a:r>
+              <a:rPr lang="en-US" sz="1425" dirty="0">
+                <a:solidFill>
+                  <a:srgbClr val="16171D"/>
+                </a:solidFill>
+                <a:latin typeface="Segoe UI"/>
+                <a:cs typeface="Segoe UI"/>
+              </a:rPr>
+              <a:t xml:space="preserve"> Check: </a:t>
+            </a:r>
+            <a:r>
+              <a:rPr lang="en-US" sz="1425" dirty="0">
+                <a:solidFill>
+                  <a:srgbClr val="16171D"/>
+                </a:solidFill>
+                <a:latin typeface="Cambria"/>
+                <a:cs typeface="Cambria"/>
+              </a:rPr>
+              <a:t xml:space="preserve">⅔ · 3/2 = 1</a:t>
+            </a:r>
+            <a:r>
+              <a:rPr lang="en-US" sz="1425" dirty="0">
+                <a:solidFill>
+                  <a:srgbClr val="16171D"/>
+                </a:solidFill>
+                <a:latin typeface="Segoe UI"/>
+                <a:cs typeface="Segoe UI"/>
+              </a:rPr>
+              <a:t xml:space="preserve">.</a:t>
+            </a:r>
+            <a:endParaRPr lang="en-US" sz="1425" dirty="0"/>
+          </a:p>
+        </p:txBody>
+      </p:sp>
+      <p:sp>
+        <p:nvSpPr>
+          <p:cNvPr id="11" name="Shape 11"/>
+          <p:cNvSpPr txBox="1"/>
+          <p:nvPr/>
+        </p:nvSpPr>
+        <p:spPr>
+          <a:xfrm>
+            <a:off x="685800" y="3793998"/>
+            <a:ext cx="5295748" cy="2065020"/>
+          </a:xfrm>
+          <a:prstGeom prst="roundRect">
+            <a:avLst>
+              <a:gd name="adj" fmla="val 8000"/>
+            </a:avLst>
+          </a:prstGeom>
+          <a:solidFill>
+            <a:srgbClr val="FFFFFF"/>
+          </a:solidFill>
+          <a:ln w="12700">
+            <a:solidFill>
+              <a:srgbClr val="E3E4EC"/>
+            </a:solidFill>
           </a:ln>
         </p:spPr>
         <p:txBody>
@@ -20355,18 +21590,62 @@
                 <a:spcPct val="100000"/>
               </a:lnSpc>
             </a:pPr>
-            <a:r>
-              <a:rPr lang="en-US" sz="1950" dirty="0">
-                <a:solidFill>
-                  <a:srgbClr val="16171D"/>
-                </a:solidFill>
-                <a:latin typeface="Segoe UI"/>
-                <a:cs typeface="Segoe UI"/>
-              </a:rPr>
-              <a:t xml:space="preserve">2. Rotate the point </a:t>
-            </a:r>
-            <a:r>
-              <a:rPr lang="en-US" sz="1950" dirty="0">
+            <a:endParaRPr lang="en-US" sz="1950" dirty="0"/>
+          </a:p>
+        </p:txBody>
+      </p:sp>
+      <p:sp>
+        <p:nvSpPr>
+          <p:cNvPr id="8" name="Shape 8"/>
+          <p:cNvSpPr txBox="1"/>
+          <p:nvPr/>
+        </p:nvSpPr>
+        <p:spPr>
+          <a:xfrm>
+            <a:off x="895350" y="3965448"/>
+            <a:ext cx="4876648" cy="534924"/>
+          </a:xfrm>
+          <a:prstGeom prst="rect">
+            <a:avLst/>
+          </a:prstGeom>
+          <a:noFill/>
+          <a:ln>
+            <a:noFill/>
+          </a:ln>
+        </p:spPr>
+        <p:txBody>
+          <a:bodyPr wrap="square" lIns="36576" tIns="27432" rIns="36576" bIns="27432" anchor="t">
+            <a:noAutofit/>
+          </a:bodyPr>
+          <a:lstStyle/>
+          <a:p>
+            <a:pPr algn="l">
+              <a:lnSpc>
+                <a:spcPct val="100000"/>
+              </a:lnSpc>
+            </a:pPr>
+            <a:r>
+              <a:rPr lang="en-US" sz="1575" dirty="0" b="1">
+                <a:solidFill>
+                  <a:srgbClr val="16171D"/>
+                </a:solidFill>
+                <a:latin typeface="Segoe UI"/>
+                <a:cs typeface="Segoe UI"/>
+              </a:rPr>
+              <a:t xml:space="preserve">2.</a:t>
+            </a:r>
+            <a:r>
+              <a:rPr lang="en-US" sz="1575" dirty="0">
+                <a:solidFill>
+                  <a:srgbClr val="16171D"/>
+                </a:solidFill>
+                <a:latin typeface="Segoe UI"/>
+                <a:cs typeface="Segoe UI"/>
+              </a:rPr>
+              <a:t xml:space="preserve"> Rotate the point </a:t>
+            </a:r>
+            <a:r>
+              <a:rPr lang="en-US" sz="1575" dirty="0">
                 <a:solidFill>
                   <a:srgbClr val="16171D"/>
                 </a:solidFill>
@@ -20376,39 +21655,173 @@
               <a:t xml:space="preserve">(8, 5)</a:t>
             </a:r>
             <a:r>
-              <a:rPr lang="en-US" sz="1950" dirty="0">
-                <a:solidFill>
-                  <a:srgbClr val="16171D"/>
-                </a:solidFill>
-                <a:latin typeface="Segoe UI"/>
-                <a:cs typeface="Segoe UI"/>
-              </a:rPr>
-              <a:t xml:space="preserve"> 90° counterclockwise about the origin. Where does it go? </a:t>
-            </a:r>
-            <a:r>
               <a:rPr lang="en-US" sz="1575" dirty="0">
                 <a:solidFill>
-                  <a:srgbClr val="5F6272"/>
-                </a:solidFill>
-                <a:latin typeface="Segoe UI"/>
-                <a:cs typeface="Segoe UI"/>
-              </a:rPr>
-              <a:t xml:space="preserve">(SE p. 306)</a:t>
-            </a:r>
-            <a:endParaRPr lang="en-US" sz="1950" dirty="0"/>
-          </a:p>
-        </p:txBody>
-      </p:sp>
-      <p:sp>
-        <p:nvSpPr>
-          <p:cNvPr id="7" name="Shape 7"/>
-          <p:cNvSpPr txBox="1"/>
-          <p:nvPr/>
-        </p:nvSpPr>
-        <p:spPr>
-          <a:xfrm>
-            <a:off x="685800" y="4026408"/>
-            <a:ext cx="3073847" cy="518922"/>
+                  <a:srgbClr val="16171D"/>
+                </a:solidFill>
+                <a:latin typeface="Segoe UI"/>
+                <a:cs typeface="Segoe UI"/>
+              </a:rPr>
+              <a:t xml:space="preserve"> 90° counterclockwise about the origin. Where does it go?</a:t>
+            </a:r>
+            <a:endParaRPr lang="en-US" sz="1575" dirty="0"/>
+          </a:p>
+        </p:txBody>
+      </p:sp>
+      <p:sp>
+        <p:nvSpPr>
+          <p:cNvPr id="9" name="Shape 9"/>
+          <p:cNvSpPr txBox="1"/>
+          <p:nvPr/>
+        </p:nvSpPr>
+        <p:spPr>
+          <a:xfrm>
+            <a:off x="895350" y="4538472"/>
+            <a:ext cx="4876648" cy="294894"/>
+          </a:xfrm>
+          <a:prstGeom prst="rect">
+            <a:avLst/>
+          </a:prstGeom>
+          <a:noFill/>
+          <a:ln>
+            <a:noFill/>
+          </a:ln>
+        </p:spPr>
+        <p:txBody>
+          <a:bodyPr wrap="square" lIns="36576" tIns="27432" rIns="36576" bIns="27432" anchor="t">
+            <a:noAutofit/>
+          </a:bodyPr>
+          <a:lstStyle/>
+          <a:p>
+            <a:pPr algn="l">
+              <a:lnSpc>
+                <a:spcPct val="100000"/>
+              </a:lnSpc>
+            </a:pPr>
+            <a:r>
+              <a:rPr lang="en-US" sz="1575" dirty="0" b="1">
+                <a:solidFill>
+                  <a:srgbClr val="16171D"/>
+                </a:solidFill>
+                <a:latin typeface="Segoe UI"/>
+                <a:cs typeface="Segoe UI"/>
+              </a:rPr>
+              <a:t xml:space="preserve">Formula:</a:t>
+            </a:r>
+            <a:r>
+              <a:rPr lang="en-US" sz="1575" dirty="0">
+                <a:solidFill>
+                  <a:srgbClr val="16171D"/>
+                </a:solidFill>
+                <a:latin typeface="Segoe UI"/>
+                <a:cs typeface="Segoe UI"/>
+              </a:rPr>
+              <a:t xml:space="preserve"> 90° counterclockwise: </a:t>
+            </a:r>
+            <a:r>
+              <a:rPr lang="en-US" sz="1575" dirty="0">
+                <a:solidFill>
+                  <a:srgbClr val="16171D"/>
+                </a:solidFill>
+                <a:latin typeface="Cambria"/>
+                <a:cs typeface="Cambria"/>
+              </a:rPr>
+              <a:t xml:space="preserve">(</a:t>
+            </a:r>
+            <a:r>
+              <a:rPr lang="en-US" sz="1575" dirty="0" i="1">
+                <a:solidFill>
+                  <a:srgbClr val="16171D"/>
+                </a:solidFill>
+                <a:latin typeface="Cambria"/>
+                <a:cs typeface="Cambria"/>
+              </a:rPr>
+              <a:t xml:space="preserve">x</a:t>
+            </a:r>
+            <a:r>
+              <a:rPr lang="en-US" sz="1575" dirty="0">
+                <a:solidFill>
+                  <a:srgbClr val="16171D"/>
+                </a:solidFill>
+                <a:latin typeface="Cambria"/>
+                <a:cs typeface="Cambria"/>
+              </a:rPr>
+              <a:t xml:space="preserve">, </a:t>
+            </a:r>
+            <a:r>
+              <a:rPr lang="en-US" sz="1575" dirty="0" i="1">
+                <a:solidFill>
+                  <a:srgbClr val="16171D"/>
+                </a:solidFill>
+                <a:latin typeface="Cambria"/>
+                <a:cs typeface="Cambria"/>
+              </a:rPr>
+              <a:t xml:space="preserve">y</a:t>
+            </a:r>
+            <a:r>
+              <a:rPr lang="en-US" sz="1575" dirty="0">
+                <a:solidFill>
+                  <a:srgbClr val="16171D"/>
+                </a:solidFill>
+                <a:latin typeface="Cambria"/>
+                <a:cs typeface="Cambria"/>
+              </a:rPr>
+              <a:t xml:space="preserve">) → (−</a:t>
+            </a:r>
+            <a:r>
+              <a:rPr lang="en-US" sz="1575" dirty="0" i="1">
+                <a:solidFill>
+                  <a:srgbClr val="16171D"/>
+                </a:solidFill>
+                <a:latin typeface="Cambria"/>
+                <a:cs typeface="Cambria"/>
+              </a:rPr>
+              <a:t xml:space="preserve">y</a:t>
+            </a:r>
+            <a:r>
+              <a:rPr lang="en-US" sz="1575" dirty="0">
+                <a:solidFill>
+                  <a:srgbClr val="16171D"/>
+                </a:solidFill>
+                <a:latin typeface="Cambria"/>
+                <a:cs typeface="Cambria"/>
+              </a:rPr>
+              <a:t xml:space="preserve">, </a:t>
+            </a:r>
+            <a:r>
+              <a:rPr lang="en-US" sz="1575" dirty="0" i="1">
+                <a:solidFill>
+                  <a:srgbClr val="16171D"/>
+                </a:solidFill>
+                <a:latin typeface="Cambria"/>
+                <a:cs typeface="Cambria"/>
+              </a:rPr>
+              <a:t xml:space="preserve">x</a:t>
+            </a:r>
+            <a:r>
+              <a:rPr lang="en-US" sz="1575" dirty="0">
+                <a:solidFill>
+                  <a:srgbClr val="16171D"/>
+                </a:solidFill>
+                <a:latin typeface="Cambria"/>
+                <a:cs typeface="Cambria"/>
+              </a:rPr>
+              <a:t xml:space="preserve">)</a:t>
+            </a:r>
+            <a:endParaRPr lang="en-US" sz="1575" dirty="0"/>
+          </a:p>
+        </p:txBody>
+      </p:sp>
+      <p:sp>
+        <p:nvSpPr>
+          <p:cNvPr id="10" name="Shape 10"/>
+          <p:cNvSpPr txBox="1"/>
+          <p:nvPr/>
+        </p:nvSpPr>
+        <p:spPr>
+          <a:xfrm>
+            <a:off x="895350" y="4871466"/>
+            <a:ext cx="2431835" cy="816102"/>
           </a:xfrm>
           <a:prstGeom prst="roundRect">
             <a:avLst>
@@ -20444,7 +21857,7 @@
               <a:t xml:space="preserve">ANSWER   </a:t>
             </a:r>
             <a:r>
-              <a:rPr lang="en-US" sz="2325" dirty="0">
+              <a:rPr lang="en-US" sz="1425" dirty="0" b="1">
                 <a:solidFill>
                   <a:srgbClr val="16171D"/>
                 </a:solidFill>
@@ -20453,27 +21866,211 @@
               </a:rPr>
               <a:t xml:space="preserve">(−5, 8)</a:t>
             </a:r>
-            <a:endParaRPr lang="en-US" sz="2325" dirty="0"/>
-          </a:p>
-        </p:txBody>
-      </p:sp>
-      <p:sp>
-        <p:nvSpPr>
-          <p:cNvPr id="8" name="Shape 8"/>
-          <p:cNvSpPr txBox="1"/>
-          <p:nvPr/>
-        </p:nvSpPr>
-        <p:spPr>
-          <a:xfrm>
-            <a:off x="6362548" y="1675638"/>
-            <a:ext cx="5143348" cy="649224"/>
-          </a:xfrm>
-          <a:prstGeom prst="rect">
-            <a:avLst/>
-          </a:prstGeom>
-          <a:noFill/>
-          <a:ln>
-            <a:noFill/>
+            <a:br>
+              <a:rPr lang="en-US" sz="1425" dirty="0">
+                <a:solidFill>
+                  <a:srgbClr val="16171D"/>
+                </a:solidFill>
+                <a:latin typeface="Segoe UI"/>
+                <a:cs typeface="Segoe UI"/>
+              </a:rPr>
+            </a:br>
+            <a:r>
+              <a:rPr lang="en-US" sz="1425" dirty="0" b="1">
+                <a:solidFill>
+                  <a:srgbClr val="16171D"/>
+                </a:solidFill>
+                <a:latin typeface="Segoe UI"/>
+                <a:cs typeface="Segoe UI"/>
+              </a:rPr>
+              <a:t xml:space="preserve">1.</a:t>
+            </a:r>
+            <a:r>
+              <a:rPr lang="en-US" sz="1425" dirty="0">
+                <a:solidFill>
+                  <a:srgbClr val="16171D"/>
+                </a:solidFill>
+                <a:latin typeface="Segoe UI"/>
+                <a:cs typeface="Segoe UI"/>
+              </a:rPr>
+              <a:t xml:space="preserve"> </a:t>
+            </a:r>
+            <a:r>
+              <a:rPr lang="en-US" sz="1425" dirty="0" i="1">
+                <a:solidFill>
+                  <a:srgbClr val="16171D"/>
+                </a:solidFill>
+                <a:latin typeface="Cambria"/>
+                <a:cs typeface="Cambria"/>
+              </a:rPr>
+              <a:t xml:space="preserve">x</a:t>
+            </a:r>
+            <a:r>
+              <a:rPr lang="en-US" sz="1425" dirty="0">
+                <a:solidFill>
+                  <a:srgbClr val="16171D"/>
+                </a:solidFill>
+                <a:latin typeface="Cambria"/>
+                <a:cs typeface="Cambria"/>
+              </a:rPr>
+              <a:t xml:space="preserve"> = 8</a:t>
+            </a:r>
+            <a:r>
+              <a:rPr lang="en-US" sz="1425" dirty="0">
+                <a:solidFill>
+                  <a:srgbClr val="16171D"/>
+                </a:solidFill>
+                <a:latin typeface="Segoe UI"/>
+                <a:cs typeface="Segoe UI"/>
+              </a:rPr>
+              <a:t xml:space="preserve"> and </a:t>
+            </a:r>
+            <a:r>
+              <a:rPr lang="en-US" sz="1425" dirty="0" i="1">
+                <a:solidFill>
+                  <a:srgbClr val="16171D"/>
+                </a:solidFill>
+                <a:latin typeface="Cambria"/>
+                <a:cs typeface="Cambria"/>
+              </a:rPr>
+              <a:t xml:space="preserve">y</a:t>
+            </a:r>
+            <a:r>
+              <a:rPr lang="en-US" sz="1425" dirty="0">
+                <a:solidFill>
+                  <a:srgbClr val="16171D"/>
+                </a:solidFill>
+                <a:latin typeface="Cambria"/>
+                <a:cs typeface="Cambria"/>
+              </a:rPr>
+              <a:t xml:space="preserve"> = 5</a:t>
+            </a:r>
+            <a:r>
+              <a:rPr lang="en-US" sz="1425" dirty="0">
+                <a:solidFill>
+                  <a:srgbClr val="16171D"/>
+                </a:solidFill>
+                <a:latin typeface="Segoe UI"/>
+                <a:cs typeface="Segoe UI"/>
+              </a:rPr>
+              <a:t xml:space="preserve">.</a:t>
+            </a:r>
+            <a:br>
+              <a:rPr lang="en-US" sz="1425" dirty="0">
+                <a:solidFill>
+                  <a:srgbClr val="16171D"/>
+                </a:solidFill>
+                <a:latin typeface="Segoe UI"/>
+                <a:cs typeface="Segoe UI"/>
+              </a:rPr>
+            </a:br>
+            <a:r>
+              <a:rPr lang="en-US" sz="1425" dirty="0" b="1">
+                <a:solidFill>
+                  <a:srgbClr val="16171D"/>
+                </a:solidFill>
+                <a:latin typeface="Segoe UI"/>
+                <a:cs typeface="Segoe UI"/>
+              </a:rPr>
+              <a:t xml:space="preserve">2.</a:t>
+            </a:r>
+            <a:r>
+              <a:rPr lang="en-US" sz="1425" dirty="0">
+                <a:solidFill>
+                  <a:srgbClr val="16171D"/>
+                </a:solidFill>
+                <a:latin typeface="Segoe UI"/>
+                <a:cs typeface="Segoe UI"/>
+              </a:rPr>
+              <a:t xml:space="preserve"> </a:t>
+            </a:r>
+            <a:r>
+              <a:rPr lang="en-US" sz="1425" dirty="0">
+                <a:solidFill>
+                  <a:srgbClr val="16171D"/>
+                </a:solidFill>
+                <a:latin typeface="Cambria"/>
+                <a:cs typeface="Cambria"/>
+              </a:rPr>
+              <a:t xml:space="preserve">(−</a:t>
+            </a:r>
+            <a:r>
+              <a:rPr lang="en-US" sz="1425" dirty="0" i="1">
+                <a:solidFill>
+                  <a:srgbClr val="16171D"/>
+                </a:solidFill>
+                <a:latin typeface="Cambria"/>
+                <a:cs typeface="Cambria"/>
+              </a:rPr>
+              <a:t xml:space="preserve">y</a:t>
+            </a:r>
+            <a:r>
+              <a:rPr lang="en-US" sz="1425" dirty="0">
+                <a:solidFill>
+                  <a:srgbClr val="16171D"/>
+                </a:solidFill>
+                <a:latin typeface="Cambria"/>
+                <a:cs typeface="Cambria"/>
+              </a:rPr>
+              <a:t xml:space="preserve">, </a:t>
+            </a:r>
+            <a:r>
+              <a:rPr lang="en-US" sz="1425" dirty="0" i="1">
+                <a:solidFill>
+                  <a:srgbClr val="16171D"/>
+                </a:solidFill>
+                <a:latin typeface="Cambria"/>
+                <a:cs typeface="Cambria"/>
+              </a:rPr>
+              <a:t xml:space="preserve">x</a:t>
+            </a:r>
+            <a:r>
+              <a:rPr lang="en-US" sz="1425" dirty="0">
+                <a:solidFill>
+                  <a:srgbClr val="16171D"/>
+                </a:solidFill>
+                <a:latin typeface="Cambria"/>
+                <a:cs typeface="Cambria"/>
+              </a:rPr>
+              <a:t xml:space="preserve">) = (−5, 8)</a:t>
+            </a:r>
+            <a:r>
+              <a:rPr lang="en-US" sz="1425" dirty="0">
+                <a:solidFill>
+                  <a:srgbClr val="16171D"/>
+                </a:solidFill>
+                <a:latin typeface="Segoe UI"/>
+                <a:cs typeface="Segoe UI"/>
+              </a:rPr>
+              <a:t xml:space="preserve">.</a:t>
+            </a:r>
+            <a:endParaRPr lang="en-US" sz="1425" dirty="0"/>
+          </a:p>
+        </p:txBody>
+      </p:sp>
+      <p:sp>
+        <p:nvSpPr>
+          <p:cNvPr id="15" name="Shape 15"/>
+          <p:cNvSpPr txBox="1"/>
+          <p:nvPr/>
+        </p:nvSpPr>
+        <p:spPr>
+          <a:xfrm>
+            <a:off x="6210148" y="1618488"/>
+            <a:ext cx="5295748" cy="2282190"/>
+          </a:xfrm>
+          <a:prstGeom prst="roundRect">
+            <a:avLst>
+              <a:gd name="adj" fmla="val 8000"/>
+            </a:avLst>
+          </a:prstGeom>
+          <a:solidFill>
+            <a:srgbClr val="FFFFFF"/>
+          </a:solidFill>
+          <a:ln w="12700">
+            <a:solidFill>
+              <a:srgbClr val="E3E4EC"/>
+            </a:solidFill>
           </a:ln>
         </p:spPr>
         <p:txBody>
@@ -20487,18 +22084,62 @@
                 <a:spcPct val="100000"/>
               </a:lnSpc>
             </a:pPr>
-            <a:r>
-              <a:rPr lang="en-US" sz="1950" dirty="0">
-                <a:solidFill>
-                  <a:srgbClr val="16171D"/>
-                </a:solidFill>
-                <a:latin typeface="Segoe UI"/>
-                <a:cs typeface="Segoe UI"/>
-              </a:rPr>
-              <a:t xml:space="preserve">3. What is the slope of the segment from </a:t>
-            </a:r>
-            <a:r>
-              <a:rPr lang="en-US" sz="1950" dirty="0">
+            <a:endParaRPr lang="en-US" sz="1950" dirty="0"/>
+          </a:p>
+        </p:txBody>
+      </p:sp>
+      <p:sp>
+        <p:nvSpPr>
+          <p:cNvPr id="12" name="Shape 12"/>
+          <p:cNvSpPr txBox="1"/>
+          <p:nvPr/>
+        </p:nvSpPr>
+        <p:spPr>
+          <a:xfrm>
+            <a:off x="6419698" y="1789938"/>
+            <a:ext cx="4876648" cy="534924"/>
+          </a:xfrm>
+          <a:prstGeom prst="rect">
+            <a:avLst/>
+          </a:prstGeom>
+          <a:noFill/>
+          <a:ln>
+            <a:noFill/>
+          </a:ln>
+        </p:spPr>
+        <p:txBody>
+          <a:bodyPr wrap="square" lIns="36576" tIns="27432" rIns="36576" bIns="27432" anchor="t">
+            <a:noAutofit/>
+          </a:bodyPr>
+          <a:lstStyle/>
+          <a:p>
+            <a:pPr algn="l">
+              <a:lnSpc>
+                <a:spcPct val="100000"/>
+              </a:lnSpc>
+            </a:pPr>
+            <a:r>
+              <a:rPr lang="en-US" sz="1575" dirty="0" b="1">
+                <a:solidFill>
+                  <a:srgbClr val="16171D"/>
+                </a:solidFill>
+                <a:latin typeface="Segoe UI"/>
+                <a:cs typeface="Segoe UI"/>
+              </a:rPr>
+              <a:t xml:space="preserve">3.</a:t>
+            </a:r>
+            <a:r>
+              <a:rPr lang="en-US" sz="1575" dirty="0">
+                <a:solidFill>
+                  <a:srgbClr val="16171D"/>
+                </a:solidFill>
+                <a:latin typeface="Segoe UI"/>
+                <a:cs typeface="Segoe UI"/>
+              </a:rPr>
+              <a:t xml:space="preserve"> What is the slope of the segment from </a:t>
+            </a:r>
+            <a:r>
+              <a:rPr lang="en-US" sz="1575" dirty="0">
                 <a:solidFill>
                   <a:srgbClr val="16171D"/>
                 </a:solidFill>
@@ -20508,7 +22149,7 @@
               <a:t xml:space="preserve">(0, 0)</a:t>
             </a:r>
             <a:r>
-              <a:rPr lang="en-US" sz="1950" dirty="0">
+              <a:rPr lang="en-US" sz="1575" dirty="0">
                 <a:solidFill>
                   <a:srgbClr val="16171D"/>
                 </a:solidFill>
@@ -20518,7 +22159,7 @@
               <a:t xml:space="preserve"> to </a:t>
             </a:r>
             <a:r>
-              <a:rPr lang="en-US" sz="1950" dirty="0">
+              <a:rPr lang="en-US" sz="1575" dirty="0">
                 <a:solidFill>
                   <a:srgbClr val="16171D"/>
                 </a:solidFill>
@@ -20528,39 +22169,183 @@
               <a:t xml:space="preserve">(8, 5)</a:t>
             </a:r>
             <a:r>
-              <a:rPr lang="en-US" sz="1950" dirty="0">
-                <a:solidFill>
-                  <a:srgbClr val="16171D"/>
-                </a:solidFill>
-                <a:latin typeface="Segoe UI"/>
-                <a:cs typeface="Segoe UI"/>
-              </a:rPr>
-              <a:t xml:space="preserve">? </a:t>
-            </a:r>
-            <a:r>
               <a:rPr lang="en-US" sz="1575" dirty="0">
                 <a:solidFill>
-                  <a:srgbClr val="5F6272"/>
-                </a:solidFill>
-                <a:latin typeface="Segoe UI"/>
-                <a:cs typeface="Segoe UI"/>
-              </a:rPr>
-              <a:t xml:space="preserve">(SE p. 306)</a:t>
-            </a:r>
-            <a:endParaRPr lang="en-US" sz="1950" dirty="0"/>
-          </a:p>
-        </p:txBody>
-      </p:sp>
-      <p:sp>
-        <p:nvSpPr>
-          <p:cNvPr id="9" name="Shape 9"/>
-          <p:cNvSpPr txBox="1"/>
-          <p:nvPr/>
-        </p:nvSpPr>
-        <p:spPr>
-          <a:xfrm>
-            <a:off x="6362548" y="2458212"/>
-            <a:ext cx="2410541" cy="518922"/>
+                  <a:srgbClr val="16171D"/>
+                </a:solidFill>
+                <a:latin typeface="Segoe UI"/>
+                <a:cs typeface="Segoe UI"/>
+              </a:rPr>
+              <a:t xml:space="preserve">?</a:t>
+            </a:r>
+            <a:endParaRPr lang="en-US" sz="1575" dirty="0"/>
+          </a:p>
+        </p:txBody>
+      </p:sp>
+      <p:sp>
+        <p:nvSpPr>
+          <p:cNvPr id="13" name="Shape 13"/>
+          <p:cNvSpPr txBox="1"/>
+          <p:nvPr/>
+        </p:nvSpPr>
+        <p:spPr>
+          <a:xfrm>
+            <a:off x="6419698" y="2362962"/>
+            <a:ext cx="4876648" cy="294894"/>
+          </a:xfrm>
+          <a:prstGeom prst="rect">
+            <a:avLst/>
+          </a:prstGeom>
+          <a:noFill/>
+          <a:ln>
+            <a:noFill/>
+          </a:ln>
+        </p:spPr>
+        <p:txBody>
+          <a:bodyPr wrap="square" lIns="36576" tIns="27432" rIns="36576" bIns="27432" anchor="t">
+            <a:noAutofit/>
+          </a:bodyPr>
+          <a:lstStyle/>
+          <a:p>
+            <a:pPr algn="l">
+              <a:lnSpc>
+                <a:spcPct val="100000"/>
+              </a:lnSpc>
+            </a:pPr>
+            <a:r>
+              <a:rPr lang="en-US" sz="1575" dirty="0" b="1">
+                <a:solidFill>
+                  <a:srgbClr val="16171D"/>
+                </a:solidFill>
+                <a:latin typeface="Segoe UI"/>
+                <a:cs typeface="Segoe UI"/>
+              </a:rPr>
+              <a:t xml:space="preserve">Formula:</a:t>
+            </a:r>
+            <a:r>
+              <a:rPr lang="en-US" sz="1575" dirty="0">
+                <a:solidFill>
+                  <a:srgbClr val="16171D"/>
+                </a:solidFill>
+                <a:latin typeface="Segoe UI"/>
+                <a:cs typeface="Segoe UI"/>
+              </a:rPr>
+              <a:t xml:space="preserve"> </a:t>
+            </a:r>
+            <a:r>
+              <a:rPr lang="en-US" sz="1575" dirty="0" i="1">
+                <a:solidFill>
+                  <a:srgbClr val="16171D"/>
+                </a:solidFill>
+                <a:latin typeface="Cambria"/>
+                <a:cs typeface="Cambria"/>
+              </a:rPr>
+              <a:t xml:space="preserve">m</a:t>
+            </a:r>
+            <a:r>
+              <a:rPr lang="en-US" sz="1575" dirty="0">
+                <a:solidFill>
+                  <a:srgbClr val="16171D"/>
+                </a:solidFill>
+                <a:latin typeface="Cambria"/>
+                <a:cs typeface="Cambria"/>
+              </a:rPr>
+              <a:t xml:space="preserve"> = (</a:t>
+            </a:r>
+            <a:r>
+              <a:rPr lang="en-US" sz="1575" dirty="0" i="1">
+                <a:solidFill>
+                  <a:srgbClr val="16171D"/>
+                </a:solidFill>
+                <a:latin typeface="Cambria"/>
+                <a:cs typeface="Cambria"/>
+              </a:rPr>
+              <a:t xml:space="preserve">y</a:t>
+            </a:r>
+            <a:r>
+              <a:rPr lang="en-US" sz="1575" dirty="0">
+                <a:solidFill>
+                  <a:srgbClr val="16171D"/>
+                </a:solidFill>
+                <a:latin typeface="Cambria"/>
+                <a:cs typeface="Cambria"/>
+              </a:rPr>
+              <a:t xml:space="preserve">₂ − </a:t>
+            </a:r>
+            <a:r>
+              <a:rPr lang="en-US" sz="1575" dirty="0" i="1">
+                <a:solidFill>
+                  <a:srgbClr val="16171D"/>
+                </a:solidFill>
+                <a:latin typeface="Cambria"/>
+                <a:cs typeface="Cambria"/>
+              </a:rPr>
+              <a:t xml:space="preserve">y</a:t>
+            </a:r>
+            <a:r>
+              <a:rPr lang="en-US" sz="1575" dirty="0">
+                <a:solidFill>
+                  <a:srgbClr val="16171D"/>
+                </a:solidFill>
+                <a:latin typeface="Cambria"/>
+                <a:cs typeface="Cambria"/>
+              </a:rPr>
+              <a:t xml:space="preserve">₁) ÷ (</a:t>
+            </a:r>
+            <a:r>
+              <a:rPr lang="en-US" sz="1575" dirty="0" i="1">
+                <a:solidFill>
+                  <a:srgbClr val="16171D"/>
+                </a:solidFill>
+                <a:latin typeface="Cambria"/>
+                <a:cs typeface="Cambria"/>
+              </a:rPr>
+              <a:t xml:space="preserve">x</a:t>
+            </a:r>
+            <a:r>
+              <a:rPr lang="en-US" sz="1575" dirty="0">
+                <a:solidFill>
+                  <a:srgbClr val="16171D"/>
+                </a:solidFill>
+                <a:latin typeface="Cambria"/>
+                <a:cs typeface="Cambria"/>
+              </a:rPr>
+              <a:t xml:space="preserve">₂ − </a:t>
+            </a:r>
+            <a:r>
+              <a:rPr lang="en-US" sz="1575" dirty="0" i="1">
+                <a:solidFill>
+                  <a:srgbClr val="16171D"/>
+                </a:solidFill>
+                <a:latin typeface="Cambria"/>
+                <a:cs typeface="Cambria"/>
+              </a:rPr>
+              <a:t xml:space="preserve">x</a:t>
+            </a:r>
+            <a:r>
+              <a:rPr lang="en-US" sz="1575" dirty="0">
+                <a:solidFill>
+                  <a:srgbClr val="16171D"/>
+                </a:solidFill>
+                <a:latin typeface="Cambria"/>
+                <a:cs typeface="Cambria"/>
+              </a:rPr>
+              <a:t xml:space="preserve">₁)</a:t>
+            </a:r>
+            <a:endParaRPr lang="en-US" sz="1575" dirty="0"/>
+          </a:p>
+        </p:txBody>
+      </p:sp>
+      <p:sp>
+        <p:nvSpPr>
+          <p:cNvPr id="14" name="Shape 14"/>
+          <p:cNvSpPr txBox="1"/>
+          <p:nvPr/>
+        </p:nvSpPr>
+        <p:spPr>
+          <a:xfrm>
+            <a:off x="6419698" y="2695956"/>
+            <a:ext cx="3868415" cy="1033272"/>
           </a:xfrm>
           <a:prstGeom prst="roundRect">
             <a:avLst>
@@ -20596,7 +22381,7 @@
               <a:t xml:space="preserve">ANSWER   </a:t>
             </a:r>
             <a:r>
-              <a:rPr lang="en-US" sz="2325" dirty="0">
+              <a:rPr lang="en-US" sz="1425" dirty="0" b="1">
                 <a:solidFill>
                   <a:srgbClr val="16171D"/>
                 </a:solidFill>
@@ -20605,27 +22390,220 @@
               </a:rPr>
               <a:t xml:space="preserve">5/8</a:t>
             </a:r>
-            <a:endParaRPr lang="en-US" sz="2325" dirty="0"/>
-          </a:p>
-        </p:txBody>
-      </p:sp>
-      <p:sp>
-        <p:nvSpPr>
-          <p:cNvPr id="10" name="Shape 10"/>
-          <p:cNvSpPr txBox="1"/>
-          <p:nvPr/>
-        </p:nvSpPr>
-        <p:spPr>
-          <a:xfrm>
-            <a:off x="6362548" y="3243834"/>
-            <a:ext cx="5143348" cy="352044"/>
-          </a:xfrm>
-          <a:prstGeom prst="rect">
-            <a:avLst/>
-          </a:prstGeom>
-          <a:noFill/>
-          <a:ln>
-            <a:noFill/>
+            <a:br>
+              <a:rPr lang="en-US" sz="1425" dirty="0">
+                <a:solidFill>
+                  <a:srgbClr val="16171D"/>
+                </a:solidFill>
+                <a:latin typeface="Segoe UI"/>
+                <a:cs typeface="Segoe UI"/>
+              </a:rPr>
+            </a:br>
+            <a:r>
+              <a:rPr lang="en-US" sz="1425" dirty="0" b="1">
+                <a:solidFill>
+                  <a:srgbClr val="16171D"/>
+                </a:solidFill>
+                <a:latin typeface="Segoe UI"/>
+                <a:cs typeface="Segoe UI"/>
+              </a:rPr>
+              <a:t xml:space="preserve">1.</a:t>
+            </a:r>
+            <a:r>
+              <a:rPr lang="en-US" sz="1425" dirty="0">
+                <a:solidFill>
+                  <a:srgbClr val="16171D"/>
+                </a:solidFill>
+                <a:latin typeface="Segoe UI"/>
+                <a:cs typeface="Segoe UI"/>
+              </a:rPr>
+              <a:t xml:space="preserve"> Subtract the </a:t>
+            </a:r>
+            <a:r>
+              <a:rPr lang="en-US" sz="1425" dirty="0" i="1">
+                <a:solidFill>
+                  <a:srgbClr val="16171D"/>
+                </a:solidFill>
+                <a:latin typeface="Cambria"/>
+                <a:cs typeface="Cambria"/>
+              </a:rPr>
+              <a:t xml:space="preserve">y</a:t>
+            </a:r>
+            <a:r>
+              <a:rPr lang="en-US" sz="1425" dirty="0">
+                <a:solidFill>
+                  <a:srgbClr val="16171D"/>
+                </a:solidFill>
+                <a:latin typeface="Segoe UI"/>
+                <a:cs typeface="Segoe UI"/>
+              </a:rPr>
+              <a:t xml:space="preserve">-values: </a:t>
+            </a:r>
+            <a:r>
+              <a:rPr lang="en-US" sz="1425" dirty="0">
+                <a:solidFill>
+                  <a:srgbClr val="16171D"/>
+                </a:solidFill>
+                <a:latin typeface="Cambria"/>
+                <a:cs typeface="Cambria"/>
+              </a:rPr>
+              <a:t xml:space="preserve">5 − 0 = 5</a:t>
+            </a:r>
+            <a:r>
+              <a:rPr lang="en-US" sz="1425" dirty="0">
+                <a:solidFill>
+                  <a:srgbClr val="16171D"/>
+                </a:solidFill>
+                <a:latin typeface="Segoe UI"/>
+                <a:cs typeface="Segoe UI"/>
+              </a:rPr>
+              <a:t xml:space="preserve">.</a:t>
+            </a:r>
+            <a:br>
+              <a:rPr lang="en-US" sz="1425" dirty="0">
+                <a:solidFill>
+                  <a:srgbClr val="16171D"/>
+                </a:solidFill>
+                <a:latin typeface="Segoe UI"/>
+                <a:cs typeface="Segoe UI"/>
+              </a:rPr>
+            </a:br>
+            <a:r>
+              <a:rPr lang="en-US" sz="1425" dirty="0" b="1">
+                <a:solidFill>
+                  <a:srgbClr val="16171D"/>
+                </a:solidFill>
+                <a:latin typeface="Segoe UI"/>
+                <a:cs typeface="Segoe UI"/>
+              </a:rPr>
+              <a:t xml:space="preserve">2.</a:t>
+            </a:r>
+            <a:r>
+              <a:rPr lang="en-US" sz="1425" dirty="0">
+                <a:solidFill>
+                  <a:srgbClr val="16171D"/>
+                </a:solidFill>
+                <a:latin typeface="Segoe UI"/>
+                <a:cs typeface="Segoe UI"/>
+              </a:rPr>
+              <a:t xml:space="preserve"> Subtract the </a:t>
+            </a:r>
+            <a:r>
+              <a:rPr lang="en-US" sz="1425" dirty="0" i="1">
+                <a:solidFill>
+                  <a:srgbClr val="16171D"/>
+                </a:solidFill>
+                <a:latin typeface="Cambria"/>
+                <a:cs typeface="Cambria"/>
+              </a:rPr>
+              <a:t xml:space="preserve">x</a:t>
+            </a:r>
+            <a:r>
+              <a:rPr lang="en-US" sz="1425" dirty="0">
+                <a:solidFill>
+                  <a:srgbClr val="16171D"/>
+                </a:solidFill>
+                <a:latin typeface="Segoe UI"/>
+                <a:cs typeface="Segoe UI"/>
+              </a:rPr>
+              <a:t xml:space="preserve">-values: </a:t>
+            </a:r>
+            <a:r>
+              <a:rPr lang="en-US" sz="1425" dirty="0">
+                <a:solidFill>
+                  <a:srgbClr val="16171D"/>
+                </a:solidFill>
+                <a:latin typeface="Cambria"/>
+                <a:cs typeface="Cambria"/>
+              </a:rPr>
+              <a:t xml:space="preserve">8 − 0 = 8</a:t>
+            </a:r>
+            <a:r>
+              <a:rPr lang="en-US" sz="1425" dirty="0">
+                <a:solidFill>
+                  <a:srgbClr val="16171D"/>
+                </a:solidFill>
+                <a:latin typeface="Segoe UI"/>
+                <a:cs typeface="Segoe UI"/>
+              </a:rPr>
+              <a:t xml:space="preserve">.</a:t>
+            </a:r>
+            <a:br>
+              <a:rPr lang="en-US" sz="1425" dirty="0">
+                <a:solidFill>
+                  <a:srgbClr val="16171D"/>
+                </a:solidFill>
+                <a:latin typeface="Segoe UI"/>
+                <a:cs typeface="Segoe UI"/>
+              </a:rPr>
+            </a:br>
+            <a:r>
+              <a:rPr lang="en-US" sz="1425" dirty="0" b="1">
+                <a:solidFill>
+                  <a:srgbClr val="16171D"/>
+                </a:solidFill>
+                <a:latin typeface="Segoe UI"/>
+                <a:cs typeface="Segoe UI"/>
+              </a:rPr>
+              <a:t xml:space="preserve">3.</a:t>
+            </a:r>
+            <a:r>
+              <a:rPr lang="en-US" sz="1425" dirty="0">
+                <a:solidFill>
+                  <a:srgbClr val="16171D"/>
+                </a:solidFill>
+                <a:latin typeface="Segoe UI"/>
+                <a:cs typeface="Segoe UI"/>
+              </a:rPr>
+              <a:t xml:space="preserve"> Divide: </a:t>
+            </a:r>
+            <a:r>
+              <a:rPr lang="en-US" sz="1425" dirty="0">
+                <a:solidFill>
+                  <a:srgbClr val="16171D"/>
+                </a:solidFill>
+                <a:latin typeface="Cambria"/>
+                <a:cs typeface="Cambria"/>
+              </a:rPr>
+              <a:t xml:space="preserve">5 ÷ 8 = 5/8</a:t>
+            </a:r>
+            <a:r>
+              <a:rPr lang="en-US" sz="1425" dirty="0">
+                <a:solidFill>
+                  <a:srgbClr val="16171D"/>
+                </a:solidFill>
+                <a:latin typeface="Segoe UI"/>
+                <a:cs typeface="Segoe UI"/>
+              </a:rPr>
+              <a:t xml:space="preserve">.</a:t>
+            </a:r>
+            <a:endParaRPr lang="en-US" sz="1425" dirty="0"/>
+          </a:p>
+        </p:txBody>
+      </p:sp>
+      <p:sp>
+        <p:nvSpPr>
+          <p:cNvPr id="19" name="Shape 19"/>
+          <p:cNvSpPr txBox="1"/>
+          <p:nvPr/>
+        </p:nvSpPr>
+        <p:spPr>
+          <a:xfrm>
+            <a:off x="6210148" y="4034028"/>
+            <a:ext cx="5295748" cy="2042160"/>
+          </a:xfrm>
+          <a:prstGeom prst="roundRect">
+            <a:avLst>
+              <a:gd name="adj" fmla="val 8000"/>
+            </a:avLst>
+          </a:prstGeom>
+          <a:solidFill>
+            <a:srgbClr val="FFFFFF"/>
+          </a:solidFill>
+          <a:ln w="12700">
+            <a:solidFill>
+              <a:srgbClr val="E3E4EC"/>
+            </a:solidFill>
           </a:ln>
         </p:spPr>
         <p:txBody>
@@ -20639,18 +22617,62 @@
                 <a:spcPct val="100000"/>
               </a:lnSpc>
             </a:pPr>
-            <a:r>
-              <a:rPr lang="en-US" sz="1950" dirty="0">
-                <a:solidFill>
-                  <a:srgbClr val="16171D"/>
-                </a:solidFill>
-                <a:latin typeface="Segoe UI"/>
-                <a:cs typeface="Segoe UI"/>
-              </a:rPr>
-              <a:t xml:space="preserve">4. What is the slope of </a:t>
-            </a:r>
-            <a:r>
-              <a:rPr lang="en-US" sz="1950" dirty="0" i="1">
+            <a:endParaRPr lang="en-US" sz="1950" dirty="0"/>
+          </a:p>
+        </p:txBody>
+      </p:sp>
+      <p:sp>
+        <p:nvSpPr>
+          <p:cNvPr id="16" name="Shape 16"/>
+          <p:cNvSpPr txBox="1"/>
+          <p:nvPr/>
+        </p:nvSpPr>
+        <p:spPr>
+          <a:xfrm>
+            <a:off x="6419698" y="4205478"/>
+            <a:ext cx="4876648" cy="294894"/>
+          </a:xfrm>
+          <a:prstGeom prst="rect">
+            <a:avLst/>
+          </a:prstGeom>
+          <a:noFill/>
+          <a:ln>
+            <a:noFill/>
+          </a:ln>
+        </p:spPr>
+        <p:txBody>
+          <a:bodyPr wrap="square" lIns="36576" tIns="27432" rIns="36576" bIns="27432" anchor="t">
+            <a:noAutofit/>
+          </a:bodyPr>
+          <a:lstStyle/>
+          <a:p>
+            <a:pPr algn="l">
+              <a:lnSpc>
+                <a:spcPct val="100000"/>
+              </a:lnSpc>
+            </a:pPr>
+            <a:r>
+              <a:rPr lang="en-US" sz="1575" dirty="0" b="1">
+                <a:solidFill>
+                  <a:srgbClr val="16171D"/>
+                </a:solidFill>
+                <a:latin typeface="Segoe UI"/>
+                <a:cs typeface="Segoe UI"/>
+              </a:rPr>
+              <a:t xml:space="preserve">4.</a:t>
+            </a:r>
+            <a:r>
+              <a:rPr lang="en-US" sz="1575" dirty="0">
+                <a:solidFill>
+                  <a:srgbClr val="16171D"/>
+                </a:solidFill>
+                <a:latin typeface="Segoe UI"/>
+                <a:cs typeface="Segoe UI"/>
+              </a:rPr>
+              <a:t xml:space="preserve"> What is the slope of </a:t>
+            </a:r>
+            <a:r>
+              <a:rPr lang="en-US" sz="1575" dirty="0" i="1">
                 <a:solidFill>
                   <a:srgbClr val="16171D"/>
                 </a:solidFill>
@@ -20660,7 +22682,7 @@
               <a:t xml:space="preserve">y</a:t>
             </a:r>
             <a:r>
-              <a:rPr lang="en-US" sz="1950" dirty="0">
+              <a:rPr lang="en-US" sz="1575" dirty="0">
                 <a:solidFill>
                   <a:srgbClr val="16171D"/>
                 </a:solidFill>
@@ -20670,7 +22692,7 @@
               <a:t xml:space="preserve"> = −3</a:t>
             </a:r>
             <a:r>
-              <a:rPr lang="en-US" sz="1950" dirty="0" i="1">
+              <a:rPr lang="en-US" sz="1575" dirty="0" i="1">
                 <a:solidFill>
                   <a:srgbClr val="16171D"/>
                 </a:solidFill>
@@ -20680,7 +22702,7 @@
               <a:t xml:space="preserve">x</a:t>
             </a:r>
             <a:r>
-              <a:rPr lang="en-US" sz="1950" dirty="0">
+              <a:rPr lang="en-US" sz="1575" dirty="0">
                 <a:solidFill>
                   <a:srgbClr val="16171D"/>
                 </a:solidFill>
@@ -20690,7 +22712,7 @@
               <a:t xml:space="preserve"> + 5</a:t>
             </a:r>
             <a:r>
-              <a:rPr lang="en-US" sz="1950" dirty="0">
+              <a:rPr lang="en-US" sz="1575" dirty="0">
                 <a:solidFill>
                   <a:srgbClr val="16171D"/>
                 </a:solidFill>
@@ -20699,20 +22721,154 @@
               </a:rPr>
               <a:t xml:space="preserve">?</a:t>
             </a:r>
-            <a:endParaRPr lang="en-US" sz="1950" dirty="0"/>
-          </a:p>
-        </p:txBody>
-      </p:sp>
-      <p:sp>
-        <p:nvSpPr>
-          <p:cNvPr id="11" name="Shape 11"/>
-          <p:cNvSpPr txBox="1"/>
-          <p:nvPr/>
-        </p:nvSpPr>
-        <p:spPr>
-          <a:xfrm>
-            <a:off x="6362548" y="3729228"/>
-            <a:ext cx="2244715" cy="518922"/>
+            <a:endParaRPr lang="en-US" sz="1575" dirty="0"/>
+          </a:p>
+        </p:txBody>
+      </p:sp>
+      <p:sp>
+        <p:nvSpPr>
+          <p:cNvPr id="17" name="Shape 17"/>
+          <p:cNvSpPr txBox="1"/>
+          <p:nvPr/>
+        </p:nvSpPr>
+        <p:spPr>
+          <a:xfrm>
+            <a:off x="6419698" y="4538472"/>
+            <a:ext cx="4876648" cy="294894"/>
+          </a:xfrm>
+          <a:prstGeom prst="rect">
+            <a:avLst/>
+          </a:prstGeom>
+          <a:noFill/>
+          <a:ln>
+            <a:noFill/>
+          </a:ln>
+        </p:spPr>
+        <p:txBody>
+          <a:bodyPr wrap="square" lIns="36576" tIns="27432" rIns="36576" bIns="27432" anchor="t">
+            <a:noAutofit/>
+          </a:bodyPr>
+          <a:lstStyle/>
+          <a:p>
+            <a:pPr algn="l">
+              <a:lnSpc>
+                <a:spcPct val="100000"/>
+              </a:lnSpc>
+            </a:pPr>
+            <a:r>
+              <a:rPr lang="en-US" sz="1575" dirty="0" b="1">
+                <a:solidFill>
+                  <a:srgbClr val="16171D"/>
+                </a:solidFill>
+                <a:latin typeface="Segoe UI"/>
+                <a:cs typeface="Segoe UI"/>
+              </a:rPr>
+              <a:t xml:space="preserve">Formula:</a:t>
+            </a:r>
+            <a:r>
+              <a:rPr lang="en-US" sz="1575" dirty="0">
+                <a:solidFill>
+                  <a:srgbClr val="16171D"/>
+                </a:solidFill>
+                <a:latin typeface="Segoe UI"/>
+                <a:cs typeface="Segoe UI"/>
+              </a:rPr>
+              <a:t xml:space="preserve"> </a:t>
+            </a:r>
+            <a:r>
+              <a:rPr lang="en-US" sz="1575" dirty="0" i="1">
+                <a:solidFill>
+                  <a:srgbClr val="16171D"/>
+                </a:solidFill>
+                <a:latin typeface="Cambria"/>
+                <a:cs typeface="Cambria"/>
+              </a:rPr>
+              <a:t xml:space="preserve">y</a:t>
+            </a:r>
+            <a:r>
+              <a:rPr lang="en-US" sz="1575" dirty="0">
+                <a:solidFill>
+                  <a:srgbClr val="16171D"/>
+                </a:solidFill>
+                <a:latin typeface="Cambria"/>
+                <a:cs typeface="Cambria"/>
+              </a:rPr>
+              <a:t xml:space="preserve"> = </a:t>
+            </a:r>
+            <a:r>
+              <a:rPr lang="en-US" sz="1575" dirty="0" i="1">
+                <a:solidFill>
+                  <a:srgbClr val="16171D"/>
+                </a:solidFill>
+                <a:latin typeface="Cambria"/>
+                <a:cs typeface="Cambria"/>
+              </a:rPr>
+              <a:t xml:space="preserve">m</a:t>
+            </a:r>
+            <a:r>
+              <a:rPr lang="en-US" sz="1575" dirty="0" i="1">
+                <a:solidFill>
+                  <a:srgbClr val="16171D"/>
+                </a:solidFill>
+                <a:latin typeface="Cambria"/>
+                <a:cs typeface="Cambria"/>
+              </a:rPr>
+              <a:t xml:space="preserve">x</a:t>
+            </a:r>
+            <a:r>
+              <a:rPr lang="en-US" sz="1575" dirty="0">
+                <a:solidFill>
+                  <a:srgbClr val="16171D"/>
+                </a:solidFill>
+                <a:latin typeface="Cambria"/>
+                <a:cs typeface="Cambria"/>
+              </a:rPr>
+              <a:t xml:space="preserve"> + </a:t>
+            </a:r>
+            <a:r>
+              <a:rPr lang="en-US" sz="1575" dirty="0" i="1">
+                <a:solidFill>
+                  <a:srgbClr val="16171D"/>
+                </a:solidFill>
+                <a:latin typeface="Cambria"/>
+                <a:cs typeface="Cambria"/>
+              </a:rPr>
+              <a:t xml:space="preserve">b</a:t>
+            </a:r>
+            <a:r>
+              <a:rPr lang="en-US" sz="1575" dirty="0">
+                <a:solidFill>
+                  <a:srgbClr val="16171D"/>
+                </a:solidFill>
+                <a:latin typeface="Segoe UI"/>
+                <a:cs typeface="Segoe UI"/>
+              </a:rPr>
+              <a:t xml:space="preserve">, slope </a:t>
+            </a:r>
+            <a:r>
+              <a:rPr lang="en-US" sz="1575" dirty="0" i="1">
+                <a:solidFill>
+                  <a:srgbClr val="16171D"/>
+                </a:solidFill>
+                <a:latin typeface="Cambria"/>
+                <a:cs typeface="Cambria"/>
+              </a:rPr>
+              <a:t xml:space="preserve">m</a:t>
+            </a:r>
+            <a:endParaRPr lang="en-US" sz="1575" dirty="0"/>
+          </a:p>
+        </p:txBody>
+      </p:sp>
+      <p:sp>
+        <p:nvSpPr>
+          <p:cNvPr id="18" name="Shape 18"/>
+          <p:cNvSpPr txBox="1"/>
+          <p:nvPr/>
+        </p:nvSpPr>
+        <p:spPr>
+          <a:xfrm>
+            <a:off x="6419698" y="4871466"/>
+            <a:ext cx="4876648" cy="1033272"/>
           </a:xfrm>
           <a:prstGeom prst="roundRect">
             <a:avLst>
@@ -20748,7 +22904,7 @@
               <a:t xml:space="preserve">ANSWER   </a:t>
             </a:r>
             <a:r>
-              <a:rPr lang="en-US" sz="2325" dirty="0">
+              <a:rPr lang="en-US" sz="1425" dirty="0" b="1">
                 <a:solidFill>
                   <a:srgbClr val="16171D"/>
                 </a:solidFill>
@@ -20757,13 +22913,271 @@
               </a:rPr>
               <a:t xml:space="preserve">−3</a:t>
             </a:r>
-            <a:endParaRPr lang="en-US" sz="2325" dirty="0"/>
-          </a:p>
-        </p:txBody>
-      </p:sp>
-      <p:sp>
-        <p:nvSpPr>
-          <p:cNvPr id="12" name="Slide Number 12"/>
+            <a:br>
+              <a:rPr lang="en-US" sz="1425" dirty="0">
+                <a:solidFill>
+                  <a:srgbClr val="16171D"/>
+                </a:solidFill>
+                <a:latin typeface="Segoe UI"/>
+                <a:cs typeface="Segoe UI"/>
+              </a:rPr>
+            </a:br>
+            <a:r>
+              <a:rPr lang="en-US" sz="1425" dirty="0" b="1">
+                <a:solidFill>
+                  <a:srgbClr val="16171D"/>
+                </a:solidFill>
+                <a:latin typeface="Segoe UI"/>
+                <a:cs typeface="Segoe UI"/>
+              </a:rPr>
+              <a:t xml:space="preserve">1.</a:t>
+            </a:r>
+            <a:r>
+              <a:rPr lang="en-US" sz="1425" dirty="0">
+                <a:solidFill>
+                  <a:srgbClr val="16171D"/>
+                </a:solidFill>
+                <a:latin typeface="Segoe UI"/>
+                <a:cs typeface="Segoe UI"/>
+              </a:rPr>
+              <a:t xml:space="preserve"> Match </a:t>
+            </a:r>
+            <a:r>
+              <a:rPr lang="en-US" sz="1425" dirty="0" i="1">
+                <a:solidFill>
+                  <a:srgbClr val="16171D"/>
+                </a:solidFill>
+                <a:latin typeface="Cambria"/>
+                <a:cs typeface="Cambria"/>
+              </a:rPr>
+              <a:t xml:space="preserve">y</a:t>
+            </a:r>
+            <a:r>
+              <a:rPr lang="en-US" sz="1425" dirty="0">
+                <a:solidFill>
+                  <a:srgbClr val="16171D"/>
+                </a:solidFill>
+                <a:latin typeface="Cambria"/>
+                <a:cs typeface="Cambria"/>
+              </a:rPr>
+              <a:t xml:space="preserve"> = −3</a:t>
+            </a:r>
+            <a:r>
+              <a:rPr lang="en-US" sz="1425" dirty="0" i="1">
+                <a:solidFill>
+                  <a:srgbClr val="16171D"/>
+                </a:solidFill>
+                <a:latin typeface="Cambria"/>
+                <a:cs typeface="Cambria"/>
+              </a:rPr>
+              <a:t xml:space="preserve">x</a:t>
+            </a:r>
+            <a:r>
+              <a:rPr lang="en-US" sz="1425" dirty="0">
+                <a:solidFill>
+                  <a:srgbClr val="16171D"/>
+                </a:solidFill>
+                <a:latin typeface="Cambria"/>
+                <a:cs typeface="Cambria"/>
+              </a:rPr>
+              <a:t xml:space="preserve"> + 5</a:t>
+            </a:r>
+            <a:r>
+              <a:rPr lang="en-US" sz="1425" dirty="0">
+                <a:solidFill>
+                  <a:srgbClr val="16171D"/>
+                </a:solidFill>
+                <a:latin typeface="Segoe UI"/>
+                <a:cs typeface="Segoe UI"/>
+              </a:rPr>
+              <a:t xml:space="preserve"> to </a:t>
+            </a:r>
+            <a:r>
+              <a:rPr lang="en-US" sz="1425" dirty="0" i="1">
+                <a:solidFill>
+                  <a:srgbClr val="16171D"/>
+                </a:solidFill>
+                <a:latin typeface="Cambria"/>
+                <a:cs typeface="Cambria"/>
+              </a:rPr>
+              <a:t xml:space="preserve">y</a:t>
+            </a:r>
+            <a:r>
+              <a:rPr lang="en-US" sz="1425" dirty="0">
+                <a:solidFill>
+                  <a:srgbClr val="16171D"/>
+                </a:solidFill>
+                <a:latin typeface="Cambria"/>
+                <a:cs typeface="Cambria"/>
+              </a:rPr>
+              <a:t xml:space="preserve"> = </a:t>
+            </a:r>
+            <a:r>
+              <a:rPr lang="en-US" sz="1425" dirty="0" i="1">
+                <a:solidFill>
+                  <a:srgbClr val="16171D"/>
+                </a:solidFill>
+                <a:latin typeface="Cambria"/>
+                <a:cs typeface="Cambria"/>
+              </a:rPr>
+              <a:t xml:space="preserve">m</a:t>
+            </a:r>
+            <a:r>
+              <a:rPr lang="en-US" sz="1425" dirty="0" i="1">
+                <a:solidFill>
+                  <a:srgbClr val="16171D"/>
+                </a:solidFill>
+                <a:latin typeface="Cambria"/>
+                <a:cs typeface="Cambria"/>
+              </a:rPr>
+              <a:t xml:space="preserve">x</a:t>
+            </a:r>
+            <a:r>
+              <a:rPr lang="en-US" sz="1425" dirty="0">
+                <a:solidFill>
+                  <a:srgbClr val="16171D"/>
+                </a:solidFill>
+                <a:latin typeface="Cambria"/>
+                <a:cs typeface="Cambria"/>
+              </a:rPr>
+              <a:t xml:space="preserve"> + </a:t>
+            </a:r>
+            <a:r>
+              <a:rPr lang="en-US" sz="1425" dirty="0" i="1">
+                <a:solidFill>
+                  <a:srgbClr val="16171D"/>
+                </a:solidFill>
+                <a:latin typeface="Cambria"/>
+                <a:cs typeface="Cambria"/>
+              </a:rPr>
+              <a:t xml:space="preserve">b</a:t>
+            </a:r>
+            <a:r>
+              <a:rPr lang="en-US" sz="1425" dirty="0">
+                <a:solidFill>
+                  <a:srgbClr val="16171D"/>
+                </a:solidFill>
+                <a:latin typeface="Segoe UI"/>
+                <a:cs typeface="Segoe UI"/>
+              </a:rPr>
+              <a:t xml:space="preserve">: </a:t>
+            </a:r>
+            <a:r>
+              <a:rPr lang="en-US" sz="1425" dirty="0" i="1">
+                <a:solidFill>
+                  <a:srgbClr val="16171D"/>
+                </a:solidFill>
+                <a:latin typeface="Cambria"/>
+                <a:cs typeface="Cambria"/>
+              </a:rPr>
+              <a:t xml:space="preserve">m</a:t>
+            </a:r>
+            <a:r>
+              <a:rPr lang="en-US" sz="1425" dirty="0">
+                <a:solidFill>
+                  <a:srgbClr val="16171D"/>
+                </a:solidFill>
+                <a:latin typeface="Cambria"/>
+                <a:cs typeface="Cambria"/>
+              </a:rPr>
+              <a:t xml:space="preserve"> = −3</a:t>
+            </a:r>
+            <a:r>
+              <a:rPr lang="en-US" sz="1425" dirty="0">
+                <a:solidFill>
+                  <a:srgbClr val="16171D"/>
+                </a:solidFill>
+                <a:latin typeface="Segoe UI"/>
+                <a:cs typeface="Segoe UI"/>
+              </a:rPr>
+              <a:t xml:space="preserve"> and </a:t>
+            </a:r>
+            <a:r>
+              <a:rPr lang="en-US" sz="1425" dirty="0" i="1">
+                <a:solidFill>
+                  <a:srgbClr val="16171D"/>
+                </a:solidFill>
+                <a:latin typeface="Cambria"/>
+                <a:cs typeface="Cambria"/>
+              </a:rPr>
+              <a:t xml:space="preserve">b</a:t>
+            </a:r>
+            <a:r>
+              <a:rPr lang="en-US" sz="1425" dirty="0">
+                <a:solidFill>
+                  <a:srgbClr val="16171D"/>
+                </a:solidFill>
+                <a:latin typeface="Cambria"/>
+                <a:cs typeface="Cambria"/>
+              </a:rPr>
+              <a:t xml:space="preserve"> = 5</a:t>
+            </a:r>
+            <a:r>
+              <a:rPr lang="en-US" sz="1425" dirty="0">
+                <a:solidFill>
+                  <a:srgbClr val="16171D"/>
+                </a:solidFill>
+                <a:latin typeface="Segoe UI"/>
+                <a:cs typeface="Segoe UI"/>
+              </a:rPr>
+              <a:t xml:space="preserve">.</a:t>
+            </a:r>
+            <a:br>
+              <a:rPr lang="en-US" sz="1425" dirty="0">
+                <a:solidFill>
+                  <a:srgbClr val="16171D"/>
+                </a:solidFill>
+                <a:latin typeface="Segoe UI"/>
+                <a:cs typeface="Segoe UI"/>
+              </a:rPr>
+            </a:br>
+            <a:r>
+              <a:rPr lang="en-US" sz="1425" dirty="0" b="1">
+                <a:solidFill>
+                  <a:srgbClr val="16171D"/>
+                </a:solidFill>
+                <a:latin typeface="Segoe UI"/>
+                <a:cs typeface="Segoe UI"/>
+              </a:rPr>
+              <a:t xml:space="preserve">2.</a:t>
+            </a:r>
+            <a:r>
+              <a:rPr lang="en-US" sz="1425" dirty="0">
+                <a:solidFill>
+                  <a:srgbClr val="16171D"/>
+                </a:solidFill>
+                <a:latin typeface="Segoe UI"/>
+                <a:cs typeface="Segoe UI"/>
+              </a:rPr>
+              <a:t xml:space="preserve"> The slope is </a:t>
+            </a:r>
+            <a:r>
+              <a:rPr lang="en-US" sz="1425" dirty="0">
+                <a:solidFill>
+                  <a:srgbClr val="16171D"/>
+                </a:solidFill>
+                <a:latin typeface="Cambria"/>
+                <a:cs typeface="Cambria"/>
+              </a:rPr>
+              <a:t xml:space="preserve">−3</a:t>
+            </a:r>
+            <a:r>
+              <a:rPr lang="en-US" sz="1425" dirty="0">
+                <a:solidFill>
+                  <a:srgbClr val="16171D"/>
+                </a:solidFill>
+                <a:latin typeface="Segoe UI"/>
+                <a:cs typeface="Segoe UI"/>
+              </a:rPr>
+              <a:t xml:space="preserve">.</a:t>
+            </a:r>
+            <a:endParaRPr lang="en-US" sz="1425" dirty="0"/>
+          </a:p>
+        </p:txBody>
+      </p:sp>
+      <p:sp>
+        <p:nvSpPr>
+          <p:cNvPr id="20" name="Slide Number 20"/>
           <p:cNvSpPr txBox="1"/>
           <p:nvPr/>
         </p:nvSpPr>
@@ -20837,7 +23251,7 @@
                                           </p:stCondLst>
                                         </p:cTn>
                                         <p:tgtEl>
-                                          <p:spTgt spid="5"/>
+                                          <p:spTgt spid="6"/>
                                         </p:tgtEl>
                                         <p:attrNameLst>
                                           <p:attrName>style.visibility</p:attrName>
@@ -20851,7 +23265,7 @@
                                       <p:cBhvr>
                                         <p:cTn id="4" dur="500"/>
                                         <p:tgtEl>
-                                          <p:spTgt spid="5"/>
+                                          <p:spTgt spid="6"/>
                                         </p:tgtEl>
                                       </p:cBhvr>
                                     </p:animEffect>
@@ -20859,7 +23273,7 @@
                                       <p:cBhvr>
                                         <p:cTn id="5" dur="500" fill="hold"/>
                                         <p:tgtEl>
-                                          <p:spTgt spid="5"/>
+                                          <p:spTgt spid="6"/>
                                         </p:tgtEl>
                                         <p:attrNameLst>
                                           <p:attrName>ppt_w</p:attrName>
@@ -20882,7 +23296,7 @@
                                       <p:cBhvr>
                                         <p:cTn id="6" dur="500" fill="hold"/>
                                         <p:tgtEl>
-                                          <p:spTgt spid="5"/>
+                                          <p:spTgt spid="6"/>
                                         </p:tgtEl>
                                         <p:attrNameLst>
                                           <p:attrName>ppt_h</p:attrName>
@@ -20936,7 +23350,7 @@
                                           </p:stCondLst>
                                         </p:cTn>
                                         <p:tgtEl>
-                                          <p:spTgt spid="7"/>
+                                          <p:spTgt spid="10"/>
                                         </p:tgtEl>
                                         <p:attrNameLst>
                                           <p:attrName>style.visibility</p:attrName>
@@ -20950,7 +23364,7 @@
                                       <p:cBhvr>
                                         <p:cTn id="11" dur="500"/>
                                         <p:tgtEl>
-                                          <p:spTgt spid="7"/>
+                                          <p:spTgt spid="10"/>
                                         </p:tgtEl>
                                       </p:cBhvr>
                                     </p:animEffect>
@@ -20958,7 +23372,7 @@
                                       <p:cBhvr>
                                         <p:cTn id="12" dur="500" fill="hold"/>
                                         <p:tgtEl>
-                                          <p:spTgt spid="7"/>
+                                          <p:spTgt spid="10"/>
                                         </p:tgtEl>
                                         <p:attrNameLst>
                                           <p:attrName>ppt_w</p:attrName>
@@ -20981,7 +23395,7 @@
                                       <p:cBhvr>
                                         <p:cTn id="13" dur="500" fill="hold"/>
                                         <p:tgtEl>
-                                          <p:spTgt spid="7"/>
+                                          <p:spTgt spid="10"/>
                                         </p:tgtEl>
                                         <p:attrNameLst>
                                           <p:attrName>ppt_h</p:attrName>
@@ -21035,7 +23449,7 @@
                                           </p:stCondLst>
                                         </p:cTn>
                                         <p:tgtEl>
-                                          <p:spTgt spid="9"/>
+                                          <p:spTgt spid="14"/>
                                         </p:tgtEl>
                                         <p:attrNameLst>
                                           <p:attrName>style.visibility</p:attrName>
@@ -21049,7 +23463,7 @@
                                       <p:cBhvr>
                                         <p:cTn id="18" dur="500"/>
                                         <p:tgtEl>
-                                          <p:spTgt spid="9"/>
+                                          <p:spTgt spid="14"/>
                                         </p:tgtEl>
                                       </p:cBhvr>
                                     </p:animEffect>
@@ -21057,7 +23471,7 @@
                                       <p:cBhvr>
                                         <p:cTn id="19" dur="500" fill="hold"/>
                                         <p:tgtEl>
-                                          <p:spTgt spid="9"/>
+                                          <p:spTgt spid="14"/>
                                         </p:tgtEl>
                                         <p:attrNameLst>
                                           <p:attrName>ppt_w</p:attrName>
@@ -21080,7 +23494,7 @@
                                       <p:cBhvr>
                                         <p:cTn id="20" dur="500" fill="hold"/>
                                         <p:tgtEl>
-                                          <p:spTgt spid="9"/>
+                                          <p:spTgt spid="14"/>
                                         </p:tgtEl>
                                         <p:attrNameLst>
                                           <p:attrName>ppt_h</p:attrName>
@@ -21134,7 +23548,7 @@
                                           </p:stCondLst>
                                         </p:cTn>
                                         <p:tgtEl>
-                                          <p:spTgt spid="11"/>
+                                          <p:spTgt spid="18"/>
                                         </p:tgtEl>
                                         <p:attrNameLst>
                                           <p:attrName>style.visibility</p:attrName>
@@ -21148,7 +23562,7 @@
                                       <p:cBhvr>
                                         <p:cTn id="25" dur="500"/>
                                         <p:tgtEl>
-                                          <p:spTgt spid="11"/>
+                                          <p:spTgt spid="18"/>
                                         </p:tgtEl>
                                       </p:cBhvr>
                                     </p:animEffect>
@@ -21156,7 +23570,7 @@
                                       <p:cBhvr>
                                         <p:cTn id="26" dur="500" fill="hold"/>
                                         <p:tgtEl>
-                                          <p:spTgt spid="11"/>
+                                          <p:spTgt spid="18"/>
                                         </p:tgtEl>
                                         <p:attrNameLst>
                                           <p:attrName>ppt_w</p:attrName>
@@ -21179,7 +23593,7 @@
                                       <p:cBhvr>
                                         <p:cTn id="27" dur="500" fill="hold"/>
                                         <p:tgtEl>
-                                          <p:spTgt spid="11"/>
+                                          <p:spTgt spid="18"/>
                                         </p:tgtEl>
                                         <p:attrNameLst>
                                           <p:attrName>ppt_h</p:attrName>

--- a/IEP/t2-lesson3-perpendicular-slopes-IEP-catchup.pptx
+++ b/IEP/t2-lesson3-perpendicular-slopes-IEP-catchup.pptx
@@ -1058,7 +1058,7 @@
           <a:p>
             <a:r>
               <a:rPr lang="en-US" dirty="0"/>
-              <a:t>Give students time to try all items before revealing. Students may use the steps slide and their notes.</a:t>
+              <a:t>Give students time to try all items before revealing. Students may use the steps slide and their notes. After each answer, click once per step and read it aloud so students can find where their work went wrong.</a:t>
             </a:r>
           </a:p>
         </p:txBody>
@@ -19653,14 +19653,14 @@
       </p:sp>
       <p:sp>
         <p:nvSpPr>
-          <p:cNvPr id="6" name="Shape 6"/>
+          <p:cNvPr id="9" name="Shape 9"/>
           <p:cNvSpPr txBox="1"/>
           <p:nvPr/>
         </p:nvSpPr>
         <p:spPr>
           <a:xfrm>
             <a:off x="685800" y="1618488"/>
-            <a:ext cx="10820095" cy="1309116"/>
+            <a:ext cx="3479698" cy="2776728"/>
           </a:xfrm>
           <a:prstGeom prst="roundRect">
             <a:avLst>
@@ -19700,7 +19700,7 @@
         <p:spPr>
           <a:xfrm>
             <a:off x="895350" y="1789938"/>
-            <a:ext cx="10400995" cy="352044"/>
+            <a:ext cx="3060598" cy="649224"/>
           </a:xfrm>
           <a:prstGeom prst="rect">
             <a:avLst/>
@@ -19783,7 +19783,7 @@
         </p:nvSpPr>
         <p:spPr>
           <a:xfrm>
-            <a:off x="895350" y="2237232"/>
+            <a:off x="895350" y="2534412"/>
             <a:ext cx="2576368" cy="518922"/>
           </a:xfrm>
           <a:prstGeom prst="roundRect">
@@ -19865,14 +19865,176 @@
       </p:sp>
       <p:sp>
         <p:nvSpPr>
-          <p:cNvPr id="9" name="Shape 9"/>
-          <p:cNvSpPr txBox="1"/>
-          <p:nvPr/>
-        </p:nvSpPr>
-        <p:spPr>
-          <a:xfrm>
-            <a:off x="685800" y="3060954"/>
-            <a:ext cx="10820095" cy="1309116"/>
+          <p:cNvPr id="6" name="Shape 6"/>
+          <p:cNvSpPr txBox="1"/>
+          <p:nvPr/>
+        </p:nvSpPr>
+        <p:spPr>
+          <a:xfrm>
+            <a:off x="895350" y="3148584"/>
+            <a:ext cx="3060598" cy="294894"/>
+          </a:xfrm>
+          <a:prstGeom prst="rect">
+            <a:avLst/>
+          </a:prstGeom>
+          <a:noFill/>
+          <a:ln>
+            <a:noFill/>
+          </a:ln>
+        </p:spPr>
+        <p:txBody>
+          <a:bodyPr wrap="square" lIns="36576" tIns="27432" rIns="36576" bIns="27432" anchor="t">
+            <a:noAutofit/>
+          </a:bodyPr>
+          <a:lstStyle/>
+          <a:p>
+            <a:pPr algn="l">
+              <a:lnSpc>
+                <a:spcPct val="100000"/>
+              </a:lnSpc>
+            </a:pPr>
+            <a:r>
+              <a:rPr lang="en-US" sz="1575" dirty="0" b="1">
+                <a:solidFill>
+                  <a:srgbClr val="16171D"/>
+                </a:solidFill>
+                <a:latin typeface="Segoe UI"/>
+                <a:cs typeface="Segoe UI"/>
+              </a:rPr>
+              <a:t xml:space="preserve">1.</a:t>
+            </a:r>
+            <a:r>
+              <a:rPr lang="en-US" sz="1575" dirty="0">
+                <a:solidFill>
+                  <a:srgbClr val="16171D"/>
+                </a:solidFill>
+                <a:latin typeface="Segoe UI"/>
+                <a:cs typeface="Segoe UI"/>
+              </a:rPr>
+              <a:t xml:space="preserve"> Flip 3/4: 4/3.</a:t>
+            </a:r>
+            <a:endParaRPr lang="en-US" sz="1575" dirty="0"/>
+          </a:p>
+        </p:txBody>
+      </p:sp>
+      <p:sp>
+        <p:nvSpPr>
+          <p:cNvPr id="7" name="Shape 7"/>
+          <p:cNvSpPr txBox="1"/>
+          <p:nvPr/>
+        </p:nvSpPr>
+        <p:spPr>
+          <a:xfrm>
+            <a:off x="895350" y="3538728"/>
+            <a:ext cx="3060598" cy="294894"/>
+          </a:xfrm>
+          <a:prstGeom prst="rect">
+            <a:avLst/>
+          </a:prstGeom>
+          <a:noFill/>
+          <a:ln>
+            <a:noFill/>
+          </a:ln>
+        </p:spPr>
+        <p:txBody>
+          <a:bodyPr wrap="square" lIns="36576" tIns="27432" rIns="36576" bIns="27432" anchor="t">
+            <a:noAutofit/>
+          </a:bodyPr>
+          <a:lstStyle/>
+          <a:p>
+            <a:pPr algn="l">
+              <a:lnSpc>
+                <a:spcPct val="100000"/>
+              </a:lnSpc>
+            </a:pPr>
+            <a:r>
+              <a:rPr lang="en-US" sz="1575" dirty="0" b="1">
+                <a:solidFill>
+                  <a:srgbClr val="16171D"/>
+                </a:solidFill>
+                <a:latin typeface="Segoe UI"/>
+                <a:cs typeface="Segoe UI"/>
+              </a:rPr>
+              <a:t xml:space="preserve">2.</a:t>
+            </a:r>
+            <a:r>
+              <a:rPr lang="en-US" sz="1575" dirty="0">
+                <a:solidFill>
+                  <a:srgbClr val="16171D"/>
+                </a:solidFill>
+                <a:latin typeface="Segoe UI"/>
+                <a:cs typeface="Segoe UI"/>
+              </a:rPr>
+              <a:t xml:space="preserve"> Change the sign: −4/3.</a:t>
+            </a:r>
+            <a:endParaRPr lang="en-US" sz="1575" dirty="0"/>
+          </a:p>
+        </p:txBody>
+      </p:sp>
+      <p:sp>
+        <p:nvSpPr>
+          <p:cNvPr id="8" name="Shape 8"/>
+          <p:cNvSpPr txBox="1"/>
+          <p:nvPr/>
+        </p:nvSpPr>
+        <p:spPr>
+          <a:xfrm>
+            <a:off x="895350" y="3928872"/>
+            <a:ext cx="3060598" cy="294894"/>
+          </a:xfrm>
+          <a:prstGeom prst="rect">
+            <a:avLst/>
+          </a:prstGeom>
+          <a:noFill/>
+          <a:ln>
+            <a:noFill/>
+          </a:ln>
+        </p:spPr>
+        <p:txBody>
+          <a:bodyPr wrap="square" lIns="36576" tIns="27432" rIns="36576" bIns="27432" anchor="t">
+            <a:noAutofit/>
+          </a:bodyPr>
+          <a:lstStyle/>
+          <a:p>
+            <a:pPr algn="l">
+              <a:lnSpc>
+                <a:spcPct val="100000"/>
+              </a:lnSpc>
+            </a:pPr>
+            <a:r>
+              <a:rPr lang="en-US" sz="1575" dirty="0" b="1">
+                <a:solidFill>
+                  <a:srgbClr val="16171D"/>
+                </a:solidFill>
+                <a:latin typeface="Segoe UI"/>
+                <a:cs typeface="Segoe UI"/>
+              </a:rPr>
+              <a:t xml:space="preserve">3.</a:t>
+            </a:r>
+            <a:r>
+              <a:rPr lang="en-US" sz="1575" dirty="0">
+                <a:solidFill>
+                  <a:srgbClr val="16171D"/>
+                </a:solidFill>
+                <a:latin typeface="Segoe UI"/>
+                <a:cs typeface="Segoe UI"/>
+              </a:rPr>
+              <a:t xml:space="preserve"> Check: 3/4 · (−4/3) = −1.</a:t>
+            </a:r>
+            <a:endParaRPr lang="en-US" sz="1575" dirty="0"/>
+          </a:p>
+        </p:txBody>
+      </p:sp>
+      <p:sp>
+        <p:nvSpPr>
+          <p:cNvPr id="14" name="Shape 14"/>
+          <p:cNvSpPr txBox="1"/>
+          <p:nvPr/>
+        </p:nvSpPr>
+        <p:spPr>
+          <a:xfrm>
+            <a:off x="4355998" y="1618488"/>
+            <a:ext cx="3479698" cy="2866644"/>
           </a:xfrm>
           <a:prstGeom prst="roundRect">
             <a:avLst>
@@ -19905,14 +20067,14 @@
       </p:sp>
       <p:sp>
         <p:nvSpPr>
-          <p:cNvPr id="7" name="Shape 7"/>
-          <p:cNvSpPr txBox="1"/>
-          <p:nvPr/>
-        </p:nvSpPr>
-        <p:spPr>
-          <a:xfrm>
-            <a:off x="895350" y="3232404"/>
-            <a:ext cx="10400995" cy="352044"/>
+          <p:cNvPr id="10" name="Shape 10"/>
+          <p:cNvSpPr txBox="1"/>
+          <p:nvPr/>
+        </p:nvSpPr>
+        <p:spPr>
+          <a:xfrm>
+            <a:off x="4565548" y="1789938"/>
+            <a:ext cx="3060598" cy="649224"/>
           </a:xfrm>
           <a:prstGeom prst="rect">
             <a:avLst/>
@@ -19949,13 +20111,13 @@
       </p:sp>
       <p:sp>
         <p:nvSpPr>
-          <p:cNvPr id="8" name="Shape 8"/>
-          <p:cNvSpPr txBox="1"/>
-          <p:nvPr/>
-        </p:nvSpPr>
-        <p:spPr>
-          <a:xfrm>
-            <a:off x="895350" y="3679698"/>
+          <p:cNvPr id="11" name="Shape 11"/>
+          <p:cNvSpPr txBox="1"/>
+          <p:nvPr/>
+        </p:nvSpPr>
+        <p:spPr>
+          <a:xfrm>
+            <a:off x="4565548" y="2534412"/>
             <a:ext cx="2742194" cy="518922"/>
           </a:xfrm>
           <a:prstGeom prst="roundRect">
@@ -20023,8 +20185,116 @@
         </p:nvSpPr>
         <p:spPr>
           <a:xfrm>
-            <a:off x="685800" y="4503420"/>
-            <a:ext cx="10820095" cy="1309116"/>
+            <a:off x="4565548" y="3148584"/>
+            <a:ext cx="3060598" cy="534924"/>
+          </a:xfrm>
+          <a:prstGeom prst="rect">
+            <a:avLst/>
+          </a:prstGeom>
+          <a:noFill/>
+          <a:ln>
+            <a:noFill/>
+          </a:ln>
+        </p:spPr>
+        <p:txBody>
+          <a:bodyPr wrap="square" lIns="36576" tIns="27432" rIns="36576" bIns="27432" anchor="t">
+            <a:noAutofit/>
+          </a:bodyPr>
+          <a:lstStyle/>
+          <a:p>
+            <a:pPr algn="l">
+              <a:lnSpc>
+                <a:spcPct val="100000"/>
+              </a:lnSpc>
+            </a:pPr>
+            <a:r>
+              <a:rPr lang="en-US" sz="1575" dirty="0" b="1">
+                <a:solidFill>
+                  <a:srgbClr val="16171D"/>
+                </a:solidFill>
+                <a:latin typeface="Segoe UI"/>
+                <a:cs typeface="Segoe UI"/>
+              </a:rPr>
+              <a:t xml:space="preserve">1.</a:t>
+            </a:r>
+            <a:r>
+              <a:rPr lang="en-US" sz="1575" dirty="0">
+                <a:solidFill>
+                  <a:srgbClr val="16171D"/>
+                </a:solidFill>
+                <a:latin typeface="Segoe UI"/>
+                <a:cs typeface="Segoe UI"/>
+              </a:rPr>
+              <a:t xml:space="preserve"> On a vertical line, x never changes.</a:t>
+            </a:r>
+            <a:endParaRPr lang="en-US" sz="1575" dirty="0"/>
+          </a:p>
+        </p:txBody>
+      </p:sp>
+      <p:sp>
+        <p:nvSpPr>
+          <p:cNvPr id="13" name="Shape 13"/>
+          <p:cNvSpPr txBox="1"/>
+          <p:nvPr/>
+        </p:nvSpPr>
+        <p:spPr>
+          <a:xfrm>
+            <a:off x="4565548" y="3778758"/>
+            <a:ext cx="3060598" cy="534924"/>
+          </a:xfrm>
+          <a:prstGeom prst="rect">
+            <a:avLst/>
+          </a:prstGeom>
+          <a:noFill/>
+          <a:ln>
+            <a:noFill/>
+          </a:ln>
+        </p:spPr>
+        <p:txBody>
+          <a:bodyPr wrap="square" lIns="36576" tIns="27432" rIns="36576" bIns="27432" anchor="t">
+            <a:noAutofit/>
+          </a:bodyPr>
+          <a:lstStyle/>
+          <a:p>
+            <a:pPr algn="l">
+              <a:lnSpc>
+                <a:spcPct val="100000"/>
+              </a:lnSpc>
+            </a:pPr>
+            <a:r>
+              <a:rPr lang="en-US" sz="1575" dirty="0" b="1">
+                <a:solidFill>
+                  <a:srgbClr val="16171D"/>
+                </a:solidFill>
+                <a:latin typeface="Segoe UI"/>
+                <a:cs typeface="Segoe UI"/>
+              </a:rPr>
+              <a:t xml:space="preserve">2.</a:t>
+            </a:r>
+            <a:r>
+              <a:rPr lang="en-US" sz="1575" dirty="0">
+                <a:solidFill>
+                  <a:srgbClr val="16171D"/>
+                </a:solidFill>
+                <a:latin typeface="Segoe UI"/>
+                <a:cs typeface="Segoe UI"/>
+              </a:rPr>
+              <a:t xml:space="preserve"> The point has x = 5, so the line is x = 5.</a:t>
+            </a:r>
+            <a:endParaRPr lang="en-US" sz="1575" dirty="0"/>
+          </a:p>
+        </p:txBody>
+      </p:sp>
+      <p:sp>
+        <p:nvSpPr>
+          <p:cNvPr id="20" name="Shape 20"/>
+          <p:cNvSpPr txBox="1"/>
+          <p:nvPr/>
+        </p:nvSpPr>
+        <p:spPr>
+          <a:xfrm>
+            <a:off x="8026197" y="1618488"/>
+            <a:ext cx="3479698" cy="3611118"/>
           </a:xfrm>
           <a:prstGeom prst="roundRect">
             <a:avLst>
@@ -20057,14 +20327,14 @@
       </p:sp>
       <p:sp>
         <p:nvSpPr>
-          <p:cNvPr id="10" name="Shape 10"/>
-          <p:cNvSpPr txBox="1"/>
-          <p:nvPr/>
-        </p:nvSpPr>
-        <p:spPr>
-          <a:xfrm>
-            <a:off x="895350" y="4674870"/>
-            <a:ext cx="10400995" cy="352044"/>
+          <p:cNvPr id="15" name="Shape 15"/>
+          <p:cNvSpPr txBox="1"/>
+          <p:nvPr/>
+        </p:nvSpPr>
+        <p:spPr>
+          <a:xfrm>
+            <a:off x="8235747" y="1789938"/>
+            <a:ext cx="3060598" cy="649224"/>
           </a:xfrm>
           <a:prstGeom prst="rect">
             <a:avLst/>
@@ -20141,14 +20411,14 @@
       </p:sp>
       <p:sp>
         <p:nvSpPr>
-          <p:cNvPr id="11" name="Shape 11"/>
-          <p:cNvSpPr txBox="1"/>
-          <p:nvPr/>
-        </p:nvSpPr>
-        <p:spPr>
-          <a:xfrm>
-            <a:off x="895350" y="5122164"/>
-            <a:ext cx="3405500" cy="518922"/>
+          <p:cNvPr id="16" name="Shape 16"/>
+          <p:cNvSpPr txBox="1"/>
+          <p:nvPr/>
+        </p:nvSpPr>
+        <p:spPr>
+          <a:xfrm>
+            <a:off x="8235747" y="2534412"/>
+            <a:ext cx="3060598" cy="873252"/>
           </a:xfrm>
           <a:prstGeom prst="roundRect">
             <a:avLst>
@@ -20229,7 +20499,169 @@
       </p:sp>
       <p:sp>
         <p:nvSpPr>
-          <p:cNvPr id="13" name="Slide Number 13"/>
+          <p:cNvPr id="17" name="Shape 17"/>
+          <p:cNvSpPr txBox="1"/>
+          <p:nvPr/>
+        </p:nvSpPr>
+        <p:spPr>
+          <a:xfrm>
+            <a:off x="8235747" y="3502914"/>
+            <a:ext cx="3060598" cy="294894"/>
+          </a:xfrm>
+          <a:prstGeom prst="rect">
+            <a:avLst/>
+          </a:prstGeom>
+          <a:noFill/>
+          <a:ln>
+            <a:noFill/>
+          </a:ln>
+        </p:spPr>
+        <p:txBody>
+          <a:bodyPr wrap="square" lIns="36576" tIns="27432" rIns="36576" bIns="27432" anchor="t">
+            <a:noAutofit/>
+          </a:bodyPr>
+          <a:lstStyle/>
+          <a:p>
+            <a:pPr algn="l">
+              <a:lnSpc>
+                <a:spcPct val="100000"/>
+              </a:lnSpc>
+            </a:pPr>
+            <a:r>
+              <a:rPr lang="en-US" sz="1575" dirty="0" b="1">
+                <a:solidFill>
+                  <a:srgbClr val="16171D"/>
+                </a:solidFill>
+                <a:latin typeface="Segoe UI"/>
+                <a:cs typeface="Segoe UI"/>
+              </a:rPr>
+              <a:t xml:space="preserve">1.</a:t>
+            </a:r>
+            <a:r>
+              <a:rPr lang="en-US" sz="1575" dirty="0">
+                <a:solidFill>
+                  <a:srgbClr val="16171D"/>
+                </a:solidFill>
+                <a:latin typeface="Segoe UI"/>
+                <a:cs typeface="Segoe UI"/>
+              </a:rPr>
+              <a:t xml:space="preserve"> The slope of y = −x is −1.</a:t>
+            </a:r>
+            <a:endParaRPr lang="en-US" sz="1575" dirty="0"/>
+          </a:p>
+        </p:txBody>
+      </p:sp>
+      <p:sp>
+        <p:nvSpPr>
+          <p:cNvPr id="18" name="Shape 18"/>
+          <p:cNvSpPr txBox="1"/>
+          <p:nvPr/>
+        </p:nvSpPr>
+        <p:spPr>
+          <a:xfrm>
+            <a:off x="8235747" y="3893058"/>
+            <a:ext cx="3060598" cy="534924"/>
+          </a:xfrm>
+          <a:prstGeom prst="rect">
+            <a:avLst/>
+          </a:prstGeom>
+          <a:noFill/>
+          <a:ln>
+            <a:noFill/>
+          </a:ln>
+        </p:spPr>
+        <p:txBody>
+          <a:bodyPr wrap="square" lIns="36576" tIns="27432" rIns="36576" bIns="27432" anchor="t">
+            <a:noAutofit/>
+          </a:bodyPr>
+          <a:lstStyle/>
+          <a:p>
+            <a:pPr algn="l">
+              <a:lnSpc>
+                <a:spcPct val="100000"/>
+              </a:lnSpc>
+            </a:pPr>
+            <a:r>
+              <a:rPr lang="en-US" sz="1575" dirty="0" b="1">
+                <a:solidFill>
+                  <a:srgbClr val="16171D"/>
+                </a:solidFill>
+                <a:latin typeface="Segoe UI"/>
+                <a:cs typeface="Segoe UI"/>
+              </a:rPr>
+              <a:t xml:space="preserve">2.</a:t>
+            </a:r>
+            <a:r>
+              <a:rPr lang="en-US" sz="1575" dirty="0">
+                <a:solidFill>
+                  <a:srgbClr val="16171D"/>
+                </a:solidFill>
+                <a:latin typeface="Segoe UI"/>
+                <a:cs typeface="Segoe UI"/>
+              </a:rPr>
+              <a:t xml:space="preserve"> Flip and change the sign: −1 becomes 1.</a:t>
+            </a:r>
+            <a:endParaRPr lang="en-US" sz="1575" dirty="0"/>
+          </a:p>
+        </p:txBody>
+      </p:sp>
+      <p:sp>
+        <p:nvSpPr>
+          <p:cNvPr id="19" name="Shape 19"/>
+          <p:cNvSpPr txBox="1"/>
+          <p:nvPr/>
+        </p:nvSpPr>
+        <p:spPr>
+          <a:xfrm>
+            <a:off x="8235747" y="4523232"/>
+            <a:ext cx="3060598" cy="534924"/>
+          </a:xfrm>
+          <a:prstGeom prst="rect">
+            <a:avLst/>
+          </a:prstGeom>
+          <a:noFill/>
+          <a:ln>
+            <a:noFill/>
+          </a:ln>
+        </p:spPr>
+        <p:txBody>
+          <a:bodyPr wrap="square" lIns="36576" tIns="27432" rIns="36576" bIns="27432" anchor="t">
+            <a:noAutofit/>
+          </a:bodyPr>
+          <a:lstStyle/>
+          <a:p>
+            <a:pPr algn="l">
+              <a:lnSpc>
+                <a:spcPct val="100000"/>
+              </a:lnSpc>
+            </a:pPr>
+            <a:r>
+              <a:rPr lang="en-US" sz="1575" dirty="0" b="1">
+                <a:solidFill>
+                  <a:srgbClr val="16171D"/>
+                </a:solidFill>
+                <a:latin typeface="Segoe UI"/>
+                <a:cs typeface="Segoe UI"/>
+              </a:rPr>
+              <a:t xml:space="preserve">3.</a:t>
+            </a:r>
+            <a:r>
+              <a:rPr lang="en-US" sz="1575" dirty="0">
+                <a:solidFill>
+                  <a:srgbClr val="16171D"/>
+                </a:solidFill>
+                <a:latin typeface="Segoe UI"/>
+                <a:cs typeface="Segoe UI"/>
+              </a:rPr>
+              <a:t xml:space="preserve"> (0, 3) is on the y-axis, so b = 3: y = x + 3.</a:t>
+            </a:r>
+            <a:endParaRPr lang="en-US" sz="1575" dirty="0"/>
+          </a:p>
+        </p:txBody>
+      </p:sp>
+      <p:sp>
+        <p:nvSpPr>
+          <p:cNvPr id="21" name="Slide Number 21"/>
           <p:cNvSpPr txBox="1"/>
           <p:nvPr/>
         </p:nvSpPr>
@@ -20389,7 +20821,7 @@
                             </p:stCondLst>
                             <p:childTnLst>
                               <p:par>
-                                <p:cTn id="14" presetID="53" presetClass="entr" presetSubtype="16" fill="hold" nodeType="clickEffect">
+                                <p:cTn id="14" presetID="42" presetClass="entr" presetSubtype="0" fill="hold" nodeType="clickEffect">
                                   <p:stCondLst>
                                     <p:cond delay="0"/>
                                   </p:stCondLst>
@@ -20397,6 +20829,204 @@
                                     <p:set>
                                       <p:cBhvr>
                                         <p:cTn id="10" dur="1" fill="hold">
+                                          <p:stCondLst>
+                                            <p:cond delay="0"/>
+                                          </p:stCondLst>
+                                        </p:cTn>
+                                        <p:tgtEl>
+                                          <p:spTgt spid="6"/>
+                                        </p:tgtEl>
+                                        <p:attrNameLst>
+                                          <p:attrName>style.visibility</p:attrName>
+                                        </p:attrNameLst>
+                                      </p:cBhvr>
+                                      <p:to>
+                                        <p:strVal val="visible"/>
+                                      </p:to>
+                                    </p:set>
+                                    <p:animEffect transition="in" filter="fade">
+                                      <p:cBhvr>
+                                        <p:cTn id="11" dur="500"/>
+                                        <p:tgtEl>
+                                          <p:spTgt spid="6"/>
+                                        </p:tgtEl>
+                                      </p:cBhvr>
+                                    </p:animEffect>
+                                    <p:anim calcmode="lin" valueType="num">
+                                      <p:cBhvr>
+                                        <p:cTn id="12" dur="500" fill="hold"/>
+                                        <p:tgtEl>
+                                          <p:spTgt spid="6"/>
+                                        </p:tgtEl>
+                                        <p:attrNameLst>
+                                          <p:attrName>ppt_x</p:attrName>
+                                        </p:attrNameLst>
+                                      </p:cBhvr>
+                                      <p:tavLst>
+                                        <p:tav tm="0">
+                                          <p:val>
+                                            <p:strVal val="#ppt_x"/>
+                                          </p:val>
+                                        </p:tav>
+                                        <p:tav tm="100000">
+                                          <p:val>
+                                            <p:strVal val="#ppt_x"/>
+                                          </p:val>
+                                        </p:tav>
+                                      </p:tavLst>
+                                    </p:anim>
+                                    <p:anim calcmode="lin" valueType="num">
+                                      <p:cBhvr>
+                                        <p:cTn id="13" dur="500" fill="hold"/>
+                                        <p:tgtEl>
+                                          <p:spTgt spid="6"/>
+                                        </p:tgtEl>
+                                        <p:attrNameLst>
+                                          <p:attrName>ppt_y</p:attrName>
+                                        </p:attrNameLst>
+                                      </p:cBhvr>
+                                      <p:tavLst>
+                                        <p:tav tm="0">
+                                          <p:val>
+                                            <p:strVal val="#ppt_y+.1"/>
+                                          </p:val>
+                                        </p:tav>
+                                        <p:tav tm="100000">
+                                          <p:val>
+                                            <p:strVal val="#ppt_y"/>
+                                          </p:val>
+                                        </p:tav>
+                                      </p:tavLst>
+                                    </p:anim>
+                                  </p:childTnLst>
+                                </p:cTn>
+                              </p:par>
+                            </p:childTnLst>
+                          </p:cTn>
+                        </p:par>
+                      </p:childTnLst>
+                    </p:cTn>
+                  </p:par>
+                  <p:par>
+                    <p:cTn id="22" fill="hold">
+                      <p:stCondLst>
+                        <p:cond delay="indefinite"/>
+                      </p:stCondLst>
+                      <p:childTnLst>
+                        <p:par>
+                          <p:cTn id="23" fill="hold">
+                            <p:stCondLst>
+                              <p:cond delay="0"/>
+                            </p:stCondLst>
+                            <p:childTnLst>
+                              <p:par>
+                                <p:cTn id="21" presetID="42" presetClass="entr" presetSubtype="0" fill="hold" nodeType="clickEffect">
+                                  <p:stCondLst>
+                                    <p:cond delay="0"/>
+                                  </p:stCondLst>
+                                  <p:childTnLst>
+                                    <p:set>
+                                      <p:cBhvr>
+                                        <p:cTn id="17" dur="1" fill="hold">
+                                          <p:stCondLst>
+                                            <p:cond delay="0"/>
+                                          </p:stCondLst>
+                                        </p:cTn>
+                                        <p:tgtEl>
+                                          <p:spTgt spid="7"/>
+                                        </p:tgtEl>
+                                        <p:attrNameLst>
+                                          <p:attrName>style.visibility</p:attrName>
+                                        </p:attrNameLst>
+                                      </p:cBhvr>
+                                      <p:to>
+                                        <p:strVal val="visible"/>
+                                      </p:to>
+                                    </p:set>
+                                    <p:animEffect transition="in" filter="fade">
+                                      <p:cBhvr>
+                                        <p:cTn id="18" dur="500"/>
+                                        <p:tgtEl>
+                                          <p:spTgt spid="7"/>
+                                        </p:tgtEl>
+                                      </p:cBhvr>
+                                    </p:animEffect>
+                                    <p:anim calcmode="lin" valueType="num">
+                                      <p:cBhvr>
+                                        <p:cTn id="19" dur="500" fill="hold"/>
+                                        <p:tgtEl>
+                                          <p:spTgt spid="7"/>
+                                        </p:tgtEl>
+                                        <p:attrNameLst>
+                                          <p:attrName>ppt_x</p:attrName>
+                                        </p:attrNameLst>
+                                      </p:cBhvr>
+                                      <p:tavLst>
+                                        <p:tav tm="0">
+                                          <p:val>
+                                            <p:strVal val="#ppt_x"/>
+                                          </p:val>
+                                        </p:tav>
+                                        <p:tav tm="100000">
+                                          <p:val>
+                                            <p:strVal val="#ppt_x"/>
+                                          </p:val>
+                                        </p:tav>
+                                      </p:tavLst>
+                                    </p:anim>
+                                    <p:anim calcmode="lin" valueType="num">
+                                      <p:cBhvr>
+                                        <p:cTn id="20" dur="500" fill="hold"/>
+                                        <p:tgtEl>
+                                          <p:spTgt spid="7"/>
+                                        </p:tgtEl>
+                                        <p:attrNameLst>
+                                          <p:attrName>ppt_y</p:attrName>
+                                        </p:attrNameLst>
+                                      </p:cBhvr>
+                                      <p:tavLst>
+                                        <p:tav tm="0">
+                                          <p:val>
+                                            <p:strVal val="#ppt_y+.1"/>
+                                          </p:val>
+                                        </p:tav>
+                                        <p:tav tm="100000">
+                                          <p:val>
+                                            <p:strVal val="#ppt_y"/>
+                                          </p:val>
+                                        </p:tav>
+                                      </p:tavLst>
+                                    </p:anim>
+                                  </p:childTnLst>
+                                </p:cTn>
+                              </p:par>
+                            </p:childTnLst>
+                          </p:cTn>
+                        </p:par>
+                      </p:childTnLst>
+                    </p:cTn>
+                  </p:par>
+                  <p:par>
+                    <p:cTn id="29" fill="hold">
+                      <p:stCondLst>
+                        <p:cond delay="indefinite"/>
+                      </p:stCondLst>
+                      <p:childTnLst>
+                        <p:par>
+                          <p:cTn id="30" fill="hold">
+                            <p:stCondLst>
+                              <p:cond delay="0"/>
+                            </p:stCondLst>
+                            <p:childTnLst>
+                              <p:par>
+                                <p:cTn id="28" presetID="42" presetClass="entr" presetSubtype="0" fill="hold" nodeType="clickEffect">
+                                  <p:stCondLst>
+                                    <p:cond delay="0"/>
+                                  </p:stCondLst>
+                                  <p:childTnLst>
+                                    <p:set>
+                                      <p:cBhvr>
+                                        <p:cTn id="24" dur="1" fill="hold">
                                           <p:stCondLst>
                                             <p:cond delay="0"/>
                                           </p:stCondLst>
@@ -20414,7 +21044,7 @@
                                     </p:set>
                                     <p:animEffect transition="in" filter="fade">
                                       <p:cBhvr>
-                                        <p:cTn id="11" dur="500"/>
+                                        <p:cTn id="25" dur="500"/>
                                         <p:tgtEl>
                                           <p:spTgt spid="8"/>
                                         </p:tgtEl>
@@ -20422,9 +21052,108 @@
                                     </p:animEffect>
                                     <p:anim calcmode="lin" valueType="num">
                                       <p:cBhvr>
-                                        <p:cTn id="12" dur="500" fill="hold"/>
+                                        <p:cTn id="26" dur="500" fill="hold"/>
                                         <p:tgtEl>
                                           <p:spTgt spid="8"/>
+                                        </p:tgtEl>
+                                        <p:attrNameLst>
+                                          <p:attrName>ppt_x</p:attrName>
+                                        </p:attrNameLst>
+                                      </p:cBhvr>
+                                      <p:tavLst>
+                                        <p:tav tm="0">
+                                          <p:val>
+                                            <p:strVal val="#ppt_x"/>
+                                          </p:val>
+                                        </p:tav>
+                                        <p:tav tm="100000">
+                                          <p:val>
+                                            <p:strVal val="#ppt_x"/>
+                                          </p:val>
+                                        </p:tav>
+                                      </p:tavLst>
+                                    </p:anim>
+                                    <p:anim calcmode="lin" valueType="num">
+                                      <p:cBhvr>
+                                        <p:cTn id="27" dur="500" fill="hold"/>
+                                        <p:tgtEl>
+                                          <p:spTgt spid="8"/>
+                                        </p:tgtEl>
+                                        <p:attrNameLst>
+                                          <p:attrName>ppt_y</p:attrName>
+                                        </p:attrNameLst>
+                                      </p:cBhvr>
+                                      <p:tavLst>
+                                        <p:tav tm="0">
+                                          <p:val>
+                                            <p:strVal val="#ppt_y+.1"/>
+                                          </p:val>
+                                        </p:tav>
+                                        <p:tav tm="100000">
+                                          <p:val>
+                                            <p:strVal val="#ppt_y"/>
+                                          </p:val>
+                                        </p:tav>
+                                      </p:tavLst>
+                                    </p:anim>
+                                  </p:childTnLst>
+                                </p:cTn>
+                              </p:par>
+                            </p:childTnLst>
+                          </p:cTn>
+                        </p:par>
+                      </p:childTnLst>
+                    </p:cTn>
+                  </p:par>
+                  <p:par>
+                    <p:cTn id="36" fill="hold">
+                      <p:stCondLst>
+                        <p:cond delay="indefinite"/>
+                      </p:stCondLst>
+                      <p:childTnLst>
+                        <p:par>
+                          <p:cTn id="37" fill="hold">
+                            <p:stCondLst>
+                              <p:cond delay="0"/>
+                            </p:stCondLst>
+                            <p:childTnLst>
+                              <p:par>
+                                <p:cTn id="35" presetID="53" presetClass="entr" presetSubtype="16" fill="hold" nodeType="clickEffect">
+                                  <p:stCondLst>
+                                    <p:cond delay="0"/>
+                                  </p:stCondLst>
+                                  <p:childTnLst>
+                                    <p:set>
+                                      <p:cBhvr>
+                                        <p:cTn id="31" dur="1" fill="hold">
+                                          <p:stCondLst>
+                                            <p:cond delay="0"/>
+                                          </p:stCondLst>
+                                        </p:cTn>
+                                        <p:tgtEl>
+                                          <p:spTgt spid="11"/>
+                                        </p:tgtEl>
+                                        <p:attrNameLst>
+                                          <p:attrName>style.visibility</p:attrName>
+                                        </p:attrNameLst>
+                                      </p:cBhvr>
+                                      <p:to>
+                                        <p:strVal val="visible"/>
+                                      </p:to>
+                                    </p:set>
+                                    <p:animEffect transition="in" filter="fade">
+                                      <p:cBhvr>
+                                        <p:cTn id="32" dur="500"/>
+                                        <p:tgtEl>
+                                          <p:spTgt spid="11"/>
+                                        </p:tgtEl>
+                                      </p:cBhvr>
+                                    </p:animEffect>
+                                    <p:anim calcmode="lin" valueType="num">
+                                      <p:cBhvr>
+                                        <p:cTn id="33" dur="500" fill="hold"/>
+                                        <p:tgtEl>
+                                          <p:spTgt spid="11"/>
                                         </p:tgtEl>
                                         <p:attrNameLst>
                                           <p:attrName>ppt_w</p:attrName>
@@ -20445,9 +21174,9 @@
                                     </p:anim>
                                     <p:anim calcmode="lin" valueType="num">
                                       <p:cBhvr>
-                                        <p:cTn id="13" dur="500" fill="hold"/>
+                                        <p:cTn id="34" dur="500" fill="hold"/>
                                         <p:tgtEl>
-                                          <p:spTgt spid="8"/>
+                                          <p:spTgt spid="11"/>
                                         </p:tgtEl>
                                         <p:attrNameLst>
                                           <p:attrName>ppt_h</p:attrName>
@@ -20476,32 +21205,32 @@
                     </p:cTn>
                   </p:par>
                   <p:par>
-                    <p:cTn id="22" fill="hold">
+                    <p:cTn id="43" fill="hold">
                       <p:stCondLst>
                         <p:cond delay="indefinite"/>
                       </p:stCondLst>
                       <p:childTnLst>
                         <p:par>
-                          <p:cTn id="23" fill="hold">
+                          <p:cTn id="44" fill="hold">
                             <p:stCondLst>
                               <p:cond delay="0"/>
                             </p:stCondLst>
                             <p:childTnLst>
                               <p:par>
-                                <p:cTn id="21" presetID="53" presetClass="entr" presetSubtype="16" fill="hold" nodeType="clickEffect">
+                                <p:cTn id="42" presetID="42" presetClass="entr" presetSubtype="0" fill="hold" nodeType="clickEffect">
                                   <p:stCondLst>
                                     <p:cond delay="0"/>
                                   </p:stCondLst>
                                   <p:childTnLst>
                                     <p:set>
                                       <p:cBhvr>
-                                        <p:cTn id="17" dur="1" fill="hold">
+                                        <p:cTn id="38" dur="1" fill="hold">
                                           <p:stCondLst>
                                             <p:cond delay="0"/>
                                           </p:stCondLst>
                                         </p:cTn>
                                         <p:tgtEl>
-                                          <p:spTgt spid="11"/>
+                                          <p:spTgt spid="12"/>
                                         </p:tgtEl>
                                         <p:attrNameLst>
                                           <p:attrName>style.visibility</p:attrName>
@@ -20513,17 +21242,215 @@
                                     </p:set>
                                     <p:animEffect transition="in" filter="fade">
                                       <p:cBhvr>
-                                        <p:cTn id="18" dur="500"/>
+                                        <p:cTn id="39" dur="500"/>
                                         <p:tgtEl>
-                                          <p:spTgt spid="11"/>
+                                          <p:spTgt spid="12"/>
                                         </p:tgtEl>
                                       </p:cBhvr>
                                     </p:animEffect>
                                     <p:anim calcmode="lin" valueType="num">
                                       <p:cBhvr>
-                                        <p:cTn id="19" dur="500" fill="hold"/>
+                                        <p:cTn id="40" dur="500" fill="hold"/>
                                         <p:tgtEl>
-                                          <p:spTgt spid="11"/>
+                                          <p:spTgt spid="12"/>
+                                        </p:tgtEl>
+                                        <p:attrNameLst>
+                                          <p:attrName>ppt_x</p:attrName>
+                                        </p:attrNameLst>
+                                      </p:cBhvr>
+                                      <p:tavLst>
+                                        <p:tav tm="0">
+                                          <p:val>
+                                            <p:strVal val="#ppt_x"/>
+                                          </p:val>
+                                        </p:tav>
+                                        <p:tav tm="100000">
+                                          <p:val>
+                                            <p:strVal val="#ppt_x"/>
+                                          </p:val>
+                                        </p:tav>
+                                      </p:tavLst>
+                                    </p:anim>
+                                    <p:anim calcmode="lin" valueType="num">
+                                      <p:cBhvr>
+                                        <p:cTn id="41" dur="500" fill="hold"/>
+                                        <p:tgtEl>
+                                          <p:spTgt spid="12"/>
+                                        </p:tgtEl>
+                                        <p:attrNameLst>
+                                          <p:attrName>ppt_y</p:attrName>
+                                        </p:attrNameLst>
+                                      </p:cBhvr>
+                                      <p:tavLst>
+                                        <p:tav tm="0">
+                                          <p:val>
+                                            <p:strVal val="#ppt_y+.1"/>
+                                          </p:val>
+                                        </p:tav>
+                                        <p:tav tm="100000">
+                                          <p:val>
+                                            <p:strVal val="#ppt_y"/>
+                                          </p:val>
+                                        </p:tav>
+                                      </p:tavLst>
+                                    </p:anim>
+                                  </p:childTnLst>
+                                </p:cTn>
+                              </p:par>
+                            </p:childTnLst>
+                          </p:cTn>
+                        </p:par>
+                      </p:childTnLst>
+                    </p:cTn>
+                  </p:par>
+                  <p:par>
+                    <p:cTn id="50" fill="hold">
+                      <p:stCondLst>
+                        <p:cond delay="indefinite"/>
+                      </p:stCondLst>
+                      <p:childTnLst>
+                        <p:par>
+                          <p:cTn id="51" fill="hold">
+                            <p:stCondLst>
+                              <p:cond delay="0"/>
+                            </p:stCondLst>
+                            <p:childTnLst>
+                              <p:par>
+                                <p:cTn id="49" presetID="42" presetClass="entr" presetSubtype="0" fill="hold" nodeType="clickEffect">
+                                  <p:stCondLst>
+                                    <p:cond delay="0"/>
+                                  </p:stCondLst>
+                                  <p:childTnLst>
+                                    <p:set>
+                                      <p:cBhvr>
+                                        <p:cTn id="45" dur="1" fill="hold">
+                                          <p:stCondLst>
+                                            <p:cond delay="0"/>
+                                          </p:stCondLst>
+                                        </p:cTn>
+                                        <p:tgtEl>
+                                          <p:spTgt spid="13"/>
+                                        </p:tgtEl>
+                                        <p:attrNameLst>
+                                          <p:attrName>style.visibility</p:attrName>
+                                        </p:attrNameLst>
+                                      </p:cBhvr>
+                                      <p:to>
+                                        <p:strVal val="visible"/>
+                                      </p:to>
+                                    </p:set>
+                                    <p:animEffect transition="in" filter="fade">
+                                      <p:cBhvr>
+                                        <p:cTn id="46" dur="500"/>
+                                        <p:tgtEl>
+                                          <p:spTgt spid="13"/>
+                                        </p:tgtEl>
+                                      </p:cBhvr>
+                                    </p:animEffect>
+                                    <p:anim calcmode="lin" valueType="num">
+                                      <p:cBhvr>
+                                        <p:cTn id="47" dur="500" fill="hold"/>
+                                        <p:tgtEl>
+                                          <p:spTgt spid="13"/>
+                                        </p:tgtEl>
+                                        <p:attrNameLst>
+                                          <p:attrName>ppt_x</p:attrName>
+                                        </p:attrNameLst>
+                                      </p:cBhvr>
+                                      <p:tavLst>
+                                        <p:tav tm="0">
+                                          <p:val>
+                                            <p:strVal val="#ppt_x"/>
+                                          </p:val>
+                                        </p:tav>
+                                        <p:tav tm="100000">
+                                          <p:val>
+                                            <p:strVal val="#ppt_x"/>
+                                          </p:val>
+                                        </p:tav>
+                                      </p:tavLst>
+                                    </p:anim>
+                                    <p:anim calcmode="lin" valueType="num">
+                                      <p:cBhvr>
+                                        <p:cTn id="48" dur="500" fill="hold"/>
+                                        <p:tgtEl>
+                                          <p:spTgt spid="13"/>
+                                        </p:tgtEl>
+                                        <p:attrNameLst>
+                                          <p:attrName>ppt_y</p:attrName>
+                                        </p:attrNameLst>
+                                      </p:cBhvr>
+                                      <p:tavLst>
+                                        <p:tav tm="0">
+                                          <p:val>
+                                            <p:strVal val="#ppt_y+.1"/>
+                                          </p:val>
+                                        </p:tav>
+                                        <p:tav tm="100000">
+                                          <p:val>
+                                            <p:strVal val="#ppt_y"/>
+                                          </p:val>
+                                        </p:tav>
+                                      </p:tavLst>
+                                    </p:anim>
+                                  </p:childTnLst>
+                                </p:cTn>
+                              </p:par>
+                            </p:childTnLst>
+                          </p:cTn>
+                        </p:par>
+                      </p:childTnLst>
+                    </p:cTn>
+                  </p:par>
+                  <p:par>
+                    <p:cTn id="57" fill="hold">
+                      <p:stCondLst>
+                        <p:cond delay="indefinite"/>
+                      </p:stCondLst>
+                      <p:childTnLst>
+                        <p:par>
+                          <p:cTn id="58" fill="hold">
+                            <p:stCondLst>
+                              <p:cond delay="0"/>
+                            </p:stCondLst>
+                            <p:childTnLst>
+                              <p:par>
+                                <p:cTn id="56" presetID="53" presetClass="entr" presetSubtype="16" fill="hold" nodeType="clickEffect">
+                                  <p:stCondLst>
+                                    <p:cond delay="0"/>
+                                  </p:stCondLst>
+                                  <p:childTnLst>
+                                    <p:set>
+                                      <p:cBhvr>
+                                        <p:cTn id="52" dur="1" fill="hold">
+                                          <p:stCondLst>
+                                            <p:cond delay="0"/>
+                                          </p:stCondLst>
+                                        </p:cTn>
+                                        <p:tgtEl>
+                                          <p:spTgt spid="16"/>
+                                        </p:tgtEl>
+                                        <p:attrNameLst>
+                                          <p:attrName>style.visibility</p:attrName>
+                                        </p:attrNameLst>
+                                      </p:cBhvr>
+                                      <p:to>
+                                        <p:strVal val="visible"/>
+                                      </p:to>
+                                    </p:set>
+                                    <p:animEffect transition="in" filter="fade">
+                                      <p:cBhvr>
+                                        <p:cTn id="53" dur="500"/>
+                                        <p:tgtEl>
+                                          <p:spTgt spid="16"/>
+                                        </p:tgtEl>
+                                      </p:cBhvr>
+                                    </p:animEffect>
+                                    <p:anim calcmode="lin" valueType="num">
+                                      <p:cBhvr>
+                                        <p:cTn id="54" dur="500" fill="hold"/>
+                                        <p:tgtEl>
+                                          <p:spTgt spid="16"/>
                                         </p:tgtEl>
                                         <p:attrNameLst>
                                           <p:attrName>ppt_w</p:attrName>
@@ -20544,9 +21471,9 @@
                                     </p:anim>
                                     <p:anim calcmode="lin" valueType="num">
                                       <p:cBhvr>
-                                        <p:cTn id="20" dur="500" fill="hold"/>
+                                        <p:cTn id="55" dur="500" fill="hold"/>
                                         <p:tgtEl>
-                                          <p:spTgt spid="11"/>
+                                          <p:spTgt spid="16"/>
                                         </p:tgtEl>
                                         <p:attrNameLst>
                                           <p:attrName>ppt_h</p:attrName>
@@ -20561,6 +21488,303 @@
                                         <p:tav tm="100000">
                                           <p:val>
                                             <p:strVal val="#ppt_h"/>
+                                          </p:val>
+                                        </p:tav>
+                                      </p:tavLst>
+                                    </p:anim>
+                                  </p:childTnLst>
+                                </p:cTn>
+                              </p:par>
+                            </p:childTnLst>
+                          </p:cTn>
+                        </p:par>
+                      </p:childTnLst>
+                    </p:cTn>
+                  </p:par>
+                  <p:par>
+                    <p:cTn id="64" fill="hold">
+                      <p:stCondLst>
+                        <p:cond delay="indefinite"/>
+                      </p:stCondLst>
+                      <p:childTnLst>
+                        <p:par>
+                          <p:cTn id="65" fill="hold">
+                            <p:stCondLst>
+                              <p:cond delay="0"/>
+                            </p:stCondLst>
+                            <p:childTnLst>
+                              <p:par>
+                                <p:cTn id="63" presetID="42" presetClass="entr" presetSubtype="0" fill="hold" nodeType="clickEffect">
+                                  <p:stCondLst>
+                                    <p:cond delay="0"/>
+                                  </p:stCondLst>
+                                  <p:childTnLst>
+                                    <p:set>
+                                      <p:cBhvr>
+                                        <p:cTn id="59" dur="1" fill="hold">
+                                          <p:stCondLst>
+                                            <p:cond delay="0"/>
+                                          </p:stCondLst>
+                                        </p:cTn>
+                                        <p:tgtEl>
+                                          <p:spTgt spid="17"/>
+                                        </p:tgtEl>
+                                        <p:attrNameLst>
+                                          <p:attrName>style.visibility</p:attrName>
+                                        </p:attrNameLst>
+                                      </p:cBhvr>
+                                      <p:to>
+                                        <p:strVal val="visible"/>
+                                      </p:to>
+                                    </p:set>
+                                    <p:animEffect transition="in" filter="fade">
+                                      <p:cBhvr>
+                                        <p:cTn id="60" dur="500"/>
+                                        <p:tgtEl>
+                                          <p:spTgt spid="17"/>
+                                        </p:tgtEl>
+                                      </p:cBhvr>
+                                    </p:animEffect>
+                                    <p:anim calcmode="lin" valueType="num">
+                                      <p:cBhvr>
+                                        <p:cTn id="61" dur="500" fill="hold"/>
+                                        <p:tgtEl>
+                                          <p:spTgt spid="17"/>
+                                        </p:tgtEl>
+                                        <p:attrNameLst>
+                                          <p:attrName>ppt_x</p:attrName>
+                                        </p:attrNameLst>
+                                      </p:cBhvr>
+                                      <p:tavLst>
+                                        <p:tav tm="0">
+                                          <p:val>
+                                            <p:strVal val="#ppt_x"/>
+                                          </p:val>
+                                        </p:tav>
+                                        <p:tav tm="100000">
+                                          <p:val>
+                                            <p:strVal val="#ppt_x"/>
+                                          </p:val>
+                                        </p:tav>
+                                      </p:tavLst>
+                                    </p:anim>
+                                    <p:anim calcmode="lin" valueType="num">
+                                      <p:cBhvr>
+                                        <p:cTn id="62" dur="500" fill="hold"/>
+                                        <p:tgtEl>
+                                          <p:spTgt spid="17"/>
+                                        </p:tgtEl>
+                                        <p:attrNameLst>
+                                          <p:attrName>ppt_y</p:attrName>
+                                        </p:attrNameLst>
+                                      </p:cBhvr>
+                                      <p:tavLst>
+                                        <p:tav tm="0">
+                                          <p:val>
+                                            <p:strVal val="#ppt_y+.1"/>
+                                          </p:val>
+                                        </p:tav>
+                                        <p:tav tm="100000">
+                                          <p:val>
+                                            <p:strVal val="#ppt_y"/>
+                                          </p:val>
+                                        </p:tav>
+                                      </p:tavLst>
+                                    </p:anim>
+                                  </p:childTnLst>
+                                </p:cTn>
+                              </p:par>
+                            </p:childTnLst>
+                          </p:cTn>
+                        </p:par>
+                      </p:childTnLst>
+                    </p:cTn>
+                  </p:par>
+                  <p:par>
+                    <p:cTn id="71" fill="hold">
+                      <p:stCondLst>
+                        <p:cond delay="indefinite"/>
+                      </p:stCondLst>
+                      <p:childTnLst>
+                        <p:par>
+                          <p:cTn id="72" fill="hold">
+                            <p:stCondLst>
+                              <p:cond delay="0"/>
+                            </p:stCondLst>
+                            <p:childTnLst>
+                              <p:par>
+                                <p:cTn id="70" presetID="42" presetClass="entr" presetSubtype="0" fill="hold" nodeType="clickEffect">
+                                  <p:stCondLst>
+                                    <p:cond delay="0"/>
+                                  </p:stCondLst>
+                                  <p:childTnLst>
+                                    <p:set>
+                                      <p:cBhvr>
+                                        <p:cTn id="66" dur="1" fill="hold">
+                                          <p:stCondLst>
+                                            <p:cond delay="0"/>
+                                          </p:stCondLst>
+                                        </p:cTn>
+                                        <p:tgtEl>
+                                          <p:spTgt spid="18"/>
+                                        </p:tgtEl>
+                                        <p:attrNameLst>
+                                          <p:attrName>style.visibility</p:attrName>
+                                        </p:attrNameLst>
+                                      </p:cBhvr>
+                                      <p:to>
+                                        <p:strVal val="visible"/>
+                                      </p:to>
+                                    </p:set>
+                                    <p:animEffect transition="in" filter="fade">
+                                      <p:cBhvr>
+                                        <p:cTn id="67" dur="500"/>
+                                        <p:tgtEl>
+                                          <p:spTgt spid="18"/>
+                                        </p:tgtEl>
+                                      </p:cBhvr>
+                                    </p:animEffect>
+                                    <p:anim calcmode="lin" valueType="num">
+                                      <p:cBhvr>
+                                        <p:cTn id="68" dur="500" fill="hold"/>
+                                        <p:tgtEl>
+                                          <p:spTgt spid="18"/>
+                                        </p:tgtEl>
+                                        <p:attrNameLst>
+                                          <p:attrName>ppt_x</p:attrName>
+                                        </p:attrNameLst>
+                                      </p:cBhvr>
+                                      <p:tavLst>
+                                        <p:tav tm="0">
+                                          <p:val>
+                                            <p:strVal val="#ppt_x"/>
+                                          </p:val>
+                                        </p:tav>
+                                        <p:tav tm="100000">
+                                          <p:val>
+                                            <p:strVal val="#ppt_x"/>
+                                          </p:val>
+                                        </p:tav>
+                                      </p:tavLst>
+                                    </p:anim>
+                                    <p:anim calcmode="lin" valueType="num">
+                                      <p:cBhvr>
+                                        <p:cTn id="69" dur="500" fill="hold"/>
+                                        <p:tgtEl>
+                                          <p:spTgt spid="18"/>
+                                        </p:tgtEl>
+                                        <p:attrNameLst>
+                                          <p:attrName>ppt_y</p:attrName>
+                                        </p:attrNameLst>
+                                      </p:cBhvr>
+                                      <p:tavLst>
+                                        <p:tav tm="0">
+                                          <p:val>
+                                            <p:strVal val="#ppt_y+.1"/>
+                                          </p:val>
+                                        </p:tav>
+                                        <p:tav tm="100000">
+                                          <p:val>
+                                            <p:strVal val="#ppt_y"/>
+                                          </p:val>
+                                        </p:tav>
+                                      </p:tavLst>
+                                    </p:anim>
+                                  </p:childTnLst>
+                                </p:cTn>
+                              </p:par>
+                            </p:childTnLst>
+                          </p:cTn>
+                        </p:par>
+                      </p:childTnLst>
+                    </p:cTn>
+                  </p:par>
+                  <p:par>
+                    <p:cTn id="78" fill="hold">
+                      <p:stCondLst>
+                        <p:cond delay="indefinite"/>
+                      </p:stCondLst>
+                      <p:childTnLst>
+                        <p:par>
+                          <p:cTn id="79" fill="hold">
+                            <p:stCondLst>
+                              <p:cond delay="0"/>
+                            </p:stCondLst>
+                            <p:childTnLst>
+                              <p:par>
+                                <p:cTn id="77" presetID="42" presetClass="entr" presetSubtype="0" fill="hold" nodeType="clickEffect">
+                                  <p:stCondLst>
+                                    <p:cond delay="0"/>
+                                  </p:stCondLst>
+                                  <p:childTnLst>
+                                    <p:set>
+                                      <p:cBhvr>
+                                        <p:cTn id="73" dur="1" fill="hold">
+                                          <p:stCondLst>
+                                            <p:cond delay="0"/>
+                                          </p:stCondLst>
+                                        </p:cTn>
+                                        <p:tgtEl>
+                                          <p:spTgt spid="19"/>
+                                        </p:tgtEl>
+                                        <p:attrNameLst>
+                                          <p:attrName>style.visibility</p:attrName>
+                                        </p:attrNameLst>
+                                      </p:cBhvr>
+                                      <p:to>
+                                        <p:strVal val="visible"/>
+                                      </p:to>
+                                    </p:set>
+                                    <p:animEffect transition="in" filter="fade">
+                                      <p:cBhvr>
+                                        <p:cTn id="74" dur="500"/>
+                                        <p:tgtEl>
+                                          <p:spTgt spid="19"/>
+                                        </p:tgtEl>
+                                      </p:cBhvr>
+                                    </p:animEffect>
+                                    <p:anim calcmode="lin" valueType="num">
+                                      <p:cBhvr>
+                                        <p:cTn id="75" dur="500" fill="hold"/>
+                                        <p:tgtEl>
+                                          <p:spTgt spid="19"/>
+                                        </p:tgtEl>
+                                        <p:attrNameLst>
+                                          <p:attrName>ppt_x</p:attrName>
+                                        </p:attrNameLst>
+                                      </p:cBhvr>
+                                      <p:tavLst>
+                                        <p:tav tm="0">
+                                          <p:val>
+                                            <p:strVal val="#ppt_x"/>
+                                          </p:val>
+                                        </p:tav>
+                                        <p:tav tm="100000">
+                                          <p:val>
+                                            <p:strVal val="#ppt_x"/>
+                                          </p:val>
+                                        </p:tav>
+                                      </p:tavLst>
+                                    </p:anim>
+                                    <p:anim calcmode="lin" valueType="num">
+                                      <p:cBhvr>
+                                        <p:cTn id="76" dur="500" fill="hold"/>
+                                        <p:tgtEl>
+                                          <p:spTgt spid="19"/>
+                                        </p:tgtEl>
+                                        <p:attrNameLst>
+                                          <p:attrName>ppt_y</p:attrName>
+                                        </p:attrNameLst>
+                                      </p:cBhvr>
+                                      <p:tavLst>
+                                        <p:tav tm="0">
+                                          <p:val>
+                                            <p:strVal val="#ppt_y+.1"/>
+                                          </p:val>
+                                        </p:tav>
+                                        <p:tav tm="100000">
+                                          <p:val>
+                                            <p:strVal val="#ppt_y"/>
                                           </p:val>
                                         </p:tav>
                                       </p:tavLst>

--- a/IEP/t2-lesson3-perpendicular-slopes-IEP-catchup.pptx
+++ b/IEP/t2-lesson3-perpendicular-slopes-IEP-catchup.pptx
@@ -9108,7 +9108,7 @@
         <p:spPr>
           <a:xfrm>
             <a:off x="6210148" y="3816858"/>
-            <a:ext cx="5295748" cy="2065020"/>
+            <a:ext cx="5295748" cy="2979420"/>
           </a:xfrm>
           <a:prstGeom prst="roundRect">
             <a:avLst>
@@ -9148,7 +9148,7 @@
         <p:spPr>
           <a:xfrm>
             <a:off x="6419698" y="3988308"/>
-            <a:ext cx="4876648" cy="534924"/>
+            <a:ext cx="4876648" cy="774954"/>
           </a:xfrm>
           <a:prstGeom prst="rect">
             <a:avLst/>
@@ -9187,7 +9187,77 @@
                 <a:latin typeface="Segoe UI"/>
                 <a:cs typeface="Segoe UI"/>
               </a:rPr>
-              <a:t xml:space="preserve"> What is the product of the slopes of two perpendicular lines (neither vertical)?</a:t>
+              <a:t xml:space="preserve"> Which equation represents a line perpendicular to </a:t>
+            </a:r>
+            <a:r>
+              <a:rPr lang="en-US" sz="1575" dirty="0" i="1">
+                <a:solidFill>
+                  <a:srgbClr val="16171D"/>
+                </a:solidFill>
+                <a:latin typeface="Cambria"/>
+                <a:cs typeface="Cambria"/>
+              </a:rPr>
+              <a:t xml:space="preserve">y</a:t>
+            </a:r>
+            <a:r>
+              <a:rPr lang="en-US" sz="1575" dirty="0">
+                <a:solidFill>
+                  <a:srgbClr val="16171D"/>
+                </a:solidFill>
+                <a:latin typeface="Cambria"/>
+                <a:cs typeface="Cambria"/>
+              </a:rPr>
+              <a:t xml:space="preserve"> = 2</a:t>
+            </a:r>
+            <a:r>
+              <a:rPr lang="en-US" sz="1575" dirty="0" i="1">
+                <a:solidFill>
+                  <a:srgbClr val="16171D"/>
+                </a:solidFill>
+                <a:latin typeface="Cambria"/>
+                <a:cs typeface="Cambria"/>
+              </a:rPr>
+              <a:t xml:space="preserve">x</a:t>
+            </a:r>
+            <a:r>
+              <a:rPr lang="en-US" sz="1575" dirty="0">
+                <a:solidFill>
+                  <a:srgbClr val="16171D"/>
+                </a:solidFill>
+                <a:latin typeface="Cambria"/>
+                <a:cs typeface="Cambria"/>
+              </a:rPr>
+              <a:t xml:space="preserve"> + 3</a:t>
+            </a:r>
+            <a:r>
+              <a:rPr lang="en-US" sz="1575" dirty="0">
+                <a:solidFill>
+                  <a:srgbClr val="16171D"/>
+                </a:solidFill>
+                <a:latin typeface="Segoe UI"/>
+                <a:cs typeface="Segoe UI"/>
+              </a:rPr>
+              <a:t xml:space="preserve"> that passes through the point </a:t>
+            </a:r>
+            <a:r>
+              <a:rPr lang="en-US" sz="1575" dirty="0">
+                <a:solidFill>
+                  <a:srgbClr val="16171D"/>
+                </a:solidFill>
+                <a:latin typeface="Cambria"/>
+                <a:cs typeface="Cambria"/>
+              </a:rPr>
+              <a:t xml:space="preserve">(4, 1)</a:t>
+            </a:r>
+            <a:r>
+              <a:rPr lang="en-US" sz="1575" dirty="0">
+                <a:solidFill>
+                  <a:srgbClr val="16171D"/>
+                </a:solidFill>
+                <a:latin typeface="Segoe UI"/>
+                <a:cs typeface="Segoe UI"/>
+              </a:rPr>
+              <a:t xml:space="preserve">?</a:t>
             </a:r>
             <a:endParaRPr lang="en-US" sz="1575" dirty="0"/>
           </a:p>
@@ -9201,8 +9271,8 @@
         </p:nvSpPr>
         <p:spPr>
           <a:xfrm>
-            <a:off x="6419698" y="4561332"/>
-            <a:ext cx="4876648" cy="294894"/>
+            <a:off x="6419698" y="4801362"/>
+            <a:ext cx="4876648" cy="534924"/>
           </a:xfrm>
           <a:prstGeom prst="rect">
             <a:avLst/>
@@ -9241,7 +9311,7 @@
                 <a:latin typeface="Segoe UI"/>
                 <a:cs typeface="Segoe UI"/>
               </a:rPr>
-              <a:t xml:space="preserve"> </a:t>
+              <a:t xml:space="preserve"> perpendicular: flip and change the sign · </a:t>
             </a:r>
             <a:r>
               <a:rPr lang="en-US" sz="1575" dirty="0" i="1">
@@ -9251,7 +9321,7 @@
                 <a:latin typeface="Cambria"/>
                 <a:cs typeface="Cambria"/>
               </a:rPr>
-              <a:t xml:space="preserve">m</a:t>
+              <a:t xml:space="preserve">y</a:t>
             </a:r>
             <a:r>
               <a:rPr lang="en-US" sz="1575" dirty="0">
@@ -9261,7 +9331,7 @@
                 <a:latin typeface="Cambria"/>
                 <a:cs typeface="Cambria"/>
               </a:rPr>
-              <a:t xml:space="preserve">₁ · </a:t>
+              <a:t xml:space="preserve"> = </a:t>
             </a:r>
             <a:r>
               <a:rPr lang="en-US" sz="1575" dirty="0" i="1">
@@ -9274,14 +9344,34 @@
               <a:t xml:space="preserve">m</a:t>
             </a:r>
             <a:r>
-              <a:rPr lang="en-US" sz="1575" dirty="0">
+              <a:rPr lang="en-US" sz="1575" dirty="0" i="1">
                 <a:solidFill>
                   <a:srgbClr val="16171D"/>
                 </a:solidFill>
                 <a:latin typeface="Cambria"/>
                 <a:cs typeface="Cambria"/>
               </a:rPr>
-              <a:t xml:space="preserve">₂ = −1</a:t>
+              <a:t xml:space="preserve">x</a:t>
+            </a:r>
+            <a:r>
+              <a:rPr lang="en-US" sz="1575" dirty="0">
+                <a:solidFill>
+                  <a:srgbClr val="16171D"/>
+                </a:solidFill>
+                <a:latin typeface="Cambria"/>
+                <a:cs typeface="Cambria"/>
+              </a:rPr>
+              <a:t xml:space="preserve"> + </a:t>
+            </a:r>
+            <a:r>
+              <a:rPr lang="en-US" sz="1575" dirty="0" i="1">
+                <a:solidFill>
+                  <a:srgbClr val="16171D"/>
+                </a:solidFill>
+                <a:latin typeface="Cambria"/>
+                <a:cs typeface="Cambria"/>
+              </a:rPr>
+              <a:t xml:space="preserve">b</a:t>
             </a:r>
             <a:endParaRPr lang="en-US" sz="1575" dirty="0"/>
           </a:p>
@@ -9295,8 +9385,8 @@
         </p:nvSpPr>
         <p:spPr>
           <a:xfrm>
-            <a:off x="6419698" y="4894326"/>
-            <a:ext cx="4826135" cy="816102"/>
+            <a:off x="6419698" y="5374386"/>
+            <a:ext cx="4876648" cy="1250442"/>
           </a:xfrm>
           <a:prstGeom prst="roundRect">
             <a:avLst>
@@ -9332,14 +9422,44 @@
               <a:t xml:space="preserve">ANSWER   </a:t>
             </a:r>
             <a:r>
-              <a:rPr lang="en-US" sz="1425" dirty="0" b="1">
+              <a:rPr lang="en-US" sz="1425" dirty="0" b="1" i="1">
                 <a:solidFill>
                   <a:srgbClr val="16171D"/>
                 </a:solidFill>
                 <a:latin typeface="Cambria"/>
                 <a:cs typeface="Cambria"/>
               </a:rPr>
-              <a:t xml:space="preserve">−1</a:t>
+              <a:t xml:space="preserve">y</a:t>
+            </a:r>
+            <a:r>
+              <a:rPr lang="en-US" sz="1425" dirty="0" b="1">
+                <a:solidFill>
+                  <a:srgbClr val="16171D"/>
+                </a:solidFill>
+                <a:latin typeface="Cambria"/>
+                <a:cs typeface="Cambria"/>
+              </a:rPr>
+              <a:t xml:space="preserve"> = −½</a:t>
+            </a:r>
+            <a:r>
+              <a:rPr lang="en-US" sz="1425" dirty="0" b="1" i="1">
+                <a:solidFill>
+                  <a:srgbClr val="16171D"/>
+                </a:solidFill>
+                <a:latin typeface="Cambria"/>
+                <a:cs typeface="Cambria"/>
+              </a:rPr>
+              <a:t xml:space="preserve">x</a:t>
+            </a:r>
+            <a:r>
+              <a:rPr lang="en-US" sz="1425" dirty="0" b="1">
+                <a:solidFill>
+                  <a:srgbClr val="16171D"/>
+                </a:solidFill>
+                <a:latin typeface="Cambria"/>
+                <a:cs typeface="Cambria"/>
+              </a:rPr>
+              <a:t xml:space="preserve"> + 3</a:t>
             </a:r>
             <a:br>
               <a:rPr lang="en-US" sz="1425" dirty="0">
@@ -9368,27 +9488,17 @@
                 <a:latin typeface="Segoe UI"/>
                 <a:cs typeface="Segoe UI"/>
               </a:rPr>
-              <a:t xml:space="preserve"> Example: slopes </a:t>
-            </a:r>
-            <a:r>
-              <a:rPr lang="en-US" sz="1425" dirty="0">
+              <a:t xml:space="preserve"> Slope of </a:t>
+            </a:r>
+            <a:r>
+              <a:rPr lang="en-US" sz="1425" dirty="0" i="1">
                 <a:solidFill>
                   <a:srgbClr val="16171D"/>
                 </a:solidFill>
                 <a:latin typeface="Cambria"/>
                 <a:cs typeface="Cambria"/>
               </a:rPr>
-              <a:t xml:space="preserve">2</a:t>
-            </a:r>
-            <a:r>
-              <a:rPr lang="en-US" sz="1425" dirty="0">
-                <a:solidFill>
-                  <a:srgbClr val="16171D"/>
-                </a:solidFill>
-                <a:latin typeface="Segoe UI"/>
-                <a:cs typeface="Segoe UI"/>
-              </a:rPr>
-              <a:t xml:space="preserve"> and </a:t>
+              <a:t xml:space="preserve">y</a:t>
             </a:r>
             <a:r>
               <a:rPr lang="en-US" sz="1425" dirty="0">
@@ -9398,6 +9508,46 @@
                 <a:latin typeface="Cambria"/>
                 <a:cs typeface="Cambria"/>
               </a:rPr>
+              <a:t xml:space="preserve"> = 2</a:t>
+            </a:r>
+            <a:r>
+              <a:rPr lang="en-US" sz="1425" dirty="0" i="1">
+                <a:solidFill>
+                  <a:srgbClr val="16171D"/>
+                </a:solidFill>
+                <a:latin typeface="Cambria"/>
+                <a:cs typeface="Cambria"/>
+              </a:rPr>
+              <a:t xml:space="preserve">x</a:t>
+            </a:r>
+            <a:r>
+              <a:rPr lang="en-US" sz="1425" dirty="0">
+                <a:solidFill>
+                  <a:srgbClr val="16171D"/>
+                </a:solidFill>
+                <a:latin typeface="Cambria"/>
+                <a:cs typeface="Cambria"/>
+              </a:rPr>
+              <a:t xml:space="preserve"> + 3</a:t>
+            </a:r>
+            <a:r>
+              <a:rPr lang="en-US" sz="1425" dirty="0">
+                <a:solidFill>
+                  <a:srgbClr val="16171D"/>
+                </a:solidFill>
+                <a:latin typeface="Segoe UI"/>
+                <a:cs typeface="Segoe UI"/>
+              </a:rPr>
+              <a:t xml:space="preserve"> is 2. Flip and change the sign: </a:t>
+            </a:r>
+            <a:r>
+              <a:rPr lang="en-US" sz="1425" dirty="0">
+                <a:solidFill>
+                  <a:srgbClr val="16171D"/>
+                </a:solidFill>
+                <a:latin typeface="Cambria"/>
+                <a:cs typeface="Cambria"/>
+              </a:rPr>
               <a:t xml:space="preserve">−½</a:t>
             </a:r>
             <a:r>
@@ -9408,7 +9558,7 @@
                 <a:latin typeface="Segoe UI"/>
                 <a:cs typeface="Segoe UI"/>
               </a:rPr>
-              <a:t xml:space="preserve"> are perpendicular.</a:t>
+              <a:t xml:space="preserve">.</a:t>
             </a:r>
             <a:br>
               <a:rPr lang="en-US" sz="1425" dirty="0">
@@ -9437,7 +9587,7 @@
                 <a:latin typeface="Segoe UI"/>
                 <a:cs typeface="Segoe UI"/>
               </a:rPr>
-              <a:t xml:space="preserve"> </a:t>
+              <a:t xml:space="preserve"> Put in </a:t>
             </a:r>
             <a:r>
               <a:rPr lang="en-US" sz="1425" dirty="0">
@@ -9447,7 +9597,7 @@
                 <a:latin typeface="Cambria"/>
                 <a:cs typeface="Cambria"/>
               </a:rPr>
-              <a:t xml:space="preserve">2 · (−½) = −1</a:t>
+              <a:t xml:space="preserve">(4, 1)</a:t>
             </a:r>
             <a:r>
               <a:rPr lang="en-US" sz="1425" dirty="0">
@@ -9457,7 +9607,7 @@
                 <a:latin typeface="Segoe UI"/>
                 <a:cs typeface="Segoe UI"/>
               </a:rPr>
-              <a:t xml:space="preserve">. The product is always </a:t>
+              <a:t xml:space="preserve">: </a:t>
             </a:r>
             <a:r>
               <a:rPr lang="en-US" sz="1425" dirty="0">
@@ -9467,7 +9617,146 @@
                 <a:latin typeface="Cambria"/>
                 <a:cs typeface="Cambria"/>
               </a:rPr>
-              <a:t xml:space="preserve">−1</a:t>
+              <a:t xml:space="preserve">1 = −½(4) + </a:t>
+            </a:r>
+            <a:r>
+              <a:rPr lang="en-US" sz="1425" dirty="0" i="1">
+                <a:solidFill>
+                  <a:srgbClr val="16171D"/>
+                </a:solidFill>
+                <a:latin typeface="Cambria"/>
+                <a:cs typeface="Cambria"/>
+              </a:rPr>
+              <a:t xml:space="preserve">b</a:t>
+            </a:r>
+            <a:r>
+              <a:rPr lang="en-US" sz="1425" dirty="0">
+                <a:solidFill>
+                  <a:srgbClr val="16171D"/>
+                </a:solidFill>
+                <a:latin typeface="Cambria"/>
+                <a:cs typeface="Cambria"/>
+              </a:rPr>
+              <a:t xml:space="preserve"> = −2 + </a:t>
+            </a:r>
+            <a:r>
+              <a:rPr lang="en-US" sz="1425" dirty="0" i="1">
+                <a:solidFill>
+                  <a:srgbClr val="16171D"/>
+                </a:solidFill>
+                <a:latin typeface="Cambria"/>
+                <a:cs typeface="Cambria"/>
+              </a:rPr>
+              <a:t xml:space="preserve">b</a:t>
+            </a:r>
+            <a:r>
+              <a:rPr lang="en-US" sz="1425" dirty="0">
+                <a:solidFill>
+                  <a:srgbClr val="16171D"/>
+                </a:solidFill>
+                <a:latin typeface="Segoe UI"/>
+                <a:cs typeface="Segoe UI"/>
+              </a:rPr>
+              <a:t xml:space="preserve">.</a:t>
+            </a:r>
+            <a:br>
+              <a:rPr lang="en-US" sz="1425" dirty="0">
+                <a:solidFill>
+                  <a:srgbClr val="16171D"/>
+                </a:solidFill>
+                <a:latin typeface="Segoe UI"/>
+                <a:cs typeface="Segoe UI"/>
+              </a:rPr>
+            </a:br>
+            <a:r>
+              <a:rPr lang="en-US" sz="1425" dirty="0" b="1">
+                <a:solidFill>
+                  <a:srgbClr val="16171D"/>
+                </a:solidFill>
+                <a:latin typeface="Segoe UI"/>
+                <a:cs typeface="Segoe UI"/>
+              </a:rPr>
+              <a:t xml:space="preserve">3.</a:t>
+            </a:r>
+            <a:r>
+              <a:rPr lang="en-US" sz="1425" dirty="0">
+                <a:solidFill>
+                  <a:srgbClr val="16171D"/>
+                </a:solidFill>
+                <a:latin typeface="Segoe UI"/>
+                <a:cs typeface="Segoe UI"/>
+              </a:rPr>
+              <a:t xml:space="preserve"> </a:t>
+            </a:r>
+            <a:r>
+              <a:rPr lang="en-US" sz="1425" dirty="0" i="1">
+                <a:solidFill>
+                  <a:srgbClr val="16171D"/>
+                </a:solidFill>
+                <a:latin typeface="Cambria"/>
+                <a:cs typeface="Cambria"/>
+              </a:rPr>
+              <a:t xml:space="preserve">b</a:t>
+            </a:r>
+            <a:r>
+              <a:rPr lang="en-US" sz="1425" dirty="0">
+                <a:solidFill>
+                  <a:srgbClr val="16171D"/>
+                </a:solidFill>
+                <a:latin typeface="Cambria"/>
+                <a:cs typeface="Cambria"/>
+              </a:rPr>
+              <a:t xml:space="preserve"> = 3</a:t>
+            </a:r>
+            <a:r>
+              <a:rPr lang="en-US" sz="1425" dirty="0">
+                <a:solidFill>
+                  <a:srgbClr val="16171D"/>
+                </a:solidFill>
+                <a:latin typeface="Segoe UI"/>
+                <a:cs typeface="Segoe UI"/>
+              </a:rPr>
+              <a:t xml:space="preserve">: </a:t>
+            </a:r>
+            <a:r>
+              <a:rPr lang="en-US" sz="1425" dirty="0" i="1">
+                <a:solidFill>
+                  <a:srgbClr val="16171D"/>
+                </a:solidFill>
+                <a:latin typeface="Cambria"/>
+                <a:cs typeface="Cambria"/>
+              </a:rPr>
+              <a:t xml:space="preserve">y</a:t>
+            </a:r>
+            <a:r>
+              <a:rPr lang="en-US" sz="1425" dirty="0">
+                <a:solidFill>
+                  <a:srgbClr val="16171D"/>
+                </a:solidFill>
+                <a:latin typeface="Cambria"/>
+                <a:cs typeface="Cambria"/>
+              </a:rPr>
+              <a:t xml:space="preserve"> = −½</a:t>
+            </a:r>
+            <a:r>
+              <a:rPr lang="en-US" sz="1425" dirty="0" i="1">
+                <a:solidFill>
+                  <a:srgbClr val="16171D"/>
+                </a:solidFill>
+                <a:latin typeface="Cambria"/>
+                <a:cs typeface="Cambria"/>
+              </a:rPr>
+              <a:t xml:space="preserve">x</a:t>
+            </a:r>
+            <a:r>
+              <a:rPr lang="en-US" sz="1425" dirty="0">
+                <a:solidFill>
+                  <a:srgbClr val="16171D"/>
+                </a:solidFill>
+                <a:latin typeface="Cambria"/>
+                <a:cs typeface="Cambria"/>
+              </a:rPr>
+              <a:t xml:space="preserve"> + 3</a:t>
             </a:r>
             <a:r>
               <a:rPr lang="en-US" sz="1425" dirty="0">
@@ -23814,7 +24103,7 @@
         <p:spPr>
           <a:xfrm>
             <a:off x="6210148" y="4034028"/>
-            <a:ext cx="5295748" cy="2042160"/>
+            <a:ext cx="5295748" cy="2716530"/>
           </a:xfrm>
           <a:prstGeom prst="roundRect">
             <a:avLst>
@@ -23854,7 +24143,7 @@
         <p:spPr>
           <a:xfrm>
             <a:off x="6419698" y="4205478"/>
-            <a:ext cx="4876648" cy="294894"/>
+            <a:ext cx="4876648" cy="534924"/>
           </a:xfrm>
           <a:prstGeom prst="rect">
             <a:avLst/>
@@ -23893,17 +24182,27 @@
                 <a:latin typeface="Segoe UI"/>
                 <a:cs typeface="Segoe UI"/>
               </a:rPr>
-              <a:t xml:space="preserve"> What is the slope of </a:t>
-            </a:r>
-            <a:r>
-              <a:rPr lang="en-US" sz="1575" dirty="0" i="1">
+              <a:t xml:space="preserve"> A line passes through the points </a:t>
+            </a:r>
+            <a:r>
+              <a:rPr lang="en-US" sz="1575" dirty="0">
                 <a:solidFill>
                   <a:srgbClr val="16171D"/>
                 </a:solidFill>
                 <a:latin typeface="Cambria"/>
                 <a:cs typeface="Cambria"/>
               </a:rPr>
-              <a:t xml:space="preserve">y</a:t>
+              <a:t xml:space="preserve">(−1, 4)</a:t>
+            </a:r>
+            <a:r>
+              <a:rPr lang="en-US" sz="1575" dirty="0">
+                <a:solidFill>
+                  <a:srgbClr val="16171D"/>
+                </a:solidFill>
+                <a:latin typeface="Segoe UI"/>
+                <a:cs typeface="Segoe UI"/>
+              </a:rPr>
+              <a:t xml:space="preserve"> and </a:t>
             </a:r>
             <a:r>
               <a:rPr lang="en-US" sz="1575" dirty="0">
@@ -23913,37 +24212,17 @@
                 <a:latin typeface="Cambria"/>
                 <a:cs typeface="Cambria"/>
               </a:rPr>
-              <a:t xml:space="preserve"> = −3</a:t>
-            </a:r>
-            <a:r>
-              <a:rPr lang="en-US" sz="1575" dirty="0" i="1">
-                <a:solidFill>
-                  <a:srgbClr val="16171D"/>
-                </a:solidFill>
-                <a:latin typeface="Cambria"/>
-                <a:cs typeface="Cambria"/>
-              </a:rPr>
-              <a:t xml:space="preserve">x</a:t>
+              <a:t xml:space="preserve">(2, −2)</a:t>
             </a:r>
             <a:r>
               <a:rPr lang="en-US" sz="1575" dirty="0">
                 <a:solidFill>
                   <a:srgbClr val="16171D"/>
                 </a:solidFill>
-                <a:latin typeface="Cambria"/>
-                <a:cs typeface="Cambria"/>
-              </a:rPr>
-              <a:t xml:space="preserve"> + 5</a:t>
-            </a:r>
-            <a:r>
-              <a:rPr lang="en-US" sz="1575" dirty="0">
-                <a:solidFill>
-                  <a:srgbClr val="16171D"/>
-                </a:solidFill>
-                <a:latin typeface="Segoe UI"/>
-                <a:cs typeface="Segoe UI"/>
-              </a:rPr>
-              <a:t xml:space="preserve">?</a:t>
+                <a:latin typeface="Segoe UI"/>
+                <a:cs typeface="Segoe UI"/>
+              </a:rPr>
+              <a:t xml:space="preserve">. What is the slope of the line?</a:t>
             </a:r>
             <a:endParaRPr lang="en-US" sz="1575" dirty="0"/>
           </a:p>
@@ -23957,7 +24236,7 @@
         </p:nvSpPr>
         <p:spPr>
           <a:xfrm>
-            <a:off x="6419698" y="4538472"/>
+            <a:off x="6419698" y="4778502"/>
             <a:ext cx="4876648" cy="294894"/>
           </a:xfrm>
           <a:prstGeom prst="rect">
@@ -24007,7 +24286,7 @@
                 <a:latin typeface="Cambria"/>
                 <a:cs typeface="Cambria"/>
               </a:rPr>
-              <a:t xml:space="preserve">y</a:t>
+              <a:t xml:space="preserve">m</a:t>
             </a:r>
             <a:r>
               <a:rPr lang="en-US" sz="1575" dirty="0">
@@ -24017,7 +24296,7 @@
                 <a:latin typeface="Cambria"/>
                 <a:cs typeface="Cambria"/>
               </a:rPr>
-              <a:t xml:space="preserve"> = </a:t>
+              <a:t xml:space="preserve"> = (</a:t>
             </a:r>
             <a:r>
               <a:rPr lang="en-US" sz="1575" dirty="0" i="1">
@@ -24027,47 +24306,37 @@
                 <a:latin typeface="Cambria"/>
                 <a:cs typeface="Cambria"/>
               </a:rPr>
-              <a:t xml:space="preserve">m</a:t>
-            </a:r>
-            <a:r>
-              <a:rPr lang="en-US" sz="1575" dirty="0" i="1">
+              <a:t xml:space="preserve">y</a:t>
+            </a:r>
+            <a:r>
+              <a:rPr lang="en-US" sz="1575" dirty="0">
                 <a:solidFill>
                   <a:srgbClr val="16171D"/>
                 </a:solidFill>
                 <a:latin typeface="Cambria"/>
                 <a:cs typeface="Cambria"/>
               </a:rPr>
-              <a:t xml:space="preserve">x</a:t>
-            </a:r>
-            <a:r>
-              <a:rPr lang="en-US" sz="1575" dirty="0">
+              <a:t xml:space="preserve">₂ − </a:t>
+            </a:r>
+            <a:r>
+              <a:rPr lang="en-US" sz="1575" dirty="0" i="1">
                 <a:solidFill>
                   <a:srgbClr val="16171D"/>
                 </a:solidFill>
                 <a:latin typeface="Cambria"/>
                 <a:cs typeface="Cambria"/>
               </a:rPr>
-              <a:t xml:space="preserve"> + </a:t>
-            </a:r>
-            <a:r>
-              <a:rPr lang="en-US" sz="1575" dirty="0" i="1">
+              <a:t xml:space="preserve">y</a:t>
+            </a:r>
+            <a:r>
+              <a:rPr lang="en-US" sz="1575" dirty="0">
                 <a:solidFill>
                   <a:srgbClr val="16171D"/>
                 </a:solidFill>
                 <a:latin typeface="Cambria"/>
                 <a:cs typeface="Cambria"/>
               </a:rPr>
-              <a:t xml:space="preserve">b</a:t>
-            </a:r>
-            <a:r>
-              <a:rPr lang="en-US" sz="1575" dirty="0">
-                <a:solidFill>
-                  <a:srgbClr val="16171D"/>
-                </a:solidFill>
-                <a:latin typeface="Segoe UI"/>
-                <a:cs typeface="Segoe UI"/>
-              </a:rPr>
-              <a:t xml:space="preserve">, slope </a:t>
+              <a:t xml:space="preserve">₁) ÷ (</a:t>
             </a:r>
             <a:r>
               <a:rPr lang="en-US" sz="1575" dirty="0" i="1">
@@ -24077,7 +24346,37 @@
                 <a:latin typeface="Cambria"/>
                 <a:cs typeface="Cambria"/>
               </a:rPr>
-              <a:t xml:space="preserve">m</a:t>
+              <a:t xml:space="preserve">x</a:t>
+            </a:r>
+            <a:r>
+              <a:rPr lang="en-US" sz="1575" dirty="0">
+                <a:solidFill>
+                  <a:srgbClr val="16171D"/>
+                </a:solidFill>
+                <a:latin typeface="Cambria"/>
+                <a:cs typeface="Cambria"/>
+              </a:rPr>
+              <a:t xml:space="preserve">₂ − </a:t>
+            </a:r>
+            <a:r>
+              <a:rPr lang="en-US" sz="1575" dirty="0" i="1">
+                <a:solidFill>
+                  <a:srgbClr val="16171D"/>
+                </a:solidFill>
+                <a:latin typeface="Cambria"/>
+                <a:cs typeface="Cambria"/>
+              </a:rPr>
+              <a:t xml:space="preserve">x</a:t>
+            </a:r>
+            <a:r>
+              <a:rPr lang="en-US" sz="1575" dirty="0">
+                <a:solidFill>
+                  <a:srgbClr val="16171D"/>
+                </a:solidFill>
+                <a:latin typeface="Cambria"/>
+                <a:cs typeface="Cambria"/>
+              </a:rPr>
+              <a:t xml:space="preserve">₁)</a:t>
             </a:r>
             <a:endParaRPr lang="en-US" sz="1575" dirty="0"/>
           </a:p>
@@ -24091,8 +24390,8 @@
         </p:nvSpPr>
         <p:spPr>
           <a:xfrm>
-            <a:off x="6419698" y="4871466"/>
-            <a:ext cx="4876648" cy="1033272"/>
+            <a:off x="6419698" y="5111496"/>
+            <a:ext cx="4876648" cy="1467612"/>
           </a:xfrm>
           <a:prstGeom prst="roundRect">
             <a:avLst>
@@ -24135,7 +24434,7 @@
                 <a:latin typeface="Cambria"/>
                 <a:cs typeface="Cambria"/>
               </a:rPr>
-              <a:t xml:space="preserve">−3</a:t>
+              <a:t xml:space="preserve">−2</a:t>
             </a:r>
             <a:br>
               <a:rPr lang="en-US" sz="1425" dirty="0">
@@ -24164,67 +24463,67 @@
                 <a:latin typeface="Segoe UI"/>
                 <a:cs typeface="Segoe UI"/>
               </a:rPr>
-              <a:t xml:space="preserve"> Match </a:t>
-            </a:r>
-            <a:r>
-              <a:rPr lang="en-US" sz="1425" dirty="0" i="1">
+              <a:t xml:space="preserve"> Label the points: </a:t>
+            </a:r>
+            <a:r>
+              <a:rPr lang="en-US" sz="1425" dirty="0">
                 <a:solidFill>
                   <a:srgbClr val="16171D"/>
                 </a:solidFill>
                 <a:latin typeface="Cambria"/>
                 <a:cs typeface="Cambria"/>
               </a:rPr>
-              <a:t xml:space="preserve">y</a:t>
-            </a:r>
-            <a:r>
-              <a:rPr lang="en-US" sz="1425" dirty="0">
+              <a:t xml:space="preserve">(</a:t>
+            </a:r>
+            <a:r>
+              <a:rPr lang="en-US" sz="1425" dirty="0" i="1">
                 <a:solidFill>
                   <a:srgbClr val="16171D"/>
                 </a:solidFill>
                 <a:latin typeface="Cambria"/>
                 <a:cs typeface="Cambria"/>
               </a:rPr>
-              <a:t xml:space="preserve"> = −3</a:t>
-            </a:r>
-            <a:r>
-              <a:rPr lang="en-US" sz="1425" dirty="0" i="1">
+              <a:t xml:space="preserve">x</a:t>
+            </a:r>
+            <a:r>
+              <a:rPr lang="en-US" sz="1425" dirty="0">
                 <a:solidFill>
                   <a:srgbClr val="16171D"/>
                 </a:solidFill>
                 <a:latin typeface="Cambria"/>
                 <a:cs typeface="Cambria"/>
               </a:rPr>
-              <a:t xml:space="preserve">x</a:t>
-            </a:r>
-            <a:r>
-              <a:rPr lang="en-US" sz="1425" dirty="0">
+              <a:t xml:space="preserve">₁, </a:t>
+            </a:r>
+            <a:r>
+              <a:rPr lang="en-US" sz="1425" dirty="0" i="1">
                 <a:solidFill>
                   <a:srgbClr val="16171D"/>
                 </a:solidFill>
                 <a:latin typeface="Cambria"/>
                 <a:cs typeface="Cambria"/>
               </a:rPr>
-              <a:t xml:space="preserve"> + 5</a:t>
+              <a:t xml:space="preserve">y</a:t>
             </a:r>
             <a:r>
               <a:rPr lang="en-US" sz="1425" dirty="0">
-                <a:solidFill>
-                  <a:srgbClr val="16171D"/>
-                </a:solidFill>
-                <a:latin typeface="Segoe UI"/>
-                <a:cs typeface="Segoe UI"/>
-              </a:rPr>
-              <a:t xml:space="preserve"> to </a:t>
-            </a:r>
-            <a:r>
-              <a:rPr lang="en-US" sz="1425" dirty="0" i="1">
                 <a:solidFill>
                   <a:srgbClr val="16171D"/>
                 </a:solidFill>
                 <a:latin typeface="Cambria"/>
                 <a:cs typeface="Cambria"/>
               </a:rPr>
-              <a:t xml:space="preserve">y</a:t>
+              <a:t xml:space="preserve">₁) = (−1, 4)</a:t>
+            </a:r>
+            <a:r>
+              <a:rPr lang="en-US" sz="1425" dirty="0">
+                <a:solidFill>
+                  <a:srgbClr val="16171D"/>
+                </a:solidFill>
+                <a:latin typeface="Segoe UI"/>
+                <a:cs typeface="Segoe UI"/>
+              </a:rPr>
+              <a:t xml:space="preserve"> and </a:t>
             </a:r>
             <a:r>
               <a:rPr lang="en-US" sz="1425" dirty="0">
@@ -24234,7 +24533,7 @@
                 <a:latin typeface="Cambria"/>
                 <a:cs typeface="Cambria"/>
               </a:rPr>
-              <a:t xml:space="preserve"> = </a:t>
+              <a:t xml:space="preserve">(</a:t>
             </a:r>
             <a:r>
               <a:rPr lang="en-US" sz="1425" dirty="0" i="1">
@@ -24244,37 +24543,37 @@
                 <a:latin typeface="Cambria"/>
                 <a:cs typeface="Cambria"/>
               </a:rPr>
-              <a:t xml:space="preserve">m</a:t>
-            </a:r>
-            <a:r>
-              <a:rPr lang="en-US" sz="1425" dirty="0" i="1">
+              <a:t xml:space="preserve">x</a:t>
+            </a:r>
+            <a:r>
+              <a:rPr lang="en-US" sz="1425" dirty="0">
                 <a:solidFill>
                   <a:srgbClr val="16171D"/>
                 </a:solidFill>
                 <a:latin typeface="Cambria"/>
                 <a:cs typeface="Cambria"/>
               </a:rPr>
-              <a:t xml:space="preserve">x</a:t>
-            </a:r>
-            <a:r>
-              <a:rPr lang="en-US" sz="1425" dirty="0">
+              <a:t xml:space="preserve">₂, </a:t>
+            </a:r>
+            <a:r>
+              <a:rPr lang="en-US" sz="1425" dirty="0" i="1">
                 <a:solidFill>
                   <a:srgbClr val="16171D"/>
                 </a:solidFill>
                 <a:latin typeface="Cambria"/>
                 <a:cs typeface="Cambria"/>
               </a:rPr>
-              <a:t xml:space="preserve"> + </a:t>
-            </a:r>
-            <a:r>
-              <a:rPr lang="en-US" sz="1425" dirty="0" i="1">
+              <a:t xml:space="preserve">y</a:t>
+            </a:r>
+            <a:r>
+              <a:rPr lang="en-US" sz="1425" dirty="0">
                 <a:solidFill>
                   <a:srgbClr val="16171D"/>
                 </a:solidFill>
                 <a:latin typeface="Cambria"/>
                 <a:cs typeface="Cambria"/>
               </a:rPr>
-              <a:t xml:space="preserve">b</a:t>
+              <a:t xml:space="preserve">₂) = (2, −2)</a:t>
             </a:r>
             <a:r>
               <a:rPr lang="en-US" sz="1425" dirty="0">
@@ -24284,7 +24583,36 @@
                 <a:latin typeface="Segoe UI"/>
                 <a:cs typeface="Segoe UI"/>
               </a:rPr>
-              <a:t xml:space="preserve">: </a:t>
+              <a:t xml:space="preserve">.</a:t>
+            </a:r>
+            <a:br>
+              <a:rPr lang="en-US" sz="1425" dirty="0">
+                <a:solidFill>
+                  <a:srgbClr val="16171D"/>
+                </a:solidFill>
+                <a:latin typeface="Segoe UI"/>
+                <a:cs typeface="Segoe UI"/>
+              </a:rPr>
+            </a:br>
+            <a:r>
+              <a:rPr lang="en-US" sz="1425" dirty="0" b="1">
+                <a:solidFill>
+                  <a:srgbClr val="16171D"/>
+                </a:solidFill>
+                <a:latin typeface="Segoe UI"/>
+                <a:cs typeface="Segoe UI"/>
+              </a:rPr>
+              <a:t xml:space="preserve">2.</a:t>
+            </a:r>
+            <a:r>
+              <a:rPr lang="en-US" sz="1425" dirty="0">
+                <a:solidFill>
+                  <a:srgbClr val="16171D"/>
+                </a:solidFill>
+                <a:latin typeface="Segoe UI"/>
+                <a:cs typeface="Segoe UI"/>
+              </a:rPr>
+              <a:t xml:space="preserve"> Subtract the </a:t>
             </a:r>
             <a:r>
               <a:rPr lang="en-US" sz="1425" dirty="0" i="1">
@@ -24294,7 +24622,17 @@
                 <a:latin typeface="Cambria"/>
                 <a:cs typeface="Cambria"/>
               </a:rPr>
-              <a:t xml:space="preserve">m</a:t>
+              <a:t xml:space="preserve">y</a:t>
+            </a:r>
+            <a:r>
+              <a:rPr lang="en-US" sz="1425" dirty="0">
+                <a:solidFill>
+                  <a:srgbClr val="16171D"/>
+                </a:solidFill>
+                <a:latin typeface="Segoe UI"/>
+                <a:cs typeface="Segoe UI"/>
+              </a:rPr>
+              <a:t xml:space="preserve">-values: </a:t>
             </a:r>
             <a:r>
               <a:rPr lang="en-US" sz="1425" dirty="0">
@@ -24304,7 +24642,7 @@
                 <a:latin typeface="Cambria"/>
                 <a:cs typeface="Cambria"/>
               </a:rPr>
-              <a:t xml:space="preserve"> = −3</a:t>
+              <a:t xml:space="preserve">−2 − 4 = −6</a:t>
             </a:r>
             <a:r>
               <a:rPr lang="en-US" sz="1425" dirty="0">
@@ -24314,7 +24652,7 @@
                 <a:latin typeface="Segoe UI"/>
                 <a:cs typeface="Segoe UI"/>
               </a:rPr>
-              <a:t xml:space="preserve"> and </a:t>
+              <a:t xml:space="preserve">. Subtract the </a:t>
             </a:r>
             <a:r>
               <a:rPr lang="en-US" sz="1425" dirty="0" i="1">
@@ -24324,7 +24662,17 @@
                 <a:latin typeface="Cambria"/>
                 <a:cs typeface="Cambria"/>
               </a:rPr>
-              <a:t xml:space="preserve">b</a:t>
+              <a:t xml:space="preserve">x</a:t>
+            </a:r>
+            <a:r>
+              <a:rPr lang="en-US" sz="1425" dirty="0">
+                <a:solidFill>
+                  <a:srgbClr val="16171D"/>
+                </a:solidFill>
+                <a:latin typeface="Segoe UI"/>
+                <a:cs typeface="Segoe UI"/>
+              </a:rPr>
+              <a:t xml:space="preserve">-values: </a:t>
             </a:r>
             <a:r>
               <a:rPr lang="en-US" sz="1425" dirty="0">
@@ -24334,7 +24682,7 @@
                 <a:latin typeface="Cambria"/>
                 <a:cs typeface="Cambria"/>
               </a:rPr>
-              <a:t xml:space="preserve"> = 5</a:t>
+              <a:t xml:space="preserve">2 − (−1) = 3</a:t>
             </a:r>
             <a:r>
               <a:rPr lang="en-US" sz="1425" dirty="0">
@@ -24363,7 +24711,7 @@
                 <a:latin typeface="Segoe UI"/>
                 <a:cs typeface="Segoe UI"/>
               </a:rPr>
-              <a:t xml:space="preserve">2.</a:t>
+              <a:t xml:space="preserve">3.</a:t>
             </a:r>
             <a:r>
               <a:rPr lang="en-US" sz="1425" dirty="0">
@@ -24373,7 +24721,7 @@
                 <a:latin typeface="Segoe UI"/>
                 <a:cs typeface="Segoe UI"/>
               </a:rPr>
-              <a:t xml:space="preserve"> The slope is </a:t>
+              <a:t xml:space="preserve"> Divide: </a:t>
             </a:r>
             <a:r>
               <a:rPr lang="en-US" sz="1425" dirty="0">
@@ -24383,7 +24731,7 @@
                 <a:latin typeface="Cambria"/>
                 <a:cs typeface="Cambria"/>
               </a:rPr>
-              <a:t xml:space="preserve">−3</a:t>
+              <a:t xml:space="preserve">−6 ÷ 3 = −2</a:t>
             </a:r>
             <a:r>
               <a:rPr lang="en-US" sz="1425" dirty="0">

--- a/IEP/t2-lesson3-perpendicular-slopes-IEP-catchup.pptx
+++ b/IEP/t2-lesson3-perpendicular-slopes-IEP-catchup.pptx
@@ -415,7 +415,7 @@
           <a:p>
             <a:r>
               <a:rPr lang="en-US" dirty="0"/>
-              <a:t>Class ends here on Thursday, October 29.</a:t>
+              <a:t>Class ends here on Wednesday, October 28.</a:t>
             </a:r>
           </a:p>
         </p:txBody>
@@ -474,7 +474,7 @@
           <a:p>
             <a:r>
               <a:rPr lang="en-US" dirty="0"/>
-              <a:t>Class starts here on Monday, November 2.</a:t>
+              <a:t>Class starts here on Thursday, October 29.</a:t>
             </a:r>
           </a:p>
         </p:txBody>
@@ -825,7 +825,7 @@
           <a:p>
             <a:r>
               <a:rPr lang="en-US" dirty="0"/>
-              <a:t>Class starts here on Thursday, October 29.</a:t>
+              <a:t>Class starts here on Wednesday, October 28.</a:t>
             </a:r>
           </a:p>
         </p:txBody>
@@ -1117,7 +1117,7 @@
           <a:p>
             <a:r>
               <a:rPr lang="en-US" dirty="0"/>
-              <a:t>Class ends here on Monday, November 2.</a:t>
+              <a:t>Class ends here on Thursday, October 29.</a:t>
             </a:r>
           </a:p>
         </p:txBody>
@@ -2046,7 +2046,7 @@
                 <a:latin typeface="Segoe UI"/>
                 <a:cs typeface="Segoe UI"/>
               </a:rPr>
-              <a:t xml:space="preserve">Adds a 15-minute Topic 1 Catch-Up (Lessons 5–6) each day · Day 1: Thu, Oct 29 · Day 2: Mon, Nov 2</a:t>
+              <a:t xml:space="preserve">Adds a 15-minute Topic 1 Catch-Up (Lessons 5–6) each day · Day 1: Wed, Oct 28 · Day 2: Thu, Oct 29</a:t>
             </a:r>
             <a:endParaRPr lang="en-US" sz="1650" dirty="0"/>
           </a:p>
@@ -2584,7 +2584,7 @@
                 <a:latin typeface="Segoe UI"/>
                 <a:cs typeface="Segoe UI"/>
               </a:rPr>
-              <a:t xml:space="preserve">I do · Watch me</a:t>
+              <a:t xml:space="preserve">I do · Watch me · ★ Essential</a:t>
             </a:r>
             <a:endParaRPr lang="en-US" sz="1200" dirty="0"/>
           </a:p>
@@ -3524,7 +3524,7 @@
                 <a:latin typeface="Segoe UI"/>
                 <a:cs typeface="Segoe UI"/>
               </a:rPr>
-              <a:t xml:space="preserve">You do · Try it</a:t>
+              <a:t xml:space="preserve">You do · Try it · ★ Essential</a:t>
             </a:r>
             <a:endParaRPr lang="en-US" sz="1200" dirty="0"/>
           </a:p>
@@ -4537,7 +4537,7 @@
                 <a:latin typeface="Segoe UI"/>
                 <a:cs typeface="Segoe UI"/>
               </a:rPr>
-              <a:t xml:space="preserve">Check it · Step by step</a:t>
+              <a:t xml:space="preserve">Check it · Step by step · ★ Essential</a:t>
             </a:r>
             <a:endParaRPr lang="en-US" sz="1200" dirty="0"/>
           </a:p>
@@ -7524,7 +7524,7 @@
                 <a:latin typeface="Segoe UI"/>
                 <a:cs typeface="Segoe UI"/>
               </a:rPr>
-              <a:t xml:space="preserve">Stop here: Thursday, October 29</a:t>
+              <a:t xml:space="preserve">Stop here: Wednesday, October 28</a:t>
             </a:r>
             <a:endParaRPr lang="en-US" sz="8250" dirty="0"/>
           </a:p>
@@ -7568,7 +7568,7 @@
                 <a:latin typeface="Segoe UI"/>
                 <a:cs typeface="Segoe UI"/>
               </a:rPr>
-              <a:t xml:space="preserve">Next class: Monday, November 2. Start at the next slide, “Start: Monday, November 2.”</a:t>
+              <a:t xml:space="preserve">Next class: Thursday, October 29. Start at the next slide, “Start: Thursday, October 29.”</a:t>
             </a:r>
             <a:endParaRPr lang="en-US" sz="2250" dirty="0"/>
           </a:p>
@@ -7718,7 +7718,7 @@
                 <a:latin typeface="Segoe UI"/>
                 <a:cs typeface="Segoe UI"/>
               </a:rPr>
-              <a:t xml:space="preserve">Start: Monday, November 2</a:t>
+              <a:t xml:space="preserve">Start: Thursday, October 29</a:t>
             </a:r>
             <a:endParaRPr lang="en-US" sz="8250" dirty="0"/>
           </a:p>
@@ -7868,7 +7868,7 @@
                 <a:latin typeface="Segoe UI"/>
                 <a:cs typeface="Segoe UI"/>
               </a:rPr>
-              <a:t xml:space="preserve">Day 2 · Bell Work · Review · Mon, Nov 2</a:t>
+              <a:t xml:space="preserve">Day 2 · Bell Work · Review · Thu, Oct 29</a:t>
             </a:r>
             <a:endParaRPr lang="en-US" sz="1200" dirty="0"/>
           </a:p>
@@ -10298,7 +10298,7 @@
                 <a:latin typeface="Segoe UI"/>
                 <a:cs typeface="Segoe UI"/>
               </a:rPr>
-              <a:t xml:space="preserve">Topic 1 Catch-Up · Mon, Nov 2 · about 15 minutes</a:t>
+              <a:t xml:space="preserve">Topic 1 Catch-Up · Thu, Oct 29 · about 15 minutes</a:t>
             </a:r>
             <a:endParaRPr lang="en-US" sz="1200" dirty="0"/>
           </a:p>
@@ -13327,7 +13327,7 @@
                 <a:latin typeface="Segoe UI"/>
                 <a:cs typeface="Segoe UI"/>
               </a:rPr>
-              <a:t xml:space="preserve">We do · Flat and straight-up lines</a:t>
+              <a:t xml:space="preserve">We do · Flat and straight-up lines · ★ Essential</a:t>
             </a:r>
             <a:endParaRPr lang="en-US" sz="1200" dirty="0"/>
           </a:p>
@@ -15825,7 +15825,7 @@
                 <a:latin typeface="Segoe UI"/>
                 <a:cs typeface="Segoe UI"/>
               </a:rPr>
-              <a:t xml:space="preserve">Start: Thursday, October 29</a:t>
+              <a:t xml:space="preserve">Start: Wednesday, October 28</a:t>
             </a:r>
             <a:endParaRPr lang="en-US" sz="8250" dirty="0"/>
           </a:p>
@@ -15975,7 +15975,7 @@
                 <a:latin typeface="Segoe UI"/>
                 <a:cs typeface="Segoe UI"/>
               </a:rPr>
-              <a:t xml:space="preserve">I do · Write it</a:t>
+              <a:t xml:space="preserve">I do · Write it · ★ Essential</a:t>
             </a:r>
             <a:endParaRPr lang="en-US" sz="1200" dirty="0"/>
           </a:p>
@@ -16881,7 +16881,7 @@
                 <a:latin typeface="Segoe UI"/>
                 <a:cs typeface="Segoe UI"/>
               </a:rPr>
-              <a:t xml:space="preserve">You do · Try it</a:t>
+              <a:t xml:space="preserve">You do · Try it · ★ Essential</a:t>
             </a:r>
             <a:endParaRPr lang="en-US" sz="1200" dirty="0"/>
           </a:p>
@@ -17904,7 +17904,7 @@
                 <a:latin typeface="Segoe UI"/>
                 <a:cs typeface="Segoe UI"/>
               </a:rPr>
-              <a:t xml:space="preserve">Check it · Step by step</a:t>
+              <a:t xml:space="preserve">Check it · Step by step · ★ Essential</a:t>
             </a:r>
             <a:endParaRPr lang="en-US" sz="1200" dirty="0"/>
           </a:p>
@@ -22211,7 +22211,7 @@
                 <a:latin typeface="Segoe UI"/>
                 <a:cs typeface="Segoe UI"/>
               </a:rPr>
-              <a:t xml:space="preserve">Stop here: Monday, November 2</a:t>
+              <a:t xml:space="preserve">Stop here: Thursday, October 29</a:t>
             </a:r>
             <a:endParaRPr lang="en-US" sz="8250" dirty="0"/>
           </a:p>
@@ -22226,7 +22226,7 @@
         <p:spPr>
           <a:xfrm>
             <a:off x="685800" y="5253228"/>
-            <a:ext cx="10820095" cy="397764"/>
+            <a:ext cx="10820095" cy="740664"/>
           </a:xfrm>
           <a:prstGeom prst="rect">
             <a:avLst/>
@@ -22255,7 +22255,7 @@
                 <a:latin typeface="Segoe UI"/>
                 <a:cs typeface="Segoe UI"/>
               </a:rPr>
-              <a:t xml:space="preserve">Next class: Tuesday, November 3. Open the Lesson 4 deck.</a:t>
+              <a:t xml:space="preserve">Next class: Monday, November 2. Topic 2 Review: Lesson 4 in brief, then the online practice test. Tonight: the Lesson 3 quiz as homework.</a:t>
             </a:r>
             <a:endParaRPr lang="en-US" sz="2250" dirty="0"/>
           </a:p>
@@ -22673,7 +22673,7 @@
                 <a:latin typeface="Segoe UI"/>
                 <a:cs typeface="Segoe UI"/>
               </a:rPr>
-              <a:t xml:space="preserve">Day 1 · Bell Work · Review · Thu, Oct 29</a:t>
+              <a:t xml:space="preserve">Day 1 · Bell Work · Review · Wed, Oct 28</a:t>
             </a:r>
             <a:endParaRPr lang="en-US" sz="1200" dirty="0"/>
           </a:p>
@@ -25273,7 +25273,7 @@
                 <a:latin typeface="Segoe UI"/>
                 <a:cs typeface="Segoe UI"/>
               </a:rPr>
-              <a:t xml:space="preserve">Topic 1 Catch-Up · Thu, Oct 29 · about 15 minutes</a:t>
+              <a:t xml:space="preserve">Topic 1 Catch-Up · Wed, Oct 28 · about 15 minutes</a:t>
             </a:r>
             <a:endParaRPr lang="en-US" sz="1200" dirty="0"/>
           </a:p>

--- a/IEP/t2-lesson3-perpendicular-slopes-IEP-catchup.pptx
+++ b/IEP/t2-lesson3-perpendicular-slopes-IEP-catchup.pptx
@@ -415,7 +415,7 @@
           <a:p>
             <a:r>
               <a:rPr lang="en-US" dirty="0"/>
-              <a:t>Class ends here on Wednesday, October 28.</a:t>
+              <a:t>Class ends here on Tuesday, October 27.</a:t>
             </a:r>
           </a:p>
         </p:txBody>
@@ -474,7 +474,7 @@
           <a:p>
             <a:r>
               <a:rPr lang="en-US" dirty="0"/>
-              <a:t>Class starts here on Thursday, October 29.</a:t>
+              <a:t>Class starts here on Wednesday, October 28.</a:t>
             </a:r>
           </a:p>
         </p:txBody>
@@ -825,7 +825,7 @@
           <a:p>
             <a:r>
               <a:rPr lang="en-US" dirty="0"/>
-              <a:t>Class starts here on Wednesday, October 28.</a:t>
+              <a:t>Class starts here on Tuesday, October 27.</a:t>
             </a:r>
           </a:p>
         </p:txBody>
@@ -1117,7 +1117,7 @@
           <a:p>
             <a:r>
               <a:rPr lang="en-US" dirty="0"/>
-              <a:t>Class ends here on Thursday, October 29.</a:t>
+              <a:t>Class ends here on Wednesday, October 28.</a:t>
             </a:r>
           </a:p>
         </p:txBody>
@@ -2046,7 +2046,7 @@
                 <a:latin typeface="Segoe UI"/>
                 <a:cs typeface="Segoe UI"/>
               </a:rPr>
-              <a:t xml:space="preserve">Adds a 15-minute Topic 1 Catch-Up (Lessons 5–6) each day · Day 1: Wed, Oct 28 · Day 2: Thu, Oct 29</a:t>
+              <a:t xml:space="preserve">Adds a 15-minute Topic 1 Catch-Up (Lessons 5–6) each day · Day 1: Tue, Oct 27 · Day 2: Wed, Oct 28</a:t>
             </a:r>
             <a:endParaRPr lang="en-US" sz="1650" dirty="0"/>
           </a:p>
@@ -7524,7 +7524,7 @@
                 <a:latin typeface="Segoe UI"/>
                 <a:cs typeface="Segoe UI"/>
               </a:rPr>
-              <a:t xml:space="preserve">Stop here: Wednesday, October 28</a:t>
+              <a:t xml:space="preserve">Stop here: Tuesday, October 27</a:t>
             </a:r>
             <a:endParaRPr lang="en-US" sz="8250" dirty="0"/>
           </a:p>
@@ -7568,7 +7568,7 @@
                 <a:latin typeface="Segoe UI"/>
                 <a:cs typeface="Segoe UI"/>
               </a:rPr>
-              <a:t xml:space="preserve">Next class: Thursday, October 29. Start at the next slide, “Start: Thursday, October 29.”</a:t>
+              <a:t xml:space="preserve">Next class: Wednesday, October 28. Start at the next slide, “Start: Wednesday, October 28.”</a:t>
             </a:r>
             <a:endParaRPr lang="en-US" sz="2250" dirty="0"/>
           </a:p>
@@ -7718,7 +7718,7 @@
                 <a:latin typeface="Segoe UI"/>
                 <a:cs typeface="Segoe UI"/>
               </a:rPr>
-              <a:t xml:space="preserve">Start: Thursday, October 29</a:t>
+              <a:t xml:space="preserve">Start: Wednesday, October 28</a:t>
             </a:r>
             <a:endParaRPr lang="en-US" sz="8250" dirty="0"/>
           </a:p>
@@ -7868,7 +7868,7 @@
                 <a:latin typeface="Segoe UI"/>
                 <a:cs typeface="Segoe UI"/>
               </a:rPr>
-              <a:t xml:space="preserve">Day 2 · Bell Work · Review · Thu, Oct 29</a:t>
+              <a:t xml:space="preserve">Day 2 · Bell Work · Review · Wed, Oct 28</a:t>
             </a:r>
             <a:endParaRPr lang="en-US" sz="1200" dirty="0"/>
           </a:p>
@@ -10298,7 +10298,7 @@
                 <a:latin typeface="Segoe UI"/>
                 <a:cs typeface="Segoe UI"/>
               </a:rPr>
-              <a:t xml:space="preserve">Topic 1 Catch-Up · Thu, Oct 29 · about 15 minutes</a:t>
+              <a:t xml:space="preserve">Topic 1 Catch-Up · Wed, Oct 28 · about 15 minutes</a:t>
             </a:r>
             <a:endParaRPr lang="en-US" sz="1200" dirty="0"/>
           </a:p>
@@ -15825,7 +15825,7 @@
                 <a:latin typeface="Segoe UI"/>
                 <a:cs typeface="Segoe UI"/>
               </a:rPr>
-              <a:t xml:space="preserve">Start: Wednesday, October 28</a:t>
+              <a:t xml:space="preserve">Start: Tuesday, October 27</a:t>
             </a:r>
             <a:endParaRPr lang="en-US" sz="8250" dirty="0"/>
           </a:p>
@@ -22211,7 +22211,7 @@
                 <a:latin typeface="Segoe UI"/>
                 <a:cs typeface="Segoe UI"/>
               </a:rPr>
-              <a:t xml:space="preserve">Stop here: Thursday, October 29</a:t>
+              <a:t xml:space="preserve">Stop here: Wednesday, October 28</a:t>
             </a:r>
             <a:endParaRPr lang="en-US" sz="8250" dirty="0"/>
           </a:p>
@@ -22255,7 +22255,7 @@
                 <a:latin typeface="Segoe UI"/>
                 <a:cs typeface="Segoe UI"/>
               </a:rPr>
-              <a:t xml:space="preserve">Next class: Monday, November 2. Topic 2 Review: Lesson 4 in brief, then the online practice test. Tonight: the Lesson 3 quiz as homework.</a:t>
+              <a:t xml:space="preserve">Next class: Thursday, October 29. Lesson 4 in one day: open the Lesson 4 deck. Tonight: the Lesson 3 quiz as homework.</a:t>
             </a:r>
             <a:endParaRPr lang="en-US" sz="2250" dirty="0"/>
           </a:p>
@@ -22673,7 +22673,7 @@
                 <a:latin typeface="Segoe UI"/>
                 <a:cs typeface="Segoe UI"/>
               </a:rPr>
-              <a:t xml:space="preserve">Day 1 · Bell Work · Review · Wed, Oct 28</a:t>
+              <a:t xml:space="preserve">Day 1 · Bell Work · Review · Tue, Oct 27</a:t>
             </a:r>
             <a:endParaRPr lang="en-US" sz="1200" dirty="0"/>
           </a:p>
@@ -25273,7 +25273,7 @@
                 <a:latin typeface="Segoe UI"/>
                 <a:cs typeface="Segoe UI"/>
               </a:rPr>
-              <a:t xml:space="preserve">Topic 1 Catch-Up · Wed, Oct 28 · about 15 minutes</a:t>
+              <a:t xml:space="preserve">Topic 1 Catch-Up · Tue, Oct 27 · about 15 minutes</a:t>
             </a:r>
             <a:endParaRPr lang="en-US" sz="1200" dirty="0"/>
           </a:p>
